--- a/doc/xil/AxleDynoCarMakerCoupling.pptx
+++ b/doc/xil/AxleDynoCarMakerCoupling.pptx
@@ -11,8 +11,6 @@
     <p:sldId id="259" r:id="rId10"/>
     <p:sldId id="260" r:id="rId11"/>
     <p:sldId id="261" r:id="rId12"/>
-    <p:sldId id="262" r:id="rId13"/>
-    <p:sldId id="263" r:id="rId14"/>
   </p:sldIdLst>
   <p:sldSz cx="12192000" cy="6858000" type="screen4x3"/>
   <p:notesSz cx="6858000" cy="9144000"/>
@@ -3678,7 +3676,7 @@
                 </a:solidFill>
                 <a:latin typeface="Consolas"/>
               </a:rPr>
-              <a:t>02 / 08</a:t>
+              <a:t>02 / 06</a:t>
             </a:r>
             <a:r>
               <a:rPr sz="900">
@@ -5127,7 +5125,7 @@
                 </a:solidFill>
                 <a:latin typeface="Consolas"/>
               </a:rPr>
-              <a:t>03 / 08</a:t>
+              <a:t>03 / 06</a:t>
             </a:r>
             <a:r>
               <a:rPr sz="900">
@@ -5136,7 +5134,7 @@
                 </a:solidFill>
                 <a:latin typeface="Consolas"/>
               </a:rPr>
-              <a:t>    TIMING · THE KEY DIAGRAM</a:t>
+              <a:t>    WHEN</a:t>
             </a:r>
           </a:p>
         </p:txBody>
@@ -5178,7 +5176,7 @@
                 </a:solidFill>
                 <a:latin typeface="Bahnschrift"/>
               </a:rPr>
-              <a:t>Where the one-step delay actually lives</a:t>
+              <a:t>One integration step, in a fixed order</a:t>
             </a:r>
           </a:p>
         </p:txBody>
@@ -5220,21 +5218,126 @@
                 </a:solidFill>
                 <a:latin typeface="Segoe UI"/>
               </a:rPr>
-              <a:t>The tire model has no memory: give it the inputs and it returns a force straight away. The delay comes from the order the modules run in. Rim_rotv is written once per cycle by PowerTrain, and Tire runs before that.</a:t>
-            </a:r>
-          </a:p>
-        </p:txBody>
-      </p:sp>
-      <p:sp>
-        <p:nvSpPr>
-          <p:cNvPr id="6" name="TextBox 5"/>
+              <a:t>Everything from here on answers one question: how is Trq_T2W[k] produced. Start with when CarMaker computes it.</a:t>
+            </a:r>
+          </a:p>
+        </p:txBody>
+      </p:sp>
+      <p:cxnSp>
+        <p:nvCxnSpPr>
+          <p:cNvPr id="6" name="Connector 5"/>
+          <p:cNvCxnSpPr/>
+          <p:nvPr/>
+        </p:nvCxnSpPr>
+        <p:spPr>
+          <a:xfrm>
+            <a:off x="658368" y="1773936"/>
+            <a:ext cx="0" cy="2670048"/>
+          </a:xfrm>
+          <a:prstGeom prst="line">
+            <a:avLst/>
+          </a:prstGeom>
+          <a:ln w="25400">
+            <a:solidFill>
+              <a:srgbClr val="A9611A"/>
+            </a:solidFill>
+          </a:ln>
+        </p:spPr>
+        <p:style>
+          <a:lnRef idx="2">
+            <a:schemeClr val="accent1"/>
+          </a:lnRef>
+          <a:fillRef idx="0">
+            <a:schemeClr val="accent1"/>
+          </a:fillRef>
+          <a:effectRef idx="1">
+            <a:schemeClr val="accent1"/>
+          </a:effectRef>
+          <a:fontRef idx="minor">
+            <a:schemeClr val="tx1"/>
+          </a:fontRef>
+        </p:style>
+      </p:cxnSp>
+      <p:cxnSp>
+        <p:nvCxnSpPr>
+          <p:cNvPr id="7" name="Connector 6"/>
+          <p:cNvCxnSpPr/>
+          <p:nvPr/>
+        </p:nvCxnSpPr>
+        <p:spPr>
+          <a:xfrm>
+            <a:off x="658368" y="1773936"/>
+            <a:ext cx="201168" cy="0"/>
+          </a:xfrm>
+          <a:prstGeom prst="line">
+            <a:avLst/>
+          </a:prstGeom>
+          <a:ln w="25400">
+            <a:solidFill>
+              <a:srgbClr val="A9611A"/>
+            </a:solidFill>
+          </a:ln>
+        </p:spPr>
+        <p:style>
+          <a:lnRef idx="2">
+            <a:schemeClr val="accent1"/>
+          </a:lnRef>
+          <a:fillRef idx="0">
+            <a:schemeClr val="accent1"/>
+          </a:fillRef>
+          <a:effectRef idx="1">
+            <a:schemeClr val="accent1"/>
+          </a:effectRef>
+          <a:fontRef idx="minor">
+            <a:schemeClr val="tx1"/>
+          </a:fontRef>
+        </p:style>
+      </p:cxnSp>
+      <p:cxnSp>
+        <p:nvCxnSpPr>
+          <p:cNvPr id="8" name="Connector 7"/>
+          <p:cNvCxnSpPr/>
+          <p:nvPr/>
+        </p:nvCxnSpPr>
+        <p:spPr>
+          <a:xfrm>
+            <a:off x="658368" y="4443984"/>
+            <a:ext cx="201168" cy="0"/>
+          </a:xfrm>
+          <a:prstGeom prst="line">
+            <a:avLst/>
+          </a:prstGeom>
+          <a:ln w="25400">
+            <a:solidFill>
+              <a:srgbClr val="A9611A"/>
+            </a:solidFill>
+          </a:ln>
+        </p:spPr>
+        <p:style>
+          <a:lnRef idx="2">
+            <a:schemeClr val="accent1"/>
+          </a:lnRef>
+          <a:fillRef idx="0">
+            <a:schemeClr val="accent1"/>
+          </a:fillRef>
+          <a:effectRef idx="1">
+            <a:schemeClr val="accent1"/>
+          </a:effectRef>
+          <a:fontRef idx="minor">
+            <a:schemeClr val="tx1"/>
+          </a:fontRef>
+        </p:style>
+      </p:cxnSp>
+      <p:sp>
+        <p:nvSpPr>
+          <p:cNvPr id="9" name="TextBox 8"/>
           <p:cNvSpPr txBox="1"/>
           <p:nvPr/>
         </p:nvSpPr>
         <p:spPr>
           <a:xfrm>
-            <a:off x="566928" y="1645920"/>
-            <a:ext cx="2743200" cy="201168"/>
+            <a:off x="329184" y="2011680"/>
+            <a:ext cx="2194560" cy="219456"/>
           </a:xfrm>
           <a:prstGeom prst="rect">
             <a:avLst/>
@@ -5256,27 +5359,27 @@
               </a:spcAft>
             </a:pPr>
             <a:r>
-              <a:rPr sz="900" b="0">
-                <a:solidFill>
-                  <a:srgbClr val="78838F"/>
-                </a:solidFill>
-                <a:latin typeface="Consolas"/>
-              </a:rPr>
-              <a:t>cycle k-1</a:t>
-            </a:r>
-          </a:p>
-        </p:txBody>
-      </p:sp>
-      <p:sp>
-        <p:nvSpPr>
-          <p:cNvPr id="7" name="TextBox 6"/>
+              <a:rPr sz="850" b="1">
+                <a:solidFill>
+                  <a:srgbClr val="A9611A"/>
+                </a:solidFill>
+                <a:latin typeface="Consolas"/>
+              </a:rPr>
+              <a:t>ONE INTEGRATION STEP</a:t>
+            </a:r>
+          </a:p>
+        </p:txBody>
+      </p:sp>
+      <p:sp>
+        <p:nvSpPr>
+          <p:cNvPr id="10" name="TextBox 9"/>
           <p:cNvSpPr txBox="1"/>
           <p:nvPr/>
         </p:nvSpPr>
         <p:spPr>
           <a:xfrm>
-            <a:off x="3931920" y="1645920"/>
-            <a:ext cx="2743200" cy="201168"/>
+            <a:off x="329184" y="2212848"/>
+            <a:ext cx="2194560" cy="219456"/>
           </a:xfrm>
           <a:prstGeom prst="rect">
             <a:avLst/>
@@ -5298,27 +5401,27 @@
               </a:spcAft>
             </a:pPr>
             <a:r>
-              <a:rPr sz="900" b="1">
+              <a:rPr sz="850" b="0">
                 <a:solidFill>
                   <a:srgbClr val="A9611A"/>
                 </a:solidFill>
                 <a:latin typeface="Consolas"/>
               </a:rPr>
-              <a:t>cycle k</a:t>
-            </a:r>
-          </a:p>
-        </p:txBody>
-      </p:sp>
-      <p:sp>
-        <p:nvSpPr>
-          <p:cNvPr id="8" name="TextBox 7"/>
+              <a:t>Ts = 1 ms</a:t>
+            </a:r>
+          </a:p>
+        </p:txBody>
+      </p:sp>
+      <p:sp>
+        <p:nvSpPr>
+          <p:cNvPr id="11" name="TextBox 10"/>
           <p:cNvSpPr txBox="1"/>
           <p:nvPr/>
         </p:nvSpPr>
         <p:spPr>
           <a:xfrm>
-            <a:off x="10149840" y="1645920"/>
-            <a:ext cx="1828800" cy="201168"/>
+            <a:off x="1005840" y="1737360"/>
+            <a:ext cx="4572000" cy="219456"/>
           </a:xfrm>
           <a:prstGeom prst="rect">
             <a:avLst/>
@@ -5340,150 +5443,195 @@
               </a:spcAft>
             </a:pPr>
             <a:r>
-              <a:rPr sz="900" b="0">
-                <a:solidFill>
-                  <a:srgbClr val="78838F"/>
-                </a:solidFill>
-                <a:latin typeface="Consolas"/>
-              </a:rPr>
-              <a:t>cycle k+1</a:t>
-            </a:r>
-          </a:p>
-        </p:txBody>
-      </p:sp>
-      <p:sp>
-        <p:nvSpPr>
-          <p:cNvPr id="9" name="Rectangle 8"/>
+              <a:rPr sz="1100" b="1">
+                <a:solidFill>
+                  <a:srgbClr val="111820"/>
+                </a:solidFill>
+                <a:latin typeface="Consolas"/>
+              </a:rPr>
+              <a:t>Vehicle</a:t>
+            </a:r>
+          </a:p>
+        </p:txBody>
+      </p:sp>
+      <p:sp>
+        <p:nvSpPr>
+          <p:cNvPr id="12" name="TextBox 11"/>
+          <p:cNvSpPr txBox="1"/>
+          <p:nvPr/>
+        </p:nvSpPr>
+        <p:spPr>
+          <a:xfrm>
+            <a:off x="1316736" y="1956816"/>
+            <a:ext cx="4572000" cy="219456"/>
+          </a:xfrm>
+          <a:prstGeom prst="rect">
+            <a:avLst/>
+          </a:prstGeom>
+          <a:noFill/>
+        </p:spPr>
+        <p:txBody>
+          <a:bodyPr wrap="square" lIns="0" rIns="0" tIns="0" bIns="0" anchor="t">
+            <a:spAutoFit/>
+          </a:bodyPr>
+          <a:lstStyle/>
+          <a:p>
+            <a:pPr algn="l">
+              <a:spcBef>
+                <a:spcPts val="0"/>
+              </a:spcBef>
+              <a:spcAft>
+                <a:spcPts val="0"/>
+              </a:spcAft>
+            </a:pPr>
+            <a:r>
+              <a:rPr sz="1000" b="0">
+                <a:solidFill>
+                  <a:srgbClr val="4A5764"/>
+                </a:solidFill>
+                <a:latin typeface="Consolas"/>
+              </a:rPr>
+              <a:t>Steering</a:t>
+            </a:r>
+          </a:p>
+        </p:txBody>
+      </p:sp>
+      <p:sp>
+        <p:nvSpPr>
+          <p:cNvPr id="13" name="TextBox 12"/>
+          <p:cNvSpPr txBox="1"/>
+          <p:nvPr/>
+        </p:nvSpPr>
+        <p:spPr>
+          <a:xfrm>
+            <a:off x="1316736" y="2176272"/>
+            <a:ext cx="4572000" cy="219456"/>
+          </a:xfrm>
+          <a:prstGeom prst="rect">
+            <a:avLst/>
+          </a:prstGeom>
+          <a:noFill/>
+        </p:spPr>
+        <p:txBody>
+          <a:bodyPr wrap="square" lIns="0" rIns="0" tIns="0" bIns="0" anchor="t">
+            <a:spAutoFit/>
+          </a:bodyPr>
+          <a:lstStyle/>
+          <a:p>
+            <a:pPr algn="l">
+              <a:spcBef>
+                <a:spcPts val="0"/>
+              </a:spcBef>
+              <a:spcAft>
+                <a:spcPts val="0"/>
+              </a:spcAft>
+            </a:pPr>
+            <a:r>
+              <a:rPr sz="1000" b="0">
+                <a:solidFill>
+                  <a:srgbClr val="4A5764"/>
+                </a:solidFill>
+                <a:latin typeface="Consolas"/>
+              </a:rPr>
+              <a:t>Suspension kinematics &amp; compliance</a:t>
+            </a:r>
+          </a:p>
+        </p:txBody>
+      </p:sp>
+      <p:sp>
+        <p:nvSpPr>
+          <p:cNvPr id="14" name="TextBox 13"/>
+          <p:cNvSpPr txBox="1"/>
+          <p:nvPr/>
+        </p:nvSpPr>
+        <p:spPr>
+          <a:xfrm>
+            <a:off x="1316736" y="2395728"/>
+            <a:ext cx="4572000" cy="219456"/>
+          </a:xfrm>
+          <a:prstGeom prst="rect">
+            <a:avLst/>
+          </a:prstGeom>
+          <a:noFill/>
+        </p:spPr>
+        <p:txBody>
+          <a:bodyPr wrap="square" lIns="0" rIns="0" tIns="0" bIns="0" anchor="t">
+            <a:spAutoFit/>
+          </a:bodyPr>
+          <a:lstStyle/>
+          <a:p>
+            <a:pPr algn="l">
+              <a:spcBef>
+                <a:spcPts val="0"/>
+              </a:spcBef>
+              <a:spcAft>
+                <a:spcPts val="0"/>
+              </a:spcAft>
+            </a:pPr>
+            <a:r>
+              <a:rPr sz="1000" b="0">
+                <a:solidFill>
+                  <a:srgbClr val="4A5764"/>
+                </a:solidFill>
+                <a:latin typeface="Consolas"/>
+              </a:rPr>
+              <a:t>Aerodynamics</a:t>
+            </a:r>
+          </a:p>
+        </p:txBody>
+      </p:sp>
+      <p:sp>
+        <p:nvSpPr>
+          <p:cNvPr id="15" name="TextBox 14"/>
+          <p:cNvSpPr txBox="1"/>
+          <p:nvPr/>
+        </p:nvSpPr>
+        <p:spPr>
+          <a:xfrm>
+            <a:off x="1316736" y="2615184"/>
+            <a:ext cx="4572000" cy="219456"/>
+          </a:xfrm>
+          <a:prstGeom prst="rect">
+            <a:avLst/>
+          </a:prstGeom>
+          <a:noFill/>
+        </p:spPr>
+        <p:txBody>
+          <a:bodyPr wrap="square" lIns="0" rIns="0" tIns="0" bIns="0" anchor="t">
+            <a:spAutoFit/>
+          </a:bodyPr>
+          <a:lstStyle/>
+          <a:p>
+            <a:pPr algn="l">
+              <a:spcBef>
+                <a:spcPts val="0"/>
+              </a:spcBef>
+              <a:spcAft>
+                <a:spcPts val="0"/>
+              </a:spcAft>
+            </a:pPr>
+            <a:r>
+              <a:rPr sz="1000" b="0">
+                <a:solidFill>
+                  <a:srgbClr val="4A5764"/>
+                </a:solidFill>
+                <a:latin typeface="Consolas"/>
+              </a:rPr>
+              <a:t>Suspension forces</a:t>
+            </a:r>
+          </a:p>
+        </p:txBody>
+      </p:sp>
+      <p:sp>
+        <p:nvSpPr>
+          <p:cNvPr id="16" name="Rectangle 15"/>
           <p:cNvSpPr/>
           <p:nvPr/>
         </p:nvSpPr>
         <p:spPr>
           <a:xfrm>
-            <a:off x="566928" y="1874520"/>
-            <a:ext cx="1572768" cy="658368"/>
-          </a:xfrm>
-          <a:prstGeom prst="rect">
-            <a:avLst/>
-          </a:prstGeom>
-          <a:noFill/>
-          <a:ln w="15875">
-            <a:solidFill>
-              <a:srgbClr val="C7CED5"/>
-            </a:solidFill>
-            <a:prstDash val="dash"/>
-          </a:ln>
-          <a:effectLst/>
-        </p:spPr>
-        <p:style>
-          <a:lnRef idx="1">
-            <a:schemeClr val="accent1"/>
-          </a:lnRef>
-          <a:fillRef idx="3">
-            <a:schemeClr val="accent1"/>
-          </a:fillRef>
-          <a:effectRef idx="2">
-            <a:schemeClr val="accent1"/>
-          </a:effectRef>
-          <a:fontRef idx="minor">
-            <a:schemeClr val="lt1"/>
-          </a:fontRef>
-        </p:style>
-        <p:txBody>
-          <a:bodyPr rtlCol="0" anchor="ctr" wrap="square" tIns="54864" bIns="54864"/>
-          <a:lstStyle/>
-          <a:p>
-            <a:pPr algn="ctr">
-              <a:spcBef>
-                <a:spcPts val="0"/>
-              </a:spcBef>
-              <a:spcAft>
-                <a:spcPts val="0"/>
-              </a:spcAft>
-            </a:pPr>
-            <a:r>
-              <a:rPr sz="1050" b="1">
-                <a:solidFill>
-                  <a:srgbClr val="111820"/>
-                </a:solidFill>
-                <a:latin typeface="Consolas"/>
-              </a:rPr>
-              <a:t>… PowerTrain</a:t>
-            </a:r>
-          </a:p>
-        </p:txBody>
-      </p:sp>
-      <p:sp>
-        <p:nvSpPr>
-          <p:cNvPr id="10" name="Rectangle 9"/>
-          <p:cNvSpPr/>
-          <p:nvPr/>
-        </p:nvSpPr>
-        <p:spPr>
-          <a:xfrm>
-            <a:off x="2286000" y="1874520"/>
-            <a:ext cx="1417320" cy="658368"/>
-          </a:xfrm>
-          <a:prstGeom prst="rect">
-            <a:avLst/>
-          </a:prstGeom>
-          <a:solidFill>
-            <a:srgbClr val="D9E9EA"/>
-          </a:solidFill>
-          <a:ln w="15875">
-            <a:solidFill>
-              <a:srgbClr val="1B646D"/>
-            </a:solidFill>
-          </a:ln>
-          <a:effectLst/>
-        </p:spPr>
-        <p:style>
-          <a:lnRef idx="1">
-            <a:schemeClr val="accent1"/>
-          </a:lnRef>
-          <a:fillRef idx="3">
-            <a:schemeClr val="accent1"/>
-          </a:fillRef>
-          <a:effectRef idx="2">
-            <a:schemeClr val="accent1"/>
-          </a:effectRef>
-          <a:fontRef idx="minor">
-            <a:schemeClr val="lt1"/>
-          </a:fontRef>
-        </p:style>
-        <p:txBody>
-          <a:bodyPr rtlCol="0" anchor="ctr" wrap="square" tIns="54864" bIns="54864"/>
-          <a:lstStyle/>
-          <a:p>
-            <a:pPr algn="ctr">
-              <a:spcBef>
-                <a:spcPts val="0"/>
-              </a:spcBef>
-              <a:spcAft>
-                <a:spcPts val="0"/>
-              </a:spcAft>
-            </a:pPr>
-            <a:r>
-              <a:rPr sz="1050" b="1">
-                <a:solidFill>
-                  <a:srgbClr val="1B646D"/>
-                </a:solidFill>
-                <a:latin typeface="Consolas"/>
-              </a:rPr>
-              <a:t>Body</a:t>
-            </a:r>
-          </a:p>
-        </p:txBody>
-      </p:sp>
-      <p:sp>
-        <p:nvSpPr>
-          <p:cNvPr id="11" name="Rectangle 10"/>
-          <p:cNvSpPr/>
-          <p:nvPr/>
-        </p:nvSpPr>
-        <p:spPr>
-          <a:xfrm>
-            <a:off x="3931920" y="1874520"/>
-            <a:ext cx="1481328" cy="658368"/>
+            <a:off x="1170432" y="2889504"/>
+            <a:ext cx="3246120" cy="566928"/>
           </a:xfrm>
           <a:prstGeom prst="rect">
             <a:avLst/>
@@ -5513,7 +5661,7 @@
           </a:fontRef>
         </p:style>
         <p:txBody>
-          <a:bodyPr rtlCol="0" anchor="ctr" wrap="square" tIns="54864" bIns="54864"/>
+          <a:bodyPr rtlCol="0" anchor="t" wrap="square" tIns="54864" bIns="54864"/>
           <a:lstStyle/>
           <a:p>
             <a:pPr algn="ctr">
@@ -5525,7 +5673,7 @@
               </a:spcAft>
             </a:pPr>
             <a:r>
-              <a:rPr sz="1050" b="1">
+              <a:rPr sz="1100" b="1">
                 <a:solidFill>
                   <a:srgbClr val="1B646D"/>
                 </a:solidFill>
@@ -5534,80 +5682,79 @@
               <a:t>Tire</a:t>
             </a:r>
           </a:p>
-        </p:txBody>
-      </p:sp>
-      <p:sp>
-        <p:nvSpPr>
-          <p:cNvPr id="12" name="Rectangle 11"/>
+          <a:p>
+            <a:pPr>
+              <a:spcBef>
+                <a:spcPts val="200"/>
+              </a:spcBef>
+              <a:spcAft>
+                <a:spcPts val="0"/>
+              </a:spcAft>
+            </a:pPr>
+            <a:r>
+              <a:rPr sz="900" b="0">
+                <a:solidFill>
+                  <a:srgbClr val="4A5764"/>
+                </a:solidFill>
+                <a:latin typeface="Consolas"/>
+              </a:rPr>
+              <a:t>reads the wheel speed as it stands</a:t>
+            </a:r>
+          </a:p>
+        </p:txBody>
+      </p:sp>
+      <p:sp>
+        <p:nvSpPr>
+          <p:cNvPr id="17" name="TextBox 16"/>
+          <p:cNvSpPr txBox="1"/>
+          <p:nvPr/>
+        </p:nvSpPr>
+        <p:spPr>
+          <a:xfrm>
+            <a:off x="1005840" y="3584448"/>
+            <a:ext cx="4572000" cy="219456"/>
+          </a:xfrm>
+          <a:prstGeom prst="rect">
+            <a:avLst/>
+          </a:prstGeom>
+          <a:noFill/>
+        </p:spPr>
+        <p:txBody>
+          <a:bodyPr wrap="square" lIns="0" rIns="0" tIns="0" bIns="0" anchor="t">
+            <a:spAutoFit/>
+          </a:bodyPr>
+          <a:lstStyle/>
+          <a:p>
+            <a:pPr algn="l">
+              <a:spcBef>
+                <a:spcPts val="0"/>
+              </a:spcBef>
+              <a:spcAft>
+                <a:spcPts val="0"/>
+              </a:spcAft>
+            </a:pPr>
+            <a:r>
+              <a:rPr sz="1100" b="1">
+                <a:solidFill>
+                  <a:srgbClr val="111820"/>
+                </a:solidFill>
+                <a:latin typeface="Consolas"/>
+              </a:rPr>
+              <a:t>Brake</a:t>
+            </a:r>
+          </a:p>
+        </p:txBody>
+      </p:sp>
+      <p:sp>
+        <p:nvSpPr>
+          <p:cNvPr id="18" name="Rectangle 17"/>
           <p:cNvSpPr/>
           <p:nvPr/>
         </p:nvSpPr>
         <p:spPr>
           <a:xfrm>
-            <a:off x="5550408" y="1874520"/>
-            <a:ext cx="914400" cy="658368"/>
-          </a:xfrm>
-          <a:prstGeom prst="rect">
-            <a:avLst/>
-          </a:prstGeom>
-          <a:solidFill>
-            <a:srgbClr val="D9E9EA"/>
-          </a:solidFill>
-          <a:ln w="15875">
-            <a:solidFill>
-              <a:srgbClr val="1B646D"/>
-            </a:solidFill>
-          </a:ln>
-          <a:effectLst/>
-        </p:spPr>
-        <p:style>
-          <a:lnRef idx="1">
-            <a:schemeClr val="accent1"/>
-          </a:lnRef>
-          <a:fillRef idx="3">
-            <a:schemeClr val="accent1"/>
-          </a:fillRef>
-          <a:effectRef idx="2">
-            <a:schemeClr val="accent1"/>
-          </a:effectRef>
-          <a:fontRef idx="minor">
-            <a:schemeClr val="lt1"/>
-          </a:fontRef>
-        </p:style>
-        <p:txBody>
-          <a:bodyPr rtlCol="0" anchor="ctr" wrap="square" tIns="54864" bIns="54864"/>
-          <a:lstStyle/>
-          <a:p>
-            <a:pPr algn="ctr">
-              <a:spcBef>
-                <a:spcPts val="0"/>
-              </a:spcBef>
-              <a:spcAft>
-                <a:spcPts val="0"/>
-              </a:spcAft>
-            </a:pPr>
-            <a:r>
-              <a:rPr sz="1050" b="1">
-                <a:solidFill>
-                  <a:srgbClr val="1B646D"/>
-                </a:solidFill>
-                <a:latin typeface="Consolas"/>
-              </a:rPr>
-              <a:t>Brake</a:t>
-            </a:r>
-          </a:p>
-        </p:txBody>
-      </p:sp>
-      <p:sp>
-        <p:nvSpPr>
-          <p:cNvPr id="13" name="Rectangle 12"/>
-          <p:cNvSpPr/>
-          <p:nvPr/>
-        </p:nvSpPr>
-        <p:spPr>
-          <a:xfrm>
-            <a:off x="6601968" y="1874520"/>
-            <a:ext cx="1783080" cy="658368"/>
+            <a:off x="1170432" y="3858768"/>
+            <a:ext cx="3246120" cy="566928"/>
           </a:xfrm>
           <a:prstGeom prst="rect">
             <a:avLst/>
@@ -5635,19 +5782,12 @@
           </a:fontRef>
         </p:style>
         <p:txBody>
-          <a:bodyPr rtlCol="0" anchor="ctr" wrap="square" tIns="54864" bIns="54864"/>
-          <a:lstStyle/>
-          <a:p>
-            <a:pPr algn="ctr">
-              <a:spcBef>
-                <a:spcPts val="0"/>
-              </a:spcBef>
-              <a:spcAft>
-                <a:spcPts val="0"/>
-              </a:spcAft>
-            </a:pPr>
-            <a:r>
-              <a:rPr sz="1050" b="1">
+          <a:bodyPr rtlCol="0" anchor="t" wrap="square" tIns="54864" bIns="54864"/>
+          <a:lstStyle/>
+          <a:p>
+            <a:pPr algn="ctr"/>
+            <a:r>
+              <a:rPr sz="1100" b="1">
                 <a:solidFill>
                   <a:srgbClr val="111820"/>
                 </a:solidFill>
@@ -5655,38 +5795,47 @@
               </a:rPr>
               <a:t>PowerTrain</a:t>
             </a:r>
-          </a:p>
-          <a:p>
-            <a:pPr algn="ctr">
-              <a:spcBef>
-                <a:spcPts val="0"/>
-              </a:spcBef>
-              <a:spcAft>
-                <a:spcPts val="0"/>
-              </a:spcAft>
-            </a:pPr>
-            <a:r>
-              <a:rPr sz="800" b="0">
+            <a:r>
+              <a:rPr sz="900">
                 <a:solidFill>
                   <a:srgbClr val="A9611A"/>
                 </a:solidFill>
                 <a:latin typeface="Consolas"/>
               </a:rPr>
-              <a:t>= OUR BLOCK</a:t>
-            </a:r>
-          </a:p>
-        </p:txBody>
-      </p:sp>
-      <p:sp>
-        <p:nvSpPr>
-          <p:cNvPr id="14" name="Rectangle 13"/>
+              <a:t>     &lt;- our block</a:t>
+            </a:r>
+          </a:p>
+          <a:p>
+            <a:pPr>
+              <a:spcBef>
+                <a:spcPts val="200"/>
+              </a:spcBef>
+              <a:spcAft>
+                <a:spcPts val="0"/>
+              </a:spcAft>
+            </a:pPr>
+            <a:r>
+              <a:rPr sz="900" b="0">
+                <a:solidFill>
+                  <a:srgbClr val="4A5764"/>
+                </a:solidFill>
+                <a:latin typeface="Consolas"/>
+              </a:rPr>
+              <a:t>advances the wheel speed state</a:t>
+            </a:r>
+          </a:p>
+        </p:txBody>
+      </p:sp>
+      <p:sp>
+        <p:nvSpPr>
+          <p:cNvPr id="19" name="Rectangle 18"/>
           <p:cNvSpPr/>
           <p:nvPr/>
         </p:nvSpPr>
         <p:spPr>
           <a:xfrm>
-            <a:off x="8522208" y="1874520"/>
-            <a:ext cx="1234440" cy="658368"/>
+            <a:off x="1170432" y="4553712"/>
+            <a:ext cx="3246120" cy="329184"/>
           </a:xfrm>
           <a:prstGeom prst="rect">
             <a:avLst/>
@@ -5694,7 +5843,7 @@
           <a:solidFill>
             <a:srgbClr val="D9E9EA"/>
           </a:solidFill>
-          <a:ln w="15875">
+          <a:ln w="19050">
             <a:solidFill>
               <a:srgbClr val="1B646D"/>
             </a:solidFill>
@@ -5728,244 +5877,17 @@
               </a:spcAft>
             </a:pPr>
             <a:r>
-              <a:rPr sz="1050" b="1">
+              <a:rPr sz="950" b="1">
                 <a:solidFill>
                   <a:srgbClr val="1B646D"/>
                 </a:solidFill>
                 <a:latin typeface="Consolas"/>
               </a:rPr>
-              <a:t>Body</a:t>
-            </a:r>
-          </a:p>
-        </p:txBody>
-      </p:sp>
-      <p:sp>
-        <p:nvSpPr>
-          <p:cNvPr id="15" name="Rectangle 14"/>
-          <p:cNvSpPr/>
-          <p:nvPr/>
-        </p:nvSpPr>
-        <p:spPr>
-          <a:xfrm>
-            <a:off x="10012680" y="1874520"/>
-            <a:ext cx="1618488" cy="658368"/>
-          </a:xfrm>
-          <a:prstGeom prst="rect">
-            <a:avLst/>
-          </a:prstGeom>
-          <a:noFill/>
-          <a:ln w="15875">
-            <a:solidFill>
-              <a:srgbClr val="C7CED5"/>
-            </a:solidFill>
-            <a:prstDash val="dash"/>
-          </a:ln>
-          <a:effectLst/>
-        </p:spPr>
-        <p:style>
-          <a:lnRef idx="1">
-            <a:schemeClr val="accent1"/>
-          </a:lnRef>
-          <a:fillRef idx="3">
-            <a:schemeClr val="accent1"/>
-          </a:fillRef>
-          <a:effectRef idx="2">
-            <a:schemeClr val="accent1"/>
-          </a:effectRef>
-          <a:fontRef idx="minor">
-            <a:schemeClr val="lt1"/>
-          </a:fontRef>
-        </p:style>
-        <p:txBody>
-          <a:bodyPr rtlCol="0" anchor="ctr" wrap="square" tIns="54864" bIns="54864"/>
-          <a:lstStyle/>
-          <a:p>
-            <a:pPr algn="ctr">
-              <a:spcBef>
-                <a:spcPts val="0"/>
-              </a:spcBef>
-              <a:spcAft>
-                <a:spcPts val="0"/>
-              </a:spcAft>
-            </a:pPr>
-            <a:r>
-              <a:rPr sz="1050" b="1">
-                <a:solidFill>
-                  <a:srgbClr val="111820"/>
-                </a:solidFill>
-                <a:latin typeface="Consolas"/>
-              </a:rPr>
-              <a:t>Tire …</a:t>
-            </a:r>
-          </a:p>
-        </p:txBody>
-      </p:sp>
-      <p:cxnSp>
-        <p:nvCxnSpPr>
-          <p:cNvPr id="16" name="Connector 15"/>
-          <p:cNvCxnSpPr/>
-          <p:nvPr/>
-        </p:nvCxnSpPr>
-        <p:spPr>
-          <a:xfrm>
-            <a:off x="3931920" y="1591056"/>
-            <a:ext cx="5824728" cy="0"/>
-          </a:xfrm>
-          <a:prstGeom prst="line">
-            <a:avLst/>
-          </a:prstGeom>
-          <a:ln w="19050">
-            <a:solidFill>
-              <a:srgbClr val="A9611A"/>
-            </a:solidFill>
-          </a:ln>
-        </p:spPr>
-        <p:style>
-          <a:lnRef idx="2">
-            <a:schemeClr val="accent1"/>
-          </a:lnRef>
-          <a:fillRef idx="0">
-            <a:schemeClr val="accent1"/>
-          </a:fillRef>
-          <a:effectRef idx="1">
-            <a:schemeClr val="accent1"/>
-          </a:effectRef>
-          <a:fontRef idx="minor">
-            <a:schemeClr val="tx1"/>
-          </a:fontRef>
-        </p:style>
-      </p:cxnSp>
-      <p:sp>
-        <p:nvSpPr>
-          <p:cNvPr id="17" name="TextBox 16"/>
-          <p:cNvSpPr txBox="1"/>
-          <p:nvPr/>
-        </p:nvSpPr>
-        <p:spPr>
-          <a:xfrm>
-            <a:off x="566928" y="3310128"/>
-            <a:ext cx="1828800" cy="402336"/>
-          </a:xfrm>
-          <a:prstGeom prst="rect">
-            <a:avLst/>
-          </a:prstGeom>
-          <a:noFill/>
-        </p:spPr>
-        <p:txBody>
-          <a:bodyPr wrap="square" lIns="0" rIns="0" tIns="0" bIns="0" anchor="t">
-            <a:spAutoFit/>
-          </a:bodyPr>
-          <a:lstStyle/>
-          <a:p>
-            <a:pPr algn="l">
-              <a:spcBef>
-                <a:spcPts val="0"/>
-              </a:spcBef>
-              <a:spcAft>
-                <a:spcPts val="0"/>
-              </a:spcAft>
-            </a:pPr>
-            <a:r>
-              <a:rPr sz="850" b="0">
-                <a:solidFill>
-                  <a:srgbClr val="78838F"/>
-                </a:solidFill>
-                <a:latin typeface="Consolas"/>
-              </a:rPr>
-              <a:t>shared variable</a:t>
-            </a:r>
-          </a:p>
-          <a:p>
-            <a:pPr>
-              <a:spcBef>
-                <a:spcPts val="0"/>
-              </a:spcBef>
-              <a:spcAft>
-                <a:spcPts val="0"/>
-              </a:spcAft>
-            </a:pPr>
-            <a:r>
-              <a:rPr sz="1100" b="1">
-                <a:solidFill>
-                  <a:srgbClr val="A9611A"/>
-                </a:solidFill>
-                <a:latin typeface="Consolas"/>
-              </a:rPr>
-              <a:t>Rim_rotv</a:t>
-            </a:r>
-          </a:p>
-        </p:txBody>
-      </p:sp>
-      <p:cxnSp>
-        <p:nvCxnSpPr>
-          <p:cNvPr id="18" name="Connector 17"/>
-          <p:cNvCxnSpPr/>
-          <p:nvPr/>
-        </p:nvCxnSpPr>
-        <p:spPr>
-          <a:xfrm>
-            <a:off x="2139696" y="3931920"/>
-            <a:ext cx="585216" cy="0"/>
-          </a:xfrm>
-          <a:prstGeom prst="line">
-            <a:avLst/>
-          </a:prstGeom>
-          <a:ln w="31750">
-            <a:solidFill>
-              <a:srgbClr val="A9611A"/>
-            </a:solidFill>
-          </a:ln>
-        </p:spPr>
-        <p:style>
-          <a:lnRef idx="2">
-            <a:schemeClr val="accent1"/>
-          </a:lnRef>
-          <a:fillRef idx="0">
-            <a:schemeClr val="accent1"/>
-          </a:fillRef>
-          <a:effectRef idx="1">
-            <a:schemeClr val="accent1"/>
-          </a:effectRef>
-          <a:fontRef idx="minor">
-            <a:schemeClr val="tx1"/>
-          </a:fontRef>
-        </p:style>
-      </p:cxnSp>
-      <p:cxnSp>
-        <p:nvCxnSpPr>
-          <p:cNvPr id="19" name="Connector 18"/>
-          <p:cNvCxnSpPr/>
-          <p:nvPr/>
-        </p:nvCxnSpPr>
-        <p:spPr>
-          <a:xfrm flipV="1">
-            <a:off x="2724912" y="3639312"/>
-            <a:ext cx="0" cy="292608"/>
-          </a:xfrm>
-          <a:prstGeom prst="line">
-            <a:avLst/>
-          </a:prstGeom>
-          <a:ln w="31750">
-            <a:solidFill>
-              <a:srgbClr val="A9611A"/>
-            </a:solidFill>
-          </a:ln>
-        </p:spPr>
-        <p:style>
-          <a:lnRef idx="2">
-            <a:schemeClr val="accent1"/>
-          </a:lnRef>
-          <a:fillRef idx="0">
-            <a:schemeClr val="accent1"/>
-          </a:fillRef>
-          <a:effectRef idx="1">
-            <a:schemeClr val="accent1"/>
-          </a:effectRef>
-          <a:fontRef idx="minor">
-            <a:schemeClr val="tx1"/>
-          </a:fontRef>
-        </p:style>
-      </p:cxnSp>
+              <a:t>Body Frame   advances the chassis states</a:t>
+            </a:r>
+          </a:p>
+        </p:txBody>
+      </p:sp>
       <p:cxnSp>
         <p:nvCxnSpPr>
           <p:cNvPr id="20" name="Connector 19"/>
@@ -5974,16 +5896,17 @@
         </p:nvCxnSpPr>
         <p:spPr>
           <a:xfrm>
-            <a:off x="2724912" y="3639312"/>
-            <a:ext cx="4517136" cy="0"/>
+            <a:off x="2788920" y="3456432"/>
+            <a:ext cx="0" cy="347472"/>
           </a:xfrm>
           <a:prstGeom prst="line">
             <a:avLst/>
           </a:prstGeom>
-          <a:ln w="31750">
+          <a:ln w="25400">
             <a:solidFill>
-              <a:srgbClr val="A9611A"/>
+              <a:srgbClr val="C7CED5"/>
             </a:solidFill>
+            <a:tailEnd type="triangle" w="med" len="med"/>
           </a:ln>
         </p:spPr>
         <p:style>
@@ -6008,17 +5931,18 @@
           <p:nvPr/>
         </p:nvCxnSpPr>
         <p:spPr>
-          <a:xfrm flipV="1">
-            <a:off x="7242048" y="3346704"/>
-            <a:ext cx="0" cy="292608"/>
+          <a:xfrm>
+            <a:off x="2788920" y="4425696"/>
+            <a:ext cx="0" cy="73152"/>
           </a:xfrm>
           <a:prstGeom prst="line">
             <a:avLst/>
           </a:prstGeom>
-          <a:ln w="31750">
+          <a:ln w="25400">
             <a:solidFill>
-              <a:srgbClr val="A9611A"/>
+              <a:srgbClr val="C7CED5"/>
             </a:solidFill>
+            <a:tailEnd type="triangle" w="med" len="med"/>
           </a:ln>
         </p:spPr>
         <p:style>
@@ -6044,16 +5968,17 @@
         </p:nvCxnSpPr>
         <p:spPr>
           <a:xfrm>
-            <a:off x="7242048" y="3346704"/>
-            <a:ext cx="4389120" cy="0"/>
+            <a:off x="4416552" y="3172968"/>
+            <a:ext cx="521208" cy="0"/>
           </a:xfrm>
           <a:prstGeom prst="line">
             <a:avLst/>
           </a:prstGeom>
-          <a:ln w="31750">
+          <a:ln w="25400">
             <a:solidFill>
-              <a:srgbClr val="A9611A"/>
+              <a:srgbClr val="1B646D"/>
             </a:solidFill>
+            <a:tailEnd type="triangle" w="med" len="med"/>
           </a:ln>
         </p:spPr>
         <p:style>
@@ -6073,107 +5998,102 @@
       </p:cxnSp>
       <p:sp>
         <p:nvSpPr>
-          <p:cNvPr id="23" name="TextBox 22"/>
-          <p:cNvSpPr txBox="1"/>
-          <p:nvPr/>
-        </p:nvSpPr>
-        <p:spPr>
-          <a:xfrm>
-            <a:off x="2834640" y="3401568"/>
-            <a:ext cx="2194560" cy="219456"/>
+          <p:cNvPr id="23" name="Rectangle 22"/>
+          <p:cNvSpPr/>
+          <p:nvPr/>
+        </p:nvSpPr>
+        <p:spPr>
+          <a:xfrm>
+            <a:off x="4992624" y="2889504"/>
+            <a:ext cx="3017520" cy="566928"/>
           </a:xfrm>
           <a:prstGeom prst="rect">
             <a:avLst/>
           </a:prstGeom>
           <a:noFill/>
-        </p:spPr>
-        <p:txBody>
-          <a:bodyPr wrap="square" lIns="0" rIns="0" tIns="0" bIns="0" anchor="t">
-            <a:spAutoFit/>
-          </a:bodyPr>
-          <a:lstStyle/>
-          <a:p>
-            <a:pPr algn="l">
-              <a:spcBef>
-                <a:spcPts val="0"/>
-              </a:spcBef>
-              <a:spcAft>
-                <a:spcPts val="0"/>
-              </a:spcAft>
-            </a:pPr>
-            <a:r>
-              <a:rPr sz="900" b="0">
-                <a:solidFill>
-                  <a:srgbClr val="78838F"/>
-                </a:solidFill>
-                <a:latin typeface="Consolas"/>
-              </a:rPr>
-              <a:t>holds w[k-1]</a:t>
-            </a:r>
-          </a:p>
-        </p:txBody>
-      </p:sp>
-      <p:sp>
-        <p:nvSpPr>
-          <p:cNvPr id="24" name="TextBox 23"/>
-          <p:cNvSpPr txBox="1"/>
-          <p:nvPr/>
-        </p:nvSpPr>
-        <p:spPr>
-          <a:xfrm>
-            <a:off x="7370064" y="3108960"/>
-            <a:ext cx="2194560" cy="219456"/>
-          </a:xfrm>
-          <a:prstGeom prst="rect">
-            <a:avLst/>
-          </a:prstGeom>
-          <a:noFill/>
-        </p:spPr>
-        <p:txBody>
-          <a:bodyPr wrap="square" lIns="0" rIns="0" tIns="0" bIns="0" anchor="t">
-            <a:spAutoFit/>
-          </a:bodyPr>
-          <a:lstStyle/>
-          <a:p>
-            <a:pPr algn="l">
-              <a:spcBef>
-                <a:spcPts val="0"/>
-              </a:spcBef>
-              <a:spcAft>
-                <a:spcPts val="0"/>
-              </a:spcAft>
-            </a:pPr>
-            <a:r>
-              <a:rPr sz="900" b="0">
-                <a:solidFill>
-                  <a:srgbClr val="78838F"/>
-                </a:solidFill>
-                <a:latin typeface="Consolas"/>
-              </a:rPr>
-              <a:t>holds w[k]</a:t>
-            </a:r>
-          </a:p>
-        </p:txBody>
-      </p:sp>
-      <p:cxnSp>
-        <p:nvCxnSpPr>
-          <p:cNvPr id="25" name="Connector 24"/>
-          <p:cNvCxnSpPr/>
-          <p:nvPr/>
-        </p:nvCxnSpPr>
-        <p:spPr>
-          <a:xfrm>
-            <a:off x="4672584" y="2532888"/>
-            <a:ext cx="0" cy="1106424"/>
-          </a:xfrm>
-          <a:prstGeom prst="line">
-            <a:avLst/>
-          </a:prstGeom>
           <a:ln w="19050">
             <a:solidFill>
               <a:srgbClr val="1B646D"/>
             </a:solidFill>
-            <a:prstDash val="dash"/>
+          </a:ln>
+          <a:effectLst/>
+        </p:spPr>
+        <p:style>
+          <a:lnRef idx="1">
+            <a:schemeClr val="accent1"/>
+          </a:lnRef>
+          <a:fillRef idx="3">
+            <a:schemeClr val="accent1"/>
+          </a:fillRef>
+          <a:effectRef idx="2">
+            <a:schemeClr val="accent1"/>
+          </a:effectRef>
+          <a:fontRef idx="minor">
+            <a:schemeClr val="lt1"/>
+          </a:fontRef>
+        </p:style>
+        <p:txBody>
+          <a:bodyPr rtlCol="0" anchor="t" wrap="square" tIns="54864" bIns="54864"/>
+          <a:lstStyle/>
+          <a:p>
+            <a:pPr algn="ctr">
+              <a:spcBef>
+                <a:spcPts val="0"/>
+              </a:spcBef>
+              <a:spcAft>
+                <a:spcPts val="0"/>
+              </a:spcAft>
+            </a:pPr>
+            <a:r>
+              <a:rPr sz="1050" b="1">
+                <a:solidFill>
+                  <a:srgbClr val="1B646D"/>
+                </a:solidFill>
+                <a:latin typeface="Consolas"/>
+              </a:rPr>
+              <a:t>uses  w[k-1]</a:t>
+            </a:r>
+          </a:p>
+          <a:p>
+            <a:pPr>
+              <a:spcBef>
+                <a:spcPts val="200"/>
+              </a:spcBef>
+              <a:spcAft>
+                <a:spcPts val="0"/>
+              </a:spcAft>
+            </a:pPr>
+            <a:r>
+              <a:rPr sz="1050" b="1">
+                <a:solidFill>
+                  <a:srgbClr val="1B646D"/>
+                </a:solidFill>
+                <a:latin typeface="Consolas"/>
+              </a:rPr>
+              <a:t>emits Trq_T2W[k]</a:t>
+            </a:r>
+          </a:p>
+        </p:txBody>
+      </p:sp>
+      <p:cxnSp>
+        <p:nvCxnSpPr>
+          <p:cNvPr id="24" name="Connector 23"/>
+          <p:cNvCxnSpPr/>
+          <p:nvPr/>
+        </p:nvCxnSpPr>
+        <p:spPr>
+          <a:xfrm>
+            <a:off x="4416552" y="4142232"/>
+            <a:ext cx="521208" cy="0"/>
+          </a:xfrm>
+          <a:prstGeom prst="line">
+            <a:avLst/>
+          </a:prstGeom>
+          <a:ln w="31750">
+            <a:solidFill>
+              <a:srgbClr val="111820"/>
+            </a:solidFill>
+            <a:tailEnd type="triangle" w="med" len="med"/>
           </a:ln>
         </p:spPr>
         <p:style>
@@ -6193,172 +6113,14 @@
       </p:cxnSp>
       <p:sp>
         <p:nvSpPr>
-          <p:cNvPr id="26" name="TextBox 25"/>
-          <p:cNvSpPr txBox="1"/>
-          <p:nvPr/>
-        </p:nvSpPr>
-        <p:spPr>
-          <a:xfrm>
-            <a:off x="4754880" y="2688336"/>
-            <a:ext cx="2011680" cy="457200"/>
-          </a:xfrm>
-          <a:prstGeom prst="rect">
-            <a:avLst/>
-          </a:prstGeom>
-          <a:noFill/>
-        </p:spPr>
-        <p:txBody>
-          <a:bodyPr wrap="square" lIns="0" rIns="0" tIns="0" bIns="0" anchor="t">
-            <a:spAutoFit/>
-          </a:bodyPr>
-          <a:lstStyle/>
-          <a:p>
-            <a:pPr algn="l">
-              <a:spcBef>
-                <a:spcPts val="0"/>
-              </a:spcBef>
-              <a:spcAft>
-                <a:spcPts val="0"/>
-              </a:spcAft>
-            </a:pPr>
-            <a:r>
-              <a:rPr sz="950" b="1">
-                <a:solidFill>
-                  <a:srgbClr val="1B646D"/>
-                </a:solidFill>
-                <a:latin typeface="Consolas"/>
-              </a:rPr>
-              <a:t>READ</a:t>
-            </a:r>
-          </a:p>
-          <a:p>
-            <a:pPr>
-              <a:spcBef>
-                <a:spcPts val="0"/>
-              </a:spcBef>
-              <a:spcAft>
-                <a:spcPts val="0"/>
-              </a:spcAft>
-            </a:pPr>
-            <a:r>
-              <a:rPr sz="900" b="0">
-                <a:solidFill>
-                  <a:srgbClr val="1B646D"/>
-                </a:solidFill>
-                <a:latin typeface="Consolas"/>
-              </a:rPr>
-              <a:t>gets w[k-1]</a:t>
-            </a:r>
-          </a:p>
-        </p:txBody>
-      </p:sp>
-      <p:cxnSp>
-        <p:nvCxnSpPr>
-          <p:cNvPr id="27" name="Connector 26"/>
-          <p:cNvCxnSpPr/>
-          <p:nvPr/>
-        </p:nvCxnSpPr>
-        <p:spPr>
-          <a:xfrm>
-            <a:off x="7242048" y="2532888"/>
-            <a:ext cx="0" cy="813816"/>
-          </a:xfrm>
-          <a:prstGeom prst="line">
-            <a:avLst/>
-          </a:prstGeom>
-          <a:ln w="19050">
-            <a:solidFill>
-              <a:srgbClr val="111820"/>
-            </a:solidFill>
-            <a:prstDash val="dash"/>
-          </a:ln>
-        </p:spPr>
-        <p:style>
-          <a:lnRef idx="2">
-            <a:schemeClr val="accent1"/>
-          </a:lnRef>
-          <a:fillRef idx="0">
-            <a:schemeClr val="accent1"/>
-          </a:fillRef>
-          <a:effectRef idx="1">
-            <a:schemeClr val="accent1"/>
-          </a:effectRef>
-          <a:fontRef idx="minor">
-            <a:schemeClr val="tx1"/>
-          </a:fontRef>
-        </p:style>
-      </p:cxnSp>
-      <p:sp>
-        <p:nvSpPr>
-          <p:cNvPr id="28" name="TextBox 27"/>
-          <p:cNvSpPr txBox="1"/>
-          <p:nvPr/>
-        </p:nvSpPr>
-        <p:spPr>
-          <a:xfrm>
-            <a:off x="7333488" y="2688336"/>
-            <a:ext cx="2011680" cy="457200"/>
-          </a:xfrm>
-          <a:prstGeom prst="rect">
-            <a:avLst/>
-          </a:prstGeom>
-          <a:noFill/>
-        </p:spPr>
-        <p:txBody>
-          <a:bodyPr wrap="square" lIns="0" rIns="0" tIns="0" bIns="0" anchor="t">
-            <a:spAutoFit/>
-          </a:bodyPr>
-          <a:lstStyle/>
-          <a:p>
-            <a:pPr algn="l">
-              <a:spcBef>
-                <a:spcPts val="0"/>
-              </a:spcBef>
-              <a:spcAft>
-                <a:spcPts val="0"/>
-              </a:spcAft>
-            </a:pPr>
-            <a:r>
-              <a:rPr sz="950" b="1">
-                <a:solidFill>
-                  <a:srgbClr val="111820"/>
-                </a:solidFill>
-                <a:latin typeface="Consolas"/>
-              </a:rPr>
-              <a:t>WRITE</a:t>
-            </a:r>
-          </a:p>
-          <a:p>
-            <a:pPr>
-              <a:spcBef>
-                <a:spcPts val="0"/>
-              </a:spcBef>
-              <a:spcAft>
-                <a:spcPts val="0"/>
-              </a:spcAft>
-            </a:pPr>
-            <a:r>
-              <a:rPr sz="900" b="0">
-                <a:solidFill>
-                  <a:srgbClr val="111820"/>
-                </a:solidFill>
-                <a:latin typeface="Consolas"/>
-              </a:rPr>
-              <a:t>emits w[k]</a:t>
-            </a:r>
-          </a:p>
-        </p:txBody>
-      </p:sp>
-      <p:sp>
-        <p:nvSpPr>
-          <p:cNvPr id="29" name="Rectangle 28"/>
+          <p:cNvPr id="25" name="Rectangle 24"/>
           <p:cNvSpPr/>
           <p:nvPr/>
         </p:nvSpPr>
         <p:spPr>
           <a:xfrm>
-            <a:off x="4672584" y="4315968"/>
-            <a:ext cx="2569464" cy="365760"/>
+            <a:off x="4992624" y="3858768"/>
+            <a:ext cx="4206240" cy="566928"/>
           </a:xfrm>
           <a:prstGeom prst="rect">
             <a:avLst/>
@@ -6366,7 +6128,7 @@
           <a:solidFill>
             <a:srgbClr val="F2E4D3"/>
           </a:solidFill>
-          <a:ln w="19050">
+          <a:ln w="25400">
             <a:solidFill>
               <a:srgbClr val="A9611A"/>
             </a:solidFill>
@@ -6388,7 +6150,7 @@
           </a:fontRef>
         </p:style>
         <p:txBody>
-          <a:bodyPr rtlCol="0" anchor="ctr" wrap="square" tIns="54864" bIns="54864"/>
+          <a:bodyPr rtlCol="0" anchor="t" wrap="square" tIns="54864" bIns="54864"/>
           <a:lstStyle/>
           <a:p>
             <a:pPr algn="ctr">
@@ -6400,99 +6162,46 @@
               </a:spcAft>
             </a:pPr>
             <a:r>
-              <a:rPr sz="1100" b="1">
-                <a:solidFill>
-                  <a:srgbClr val="A9611A"/>
-                </a:solidFill>
-                <a:latin typeface="Consolas"/>
-              </a:rPr>
-              <a:t>this gap IS the z⁻¹</a:t>
-            </a:r>
-          </a:p>
-        </p:txBody>
-      </p:sp>
-      <p:cxnSp>
-        <p:nvCxnSpPr>
-          <p:cNvPr id="30" name="Connector 29"/>
-          <p:cNvCxnSpPr/>
-          <p:nvPr/>
-        </p:nvCxnSpPr>
-        <p:spPr>
-          <a:xfrm>
-            <a:off x="4672584" y="3694176"/>
-            <a:ext cx="0" cy="621792"/>
-          </a:xfrm>
-          <a:prstGeom prst="line">
-            <a:avLst/>
-          </a:prstGeom>
-          <a:ln w="12700">
-            <a:solidFill>
-              <a:srgbClr val="A9611A"/>
-            </a:solidFill>
-            <a:prstDash val="dash"/>
-          </a:ln>
-        </p:spPr>
-        <p:style>
-          <a:lnRef idx="2">
-            <a:schemeClr val="accent1"/>
-          </a:lnRef>
-          <a:fillRef idx="0">
-            <a:schemeClr val="accent1"/>
-          </a:fillRef>
-          <a:effectRef idx="1">
-            <a:schemeClr val="accent1"/>
-          </a:effectRef>
-          <a:fontRef idx="minor">
-            <a:schemeClr val="tx1"/>
-          </a:fontRef>
-        </p:style>
-      </p:cxnSp>
-      <p:cxnSp>
-        <p:nvCxnSpPr>
-          <p:cNvPr id="31" name="Connector 30"/>
-          <p:cNvCxnSpPr/>
-          <p:nvPr/>
-        </p:nvCxnSpPr>
-        <p:spPr>
-          <a:xfrm>
-            <a:off x="7242048" y="3401568"/>
-            <a:ext cx="0" cy="914400"/>
-          </a:xfrm>
-          <a:prstGeom prst="line">
-            <a:avLst/>
-          </a:prstGeom>
-          <a:ln w="12700">
-            <a:solidFill>
-              <a:srgbClr val="A9611A"/>
-            </a:solidFill>
-            <a:prstDash val="dash"/>
-          </a:ln>
-        </p:spPr>
-        <p:style>
-          <a:lnRef idx="2">
-            <a:schemeClr val="accent1"/>
-          </a:lnRef>
-          <a:fillRef idx="0">
-            <a:schemeClr val="accent1"/>
-          </a:fillRef>
-          <a:effectRef idx="1">
-            <a:schemeClr val="accent1"/>
-          </a:effectRef>
-          <a:fontRef idx="minor">
-            <a:schemeClr val="tx1"/>
-          </a:fontRef>
-        </p:style>
-      </p:cxnSp>
-      <p:sp>
-        <p:nvSpPr>
-          <p:cNvPr id="32" name="TextBox 31"/>
+              <a:rPr sz="1050" b="0">
+                <a:solidFill>
+                  <a:srgbClr val="111820"/>
+                </a:solidFill>
+                <a:latin typeface="Consolas"/>
+              </a:rPr>
+              <a:t>w[k] = w[k-1] + (Ts / I) *</a:t>
+            </a:r>
+          </a:p>
+          <a:p>
+            <a:pPr>
+              <a:spcBef>
+                <a:spcPts val="200"/>
+              </a:spcBef>
+              <a:spcAft>
+                <a:spcPts val="0"/>
+              </a:spcAft>
+            </a:pPr>
+            <a:r>
+              <a:rPr sz="1050" b="0">
+                <a:solidFill>
+                  <a:srgbClr val="111820"/>
+                </a:solidFill>
+                <a:latin typeface="Consolas"/>
+              </a:rPr>
+              <a:t>           ( Taxl[k] + Trq_T2W[k] )</a:t>
+            </a:r>
+          </a:p>
+        </p:txBody>
+      </p:sp>
+      <p:sp>
+        <p:nvSpPr>
+          <p:cNvPr id="26" name="TextBox 25"/>
           <p:cNvSpPr txBox="1"/>
           <p:nvPr/>
         </p:nvSpPr>
         <p:spPr>
           <a:xfrm>
-            <a:off x="7498080" y="4370832"/>
-            <a:ext cx="4114800" cy="274320"/>
+            <a:off x="566928" y="5084064"/>
+            <a:ext cx="11064240" cy="548640"/>
           </a:xfrm>
           <a:prstGeom prst="rect">
             <a:avLst/>
@@ -6514,45 +6223,26 @@
               </a:spcAft>
             </a:pPr>
             <a:r>
-              <a:rPr sz="900" b="0">
-                <a:solidFill>
-                  <a:srgbClr val="78838F"/>
-                </a:solidFill>
-                <a:latin typeface="Consolas"/>
-              </a:rPr>
-              <a:t>A memoryless block fed a stale</a:t>
-            </a:r>
-          </a:p>
-          <a:p>
-            <a:pPr>
-              <a:spcBef>
-                <a:spcPts val="0"/>
-              </a:spcBef>
-              <a:spcAft>
-                <a:spcPts val="0"/>
-              </a:spcAft>
-            </a:pPr>
-            <a:r>
-              <a:rPr sz="900" b="0">
-                <a:solidFill>
-                  <a:srgbClr val="78838F"/>
-                </a:solidFill>
-                <a:latin typeface="Consolas"/>
-              </a:rPr>
-              <a:t>input still produces a delayed output.</a:t>
-            </a:r>
-          </a:p>
-        </p:txBody>
-      </p:sp>
-      <p:sp>
-        <p:nvSpPr>
-          <p:cNvPr id="33" name="TextBox 32"/>
+              <a:rPr sz="950" b="0">
+                <a:solidFill>
+                  <a:srgbClr val="A9611A"/>
+                </a:solidFill>
+                <a:latin typeface="Consolas"/>
+              </a:rPr>
+              <a:t>The tire is evaluated before the wheel speed is advanced, so it uses the value the state holds at the start of the step.</a:t>
+            </a:r>
+          </a:p>
+        </p:txBody>
+      </p:sp>
+      <p:sp>
+        <p:nvSpPr>
+          <p:cNvPr id="27" name="TextBox 26"/>
           <p:cNvSpPr txBox="1"/>
           <p:nvPr/>
         </p:nvSpPr>
         <p:spPr>
           <a:xfrm>
-            <a:off x="566928" y="4956048"/>
+            <a:off x="566928" y="5303520"/>
             <a:ext cx="11064240" cy="548640"/>
           </a:xfrm>
           <a:prstGeom prst="rect">
@@ -6581,36 +6271,73 @@
                 </a:solidFill>
                 <a:latin typeface="Consolas"/>
               </a:rPr>
-              <a:t>The delay is also REQUIRED: without it, w[k] = w[k-1] + (Ts/I)(Taxl[k] + f(w[k])) is implicit in w[k] — an algebraic loop</a:t>
-            </a:r>
-          </a:p>
-        </p:txBody>
-      </p:sp>
-      <p:sp>
-        <p:nvSpPr>
-          <p:cNvPr id="34" name="TextBox 33"/>
-          <p:cNvSpPr txBox="1"/>
-          <p:nvPr/>
-        </p:nvSpPr>
-        <p:spPr>
-          <a:xfrm>
-            <a:off x="566928" y="5175504"/>
-            <a:ext cx="11064240" cy="548640"/>
+              <a:t>That is what advancing an ODE state means. It is not a delay added by our bypass: CarMaker's own powertrain does the same thing.</a:t>
+            </a:r>
+          </a:p>
+        </p:txBody>
+      </p:sp>
+      <p:sp>
+        <p:nvSpPr>
+          <p:cNvPr id="28" name="Rectangle 27"/>
+          <p:cNvSpPr/>
+          <p:nvPr/>
+        </p:nvSpPr>
+        <p:spPr>
+          <a:xfrm>
+            <a:off x="566928" y="5577840"/>
+            <a:ext cx="3520440" cy="969264"/>
           </a:xfrm>
           <a:prstGeom prst="rect">
             <a:avLst/>
           </a:prstGeom>
           <a:noFill/>
-        </p:spPr>
-        <p:txBody>
-          <a:bodyPr wrap="square" lIns="0" rIns="0" tIns="0" bIns="0" anchor="t">
-            <a:spAutoFit/>
-          </a:bodyPr>
-          <a:lstStyle/>
-          <a:p>
-            <a:pPr algn="l">
-              <a:spcBef>
-                <a:spcPts val="0"/>
+          <a:ln w="15875">
+            <a:solidFill>
+              <a:srgbClr val="1B646D"/>
+            </a:solidFill>
+          </a:ln>
+          <a:effectLst/>
+        </p:spPr>
+        <p:style>
+          <a:lnRef idx="1">
+            <a:schemeClr val="accent1"/>
+          </a:lnRef>
+          <a:fillRef idx="3">
+            <a:schemeClr val="accent1"/>
+          </a:fillRef>
+          <a:effectRef idx="2">
+            <a:schemeClr val="accent1"/>
+          </a:effectRef>
+          <a:fontRef idx="minor">
+            <a:schemeClr val="lt1"/>
+          </a:fontRef>
+        </p:style>
+        <p:txBody>
+          <a:bodyPr rtlCol="0" anchor="t" wrap="square" tIns="54864" bIns="54864"/>
+          <a:lstStyle/>
+          <a:p>
+            <a:pPr algn="ctr">
+              <a:spcBef>
+                <a:spcPts val="0"/>
+              </a:spcBef>
+              <a:spcAft>
+                <a:spcPts val="0"/>
+              </a:spcAft>
+            </a:pPr>
+            <a:r>
+              <a:rPr sz="1300" b="1">
+                <a:solidFill>
+                  <a:srgbClr val="1B646D"/>
+                </a:solidFill>
+                <a:latin typeface="Bahnschrift"/>
+              </a:rPr>
+              <a:t>Two states advance here</a:t>
+            </a:r>
+          </a:p>
+          <a:p>
+            <a:pPr>
+              <a:spcBef>
+                <a:spcPts val="300"/>
               </a:spcBef>
               <a:spcAft>
                 <a:spcPts val="0"/>
@@ -6619,11 +6346,228 @@
             <a:r>
               <a:rPr sz="950" b="0">
                 <a:solidFill>
-                  <a:srgbClr val="78838F"/>
-                </a:solidFill>
-                <a:latin typeface="Consolas"/>
-              </a:rPr>
-              <a:t>needing iteration, which real-time code cannot do. Either the tire's relaxation states break the loop, or this scheduling delay does.</a:t>
+                  <a:srgbClr val="4A5764"/>
+                </a:solidFill>
+                <a:latin typeface="Consolas"/>
+              </a:rPr>
+              <a:t>Wheel speed at the PowerTrain slot,</a:t>
+            </a:r>
+          </a:p>
+          <a:p>
+            <a:pPr>
+              <a:spcBef>
+                <a:spcPts val="100"/>
+              </a:spcBef>
+              <a:spcAft>
+                <a:spcPts val="0"/>
+              </a:spcAft>
+            </a:pPr>
+            <a:r>
+              <a:rPr sz="950" b="0">
+                <a:solidFill>
+                  <a:srgbClr val="4A5764"/>
+                </a:solidFill>
+                <a:latin typeface="Consolas"/>
+              </a:rPr>
+              <a:t>chassis afterwards at Body Frame.</a:t>
+            </a:r>
+          </a:p>
+        </p:txBody>
+      </p:sp>
+      <p:sp>
+        <p:nvSpPr>
+          <p:cNvPr id="29" name="Rectangle 28"/>
+          <p:cNvSpPr/>
+          <p:nvPr/>
+        </p:nvSpPr>
+        <p:spPr>
+          <a:xfrm>
+            <a:off x="4315968" y="5577840"/>
+            <a:ext cx="3520440" cy="969264"/>
+          </a:xfrm>
+          <a:prstGeom prst="rect">
+            <a:avLst/>
+          </a:prstGeom>
+          <a:noFill/>
+          <a:ln w="15875">
+            <a:solidFill>
+              <a:srgbClr val="C7CED5"/>
+            </a:solidFill>
+          </a:ln>
+          <a:effectLst/>
+        </p:spPr>
+        <p:style>
+          <a:lnRef idx="1">
+            <a:schemeClr val="accent1"/>
+          </a:lnRef>
+          <a:fillRef idx="3">
+            <a:schemeClr val="accent1"/>
+          </a:fillRef>
+          <a:effectRef idx="2">
+            <a:schemeClr val="accent1"/>
+          </a:effectRef>
+          <a:fontRef idx="minor">
+            <a:schemeClr val="lt1"/>
+          </a:fontRef>
+        </p:style>
+        <p:txBody>
+          <a:bodyPr rtlCol="0" anchor="t" wrap="square" tIns="54864" bIns="54864"/>
+          <a:lstStyle/>
+          <a:p>
+            <a:pPr algn="ctr">
+              <a:spcBef>
+                <a:spcPts val="0"/>
+              </a:spcBef>
+              <a:spcAft>
+                <a:spcPts val="0"/>
+              </a:spcAft>
+            </a:pPr>
+            <a:r>
+              <a:rPr sz="1300" b="1">
+                <a:solidFill>
+                  <a:srgbClr val="111820"/>
+                </a:solidFill>
+                <a:latin typeface="Bahnschrift"/>
+              </a:rPr>
+              <a:t>Backward Euler</a:t>
+            </a:r>
+          </a:p>
+          <a:p>
+            <a:pPr>
+              <a:spcBef>
+                <a:spcPts val="300"/>
+              </a:spcBef>
+              <a:spcAft>
+                <a:spcPts val="0"/>
+              </a:spcAft>
+            </a:pPr>
+            <a:r>
+              <a:rPr sz="950" b="0">
+                <a:solidFill>
+                  <a:srgbClr val="4A5764"/>
+                </a:solidFill>
+                <a:latin typeface="Consolas"/>
+              </a:rPr>
+              <a:t>CarMaker's own solver; ours matches.</a:t>
+            </a:r>
+          </a:p>
+          <a:p>
+            <a:pPr>
+              <a:spcBef>
+                <a:spcPts val="100"/>
+              </a:spcBef>
+              <a:spcAft>
+                <a:spcPts val="0"/>
+              </a:spcAft>
+            </a:pPr>
+            <a:r>
+              <a:rPr sz="950" b="0">
+                <a:solidFill>
+                  <a:srgbClr val="4A5764"/>
+                </a:solidFill>
+                <a:latin typeface="Consolas"/>
+              </a:rPr>
+              <a:t>Single stage, so this runs once per step.</a:t>
+            </a:r>
+          </a:p>
+        </p:txBody>
+      </p:sp>
+      <p:sp>
+        <p:nvSpPr>
+          <p:cNvPr id="30" name="Rectangle 29"/>
+          <p:cNvSpPr/>
+          <p:nvPr/>
+        </p:nvSpPr>
+        <p:spPr>
+          <a:xfrm>
+            <a:off x="8065008" y="5577840"/>
+            <a:ext cx="3566160" cy="969264"/>
+          </a:xfrm>
+          <a:prstGeom prst="rect">
+            <a:avLst/>
+          </a:prstGeom>
+          <a:solidFill>
+            <a:srgbClr val="F3DED8"/>
+          </a:solidFill>
+          <a:ln w="19050">
+            <a:solidFill>
+              <a:srgbClr val="933723"/>
+            </a:solidFill>
+          </a:ln>
+          <a:effectLst/>
+        </p:spPr>
+        <p:style>
+          <a:lnRef idx="1">
+            <a:schemeClr val="accent1"/>
+          </a:lnRef>
+          <a:fillRef idx="3">
+            <a:schemeClr val="accent1"/>
+          </a:fillRef>
+          <a:effectRef idx="2">
+            <a:schemeClr val="accent1"/>
+          </a:effectRef>
+          <a:fontRef idx="minor">
+            <a:schemeClr val="lt1"/>
+          </a:fontRef>
+        </p:style>
+        <p:txBody>
+          <a:bodyPr rtlCol="0" anchor="t" wrap="square" tIns="54864" bIns="54864"/>
+          <a:lstStyle/>
+          <a:p>
+            <a:pPr algn="ctr">
+              <a:spcBef>
+                <a:spcPts val="0"/>
+              </a:spcBef>
+              <a:spcAft>
+                <a:spcPts val="0"/>
+              </a:spcAft>
+            </a:pPr>
+            <a:r>
+              <a:rPr sz="1300" b="1">
+                <a:solidFill>
+                  <a:srgbClr val="933723"/>
+                </a:solidFill>
+                <a:latin typeface="Bahnschrift"/>
+              </a:rPr>
+              <a:t>Do not add another step</a:t>
+            </a:r>
+          </a:p>
+          <a:p>
+            <a:pPr>
+              <a:spcBef>
+                <a:spcPts val="300"/>
+              </a:spcBef>
+              <a:spcAft>
+                <a:spcPts val="0"/>
+              </a:spcAft>
+            </a:pPr>
+            <a:r>
+              <a:rPr sz="950" b="0">
+                <a:solidFill>
+                  <a:srgbClr val="4A5764"/>
+                </a:solidFill>
+                <a:latin typeface="Consolas"/>
+              </a:rPr>
+              <a:t>A Memory block or rate transition on</a:t>
+            </a:r>
+          </a:p>
+          <a:p>
+            <a:pPr>
+              <a:spcBef>
+                <a:spcPts val="100"/>
+              </a:spcBef>
+              <a:spcAft>
+                <a:spcPts val="0"/>
+              </a:spcAft>
+            </a:pPr>
+            <a:r>
+              <a:rPr sz="950" b="0">
+                <a:solidFill>
+                  <a:srgbClr val="4A5764"/>
+                </a:solidFill>
+                <a:latin typeface="Consolas"/>
+              </a:rPr>
+              <a:t>Trq_T2W -&gt; integrator -&gt; rotv costs damping.</a:t>
             </a:r>
           </a:p>
         </p:txBody>
@@ -6719,7 +6663,7 @@
                 </a:solidFill>
                 <a:latin typeface="Consolas"/>
               </a:rPr>
-              <a:t>04 / 08</a:t>
+              <a:t>04 / 06</a:t>
             </a:r>
             <a:r>
               <a:rPr sz="900">
@@ -6728,7 +6672,7 @@
                 </a:solidFill>
                 <a:latin typeface="Consolas"/>
               </a:rPr>
-              <a:t>    TWO INTEGRATIONS</a:t>
+              <a:t>    HOW</a:t>
             </a:r>
           </a:p>
         </p:txBody>
@@ -6770,7 +6714,7 @@
                 </a:solidFill>
                 <a:latin typeface="Bahnschrift"/>
               </a:rPr>
-              <a:t>The wheel integration happens at the PowerTrain step, not after it</a:t>
+              <a:t>What the tire model does with the wheel speed</a:t>
             </a:r>
           </a:p>
         </p:txBody>
@@ -6812,7 +6756,7 @@
                 </a:solidFill>
                 <a:latin typeface="Segoe UI"/>
               </a:rPr>
-              <a:t>Two different integrations are easy to mix up. They run at different points and belong to different parties.</a:t>
+              <a:t>The bench supplies one quantity: the wheel rotational speed. Follow it down through the tire model to the torque that comes back.</a:t>
             </a:r>
           </a:p>
         </p:txBody>
@@ -6825,8 +6769,8 @@
         </p:nvSpPr>
         <p:spPr>
           <a:xfrm>
-            <a:off x="566928" y="1874520"/>
-            <a:ext cx="5394960" cy="1243584"/>
+            <a:off x="566928" y="1773936"/>
+            <a:ext cx="5074920" cy="786384"/>
           </a:xfrm>
           <a:prstGeom prst="rect">
             <a:avLst/>
@@ -6834,7 +6778,7 @@
           <a:solidFill>
             <a:srgbClr val="F2E4D3"/>
           </a:solidFill>
-          <a:ln w="19050">
+          <a:ln w="25400">
             <a:solidFill>
               <a:srgbClr val="A9611A"/>
             </a:solidFill>
@@ -6874,7 +6818,7 @@
                 </a:solidFill>
                 <a:latin typeface="Bahnschrift"/>
               </a:rPr>
-              <a:t>A · OURS — wheel spin  w</a:t>
+              <a:t>FROM THE BENCH</a:t>
             </a:r>
           </a:p>
           <a:p>
@@ -6893,7 +6837,7 @@
                 </a:solidFill>
                 <a:latin typeface="Consolas"/>
               </a:rPr>
-              <a:t>At the PowerTrain slot. CM natively does it in the</a:t>
+              <a:t>w[k-1]  -&gt;  Rim_rotv</a:t>
             </a:r>
           </a:p>
           <a:p>
@@ -6912,26 +6856,7 @@
                 </a:solidFill>
                 <a:latin typeface="Consolas"/>
               </a:rPr>
-              <a:t>DriveLine — “Integration of rotation speeds”, Fig 16.83.</a:t>
-            </a:r>
-          </a:p>
-          <a:p>
-            <a:pPr>
-              <a:spcBef>
-                <a:spcPts val="100"/>
-              </a:spcBef>
-              <a:spcAft>
-                <a:spcPts val="0"/>
-              </a:spcAft>
-            </a:pPr>
-            <a:r>
-              <a:rPr sz="950" b="0">
-                <a:solidFill>
-                  <a:srgbClr val="4A5764"/>
-                </a:solidFill>
-                <a:latin typeface="Consolas"/>
-              </a:rPr>
-              <a:t>In our build, our Simulink block IS this step.</a:t>
+              <a:t>the wheel rotational speed, and nothing else</a:t>
             </a:r>
           </a:p>
         </p:txBody>
@@ -6944,8 +6869,8 @@
         </p:nvSpPr>
         <p:spPr>
           <a:xfrm>
-            <a:off x="6236208" y="1874520"/>
-            <a:ext cx="5394960" cy="1243584"/>
+            <a:off x="6556248" y="1773936"/>
+            <a:ext cx="5074920" cy="786384"/>
           </a:xfrm>
           <a:prstGeom prst="rect">
             <a:avLst/>
@@ -6993,7 +6918,7 @@
                 </a:solidFill>
                 <a:latin typeface="Bahnschrift"/>
               </a:rPr>
-              <a:t>B · CARMAKER — body &amp; suspension</a:t>
+              <a:t>FROM CARMAKER'S BODY MODEL</a:t>
             </a:r>
           </a:p>
           <a:p>
@@ -7012,7 +6937,7 @@
                 </a:solidFill>
                 <a:latin typeface="Consolas"/>
               </a:rPr>
-              <a:t>At Body Frame, AFTER PowerTrain. Fig 1.23 brackets</a:t>
+              <a:t>P_v0_W · Fz · camber · muRoad</a:t>
             </a:r>
           </a:p>
           <a:p>
@@ -7031,48 +6956,168 @@
                 </a:solidFill>
                 <a:latin typeface="Consolas"/>
               </a:rPr>
-              <a:t>the whole vehicle-model evaluation as</a:t>
-            </a:r>
-          </a:p>
-          <a:p>
-            <a:pPr>
-              <a:spcBef>
-                <a:spcPts val="100"/>
-              </a:spcBef>
-              <a:spcAft>
-                <a:spcPts val="0"/>
-              </a:spcAft>
-            </a:pPr>
-            <a:r>
-              <a:rPr sz="950" b="0">
-                <a:solidFill>
-                  <a:srgbClr val="4A5764"/>
-                </a:solidFill>
-                <a:latin typeface="Consolas"/>
-              </a:rPr>
-              <a:t>“One integration step”.</a:t>
-            </a:r>
-          </a:p>
-        </p:txBody>
-      </p:sp>
-      <p:sp>
-        <p:nvSpPr>
-          <p:cNvPr id="8" name="Rectangle 7"/>
+              <a:t>contact-point velocity, load, friction</a:t>
+            </a:r>
+          </a:p>
+        </p:txBody>
+      </p:sp>
+      <p:cxnSp>
+        <p:nvCxnSpPr>
+          <p:cNvPr id="8" name="Connector 7"/>
+          <p:cNvCxnSpPr/>
+          <p:nvPr/>
+        </p:nvCxnSpPr>
+        <p:spPr>
+          <a:xfrm>
+            <a:off x="3108960" y="2560320"/>
+            <a:ext cx="0" cy="182880"/>
+          </a:xfrm>
+          <a:prstGeom prst="line">
+            <a:avLst/>
+          </a:prstGeom>
+          <a:ln w="31750">
+            <a:solidFill>
+              <a:srgbClr val="A9611A"/>
+            </a:solidFill>
+          </a:ln>
+        </p:spPr>
+        <p:style>
+          <a:lnRef idx="2">
+            <a:schemeClr val="accent1"/>
+          </a:lnRef>
+          <a:fillRef idx="0">
+            <a:schemeClr val="accent1"/>
+          </a:fillRef>
+          <a:effectRef idx="1">
+            <a:schemeClr val="accent1"/>
+          </a:effectRef>
+          <a:fontRef idx="minor">
+            <a:schemeClr val="tx1"/>
+          </a:fontRef>
+        </p:style>
+      </p:cxnSp>
+      <p:cxnSp>
+        <p:nvCxnSpPr>
+          <p:cNvPr id="9" name="Connector 8"/>
+          <p:cNvCxnSpPr/>
+          <p:nvPr/>
+        </p:nvCxnSpPr>
+        <p:spPr>
+          <a:xfrm>
+            <a:off x="9098280" y="2560320"/>
+            <a:ext cx="0" cy="182880"/>
+          </a:xfrm>
+          <a:prstGeom prst="line">
+            <a:avLst/>
+          </a:prstGeom>
+          <a:ln w="25400">
+            <a:solidFill>
+              <a:srgbClr val="1B646D"/>
+            </a:solidFill>
+          </a:ln>
+        </p:spPr>
+        <p:style>
+          <a:lnRef idx="2">
+            <a:schemeClr val="accent1"/>
+          </a:lnRef>
+          <a:fillRef idx="0">
+            <a:schemeClr val="accent1"/>
+          </a:fillRef>
+          <a:effectRef idx="1">
+            <a:schemeClr val="accent1"/>
+          </a:effectRef>
+          <a:fontRef idx="minor">
+            <a:schemeClr val="tx1"/>
+          </a:fontRef>
+        </p:style>
+      </p:cxnSp>
+      <p:cxnSp>
+        <p:nvCxnSpPr>
+          <p:cNvPr id="10" name="Connector 9"/>
+          <p:cNvCxnSpPr/>
+          <p:nvPr/>
+        </p:nvCxnSpPr>
+        <p:spPr>
+          <a:xfrm>
+            <a:off x="3108960" y="2743200"/>
+            <a:ext cx="5989320" cy="0"/>
+          </a:xfrm>
+          <a:prstGeom prst="line">
+            <a:avLst/>
+          </a:prstGeom>
+          <a:ln w="25400">
+            <a:solidFill>
+              <a:srgbClr val="C7CED5"/>
+            </a:solidFill>
+          </a:ln>
+        </p:spPr>
+        <p:style>
+          <a:lnRef idx="2">
+            <a:schemeClr val="accent1"/>
+          </a:lnRef>
+          <a:fillRef idx="0">
+            <a:schemeClr val="accent1"/>
+          </a:fillRef>
+          <a:effectRef idx="1">
+            <a:schemeClr val="accent1"/>
+          </a:effectRef>
+          <a:fontRef idx="minor">
+            <a:schemeClr val="tx1"/>
+          </a:fontRef>
+        </p:style>
+      </p:cxnSp>
+      <p:cxnSp>
+        <p:nvCxnSpPr>
+          <p:cNvPr id="11" name="Connector 10"/>
+          <p:cNvCxnSpPr/>
+          <p:nvPr/>
+        </p:nvCxnSpPr>
+        <p:spPr>
+          <a:xfrm>
+            <a:off x="6099048" y="2743200"/>
+            <a:ext cx="0" cy="182880"/>
+          </a:xfrm>
+          <a:prstGeom prst="line">
+            <a:avLst/>
+          </a:prstGeom>
+          <a:ln w="31750">
+            <a:solidFill>
+              <a:srgbClr val="C7CED5"/>
+            </a:solidFill>
+            <a:tailEnd type="triangle" w="med" len="med"/>
+          </a:ln>
+        </p:spPr>
+        <p:style>
+          <a:lnRef idx="2">
+            <a:schemeClr val="accent1"/>
+          </a:lnRef>
+          <a:fillRef idx="0">
+            <a:schemeClr val="accent1"/>
+          </a:fillRef>
+          <a:effectRef idx="1">
+            <a:schemeClr val="accent1"/>
+          </a:effectRef>
+          <a:fontRef idx="minor">
+            <a:schemeClr val="tx1"/>
+          </a:fontRef>
+        </p:style>
+      </p:cxnSp>
+      <p:sp>
+        <p:nvSpPr>
+          <p:cNvPr id="12" name="Rectangle 11"/>
           <p:cNvSpPr/>
           <p:nvPr/>
         </p:nvSpPr>
         <p:spPr>
           <a:xfrm>
-            <a:off x="566928" y="3310128"/>
-            <a:ext cx="11064240" cy="1225296"/>
+            <a:off x="566928" y="2980944"/>
+            <a:ext cx="11064240" cy="822960"/>
           </a:xfrm>
           <a:prstGeom prst="rect">
             <a:avLst/>
           </a:prstGeom>
-          <a:solidFill>
-            <a:srgbClr val="F4F6F7"/>
-          </a:solidFill>
-          <a:ln w="12700">
+          <a:noFill/>
+          <a:ln w="19050">
             <a:solidFill>
               <a:srgbClr val="C7CED5"/>
             </a:solidFill>
@@ -7094,25 +7139,45 @@
           </a:fontRef>
         </p:style>
         <p:txBody>
-          <a:bodyPr rtlCol="0" anchor="t" wrap="square" tIns="91440" bIns="54864" lIns="146304"/>
-          <a:lstStyle/>
-          <a:p>
-            <a:pPr algn="ctr">
-              <a:spcBef>
-                <a:spcPts val="0"/>
-              </a:spcBef>
-              <a:spcAft>
-                <a:spcPts val="0"/>
-              </a:spcAft>
-            </a:pPr>
-            <a:r>
-              <a:rPr sz="1100" b="0">
-                <a:solidFill>
-                  <a:srgbClr val="4A5764"/>
-                </a:solidFill>
-                <a:latin typeface="Consolas"/>
-              </a:rPr>
-              <a:t>Tire         reads  Rim_rotv = w[k-1],  emits Trq_T2W[k]      (memoryless map)</a:t>
+          <a:bodyPr rtlCol="0" anchor="t" wrap="square" tIns="54864" bIns="54864"/>
+          <a:lstStyle/>
+          <a:p>
+            <a:pPr algn="ctr"/>
+            <a:r>
+              <a:rPr sz="1050" b="1">
+                <a:solidFill>
+                  <a:srgbClr val="111820"/>
+                </a:solidFill>
+                <a:latin typeface="Consolas"/>
+              </a:rPr>
+              <a:t>1   SLIP        </a:t>
+            </a:r>
+            <a:r>
+              <a:rPr sz="1000" b="1">
+                <a:solidFill>
+                  <a:srgbClr val="A9611A"/>
+                </a:solidFill>
+                <a:latin typeface="Consolas"/>
+              </a:rPr>
+              <a:t>longitudinal   </a:t>
+            </a:r>
+            <a:r>
+              <a:rPr sz="1000" b="0">
+                <a:solidFill>
+                  <a:srgbClr val="111820"/>
+                </a:solidFill>
+                <a:latin typeface="Consolas"/>
+              </a:rPr>
+              <a:t>s = ( w · rBelt_eff - vx ) / |…|      </a:t>
+            </a:r>
+            <a:r>
+              <a:rPr sz="900" b="0">
+                <a:solidFill>
+                  <a:srgbClr val="A9611A"/>
+                </a:solidFill>
+                <a:latin typeface="Consolas"/>
+              </a:rPr>
+              <a:t>&lt;- the bench sets this</a:t>
             </a:r>
           </a:p>
           <a:p>
@@ -7120,78 +7185,112 @@
               <a:spcBef>
                 <a:spcPts val="200"/>
               </a:spcBef>
-              <a:spcAft>
-                <a:spcPts val="0"/>
-              </a:spcAft>
-            </a:pPr>
-            <a:r>
-              <a:rPr sz="1100" b="0">
-                <a:solidFill>
-                  <a:srgbClr val="4A5764"/>
-                </a:solidFill>
-                <a:latin typeface="Consolas"/>
-              </a:rPr>
-              <a:t>Brake</a:t>
+            </a:pPr>
+            <a:r>
+              <a:rPr sz="1000" b="1">
+                <a:solidFill>
+                  <a:srgbClr val="1B646D"/>
+                </a:solidFill>
+                <a:latin typeface="Consolas"/>
+              </a:rPr>
+              <a:t>                lateral        </a:t>
+            </a:r>
+            <a:r>
+              <a:rPr sz="1000" b="0">
+                <a:solidFill>
+                  <a:srgbClr val="111820"/>
+                </a:solidFill>
+                <a:latin typeface="Consolas"/>
+              </a:rPr>
+              <a:t>alpha = atan( vy / |vx| )             </a:t>
+            </a:r>
+            <a:r>
+              <a:rPr sz="900" b="0">
+                <a:solidFill>
+                  <a:srgbClr val="1B646D"/>
+                </a:solidFill>
+                <a:latin typeface="Consolas"/>
+              </a:rPr>
+              <a:t>&lt;- steering and body yaw</a:t>
             </a:r>
           </a:p>
           <a:p>
             <a:pPr>
               <a:spcBef>
-                <a:spcPts val="200"/>
-              </a:spcBef>
-              <a:spcAft>
-                <a:spcPts val="0"/>
-              </a:spcAft>
-            </a:pPr>
-            <a:r>
-              <a:rPr sz="1100" b="1">
-                <a:solidFill>
-                  <a:srgbClr val="A9611A"/>
-                </a:solidFill>
-                <a:latin typeface="Consolas"/>
-              </a:rPr>
-              <a:t>PowerTrain   INTEGRATION A:  w[k] = w[k-1] + (Ts/I)(Taxl[k] + Trq_T2W[k])</a:t>
-            </a:r>
-          </a:p>
-          <a:p>
-            <a:pPr>
-              <a:spcBef>
-                <a:spcPts val="200"/>
-              </a:spcBef>
-              <a:spcAft>
-                <a:spcPts val="0"/>
-              </a:spcAft>
-            </a:pPr>
-            <a:r>
-              <a:rPr sz="1100" b="1">
-                <a:solidFill>
-                  <a:srgbClr val="1B646D"/>
-                </a:solidFill>
-                <a:latin typeface="Consolas"/>
-              </a:rPr>
-              <a:t>Body Frame   INTEGRATION B:  advances chassis / suspension states</a:t>
-            </a:r>
-          </a:p>
-        </p:txBody>
-      </p:sp>
-      <p:sp>
-        <p:nvSpPr>
-          <p:cNvPr id="9" name="Rectangle 8"/>
-          <p:cNvSpPr/>
-          <p:nvPr/>
-        </p:nvSpPr>
-        <p:spPr>
-          <a:xfrm>
-            <a:off x="566928" y="4736592"/>
-            <a:ext cx="5394960" cy="1243584"/>
-          </a:xfrm>
-          <a:prstGeom prst="rect">
-            <a:avLst/>
-          </a:prstGeom>
-          <a:noFill/>
-          <a:ln w="15875">
+                <a:spcPts val="300"/>
+              </a:spcBef>
+              <a:spcAft>
+                <a:spcPts val="0"/>
+              </a:spcAft>
+            </a:pPr>
+            <a:r>
+              <a:rPr sz="900" b="0">
+                <a:solidFill>
+                  <a:srgbClr val="78838F"/>
+                </a:solidFill>
+                <a:latin typeface="Consolas"/>
+              </a:rPr>
+              <a:t>Both come from one contact-point velocity vector, split into its two components.</a:t>
+            </a:r>
+          </a:p>
+        </p:txBody>
+      </p:sp>
+      <p:cxnSp>
+        <p:nvCxnSpPr>
+          <p:cNvPr id="13" name="Connector 12"/>
+          <p:cNvCxnSpPr/>
+          <p:nvPr/>
+        </p:nvCxnSpPr>
+        <p:spPr>
+          <a:xfrm>
+            <a:off x="6099048" y="3803904"/>
+            <a:ext cx="0" cy="164592"/>
+          </a:xfrm>
+          <a:prstGeom prst="line">
+            <a:avLst/>
+          </a:prstGeom>
+          <a:ln w="31750">
             <a:solidFill>
               <a:srgbClr val="C7CED5"/>
+            </a:solidFill>
+            <a:tailEnd type="triangle" w="med" len="med"/>
+          </a:ln>
+        </p:spPr>
+        <p:style>
+          <a:lnRef idx="2">
+            <a:schemeClr val="accent1"/>
+          </a:lnRef>
+          <a:fillRef idx="0">
+            <a:schemeClr val="accent1"/>
+          </a:fillRef>
+          <a:effectRef idx="1">
+            <a:schemeClr val="accent1"/>
+          </a:effectRef>
+          <a:fontRef idx="minor">
+            <a:schemeClr val="tx1"/>
+          </a:fontRef>
+        </p:style>
+      </p:cxnSp>
+      <p:sp>
+        <p:nvSpPr>
+          <p:cNvPr id="14" name="Rectangle 13"/>
+          <p:cNvSpPr/>
+          <p:nvPr/>
+        </p:nvSpPr>
+        <p:spPr>
+          <a:xfrm>
+            <a:off x="566928" y="4023360"/>
+            <a:ext cx="11064240" cy="694944"/>
+          </a:xfrm>
+          <a:prstGeom prst="rect">
+            <a:avLst/>
+          </a:prstGeom>
+          <a:solidFill>
+            <a:srgbClr val="F2E4D3"/>
+          </a:solidFill>
+          <a:ln w="25400">
+            <a:solidFill>
+              <a:srgbClr val="A9611A"/>
             </a:solidFill>
           </a:ln>
           <a:effectLst/>
@@ -7214,22 +7313,33 @@
           <a:bodyPr rtlCol="0" anchor="t" wrap="square" tIns="54864" bIns="54864"/>
           <a:lstStyle/>
           <a:p>
-            <a:pPr algn="ctr">
-              <a:spcBef>
-                <a:spcPts val="0"/>
-              </a:spcBef>
-              <a:spcAft>
-                <a:spcPts val="0"/>
-              </a:spcAft>
-            </a:pPr>
-            <a:r>
-              <a:rPr sz="1300" b="1">
+            <a:pPr algn="ctr"/>
+            <a:r>
+              <a:rPr sz="1050" b="1">
+                <a:solidFill>
+                  <a:srgbClr val="A9611A"/>
+                </a:solidFill>
+                <a:latin typeface="Consolas"/>
+              </a:rPr>
+              <a:t>2   RELAXATION  </a:t>
+            </a:r>
+            <a:r>
+              <a:rPr sz="1000" b="0">
                 <a:solidFill>
                   <a:srgbClr val="111820"/>
                 </a:solidFill>
-                <a:latin typeface="Bahnschrift"/>
-              </a:rPr>
-              <a:t>CM's solver is Backward Euler</a:t>
+                <a:latin typeface="Consolas"/>
+              </a:rPr>
+              <a:t>tau = sigma / vx    sigma ~ 0.05 m      </a:t>
+            </a:r>
+            <a:r>
+              <a:rPr sz="900" b="0">
+                <a:solidFill>
+                  <a:srgbClr val="A9611A"/>
+                </a:solidFill>
+                <a:latin typeface="Consolas"/>
+              </a:rPr>
+              <a:t>the tire's only ODE states</a:t>
             </a:r>
           </a:p>
           <a:p>
@@ -7242,73 +7352,222 @@
               </a:spcAft>
             </a:pPr>
             <a:r>
-              <a:rPr sz="950" b="0">
-                <a:solidFill>
-                  <a:srgbClr val="4A5764"/>
-                </a:solidFill>
-                <a:latin typeface="Consolas"/>
-              </a:rPr>
-              <a:t>“Since the solver used in CarMaker is backwards-euler,</a:t>
+              <a:rPr sz="900" b="0">
+                <a:solidFill>
+                  <a:srgbClr val="78838F"/>
+                </a:solidFill>
+                <a:latin typeface="Consolas"/>
+              </a:rPr>
+              <a:t>The carcass takes a rolling distance to build force, so slip is low-passed before it becomes force. Everything else here is algebraic.</a:t>
+            </a:r>
+          </a:p>
+        </p:txBody>
+      </p:sp>
+      <p:cxnSp>
+        <p:nvCxnSpPr>
+          <p:cNvPr id="15" name="Connector 14"/>
+          <p:cNvCxnSpPr/>
+          <p:nvPr/>
+        </p:nvCxnSpPr>
+        <p:spPr>
+          <a:xfrm>
+            <a:off x="6099048" y="4718304"/>
+            <a:ext cx="0" cy="164592"/>
+          </a:xfrm>
+          <a:prstGeom prst="line">
+            <a:avLst/>
+          </a:prstGeom>
+          <a:ln w="31750">
+            <a:solidFill>
+              <a:srgbClr val="C7CED5"/>
+            </a:solidFill>
+            <a:tailEnd type="triangle" w="med" len="med"/>
+          </a:ln>
+        </p:spPr>
+        <p:style>
+          <a:lnRef idx="2">
+            <a:schemeClr val="accent1"/>
+          </a:lnRef>
+          <a:fillRef idx="0">
+            <a:schemeClr val="accent1"/>
+          </a:fillRef>
+          <a:effectRef idx="1">
+            <a:schemeClr val="accent1"/>
+          </a:effectRef>
+          <a:fontRef idx="minor">
+            <a:schemeClr val="tx1"/>
+          </a:fontRef>
+        </p:style>
+      </p:cxnSp>
+      <p:sp>
+        <p:nvSpPr>
+          <p:cNvPr id="16" name="Rectangle 15"/>
+          <p:cNvSpPr/>
+          <p:nvPr/>
+        </p:nvSpPr>
+        <p:spPr>
+          <a:xfrm>
+            <a:off x="566928" y="4937760"/>
+            <a:ext cx="11064240" cy="822960"/>
+          </a:xfrm>
+          <a:prstGeom prst="rect">
+            <a:avLst/>
+          </a:prstGeom>
+          <a:solidFill>
+            <a:srgbClr val="D9E9EA"/>
+          </a:solidFill>
+          <a:ln w="25400">
+            <a:solidFill>
+              <a:srgbClr val="1B646D"/>
+            </a:solidFill>
+          </a:ln>
+          <a:effectLst/>
+        </p:spPr>
+        <p:style>
+          <a:lnRef idx="1">
+            <a:schemeClr val="accent1"/>
+          </a:lnRef>
+          <a:fillRef idx="3">
+            <a:schemeClr val="accent1"/>
+          </a:fillRef>
+          <a:effectRef idx="2">
+            <a:schemeClr val="accent1"/>
+          </a:effectRef>
+          <a:fontRef idx="minor">
+            <a:schemeClr val="lt1"/>
+          </a:fontRef>
+        </p:style>
+        <p:txBody>
+          <a:bodyPr rtlCol="0" anchor="t" wrap="square" tIns="54864" bIns="54864"/>
+          <a:lstStyle/>
+          <a:p>
+            <a:pPr algn="ctr"/>
+            <a:r>
+              <a:rPr sz="1050" b="1">
+                <a:solidFill>
+                  <a:srgbClr val="1B646D"/>
+                </a:solidFill>
+                <a:latin typeface="Consolas"/>
+              </a:rPr>
+              <a:t>3   FORCES      </a:t>
+            </a:r>
+            <a:r>
+              <a:rPr sz="1000" b="0">
+                <a:solidFill>
+                  <a:srgbClr val="111820"/>
+                </a:solidFill>
+                <a:latin typeface="Consolas"/>
+              </a:rPr>
+              <a:t>Fx = Gx(alpha) · Fx0(s)      </a:t>
+            </a:r>
+            <a:r>
+              <a:rPr sz="900" b="0">
+                <a:solidFill>
+                  <a:srgbClr val="78838F"/>
+                </a:solidFill>
+                <a:latin typeface="Consolas"/>
+              </a:rPr>
+              <a:t>longitudinal force, reduced by cornering</a:t>
             </a:r>
           </a:p>
           <a:p>
             <a:pPr>
               <a:spcBef>
-                <a:spcPts val="100"/>
-              </a:spcBef>
-              <a:spcAft>
-                <a:spcPts val="0"/>
-              </a:spcAft>
-            </a:pPr>
-            <a:r>
-              <a:rPr sz="950" b="0">
-                <a:solidFill>
-                  <a:srgbClr val="4A5764"/>
-                </a:solidFill>
-                <a:latin typeface="Consolas"/>
-              </a:rPr>
-              <a:t>the user needs to choose this option.”  Our K*Ts*z/(z-1)</a:t>
+                <a:spcPts val="200"/>
+              </a:spcBef>
+            </a:pPr>
+            <a:r>
+              <a:rPr sz="1000" b="0">
+                <a:solidFill>
+                  <a:srgbClr val="111820"/>
+                </a:solidFill>
+                <a:latin typeface="Consolas"/>
+              </a:rPr>
+              <a:t>                Fy = Gy(s)     · Fy0(alpha)  </a:t>
+            </a:r>
+            <a:r>
+              <a:rPr sz="900" b="0">
+                <a:solidFill>
+                  <a:srgbClr val="78838F"/>
+                </a:solidFill>
+                <a:latin typeface="Consolas"/>
+              </a:rPr>
+              <a:t>lateral force, reduced by driving or braking</a:t>
             </a:r>
           </a:p>
           <a:p>
             <a:pPr>
               <a:spcBef>
-                <a:spcPts val="100"/>
-              </a:spcBef>
-              <a:spcAft>
-                <a:spcPts val="0"/>
-              </a:spcAft>
-            </a:pPr>
-            <a:r>
-              <a:rPr sz="950" b="0">
-                <a:solidFill>
-                  <a:srgbClr val="4A5764"/>
-                </a:solidFill>
-                <a:latin typeface="Consolas"/>
-              </a:rPr>
-              <a:t>matches CM's own solver, not just IPG's reference model.</a:t>
-            </a:r>
-          </a:p>
-        </p:txBody>
-      </p:sp>
-      <p:sp>
-        <p:nvSpPr>
-          <p:cNvPr id="10" name="Rectangle 9"/>
+                <a:spcPts val="300"/>
+              </a:spcBef>
+              <a:spcAft>
+                <a:spcPts val="0"/>
+              </a:spcAft>
+            </a:pPr>
+            <a:r>
+              <a:rPr sz="900" b="0">
+                <a:solidFill>
+                  <a:srgbClr val="78838F"/>
+                </a:solidFill>
+                <a:latin typeface="Consolas"/>
+              </a:rPr>
+              <a:t>Gx and Gy are the friction ellipse: one contact patch, one friction budget, so the two directions take from each other.</a:t>
+            </a:r>
+          </a:p>
+        </p:txBody>
+      </p:sp>
+      <p:cxnSp>
+        <p:nvCxnSpPr>
+          <p:cNvPr id="17" name="Connector 16"/>
+          <p:cNvCxnSpPr/>
+          <p:nvPr/>
+        </p:nvCxnSpPr>
+        <p:spPr>
+          <a:xfrm>
+            <a:off x="6099048" y="5760720"/>
+            <a:ext cx="0" cy="164592"/>
+          </a:xfrm>
+          <a:prstGeom prst="line">
+            <a:avLst/>
+          </a:prstGeom>
+          <a:ln w="31750">
+            <a:solidFill>
+              <a:srgbClr val="C7CED5"/>
+            </a:solidFill>
+            <a:tailEnd type="triangle" w="med" len="med"/>
+          </a:ln>
+        </p:spPr>
+        <p:style>
+          <a:lnRef idx="2">
+            <a:schemeClr val="accent1"/>
+          </a:lnRef>
+          <a:fillRef idx="0">
+            <a:schemeClr val="accent1"/>
+          </a:fillRef>
+          <a:effectRef idx="1">
+            <a:schemeClr val="accent1"/>
+          </a:effectRef>
+          <a:fontRef idx="minor">
+            <a:schemeClr val="tx1"/>
+          </a:fontRef>
+        </p:style>
+      </p:cxnSp>
+      <p:sp>
+        <p:nvSpPr>
+          <p:cNvPr id="18" name="Rectangle 17"/>
           <p:cNvSpPr/>
           <p:nvPr/>
         </p:nvSpPr>
         <p:spPr>
           <a:xfrm>
-            <a:off x="6236208" y="4736592"/>
-            <a:ext cx="5394960" cy="1243584"/>
+            <a:off x="566928" y="5980176"/>
+            <a:ext cx="11064240" cy="402336"/>
           </a:xfrm>
           <a:prstGeom prst="rect">
             <a:avLst/>
           </a:prstGeom>
-          <a:solidFill>
-            <a:srgbClr val="F3DED8"/>
-          </a:solidFill>
-          <a:ln w="19050">
+          <a:noFill/>
+          <a:ln w="31750">
             <a:solidFill>
               <a:srgbClr val="933723"/>
             </a:solidFill>
@@ -7330,82 +7589,36 @@
           </a:fontRef>
         </p:style>
         <p:txBody>
-          <a:bodyPr rtlCol="0" anchor="t" wrap="square" tIns="54864" bIns="54864"/>
-          <a:lstStyle/>
-          <a:p>
-            <a:pPr algn="ctr">
-              <a:spcBef>
-                <a:spcPts val="0"/>
-              </a:spcBef>
-              <a:spcAft>
-                <a:spcPts val="0"/>
-              </a:spcAft>
-            </a:pPr>
-            <a:r>
-              <a:rPr sz="1300" b="1">
+          <a:bodyPr rtlCol="0" anchor="ctr" wrap="square" tIns="54864" bIns="54864"/>
+          <a:lstStyle/>
+          <a:p>
+            <a:pPr algn="ctr"/>
+            <a:r>
+              <a:rPr sz="1050" b="1">
                 <a:solidFill>
                   <a:srgbClr val="933723"/>
                 </a:solidFill>
-                <a:latin typeface="Bahnschrift"/>
-              </a:rPr>
-              <a:t>THE ONE RULE — add no further delay</a:t>
-            </a:r>
-          </a:p>
-          <a:p>
-            <a:pPr>
-              <a:spcBef>
-                <a:spcPts val="300"/>
-              </a:spcBef>
-              <a:spcAft>
-                <a:spcPts val="0"/>
-              </a:spcAft>
-            </a:pPr>
-            <a:r>
-              <a:rPr sz="950" b="0">
-                <a:solidFill>
-                  <a:srgbClr val="4A5764"/>
-                </a:solidFill>
-                <a:latin typeface="Consolas"/>
-              </a:rPr>
-              <a:t>The ordering supplies exactly one step, free. Any Memory,</a:t>
-            </a:r>
-          </a:p>
-          <a:p>
-            <a:pPr>
-              <a:spcBef>
-                <a:spcPts val="100"/>
-              </a:spcBef>
-              <a:spcAft>
-                <a:spcPts val="0"/>
-              </a:spcAft>
-            </a:pPr>
-            <a:r>
-              <a:rPr sz="950" b="0">
-                <a:solidFill>
-                  <a:srgbClr val="4A5764"/>
-                </a:solidFill>
-                <a:latin typeface="Consolas"/>
-              </a:rPr>
-              <a:t>Unit Delay or rate transition on Trq_T2W → integrator →</a:t>
-            </a:r>
-          </a:p>
-          <a:p>
-            <a:pPr>
-              <a:spcBef>
-                <a:spcPts val="100"/>
-              </a:spcBef>
-              <a:spcAft>
-                <a:spcPts val="0"/>
-              </a:spcAft>
-            </a:pPr>
-            <a:r>
-              <a:rPr sz="950" b="0">
-                <a:solidFill>
-                  <a:srgbClr val="4A5764"/>
-                </a:solidFill>
-                <a:latin typeface="Consolas"/>
-              </a:rPr>
-              <a:t>rotv makes d = 2, costing a further dzeta ~ 0.14.</a:t>
+                <a:latin typeface="Consolas"/>
+              </a:rPr>
+              <a:t>4   SPIN-AXIS TORQUE   </a:t>
+            </a:r>
+            <a:r>
+              <a:rPr sz="1000" b="0">
+                <a:solidFill>
+                  <a:srgbClr val="111820"/>
+                </a:solidFill>
+                <a:latin typeface="Consolas"/>
+              </a:rPr>
+              <a:t>Trq_T2W = -r · Fx  +  rolling resistance      </a:t>
+            </a:r>
+            <a:r>
+              <a:rPr sz="900" b="1">
+                <a:solidFill>
+                  <a:srgbClr val="933723"/>
+                </a:solidFill>
+                <a:latin typeface="Consolas"/>
+              </a:rPr>
+              <a:t>-&gt; back to our integrator</a:t>
             </a:r>
           </a:p>
         </p:txBody>
@@ -7501,7 +7714,7 @@
                 </a:solidFill>
                 <a:latin typeface="Consolas"/>
               </a:rPr>
-              <a:t>05 / 08</a:t>
+              <a:t>05 / 06</a:t>
             </a:r>
             <a:r>
               <a:rPr sz="900">
@@ -7510,7 +7723,7 @@
                 </a:solidFill>
                 <a:latin typeface="Consolas"/>
               </a:rPr>
-              <a:t>    INSIDE THE TIRE</a:t>
+              <a:t>    WHAT CAN GO WRONG</a:t>
             </a:r>
           </a:p>
         </p:txBody>
@@ -7552,7 +7765,7 @@
                 </a:solidFill>
                 <a:latin typeface="Bahnschrift"/>
               </a:rPr>
-              <a:t>The tire has almost no state, and the one exception matters</a:t>
+              <a:t>The wheel can oscillate against the tire</a:t>
             </a:r>
           </a:p>
         </p:txBody>
@@ -7565,8 +7778,8 @@
         </p:nvSpPr>
         <p:spPr>
           <a:xfrm>
-            <a:off x="566928" y="1828800"/>
-            <a:ext cx="2377440" cy="274320"/>
+            <a:off x="566928" y="1243584"/>
+            <a:ext cx="10424160" cy="457200"/>
           </a:xfrm>
           <a:prstGeom prst="rect">
             <a:avLst/>
@@ -7588,13 +7801,13 @@
               </a:spcAft>
             </a:pPr>
             <a:r>
-              <a:rPr sz="1300" b="1">
-                <a:solidFill>
-                  <a:srgbClr val="1B646D"/>
-                </a:solidFill>
-                <a:latin typeface="Bahnschrift"/>
-              </a:rPr>
-              <a:t>INPUTS</a:t>
+              <a:rPr sz="1250" b="0">
+                <a:solidFill>
+                  <a:srgbClr val="4A5764"/>
+                </a:solidFill>
+                <a:latin typeface="Segoe UI"/>
+              </a:rPr>
+              <a:t>The wheel has inertia. The tire sits between it and the road and acts like a spring. That is an oscillator, and it exists on any real vehicle.</a:t>
             </a:r>
           </a:p>
         </p:txBody>
@@ -7607,8 +7820,8 @@
         </p:nvSpPr>
         <p:spPr>
           <a:xfrm>
-            <a:off x="566928" y="2157984"/>
-            <a:ext cx="2743200" cy="219456"/>
+            <a:off x="566928" y="1792224"/>
+            <a:ext cx="3657600" cy="237744"/>
           </a:xfrm>
           <a:prstGeom prst="rect">
             <a:avLst/>
@@ -7630,287 +7843,35 @@
               </a:spcAft>
             </a:pPr>
             <a:r>
-              <a:rPr sz="1000" b="0">
+              <a:rPr sz="1300" b="1">
                 <a:solidFill>
                   <a:srgbClr val="111820"/>
                 </a:solidFill>
-                <a:latin typeface="Consolas"/>
-              </a:rPr>
-              <a:t>P_v0_W[0..2]</a:t>
-            </a:r>
-          </a:p>
-        </p:txBody>
-      </p:sp>
-      <p:sp>
-        <p:nvSpPr>
-          <p:cNvPr id="7" name="TextBox 6"/>
-          <p:cNvSpPr txBox="1"/>
-          <p:nvPr/>
-        </p:nvSpPr>
-        <p:spPr>
-          <a:xfrm>
-            <a:off x="566928" y="2414016"/>
-            <a:ext cx="2743200" cy="219456"/>
-          </a:xfrm>
-          <a:prstGeom prst="rect">
+                <a:latin typeface="Bahnschrift"/>
+              </a:rPr>
+              <a:t>WHAT OSCILLATES</a:t>
+            </a:r>
+          </a:p>
+        </p:txBody>
+      </p:sp>
+      <p:sp>
+        <p:nvSpPr>
+          <p:cNvPr id="7" name="Donut 6"/>
+          <p:cNvSpPr/>
+          <p:nvPr/>
+        </p:nvSpPr>
+        <p:spPr>
+          <a:xfrm>
+            <a:off x="822960" y="2139696"/>
+            <a:ext cx="1371600" cy="1371600"/>
+          </a:xfrm>
+          <a:prstGeom prst="donut">
             <a:avLst/>
           </a:prstGeom>
           <a:noFill/>
-        </p:spPr>
-        <p:txBody>
-          <a:bodyPr wrap="square" lIns="0" rIns="0" tIns="0" bIns="0" anchor="t">
-            <a:spAutoFit/>
-          </a:bodyPr>
-          <a:lstStyle/>
-          <a:p>
-            <a:pPr algn="l">
-              <a:spcBef>
-                <a:spcPts val="0"/>
-              </a:spcBef>
-              <a:spcAft>
-                <a:spcPts val="0"/>
-              </a:spcAft>
-            </a:pPr>
-            <a:r>
-              <a:rPr sz="1000" b="1">
-                <a:solidFill>
-                  <a:srgbClr val="A9611A"/>
-                </a:solidFill>
-                <a:latin typeface="Consolas"/>
-              </a:rPr>
-              <a:t>Rim_rotv   ← our w[k-1]</a:t>
-            </a:r>
-          </a:p>
-        </p:txBody>
-      </p:sp>
-      <p:sp>
-        <p:nvSpPr>
-          <p:cNvPr id="8" name="TextBox 7"/>
-          <p:cNvSpPr txBox="1"/>
-          <p:nvPr/>
-        </p:nvSpPr>
-        <p:spPr>
-          <a:xfrm>
-            <a:off x="566928" y="2670048"/>
-            <a:ext cx="2743200" cy="219456"/>
-          </a:xfrm>
-          <a:prstGeom prst="rect">
-            <a:avLst/>
-          </a:prstGeom>
-          <a:noFill/>
-        </p:spPr>
-        <p:txBody>
-          <a:bodyPr wrap="square" lIns="0" rIns="0" tIns="0" bIns="0" anchor="t">
-            <a:spAutoFit/>
-          </a:bodyPr>
-          <a:lstStyle/>
-          <a:p>
-            <a:pPr algn="l">
-              <a:spcBef>
-                <a:spcPts val="0"/>
-              </a:spcBef>
-              <a:spcAft>
-                <a:spcPts val="0"/>
-              </a:spcAft>
-            </a:pPr>
-            <a:r>
-              <a:rPr sz="1000" b="0">
-                <a:solidFill>
-                  <a:srgbClr val="111820"/>
-                </a:solidFill>
-                <a:latin typeface="Consolas"/>
-              </a:rPr>
-              <a:t>Frc_W[2] = Fz</a:t>
-            </a:r>
-          </a:p>
-        </p:txBody>
-      </p:sp>
-      <p:sp>
-        <p:nvSpPr>
-          <p:cNvPr id="9" name="TextBox 8"/>
-          <p:cNvSpPr txBox="1"/>
-          <p:nvPr/>
-        </p:nvSpPr>
-        <p:spPr>
-          <a:xfrm>
-            <a:off x="566928" y="2926080"/>
-            <a:ext cx="2743200" cy="219456"/>
-          </a:xfrm>
-          <a:prstGeom prst="rect">
-            <a:avLst/>
-          </a:prstGeom>
-          <a:noFill/>
-        </p:spPr>
-        <p:txBody>
-          <a:bodyPr wrap="square" lIns="0" rIns="0" tIns="0" bIns="0" anchor="t">
-            <a:spAutoFit/>
-          </a:bodyPr>
-          <a:lstStyle/>
-          <a:p>
-            <a:pPr algn="l">
-              <a:spcBef>
-                <a:spcPts val="0"/>
-              </a:spcBef>
-              <a:spcAft>
-                <a:spcPts val="0"/>
-              </a:spcAft>
-            </a:pPr>
-            <a:r>
-              <a:rPr sz="1000" b="0">
-                <a:solidFill>
-                  <a:srgbClr val="111820"/>
-                </a:solidFill>
-                <a:latin typeface="Consolas"/>
-              </a:rPr>
-              <a:t>InclinAngle</a:t>
-            </a:r>
-          </a:p>
-        </p:txBody>
-      </p:sp>
-      <p:sp>
-        <p:nvSpPr>
-          <p:cNvPr id="10" name="TextBox 9"/>
-          <p:cNvSpPr txBox="1"/>
-          <p:nvPr/>
-        </p:nvSpPr>
-        <p:spPr>
-          <a:xfrm>
-            <a:off x="566928" y="3182112"/>
-            <a:ext cx="2743200" cy="219456"/>
-          </a:xfrm>
-          <a:prstGeom prst="rect">
-            <a:avLst/>
-          </a:prstGeom>
-          <a:noFill/>
-        </p:spPr>
-        <p:txBody>
-          <a:bodyPr wrap="square" lIns="0" rIns="0" tIns="0" bIns="0" anchor="t">
-            <a:spAutoFit/>
-          </a:bodyPr>
-          <a:lstStyle/>
-          <a:p>
-            <a:pPr algn="l">
-              <a:spcBef>
-                <a:spcPts val="0"/>
-              </a:spcBef>
-              <a:spcAft>
-                <a:spcPts val="0"/>
-              </a:spcAft>
-            </a:pPr>
-            <a:r>
-              <a:rPr sz="1000" b="0">
-                <a:solidFill>
-                  <a:srgbClr val="111820"/>
-                </a:solidFill>
-                <a:latin typeface="Consolas"/>
-              </a:rPr>
-              <a:t>muRoad</a:t>
-            </a:r>
-          </a:p>
-        </p:txBody>
-      </p:sp>
-      <p:sp>
-        <p:nvSpPr>
-          <p:cNvPr id="11" name="TextBox 10"/>
-          <p:cNvSpPr txBox="1"/>
-          <p:nvPr/>
-        </p:nvSpPr>
-        <p:spPr>
-          <a:xfrm>
-            <a:off x="566928" y="3438144"/>
-            <a:ext cx="2743200" cy="219456"/>
-          </a:xfrm>
-          <a:prstGeom prst="rect">
-            <a:avLst/>
-          </a:prstGeom>
-          <a:noFill/>
-        </p:spPr>
-        <p:txBody>
-          <a:bodyPr wrap="square" lIns="0" rIns="0" tIns="0" bIns="0" anchor="t">
-            <a:spAutoFit/>
-          </a:bodyPr>
-          <a:lstStyle/>
-          <a:p>
-            <a:pPr algn="l">
-              <a:spcBef>
-                <a:spcPts val="0"/>
-              </a:spcBef>
-              <a:spcAft>
-                <a:spcPts val="0"/>
-              </a:spcAft>
-            </a:pPr>
-            <a:r>
-              <a:rPr sz="1000" b="0">
-                <a:solidFill>
-                  <a:srgbClr val="111820"/>
-                </a:solidFill>
-                <a:latin typeface="Consolas"/>
-              </a:rPr>
-              <a:t>Rim_turnv</a:t>
-            </a:r>
-          </a:p>
-        </p:txBody>
-      </p:sp>
-      <p:sp>
-        <p:nvSpPr>
-          <p:cNvPr id="12" name="TextBox 11"/>
-          <p:cNvSpPr txBox="1"/>
-          <p:nvPr/>
-        </p:nvSpPr>
-        <p:spPr>
-          <a:xfrm>
-            <a:off x="566928" y="3822192"/>
-            <a:ext cx="2834640" cy="219456"/>
-          </a:xfrm>
-          <a:prstGeom prst="rect">
-            <a:avLst/>
-          </a:prstGeom>
-          <a:noFill/>
-        </p:spPr>
-        <p:txBody>
-          <a:bodyPr wrap="square" lIns="0" rIns="0" tIns="0" bIns="0" anchor="t">
-            <a:spAutoFit/>
-          </a:bodyPr>
-          <a:lstStyle/>
-          <a:p>
-            <a:pPr algn="l">
-              <a:spcBef>
-                <a:spcPts val="0"/>
-              </a:spcBef>
-              <a:spcAft>
-                <a:spcPts val="0"/>
-              </a:spcAft>
-            </a:pPr>
-            <a:r>
-              <a:rPr sz="950" b="1">
-                <a:solidFill>
-                  <a:srgbClr val="933723"/>
-                </a:solidFill>
-                <a:latin typeface="Consolas"/>
-              </a:rPr>
-              <a:t>no torque input exists</a:t>
-            </a:r>
-          </a:p>
-        </p:txBody>
-      </p:sp>
-      <p:sp>
-        <p:nvSpPr>
-          <p:cNvPr id="13" name="Rectangle 12"/>
-          <p:cNvSpPr/>
-          <p:nvPr/>
-        </p:nvSpPr>
-        <p:spPr>
-          <a:xfrm>
-            <a:off x="3749040" y="1828800"/>
-            <a:ext cx="4846320" cy="658368"/>
-          </a:xfrm>
-          <a:prstGeom prst="rect">
-            <a:avLst/>
-          </a:prstGeom>
-          <a:noFill/>
-          <a:ln w="15875">
+          <a:ln w="31750">
             <a:solidFill>
-              <a:srgbClr val="C7CED5"/>
+              <a:srgbClr val="111820"/>
             </a:solidFill>
           </a:ln>
           <a:effectLst/>
@@ -7930,7 +7891,33 @@
           </a:fontRef>
         </p:style>
         <p:txBody>
-          <a:bodyPr rtlCol="0" anchor="t" wrap="square" tIns="54864" bIns="54864"/>
+          <a:bodyPr rtlCol="0" anchor="ctr"/>
+          <a:lstStyle/>
+          <a:p>
+            <a:pPr algn="ctr"/>
+          </a:p>
+        </p:txBody>
+      </p:sp>
+      <p:sp>
+        <p:nvSpPr>
+          <p:cNvPr id="8" name="TextBox 7"/>
+          <p:cNvSpPr txBox="1"/>
+          <p:nvPr/>
+        </p:nvSpPr>
+        <p:spPr>
+          <a:xfrm>
+            <a:off x="1280160" y="2724912"/>
+            <a:ext cx="457200" cy="237744"/>
+          </a:xfrm>
+          <a:prstGeom prst="rect">
+            <a:avLst/>
+          </a:prstGeom>
+          <a:noFill/>
+        </p:spPr>
+        <p:txBody>
+          <a:bodyPr wrap="square" lIns="0" rIns="0" tIns="0" bIns="0" anchor="t">
+            <a:spAutoFit/>
+          </a:bodyPr>
           <a:lstStyle/>
           <a:p>
             <a:pPr algn="ctr">
@@ -7942,232 +7929,93 @@
               </a:spcAft>
             </a:pPr>
             <a:r>
-              <a:rPr sz="950" b="1">
-                <a:solidFill>
-                  <a:srgbClr val="78838F"/>
-                </a:solidFill>
-                <a:latin typeface="Consolas"/>
-              </a:rPr>
-              <a:t>1 · kinematics → slip  — algebraic</a:t>
+              <a:rPr sz="1300" b="1">
+                <a:solidFill>
+                  <a:srgbClr val="111820"/>
+                </a:solidFill>
+                <a:latin typeface="Consolas"/>
+              </a:rPr>
+              <a:t>I</a:t>
+            </a:r>
+          </a:p>
+        </p:txBody>
+      </p:sp>
+      <p:sp>
+        <p:nvSpPr>
+          <p:cNvPr id="9" name="TextBox 8"/>
+          <p:cNvSpPr txBox="1"/>
+          <p:nvPr/>
+        </p:nvSpPr>
+        <p:spPr>
+          <a:xfrm>
+            <a:off x="658368" y="3584448"/>
+            <a:ext cx="1828800" cy="219456"/>
+          </a:xfrm>
+          <a:prstGeom prst="rect">
+            <a:avLst/>
+          </a:prstGeom>
+          <a:noFill/>
+        </p:spPr>
+        <p:txBody>
+          <a:bodyPr wrap="square" lIns="0" rIns="0" tIns="0" bIns="0" anchor="t">
+            <a:spAutoFit/>
+          </a:bodyPr>
+          <a:lstStyle/>
+          <a:p>
+            <a:pPr algn="l">
+              <a:spcBef>
+                <a:spcPts val="0"/>
+              </a:spcBef>
+              <a:spcAft>
+                <a:spcPts val="0"/>
+              </a:spcAft>
+            </a:pPr>
+            <a:r>
+              <a:rPr sz="900" b="0">
+                <a:solidFill>
+                  <a:srgbClr val="A9611A"/>
+                </a:solidFill>
+                <a:latin typeface="Consolas"/>
+              </a:rPr>
+              <a:t>wheel rocks back</a:t>
             </a:r>
           </a:p>
           <a:p>
             <a:pPr>
               <a:spcBef>
-                <a:spcPts val="200"/>
-              </a:spcBef>
-              <a:spcAft>
-                <a:spcPts val="0"/>
-              </a:spcAft>
-            </a:pPr>
-            <a:r>
-              <a:rPr sz="950" b="0">
-                <a:solidFill>
-                  <a:srgbClr val="4A5764"/>
-                </a:solidFill>
-                <a:latin typeface="Consolas"/>
-              </a:rPr>
-              <a:t>s = (Rim_rotv*rBelt_eff - vx) / |…|      alpha = atan(vy/|vx|)</a:t>
-            </a:r>
-          </a:p>
-        </p:txBody>
-      </p:sp>
-      <p:sp>
-        <p:nvSpPr>
-          <p:cNvPr id="14" name="Rectangle 13"/>
+                <a:spcPts val="0"/>
+              </a:spcBef>
+              <a:spcAft>
+                <a:spcPts val="0"/>
+              </a:spcAft>
+            </a:pPr>
+            <a:r>
+              <a:rPr sz="900" b="0">
+                <a:solidFill>
+                  <a:srgbClr val="A9611A"/>
+                </a:solidFill>
+                <a:latin typeface="Consolas"/>
+              </a:rPr>
+              <a:t>and forth</a:t>
+            </a:r>
+          </a:p>
+        </p:txBody>
+      </p:sp>
+      <p:sp>
+        <p:nvSpPr>
+          <p:cNvPr id="10" name="Lightning Bolt 9"/>
           <p:cNvSpPr/>
           <p:nvPr/>
         </p:nvSpPr>
         <p:spPr>
           <a:xfrm>
-            <a:off x="3749040" y="2615184"/>
-            <a:ext cx="4846320" cy="786384"/>
-          </a:xfrm>
-          <a:prstGeom prst="rect">
-            <a:avLst/>
-          </a:prstGeom>
-          <a:solidFill>
-            <a:srgbClr val="F2E4D3"/>
-          </a:solidFill>
-          <a:ln w="25400">
-            <a:solidFill>
-              <a:srgbClr val="A9611A"/>
-            </a:solidFill>
-          </a:ln>
-          <a:effectLst/>
-        </p:spPr>
-        <p:style>
-          <a:lnRef idx="1">
-            <a:schemeClr val="accent1"/>
-          </a:lnRef>
-          <a:fillRef idx="3">
-            <a:schemeClr val="accent1"/>
-          </a:fillRef>
-          <a:effectRef idx="2">
-            <a:schemeClr val="accent1"/>
-          </a:effectRef>
-          <a:fontRef idx="minor">
-            <a:schemeClr val="lt1"/>
-          </a:fontRef>
-        </p:style>
-        <p:txBody>
-          <a:bodyPr rtlCol="0" anchor="t" wrap="square" tIns="54864" bIns="54864"/>
-          <a:lstStyle/>
-          <a:p>
-            <a:pPr algn="ctr">
-              <a:spcBef>
-                <a:spcPts val="0"/>
-              </a:spcBef>
-              <a:spcAft>
-                <a:spcPts val="0"/>
-              </a:spcAft>
-            </a:pPr>
-            <a:r>
-              <a:rPr sz="950" b="1">
-                <a:solidFill>
-                  <a:srgbClr val="A9611A"/>
-                </a:solidFill>
-                <a:latin typeface="Consolas"/>
-              </a:rPr>
-              <a:t>1.5 · RELAXATION — THE ONLY STATE</a:t>
-            </a:r>
-          </a:p>
-          <a:p>
-            <a:pPr>
-              <a:spcBef>
-                <a:spcPts val="200"/>
-              </a:spcBef>
-              <a:spcAft>
-                <a:spcPts val="0"/>
-              </a:spcAft>
-            </a:pPr>
-            <a:r>
-              <a:rPr sz="950" b="0">
-                <a:solidFill>
-                  <a:srgbClr val="4A5764"/>
-                </a:solidFill>
-                <a:latin typeface="Consolas"/>
-              </a:rPr>
-              <a:t>du/dt, dv/dt  (EQ 383-384)    tau = sigma / |Vcx|</a:t>
-            </a:r>
-          </a:p>
-          <a:p>
-            <a:pPr>
-              <a:spcBef>
-                <a:spcPts val="200"/>
-              </a:spcBef>
-              <a:spcAft>
-                <a:spcPts val="0"/>
-              </a:spcAft>
-            </a:pPr>
-            <a:r>
-              <a:rPr sz="950" b="0">
-                <a:solidFill>
-                  <a:srgbClr val="4A5764"/>
-                </a:solidFill>
-                <a:latin typeface="Consolas"/>
-              </a:rPr>
-              <a:t>2-3 states per wheel · only if USE_MODE &gt;= +10</a:t>
-            </a:r>
-          </a:p>
-        </p:txBody>
-      </p:sp>
-      <p:sp>
-        <p:nvSpPr>
-          <p:cNvPr id="15" name="Rectangle 14"/>
-          <p:cNvSpPr/>
-          <p:nvPr/>
-        </p:nvSpPr>
-        <p:spPr>
-          <a:xfrm>
-            <a:off x="3749040" y="3529584"/>
-            <a:ext cx="4846320" cy="566928"/>
-          </a:xfrm>
-          <a:prstGeom prst="rect">
+            <a:off x="2304288" y="2651760"/>
+            <a:ext cx="1097280" cy="365760"/>
+          </a:xfrm>
+          <a:prstGeom prst="lightningBolt">
             <a:avLst/>
           </a:prstGeom>
           <a:noFill/>
-          <a:ln w="15875">
-            <a:solidFill>
-              <a:srgbClr val="C7CED5"/>
-            </a:solidFill>
-          </a:ln>
-          <a:effectLst/>
-        </p:spPr>
-        <p:style>
-          <a:lnRef idx="1">
-            <a:schemeClr val="accent1"/>
-          </a:lnRef>
-          <a:fillRef idx="3">
-            <a:schemeClr val="accent1"/>
-          </a:fillRef>
-          <a:effectRef idx="2">
-            <a:schemeClr val="accent1"/>
-          </a:effectRef>
-          <a:fontRef idx="minor">
-            <a:schemeClr val="lt1"/>
-          </a:fontRef>
-        </p:style>
-        <p:txBody>
-          <a:bodyPr rtlCol="0" anchor="t" wrap="square" tIns="54864" bIns="54864"/>
-          <a:lstStyle/>
-          <a:p>
-            <a:pPr algn="ctr">
-              <a:spcBef>
-                <a:spcPts val="0"/>
-              </a:spcBef>
-              <a:spcAft>
-                <a:spcPts val="0"/>
-              </a:spcAft>
-            </a:pPr>
-            <a:r>
-              <a:rPr sz="950" b="1">
-                <a:solidFill>
-                  <a:srgbClr val="78838F"/>
-                </a:solidFill>
-                <a:latin typeface="Consolas"/>
-              </a:rPr>
-              <a:t>2 · pure-slip forces — algebraic</a:t>
-            </a:r>
-          </a:p>
-          <a:p>
-            <a:pPr>
-              <a:spcBef>
-                <a:spcPts val="200"/>
-              </a:spcBef>
-              <a:spcAft>
-                <a:spcPts val="0"/>
-              </a:spcAft>
-            </a:pPr>
-            <a:r>
-              <a:rPr sz="950" b="0">
-                <a:solidFill>
-                  <a:srgbClr val="4A5764"/>
-                </a:solidFill>
-                <a:latin typeface="Consolas"/>
-              </a:rPr>
-              <a:t>Fx0(s)        Fy0(alpha)</a:t>
-            </a:r>
-          </a:p>
-        </p:txBody>
-      </p:sp>
-      <p:sp>
-        <p:nvSpPr>
-          <p:cNvPr id="16" name="Rectangle 15"/>
-          <p:cNvSpPr/>
-          <p:nvPr/>
-        </p:nvSpPr>
-        <p:spPr>
-          <a:xfrm>
-            <a:off x="3749040" y="4206240"/>
-            <a:ext cx="4846320" cy="786384"/>
-          </a:xfrm>
-          <a:prstGeom prst="rect">
-            <a:avLst/>
-          </a:prstGeom>
-          <a:solidFill>
-            <a:srgbClr val="D9E9EA"/>
-          </a:solidFill>
           <a:ln w="25400">
             <a:solidFill>
               <a:srgbClr val="1B646D"/>
@@ -8190,31 +8038,218 @@
           </a:fontRef>
         </p:style>
         <p:txBody>
-          <a:bodyPr rtlCol="0" anchor="t" wrap="square" tIns="54864" bIns="54864"/>
-          <a:lstStyle/>
-          <a:p>
-            <a:pPr algn="ctr">
-              <a:spcBef>
-                <a:spcPts val="0"/>
-              </a:spcBef>
-              <a:spcAft>
-                <a:spcPts val="0"/>
-              </a:spcAft>
-            </a:pPr>
-            <a:r>
-              <a:rPr sz="950" b="1">
+          <a:bodyPr rtlCol="0" anchor="ctr"/>
+          <a:lstStyle/>
+          <a:p>
+            <a:pPr algn="ctr"/>
+          </a:p>
+        </p:txBody>
+      </p:sp>
+      <p:sp>
+        <p:nvSpPr>
+          <p:cNvPr id="11" name="TextBox 10"/>
+          <p:cNvSpPr txBox="1"/>
+          <p:nvPr/>
+        </p:nvSpPr>
+        <p:spPr>
+          <a:xfrm>
+            <a:off x="2249424" y="2340864"/>
+            <a:ext cx="1463040" cy="219456"/>
+          </a:xfrm>
+          <a:prstGeom prst="rect">
+            <a:avLst/>
+          </a:prstGeom>
+          <a:noFill/>
+        </p:spPr>
+        <p:txBody>
+          <a:bodyPr wrap="square" lIns="0" rIns="0" tIns="0" bIns="0" anchor="t">
+            <a:spAutoFit/>
+          </a:bodyPr>
+          <a:lstStyle/>
+          <a:p>
+            <a:pPr algn="l">
+              <a:spcBef>
+                <a:spcPts val="0"/>
+              </a:spcBef>
+              <a:spcAft>
+                <a:spcPts val="0"/>
+              </a:spcAft>
+            </a:pPr>
+            <a:r>
+              <a:rPr sz="900" b="0">
                 <a:solidFill>
                   <a:srgbClr val="1B646D"/>
                 </a:solidFill>
                 <a:latin typeface="Consolas"/>
               </a:rPr>
-              <a:t>3 · COMBINED SLIP — algebraic</a:t>
+              <a:t>tire carcass</a:t>
+            </a:r>
+          </a:p>
+        </p:txBody>
+      </p:sp>
+      <p:sp>
+        <p:nvSpPr>
+          <p:cNvPr id="12" name="TextBox 11"/>
+          <p:cNvSpPr txBox="1"/>
+          <p:nvPr/>
+        </p:nvSpPr>
+        <p:spPr>
+          <a:xfrm>
+            <a:off x="2249424" y="3072384"/>
+            <a:ext cx="1554480" cy="219456"/>
+          </a:xfrm>
+          <a:prstGeom prst="rect">
+            <a:avLst/>
+          </a:prstGeom>
+          <a:noFill/>
+        </p:spPr>
+        <p:txBody>
+          <a:bodyPr wrap="square" lIns="0" rIns="0" tIns="0" bIns="0" anchor="t">
+            <a:spAutoFit/>
+          </a:bodyPr>
+          <a:lstStyle/>
+          <a:p>
+            <a:pPr algn="l">
+              <a:spcBef>
+                <a:spcPts val="0"/>
+              </a:spcBef>
+              <a:spcAft>
+                <a:spcPts val="0"/>
+              </a:spcAft>
+            </a:pPr>
+            <a:r>
+              <a:rPr sz="900" b="0">
+                <a:solidFill>
+                  <a:srgbClr val="1B646D"/>
+                </a:solidFill>
+                <a:latin typeface="Consolas"/>
+              </a:rPr>
+              <a:t>acts as a spring</a:t>
+            </a:r>
+          </a:p>
+        </p:txBody>
+      </p:sp>
+      <p:cxnSp>
+        <p:nvCxnSpPr>
+          <p:cNvPr id="13" name="Connector 12"/>
+          <p:cNvCxnSpPr/>
+          <p:nvPr/>
+        </p:nvCxnSpPr>
+        <p:spPr>
+          <a:xfrm>
+            <a:off x="3584448" y="2432304"/>
+            <a:ext cx="0" cy="841248"/>
+          </a:xfrm>
+          <a:prstGeom prst="line">
+            <a:avLst/>
+          </a:prstGeom>
+          <a:ln w="38100">
+            <a:solidFill>
+              <a:srgbClr val="111820"/>
+            </a:solidFill>
+          </a:ln>
+        </p:spPr>
+        <p:style>
+          <a:lnRef idx="2">
+            <a:schemeClr val="accent1"/>
+          </a:lnRef>
+          <a:fillRef idx="0">
+            <a:schemeClr val="accent1"/>
+          </a:fillRef>
+          <a:effectRef idx="1">
+            <a:schemeClr val="accent1"/>
+          </a:effectRef>
+          <a:fontRef idx="minor">
+            <a:schemeClr val="tx1"/>
+          </a:fontRef>
+        </p:style>
+      </p:cxnSp>
+      <p:sp>
+        <p:nvSpPr>
+          <p:cNvPr id="14" name="TextBox 13"/>
+          <p:cNvSpPr txBox="1"/>
+          <p:nvPr/>
+        </p:nvSpPr>
+        <p:spPr>
+          <a:xfrm>
+            <a:off x="3675888" y="2724912"/>
+            <a:ext cx="731520" cy="219456"/>
+          </a:xfrm>
+          <a:prstGeom prst="rect">
+            <a:avLst/>
+          </a:prstGeom>
+          <a:noFill/>
+        </p:spPr>
+        <p:txBody>
+          <a:bodyPr wrap="square" lIns="0" rIns="0" tIns="0" bIns="0" anchor="t">
+            <a:spAutoFit/>
+          </a:bodyPr>
+          <a:lstStyle/>
+          <a:p>
+            <a:pPr algn="l">
+              <a:spcBef>
+                <a:spcPts val="0"/>
+              </a:spcBef>
+              <a:spcAft>
+                <a:spcPts val="0"/>
+              </a:spcAft>
+            </a:pPr>
+            <a:r>
+              <a:rPr sz="900" b="0">
+                <a:solidFill>
+                  <a:srgbClr val="78838F"/>
+                </a:solidFill>
+                <a:latin typeface="Consolas"/>
+              </a:rPr>
+              <a:t>road</a:t>
+            </a:r>
+          </a:p>
+        </p:txBody>
+      </p:sp>
+      <p:sp>
+        <p:nvSpPr>
+          <p:cNvPr id="15" name="TextBox 14"/>
+          <p:cNvSpPr txBox="1"/>
+          <p:nvPr/>
+        </p:nvSpPr>
+        <p:spPr>
+          <a:xfrm>
+            <a:off x="566928" y="3968496"/>
+            <a:ext cx="4206240" cy="1005840"/>
+          </a:xfrm>
+          <a:prstGeom prst="rect">
+            <a:avLst/>
+          </a:prstGeom>
+          <a:noFill/>
+        </p:spPr>
+        <p:txBody>
+          <a:bodyPr wrap="square" lIns="0" rIns="0" tIns="0" bIns="0" anchor="t">
+            <a:spAutoFit/>
+          </a:bodyPr>
+          <a:lstStyle/>
+          <a:p>
+            <a:pPr algn="l">
+              <a:spcBef>
+                <a:spcPts val="0"/>
+              </a:spcBef>
+              <a:spcAft>
+                <a:spcPts val="0"/>
+              </a:spcAft>
+            </a:pPr>
+            <a:r>
+              <a:rPr sz="950" b="0">
+                <a:solidFill>
+                  <a:srgbClr val="4A5764"/>
+                </a:solidFill>
+                <a:latin typeface="Consolas"/>
+              </a:rPr>
+              <a:t>The carcass has to flex before it can pass</a:t>
             </a:r>
           </a:p>
           <a:p>
             <a:pPr>
               <a:spcBef>
-                <a:spcPts val="200"/>
+                <a:spcPts val="0"/>
               </a:spcBef>
               <a:spcAft>
                 <a:spcPts val="0"/>
@@ -8227,13 +8262,13 @@
                 </a:solidFill>
                 <a:latin typeface="Consolas"/>
               </a:rPr>
-              <a:t>Fx = Gx(alpha) * Fx0(s)      EQ 352</a:t>
+              <a:t>force to the road. CarMaker gives that flex a</a:t>
             </a:r>
           </a:p>
           <a:p>
             <a:pPr>
               <a:spcBef>
-                <a:spcPts val="200"/>
+                <a:spcPts val="0"/>
               </a:spcBef>
               <a:spcAft>
                 <a:spcPts val="0"/>
@@ -8246,100 +8281,94 @@
                 </a:solidFill>
                 <a:latin typeface="Consolas"/>
               </a:rPr>
-              <a:t>Fy = Gy(s)     * Fy0(alpha)  EQ 360</a:t>
-            </a:r>
-          </a:p>
-        </p:txBody>
-      </p:sp>
-      <p:sp>
-        <p:nvSpPr>
-          <p:cNvPr id="17" name="Rectangle 16"/>
-          <p:cNvSpPr/>
-          <p:nvPr/>
-        </p:nvSpPr>
-        <p:spPr>
-          <a:xfrm>
-            <a:off x="3749040" y="5120640"/>
-            <a:ext cx="4846320" cy="621792"/>
-          </a:xfrm>
-          <a:prstGeom prst="rect">
-            <a:avLst/>
-          </a:prstGeom>
-          <a:noFill/>
-          <a:ln w="15875">
+              <a:t>length: about 5 cm of rolling. A compliance is</a:t>
+            </a:r>
+          </a:p>
+          <a:p>
+            <a:pPr>
+              <a:spcBef>
+                <a:spcPts val="0"/>
+              </a:spcBef>
+              <a:spcAft>
+                <a:spcPts val="0"/>
+              </a:spcAft>
+            </a:pPr>
+            <a:r>
+              <a:rPr sz="950" b="0">
+                <a:solidFill>
+                  <a:srgbClr val="4A5764"/>
+                </a:solidFill>
+                <a:latin typeface="Consolas"/>
+              </a:rPr>
+              <a:t>a spring, and a spring against the wheel</a:t>
+            </a:r>
+          </a:p>
+          <a:p>
+            <a:pPr>
+              <a:spcBef>
+                <a:spcPts val="0"/>
+              </a:spcBef>
+              <a:spcAft>
+                <a:spcPts val="0"/>
+              </a:spcAft>
+            </a:pPr>
+            <a:r>
+              <a:rPr sz="950" b="0">
+                <a:solidFill>
+                  <a:srgbClr val="4A5764"/>
+                </a:solidFill>
+                <a:latin typeface="Consolas"/>
+              </a:rPr>
+              <a:t>inertia is an oscillator.</a:t>
+            </a:r>
+          </a:p>
+        </p:txBody>
+      </p:sp>
+      <p:cxnSp>
+        <p:nvCxnSpPr>
+          <p:cNvPr id="16" name="Connector 15"/>
+          <p:cNvCxnSpPr/>
+          <p:nvPr/>
+        </p:nvCxnSpPr>
+        <p:spPr>
+          <a:xfrm>
+            <a:off x="5029200" y="1737360"/>
+            <a:ext cx="0" cy="3383280"/>
+          </a:xfrm>
+          <a:prstGeom prst="line">
+            <a:avLst/>
+          </a:prstGeom>
+          <a:ln w="12700">
             <a:solidFill>
               <a:srgbClr val="C7CED5"/>
             </a:solidFill>
           </a:ln>
-          <a:effectLst/>
         </p:spPr>
         <p:style>
-          <a:lnRef idx="1">
+          <a:lnRef idx="2">
             <a:schemeClr val="accent1"/>
           </a:lnRef>
-          <a:fillRef idx="3">
+          <a:fillRef idx="0">
             <a:schemeClr val="accent1"/>
           </a:fillRef>
-          <a:effectRef idx="2">
+          <a:effectRef idx="1">
             <a:schemeClr val="accent1"/>
           </a:effectRef>
           <a:fontRef idx="minor">
-            <a:schemeClr val="lt1"/>
+            <a:schemeClr val="tx1"/>
           </a:fontRef>
         </p:style>
-        <p:txBody>
-          <a:bodyPr rtlCol="0" anchor="t" wrap="square" tIns="54864" bIns="54864"/>
-          <a:lstStyle/>
-          <a:p>
-            <a:pPr algn="ctr">
-              <a:spcBef>
-                <a:spcPts val="0"/>
-              </a:spcBef>
-              <a:spcAft>
-                <a:spcPts val="0"/>
-              </a:spcAft>
-            </a:pPr>
-            <a:r>
-              <a:rPr sz="950" b="1">
-                <a:solidFill>
-                  <a:srgbClr val="78838F"/>
-                </a:solidFill>
-                <a:latin typeface="Consolas"/>
-              </a:rPr>
-              <a:t>4 · spin-axis moment — algebraic</a:t>
-            </a:r>
-          </a:p>
-          <a:p>
-            <a:pPr>
-              <a:spcBef>
-                <a:spcPts val="200"/>
-              </a:spcBef>
-              <a:spcAft>
-                <a:spcPts val="0"/>
-              </a:spcAft>
-            </a:pPr>
-            <a:r>
-              <a:rPr sz="950" b="0">
-                <a:solidFill>
-                  <a:srgbClr val="4A5764"/>
-                </a:solidFill>
-                <a:latin typeface="Consolas"/>
-              </a:rPr>
-              <a:t>Trq_T2W  !=  -r*Fx   —  also carries TrqRR (SAE J2452)</a:t>
-            </a:r>
-          </a:p>
-        </p:txBody>
-      </p:sp>
-      <p:sp>
-        <p:nvSpPr>
-          <p:cNvPr id="18" name="TextBox 17"/>
+      </p:cxnSp>
+      <p:sp>
+        <p:nvSpPr>
+          <p:cNvPr id="17" name="TextBox 16"/>
           <p:cNvSpPr txBox="1"/>
           <p:nvPr/>
         </p:nvSpPr>
         <p:spPr>
           <a:xfrm>
-            <a:off x="9006840" y="1828800"/>
-            <a:ext cx="2743200" cy="274320"/>
+            <a:off x="5303520" y="1792224"/>
+            <a:ext cx="6309360" cy="237744"/>
           </a:xfrm>
           <a:prstGeom prst="rect">
             <a:avLst/>
@@ -8363,25 +8392,25 @@
             <a:r>
               <a:rPr sz="1300" b="1">
                 <a:solidFill>
-                  <a:srgbClr val="1B646D"/>
+                  <a:srgbClr val="111820"/>
                 </a:solidFill>
                 <a:latin typeface="Bahnschrift"/>
               </a:rPr>
-              <a:t>OUTPUTS</a:t>
-            </a:r>
-          </a:p>
-        </p:txBody>
-      </p:sp>
-      <p:sp>
-        <p:nvSpPr>
-          <p:cNvPr id="19" name="TextBox 18"/>
+              <a:t>WHERE THE DAMPING COMES FROM</a:t>
+            </a:r>
+          </a:p>
+        </p:txBody>
+      </p:sp>
+      <p:sp>
+        <p:nvSpPr>
+          <p:cNvPr id="18" name="TextBox 17"/>
           <p:cNvSpPr txBox="1"/>
           <p:nvPr/>
         </p:nvSpPr>
         <p:spPr>
           <a:xfrm>
-            <a:off x="9006840" y="2157984"/>
-            <a:ext cx="2743200" cy="219456"/>
+            <a:off x="5303520" y="2084832"/>
+            <a:ext cx="6309360" cy="822960"/>
           </a:xfrm>
           <a:prstGeom prst="rect">
             <a:avLst/>
@@ -8403,27 +8432,84 @@
               </a:spcAft>
             </a:pPr>
             <a:r>
-              <a:rPr sz="1000" b="0">
-                <a:solidFill>
-                  <a:srgbClr val="111820"/>
-                </a:solidFill>
-                <a:latin typeface="Consolas"/>
-              </a:rPr>
-              <a:t>Slp   Alpha</a:t>
-            </a:r>
-          </a:p>
-        </p:txBody>
-      </p:sp>
-      <p:sp>
-        <p:nvSpPr>
-          <p:cNvPr id="20" name="TextBox 19"/>
+              <a:rPr sz="950" b="0">
+                <a:solidFill>
+                  <a:srgbClr val="4A5764"/>
+                </a:solidFill>
+                <a:latin typeface="Consolas"/>
+              </a:rPr>
+              <a:t>As the tire rolls it continuously lays down fresh rubber and renews its grip.</a:t>
+            </a:r>
+          </a:p>
+          <a:p>
+            <a:pPr>
+              <a:spcBef>
+                <a:spcPts val="0"/>
+              </a:spcBef>
+              <a:spcAft>
+                <a:spcPts val="0"/>
+              </a:spcAft>
+            </a:pPr>
+            <a:r>
+              <a:rPr sz="950" b="0">
+                <a:solidFill>
+                  <a:srgbClr val="4A5764"/>
+                </a:solidFill>
+                <a:latin typeface="Consolas"/>
+              </a:rPr>
+              <a:t>That is what settles the oscillation.</a:t>
+            </a:r>
+          </a:p>
+          <a:p>
+            <a:pPr>
+              <a:spcBef>
+                <a:spcPts val="400"/>
+              </a:spcBef>
+              <a:spcAft>
+                <a:spcPts val="0"/>
+              </a:spcAft>
+            </a:pPr>
+            <a:r>
+              <a:rPr sz="950" b="1">
+                <a:solidFill>
+                  <a:srgbClr val="A9611A"/>
+                </a:solidFill>
+                <a:latin typeface="Consolas"/>
+              </a:rPr>
+              <a:t>Faster rolling renews it faster, so damping grows with speed.</a:t>
+            </a:r>
+          </a:p>
+          <a:p>
+            <a:pPr>
+              <a:spcBef>
+                <a:spcPts val="0"/>
+              </a:spcBef>
+              <a:spcAft>
+                <a:spcPts val="0"/>
+              </a:spcAft>
+            </a:pPr>
+            <a:r>
+              <a:rPr sz="950" b="1">
+                <a:solidFill>
+                  <a:srgbClr val="A9611A"/>
+                </a:solidFill>
+                <a:latin typeface="Consolas"/>
+              </a:rPr>
+              <a:t>At a standstill there is none at all.</a:t>
+            </a:r>
+          </a:p>
+        </p:txBody>
+      </p:sp>
+      <p:sp>
+        <p:nvSpPr>
+          <p:cNvPr id="19" name="TextBox 18"/>
           <p:cNvSpPr txBox="1"/>
           <p:nvPr/>
         </p:nvSpPr>
         <p:spPr>
           <a:xfrm>
-            <a:off x="9006840" y="2414016"/>
-            <a:ext cx="2743200" cy="219456"/>
+            <a:off x="5303520" y="3218688"/>
+            <a:ext cx="6309360" cy="237744"/>
           </a:xfrm>
           <a:prstGeom prst="rect">
             <a:avLst/>
@@ -8445,27 +8531,27 @@
               </a:spcAft>
             </a:pPr>
             <a:r>
-              <a:rPr sz="1000" b="0">
+              <a:rPr sz="1300" b="1">
                 <a:solidFill>
                   <a:srgbClr val="111820"/>
                 </a:solidFill>
-                <a:latin typeface="Consolas"/>
-              </a:rPr>
-              <a:t>TurnSlp</a:t>
-            </a:r>
-          </a:p>
-        </p:txBody>
-      </p:sp>
-      <p:sp>
-        <p:nvSpPr>
-          <p:cNvPr id="21" name="TextBox 20"/>
+                <a:latin typeface="Bahnschrift"/>
+              </a:rPr>
+              <a:t>WHAT THE INTEGRATION STEP COSTS</a:t>
+            </a:r>
+          </a:p>
+        </p:txBody>
+      </p:sp>
+      <p:sp>
+        <p:nvSpPr>
+          <p:cNvPr id="20" name="TextBox 19"/>
           <p:cNvSpPr txBox="1"/>
           <p:nvPr/>
         </p:nvSpPr>
         <p:spPr>
           <a:xfrm>
-            <a:off x="9006840" y="2670048"/>
-            <a:ext cx="2743200" cy="219456"/>
+            <a:off x="5303520" y="3511296"/>
+            <a:ext cx="6309360" cy="914400"/>
           </a:xfrm>
           <a:prstGeom prst="rect">
             <a:avLst/>
@@ -8487,27 +8573,84 @@
               </a:spcAft>
             </a:pPr>
             <a:r>
-              <a:rPr sz="1000" b="0">
-                <a:solidFill>
-                  <a:srgbClr val="111820"/>
-                </a:solidFill>
-                <a:latin typeface="Consolas"/>
-              </a:rPr>
-              <a:t>vBelt</a:t>
-            </a:r>
-          </a:p>
-        </p:txBody>
-      </p:sp>
-      <p:sp>
-        <p:nvSpPr>
-          <p:cNvPr id="22" name="TextBox 21"/>
+              <a:rPr sz="950" b="0">
+                <a:solidFill>
+                  <a:srgbClr val="4A5764"/>
+                </a:solidFill>
+                <a:latin typeface="Consolas"/>
+              </a:rPr>
+              <a:t>The tire is evaluated once per step, from the wheel speed as it stood at</a:t>
+            </a:r>
+          </a:p>
+          <a:p>
+            <a:pPr>
+              <a:spcBef>
+                <a:spcPts val="0"/>
+              </a:spcBef>
+              <a:spcAft>
+                <a:spcPts val="0"/>
+              </a:spcAft>
+            </a:pPr>
+            <a:r>
+              <a:rPr sz="950" b="0">
+                <a:solidFill>
+                  <a:srgbClr val="4A5764"/>
+                </a:solidFill>
+                <a:latin typeface="Consolas"/>
+              </a:rPr>
+              <a:t>the start of it. That always removes a small, fixed amount of damping.</a:t>
+            </a:r>
+          </a:p>
+          <a:p>
+            <a:pPr>
+              <a:spcBef>
+                <a:spcPts val="400"/>
+              </a:spcBef>
+              <a:spcAft>
+                <a:spcPts val="0"/>
+              </a:spcAft>
+            </a:pPr>
+            <a:r>
+              <a:rPr sz="950" b="0">
+                <a:solidFill>
+                  <a:srgbClr val="933723"/>
+                </a:solidFill>
+                <a:latin typeface="Consolas"/>
+              </a:rPr>
+              <a:t>At road speed there is plenty to spare. Down near walking pace there is</a:t>
+            </a:r>
+          </a:p>
+          <a:p>
+            <a:pPr>
+              <a:spcBef>
+                <a:spcPts val="0"/>
+              </a:spcBef>
+              <a:spcAft>
+                <a:spcPts val="0"/>
+              </a:spcAft>
+            </a:pPr>
+            <a:r>
+              <a:rPr sz="950" b="0">
+                <a:solidFill>
+                  <a:srgbClr val="933723"/>
+                </a:solidFill>
+                <a:latin typeface="Consolas"/>
+              </a:rPr>
+              <a:t>not, and the trace can ring.</a:t>
+            </a:r>
+          </a:p>
+        </p:txBody>
+      </p:sp>
+      <p:sp>
+        <p:nvSpPr>
+          <p:cNvPr id="21" name="TextBox 20"/>
           <p:cNvSpPr txBox="1"/>
           <p:nvPr/>
         </p:nvSpPr>
         <p:spPr>
           <a:xfrm>
-            <a:off x="9006840" y="2926080"/>
-            <a:ext cx="2743200" cy="219456"/>
+            <a:off x="5303520" y="4590288"/>
+            <a:ext cx="6309360" cy="237744"/>
           </a:xfrm>
           <a:prstGeom prst="rect">
             <a:avLst/>
@@ -8529,242 +8672,35 @@
               </a:spcAft>
             </a:pPr>
             <a:r>
-              <a:rPr sz="1000" b="0">
-                <a:solidFill>
-                  <a:srgbClr val="111820"/>
-                </a:solidFill>
-                <a:latin typeface="Consolas"/>
-              </a:rPr>
-              <a:t>rBelt_eff</a:t>
-            </a:r>
-          </a:p>
-        </p:txBody>
-      </p:sp>
-      <p:sp>
-        <p:nvSpPr>
-          <p:cNvPr id="23" name="TextBox 22"/>
-          <p:cNvSpPr txBox="1"/>
-          <p:nvPr/>
-        </p:nvSpPr>
-        <p:spPr>
-          <a:xfrm>
-            <a:off x="9006840" y="3182112"/>
-            <a:ext cx="2743200" cy="219456"/>
-          </a:xfrm>
-          <a:prstGeom prst="rect">
-            <a:avLst/>
-          </a:prstGeom>
-          <a:noFill/>
-        </p:spPr>
-        <p:txBody>
-          <a:bodyPr wrap="square" lIns="0" rIns="0" tIns="0" bIns="0" anchor="t">
-            <a:spAutoFit/>
-          </a:bodyPr>
-          <a:lstStyle/>
-          <a:p>
-            <a:pPr algn="l">
-              <a:spcBef>
-                <a:spcPts val="0"/>
-              </a:spcBef>
-              <a:spcAft>
-                <a:spcPts val="0"/>
-              </a:spcAft>
-            </a:pPr>
-            <a:r>
-              <a:rPr sz="1000" b="0">
-                <a:solidFill>
-                  <a:srgbClr val="111820"/>
-                </a:solidFill>
-                <a:latin typeface="Consolas"/>
-              </a:rPr>
-              <a:t>Frc_W  Fx Fy Fz</a:t>
-            </a:r>
-          </a:p>
-        </p:txBody>
-      </p:sp>
-      <p:sp>
-        <p:nvSpPr>
-          <p:cNvPr id="24" name="TextBox 23"/>
-          <p:cNvSpPr txBox="1"/>
-          <p:nvPr/>
-        </p:nvSpPr>
-        <p:spPr>
-          <a:xfrm>
-            <a:off x="9006840" y="3438144"/>
-            <a:ext cx="2743200" cy="219456"/>
-          </a:xfrm>
-          <a:prstGeom prst="rect">
-            <a:avLst/>
-          </a:prstGeom>
-          <a:noFill/>
-        </p:spPr>
-        <p:txBody>
-          <a:bodyPr wrap="square" lIns="0" rIns="0" tIns="0" bIns="0" anchor="t">
-            <a:spAutoFit/>
-          </a:bodyPr>
-          <a:lstStyle/>
-          <a:p>
-            <a:pPr algn="l">
-              <a:spcBef>
-                <a:spcPts val="0"/>
-              </a:spcBef>
-              <a:spcAft>
-                <a:spcPts val="0"/>
-              </a:spcAft>
-            </a:pPr>
-            <a:r>
-              <a:rPr sz="1000" b="0">
-                <a:solidFill>
-                  <a:srgbClr val="111820"/>
-                </a:solidFill>
-                <a:latin typeface="Consolas"/>
-              </a:rPr>
-              <a:t>Trq_W  Mx My Mz</a:t>
-            </a:r>
-          </a:p>
-        </p:txBody>
-      </p:sp>
-      <p:sp>
-        <p:nvSpPr>
-          <p:cNvPr id="25" name="TextBox 24"/>
-          <p:cNvSpPr txBox="1"/>
-          <p:nvPr/>
-        </p:nvSpPr>
-        <p:spPr>
-          <a:xfrm>
-            <a:off x="9006840" y="3931920"/>
-            <a:ext cx="2926080" cy="274320"/>
-          </a:xfrm>
-          <a:prstGeom prst="rect">
-            <a:avLst/>
-          </a:prstGeom>
-          <a:noFill/>
-        </p:spPr>
-        <p:txBody>
-          <a:bodyPr wrap="square" lIns="0" rIns="0" tIns="0" bIns="0" anchor="t">
-            <a:spAutoFit/>
-          </a:bodyPr>
-          <a:lstStyle/>
-          <a:p>
-            <a:pPr algn="l">
-              <a:spcBef>
-                <a:spcPts val="0"/>
-              </a:spcBef>
-              <a:spcAft>
-                <a:spcPts val="0"/>
-              </a:spcAft>
-            </a:pPr>
-            <a:r>
-              <a:rPr sz="1100" b="1">
-                <a:solidFill>
-                  <a:srgbClr val="1B646D"/>
-                </a:solidFill>
-                <a:latin typeface="Consolas"/>
-              </a:rPr>
-              <a:t>Trq_T2W</a:t>
-            </a:r>
-          </a:p>
-        </p:txBody>
-      </p:sp>
-      <p:sp>
-        <p:nvSpPr>
-          <p:cNvPr id="26" name="TextBox 25"/>
-          <p:cNvSpPr txBox="1"/>
-          <p:nvPr/>
-        </p:nvSpPr>
-        <p:spPr>
-          <a:xfrm>
-            <a:off x="9006840" y="4352544"/>
-            <a:ext cx="2926080" cy="914400"/>
-          </a:xfrm>
-          <a:prstGeom prst="rect">
-            <a:avLst/>
-          </a:prstGeom>
-          <a:noFill/>
-        </p:spPr>
-        <p:txBody>
-          <a:bodyPr wrap="square" lIns="0" rIns="0" tIns="0" bIns="0" anchor="t">
-            <a:spAutoFit/>
-          </a:bodyPr>
-          <a:lstStyle/>
-          <a:p>
-            <a:pPr algn="l">
-              <a:spcBef>
-                <a:spcPts val="0"/>
-              </a:spcBef>
-              <a:spcAft>
-                <a:spcPts val="0"/>
-              </a:spcAft>
-            </a:pPr>
-            <a:r>
-              <a:rPr sz="900" b="0">
+              <a:rPr sz="1200" b="1">
                 <a:solidFill>
                   <a:srgbClr val="78838F"/>
                 </a:solidFill>
-                <a:latin typeface="Consolas"/>
-              </a:rPr>
-              <a:t>Fz is an INPUT, not a state:</a:t>
-            </a:r>
-          </a:p>
-          <a:p>
-            <a:pPr>
-              <a:spcBef>
-                <a:spcPts val="0"/>
-              </a:spcBef>
-              <a:spcAft>
-                <a:spcPts val="0"/>
-              </a:spcAft>
-            </a:pPr>
-            <a:r>
-              <a:rPr sz="900" b="0">
-                <a:solidFill>
-                  <a:srgbClr val="78838F"/>
-                </a:solidFill>
-                <a:latin typeface="Consolas"/>
-              </a:rPr>
-              <a:t>CPI models carry no</a:t>
-            </a:r>
-          </a:p>
-          <a:p>
-            <a:pPr>
-              <a:spcBef>
-                <a:spcPts val="0"/>
-              </a:spcBef>
-              <a:spcAft>
-                <a:spcPts val="0"/>
-              </a:spcAft>
-            </a:pPr>
-            <a:r>
-              <a:rPr sz="900" b="0">
-                <a:solidFill>
-                  <a:srgbClr val="78838F"/>
-                </a:solidFill>
-                <a:latin typeface="Consolas"/>
-              </a:rPr>
-              <a:t>vertical dynamics.</a:t>
+                <a:latin typeface="Bahnschrift"/>
+              </a:rPr>
+              <a:t>EXAMPLE — rotv OR Trq_T2W DURING A SLOW CRAWL</a:t>
             </a:r>
           </a:p>
         </p:txBody>
       </p:sp>
       <p:cxnSp>
         <p:nvCxnSpPr>
-          <p:cNvPr id="27" name="Connector 26"/>
+          <p:cNvPr id="22" name="Connector 21"/>
           <p:cNvCxnSpPr/>
           <p:nvPr/>
         </p:nvCxnSpPr>
         <p:spPr>
           <a:xfrm>
-            <a:off x="3383280" y="2651760"/>
-            <a:ext cx="310896" cy="0"/>
+            <a:off x="5394960" y="5010912"/>
+            <a:ext cx="640080" cy="0"/>
           </a:xfrm>
           <a:prstGeom prst="line">
             <a:avLst/>
           </a:prstGeom>
-          <a:ln w="31750">
+          <a:ln w="25400">
             <a:solidFill>
-              <a:srgbClr val="A9611A"/>
+              <a:srgbClr val="1B646D"/>
             </a:solidFill>
-            <a:tailEnd type="triangle" w="med" len="med"/>
           </a:ln>
         </p:spPr>
         <p:style>
@@ -8784,23 +8720,22 @@
       </p:cxnSp>
       <p:cxnSp>
         <p:nvCxnSpPr>
-          <p:cNvPr id="28" name="Connector 27"/>
+          <p:cNvPr id="23" name="Connector 22"/>
           <p:cNvCxnSpPr/>
           <p:nvPr/>
         </p:nvCxnSpPr>
         <p:spPr>
-          <a:xfrm>
-            <a:off x="8631936" y="4023360"/>
-            <a:ext cx="320040" cy="0"/>
+          <a:xfrm flipV="1">
+            <a:off x="6035040" y="4956048"/>
+            <a:ext cx="182880" cy="54864"/>
           </a:xfrm>
           <a:prstGeom prst="line">
             <a:avLst/>
           </a:prstGeom>
-          <a:ln w="31750">
+          <a:ln w="25400">
             <a:solidFill>
               <a:srgbClr val="1B646D"/>
             </a:solidFill>
-            <a:tailEnd type="triangle" w="med" len="med"/>
           </a:ln>
         </p:spPr>
         <p:style>
@@ -8818,16 +8753,121 @@
           </a:fontRef>
         </p:style>
       </p:cxnSp>
-      <p:sp>
-        <p:nvSpPr>
-          <p:cNvPr id="29" name="TextBox 28"/>
+      <p:cxnSp>
+        <p:nvCxnSpPr>
+          <p:cNvPr id="24" name="Connector 23"/>
+          <p:cNvCxnSpPr/>
+          <p:nvPr/>
+        </p:nvCxnSpPr>
+        <p:spPr>
+          <a:xfrm>
+            <a:off x="6217920" y="4956048"/>
+            <a:ext cx="182880" cy="91440"/>
+          </a:xfrm>
+          <a:prstGeom prst="line">
+            <a:avLst/>
+          </a:prstGeom>
+          <a:ln w="25400">
+            <a:solidFill>
+              <a:srgbClr val="1B646D"/>
+            </a:solidFill>
+          </a:ln>
+        </p:spPr>
+        <p:style>
+          <a:lnRef idx="2">
+            <a:schemeClr val="accent1"/>
+          </a:lnRef>
+          <a:fillRef idx="0">
+            <a:schemeClr val="accent1"/>
+          </a:fillRef>
+          <a:effectRef idx="1">
+            <a:schemeClr val="accent1"/>
+          </a:effectRef>
+          <a:fontRef idx="minor">
+            <a:schemeClr val="tx1"/>
+          </a:fontRef>
+        </p:style>
+      </p:cxnSp>
+      <p:cxnSp>
+        <p:nvCxnSpPr>
+          <p:cNvPr id="25" name="Connector 24"/>
+          <p:cNvCxnSpPr/>
+          <p:nvPr/>
+        </p:nvCxnSpPr>
+        <p:spPr>
+          <a:xfrm flipV="1">
+            <a:off x="6400800" y="5001768"/>
+            <a:ext cx="182880" cy="45720"/>
+          </a:xfrm>
+          <a:prstGeom prst="line">
+            <a:avLst/>
+          </a:prstGeom>
+          <a:ln w="25400">
+            <a:solidFill>
+              <a:srgbClr val="1B646D"/>
+            </a:solidFill>
+          </a:ln>
+        </p:spPr>
+        <p:style>
+          <a:lnRef idx="2">
+            <a:schemeClr val="accent1"/>
+          </a:lnRef>
+          <a:fillRef idx="0">
+            <a:schemeClr val="accent1"/>
+          </a:fillRef>
+          <a:effectRef idx="1">
+            <a:schemeClr val="accent1"/>
+          </a:effectRef>
+          <a:fontRef idx="minor">
+            <a:schemeClr val="tx1"/>
+          </a:fontRef>
+        </p:style>
+      </p:cxnSp>
+      <p:cxnSp>
+        <p:nvCxnSpPr>
+          <p:cNvPr id="26" name="Connector 25"/>
+          <p:cNvCxnSpPr/>
+          <p:nvPr/>
+        </p:nvCxnSpPr>
+        <p:spPr>
+          <a:xfrm>
+            <a:off x="6583680" y="5001768"/>
+            <a:ext cx="822960" cy="9144"/>
+          </a:xfrm>
+          <a:prstGeom prst="line">
+            <a:avLst/>
+          </a:prstGeom>
+          <a:ln w="25400">
+            <a:solidFill>
+              <a:srgbClr val="1B646D"/>
+            </a:solidFill>
+          </a:ln>
+        </p:spPr>
+        <p:style>
+          <a:lnRef idx="2">
+            <a:schemeClr val="accent1"/>
+          </a:lnRef>
+          <a:fillRef idx="0">
+            <a:schemeClr val="accent1"/>
+          </a:fillRef>
+          <a:effectRef idx="1">
+            <a:schemeClr val="accent1"/>
+          </a:effectRef>
+          <a:fontRef idx="minor">
+            <a:schemeClr val="tx1"/>
+          </a:fontRef>
+        </p:style>
+      </p:cxnSp>
+      <p:sp>
+        <p:nvSpPr>
+          <p:cNvPr id="27" name="TextBox 26"/>
           <p:cNvSpPr txBox="1"/>
           <p:nvPr/>
         </p:nvSpPr>
         <p:spPr>
           <a:xfrm>
-            <a:off x="566928" y="5888736"/>
-            <a:ext cx="11064240" cy="548640"/>
+            <a:off x="7498080" y="4901184"/>
+            <a:ext cx="914400" cy="219456"/>
           </a:xfrm>
           <a:prstGeom prst="rect">
             <a:avLst/>
@@ -8849,27 +8889,342 @@
               </a:spcAft>
             </a:pPr>
             <a:r>
-              <a:rPr sz="950" b="0">
-                <a:solidFill>
-                  <a:srgbClr val="78838F"/>
-                </a:solidFill>
-                <a:latin typeface="Consolas"/>
-              </a:rPr>
-              <a:t>The relaxation states set the ~45 Hz mode on the next slide. Without them the tire is an instantaneous spring from rotv to torque and the</a:t>
-            </a:r>
-          </a:p>
-        </p:txBody>
-      </p:sp>
-      <p:sp>
-        <p:nvSpPr>
-          <p:cNvPr id="30" name="TextBox 29"/>
+              <a:rPr sz="900" b="0">
+                <a:solidFill>
+                  <a:srgbClr val="1B646D"/>
+                </a:solidFill>
+                <a:latin typeface="Consolas"/>
+              </a:rPr>
+              <a:t>healthy</a:t>
+            </a:r>
+          </a:p>
+        </p:txBody>
+      </p:sp>
+      <p:cxnSp>
+        <p:nvCxnSpPr>
+          <p:cNvPr id="28" name="Connector 27"/>
+          <p:cNvCxnSpPr/>
+          <p:nvPr/>
+        </p:nvCxnSpPr>
+        <p:spPr>
+          <a:xfrm>
+            <a:off x="8503920" y="5010912"/>
+            <a:ext cx="365760" cy="0"/>
+          </a:xfrm>
+          <a:prstGeom prst="line">
+            <a:avLst/>
+          </a:prstGeom>
+          <a:ln w="25400">
+            <a:solidFill>
+              <a:srgbClr val="933723"/>
+            </a:solidFill>
+          </a:ln>
+        </p:spPr>
+        <p:style>
+          <a:lnRef idx="2">
+            <a:schemeClr val="accent1"/>
+          </a:lnRef>
+          <a:fillRef idx="0">
+            <a:schemeClr val="accent1"/>
+          </a:fillRef>
+          <a:effectRef idx="1">
+            <a:schemeClr val="accent1"/>
+          </a:effectRef>
+          <a:fontRef idx="minor">
+            <a:schemeClr val="tx1"/>
+          </a:fontRef>
+        </p:style>
+      </p:cxnSp>
+      <p:cxnSp>
+        <p:nvCxnSpPr>
+          <p:cNvPr id="29" name="Connector 28"/>
+          <p:cNvCxnSpPr/>
+          <p:nvPr/>
+        </p:nvCxnSpPr>
+        <p:spPr>
+          <a:xfrm flipV="1">
+            <a:off x="8869680" y="4700016"/>
+            <a:ext cx="109728" cy="310896"/>
+          </a:xfrm>
+          <a:prstGeom prst="line">
+            <a:avLst/>
+          </a:prstGeom>
+          <a:ln w="25400">
+            <a:solidFill>
+              <a:srgbClr val="933723"/>
+            </a:solidFill>
+          </a:ln>
+        </p:spPr>
+        <p:style>
+          <a:lnRef idx="2">
+            <a:schemeClr val="accent1"/>
+          </a:lnRef>
+          <a:fillRef idx="0">
+            <a:schemeClr val="accent1"/>
+          </a:fillRef>
+          <a:effectRef idx="1">
+            <a:schemeClr val="accent1"/>
+          </a:effectRef>
+          <a:fontRef idx="minor">
+            <a:schemeClr val="tx1"/>
+          </a:fontRef>
+        </p:style>
+      </p:cxnSp>
+      <p:cxnSp>
+        <p:nvCxnSpPr>
+          <p:cNvPr id="30" name="Connector 29"/>
+          <p:cNvCxnSpPr/>
+          <p:nvPr/>
+        </p:nvCxnSpPr>
+        <p:spPr>
+          <a:xfrm>
+            <a:off x="8979408" y="4700016"/>
+            <a:ext cx="109728" cy="585216"/>
+          </a:xfrm>
+          <a:prstGeom prst="line">
+            <a:avLst/>
+          </a:prstGeom>
+          <a:ln w="25400">
+            <a:solidFill>
+              <a:srgbClr val="933723"/>
+            </a:solidFill>
+          </a:ln>
+        </p:spPr>
+        <p:style>
+          <a:lnRef idx="2">
+            <a:schemeClr val="accent1"/>
+          </a:lnRef>
+          <a:fillRef idx="0">
+            <a:schemeClr val="accent1"/>
+          </a:fillRef>
+          <a:effectRef idx="1">
+            <a:schemeClr val="accent1"/>
+          </a:effectRef>
+          <a:fontRef idx="minor">
+            <a:schemeClr val="tx1"/>
+          </a:fontRef>
+        </p:style>
+      </p:cxnSp>
+      <p:cxnSp>
+        <p:nvCxnSpPr>
+          <p:cNvPr id="31" name="Connector 30"/>
+          <p:cNvCxnSpPr/>
+          <p:nvPr/>
+        </p:nvCxnSpPr>
+        <p:spPr>
+          <a:xfrm flipV="1">
+            <a:off x="9089136" y="4809744"/>
+            <a:ext cx="109728" cy="475488"/>
+          </a:xfrm>
+          <a:prstGeom prst="line">
+            <a:avLst/>
+          </a:prstGeom>
+          <a:ln w="25400">
+            <a:solidFill>
+              <a:srgbClr val="933723"/>
+            </a:solidFill>
+          </a:ln>
+        </p:spPr>
+        <p:style>
+          <a:lnRef idx="2">
+            <a:schemeClr val="accent1"/>
+          </a:lnRef>
+          <a:fillRef idx="0">
+            <a:schemeClr val="accent1"/>
+          </a:fillRef>
+          <a:effectRef idx="1">
+            <a:schemeClr val="accent1"/>
+          </a:effectRef>
+          <a:fontRef idx="minor">
+            <a:schemeClr val="tx1"/>
+          </a:fontRef>
+        </p:style>
+      </p:cxnSp>
+      <p:cxnSp>
+        <p:nvCxnSpPr>
+          <p:cNvPr id="32" name="Connector 31"/>
+          <p:cNvCxnSpPr/>
+          <p:nvPr/>
+        </p:nvCxnSpPr>
+        <p:spPr>
+          <a:xfrm>
+            <a:off x="9198864" y="4809744"/>
+            <a:ext cx="109728" cy="365760"/>
+          </a:xfrm>
+          <a:prstGeom prst="line">
+            <a:avLst/>
+          </a:prstGeom>
+          <a:ln w="25400">
+            <a:solidFill>
+              <a:srgbClr val="933723"/>
+            </a:solidFill>
+          </a:ln>
+        </p:spPr>
+        <p:style>
+          <a:lnRef idx="2">
+            <a:schemeClr val="accent1"/>
+          </a:lnRef>
+          <a:fillRef idx="0">
+            <a:schemeClr val="accent1"/>
+          </a:fillRef>
+          <a:effectRef idx="1">
+            <a:schemeClr val="accent1"/>
+          </a:effectRef>
+          <a:fontRef idx="minor">
+            <a:schemeClr val="tx1"/>
+          </a:fontRef>
+        </p:style>
+      </p:cxnSp>
+      <p:cxnSp>
+        <p:nvCxnSpPr>
+          <p:cNvPr id="33" name="Connector 32"/>
+          <p:cNvCxnSpPr/>
+          <p:nvPr/>
+        </p:nvCxnSpPr>
+        <p:spPr>
+          <a:xfrm flipV="1">
+            <a:off x="9308592" y="4919472"/>
+            <a:ext cx="109728" cy="256032"/>
+          </a:xfrm>
+          <a:prstGeom prst="line">
+            <a:avLst/>
+          </a:prstGeom>
+          <a:ln w="25400">
+            <a:solidFill>
+              <a:srgbClr val="933723"/>
+            </a:solidFill>
+          </a:ln>
+        </p:spPr>
+        <p:style>
+          <a:lnRef idx="2">
+            <a:schemeClr val="accent1"/>
+          </a:lnRef>
+          <a:fillRef idx="0">
+            <a:schemeClr val="accent1"/>
+          </a:fillRef>
+          <a:effectRef idx="1">
+            <a:schemeClr val="accent1"/>
+          </a:effectRef>
+          <a:fontRef idx="minor">
+            <a:schemeClr val="tx1"/>
+          </a:fontRef>
+        </p:style>
+      </p:cxnSp>
+      <p:cxnSp>
+        <p:nvCxnSpPr>
+          <p:cNvPr id="34" name="Connector 33"/>
+          <p:cNvCxnSpPr/>
+          <p:nvPr/>
+        </p:nvCxnSpPr>
+        <p:spPr>
+          <a:xfrm>
+            <a:off x="9418320" y="4919472"/>
+            <a:ext cx="109728" cy="164592"/>
+          </a:xfrm>
+          <a:prstGeom prst="line">
+            <a:avLst/>
+          </a:prstGeom>
+          <a:ln w="25400">
+            <a:solidFill>
+              <a:srgbClr val="933723"/>
+            </a:solidFill>
+          </a:ln>
+        </p:spPr>
+        <p:style>
+          <a:lnRef idx="2">
+            <a:schemeClr val="accent1"/>
+          </a:lnRef>
+          <a:fillRef idx="0">
+            <a:schemeClr val="accent1"/>
+          </a:fillRef>
+          <a:effectRef idx="1">
+            <a:schemeClr val="accent1"/>
+          </a:effectRef>
+          <a:fontRef idx="minor">
+            <a:schemeClr val="tx1"/>
+          </a:fontRef>
+        </p:style>
+      </p:cxnSp>
+      <p:cxnSp>
+        <p:nvCxnSpPr>
+          <p:cNvPr id="35" name="Connector 34"/>
+          <p:cNvCxnSpPr/>
+          <p:nvPr/>
+        </p:nvCxnSpPr>
+        <p:spPr>
+          <a:xfrm flipV="1">
+            <a:off x="9528048" y="4992624"/>
+            <a:ext cx="109728" cy="91440"/>
+          </a:xfrm>
+          <a:prstGeom prst="line">
+            <a:avLst/>
+          </a:prstGeom>
+          <a:ln w="25400">
+            <a:solidFill>
+              <a:srgbClr val="933723"/>
+            </a:solidFill>
+          </a:ln>
+        </p:spPr>
+        <p:style>
+          <a:lnRef idx="2">
+            <a:schemeClr val="accent1"/>
+          </a:lnRef>
+          <a:fillRef idx="0">
+            <a:schemeClr val="accent1"/>
+          </a:fillRef>
+          <a:effectRef idx="1">
+            <a:schemeClr val="accent1"/>
+          </a:effectRef>
+          <a:fontRef idx="minor">
+            <a:schemeClr val="tx1"/>
+          </a:fontRef>
+        </p:style>
+      </p:cxnSp>
+      <p:cxnSp>
+        <p:nvCxnSpPr>
+          <p:cNvPr id="36" name="Connector 35"/>
+          <p:cNvCxnSpPr/>
+          <p:nvPr/>
+        </p:nvCxnSpPr>
+        <p:spPr>
+          <a:xfrm>
+            <a:off x="9637776" y="4992624"/>
+            <a:ext cx="603504" cy="18288"/>
+          </a:xfrm>
+          <a:prstGeom prst="line">
+            <a:avLst/>
+          </a:prstGeom>
+          <a:ln w="25400">
+            <a:solidFill>
+              <a:srgbClr val="933723"/>
+            </a:solidFill>
+          </a:ln>
+        </p:spPr>
+        <p:style>
+          <a:lnRef idx="2">
+            <a:schemeClr val="accent1"/>
+          </a:lnRef>
+          <a:fillRef idx="0">
+            <a:schemeClr val="accent1"/>
+          </a:fillRef>
+          <a:effectRef idx="1">
+            <a:schemeClr val="accent1"/>
+          </a:effectRef>
+          <a:fontRef idx="minor">
+            <a:schemeClr val="tx1"/>
+          </a:fontRef>
+        </p:style>
+      </p:cxnSp>
+      <p:sp>
+        <p:nvSpPr>
+          <p:cNvPr id="37" name="TextBox 36"/>
           <p:cNvSpPr txBox="1"/>
           <p:nvPr/>
         </p:nvSpPr>
         <p:spPr>
           <a:xfrm>
-            <a:off x="566928" y="6108192"/>
-            <a:ext cx="11064240" cy="548640"/>
+            <a:off x="10332720" y="4901184"/>
+            <a:ext cx="1097280" cy="219456"/>
           </a:xfrm>
           <a:prstGeom prst="rect">
             <a:avLst/>
@@ -8891,13 +9246,406 @@
               </a:spcAft>
             </a:pPr>
             <a:r>
+              <a:rPr sz="900" b="1">
+                <a:solidFill>
+                  <a:srgbClr val="933723"/>
+                </a:solidFill>
+                <a:latin typeface="Consolas"/>
+              </a:rPr>
+              <a:t>ringing</a:t>
+            </a:r>
+          </a:p>
+        </p:txBody>
+      </p:sp>
+      <p:sp>
+        <p:nvSpPr>
+          <p:cNvPr id="38" name="TextBox 37"/>
+          <p:cNvSpPr txBox="1"/>
+          <p:nvPr/>
+        </p:nvSpPr>
+        <p:spPr>
+          <a:xfrm>
+            <a:off x="566928" y="5358384"/>
+            <a:ext cx="11064240" cy="548640"/>
+          </a:xfrm>
+          <a:prstGeom prst="rect">
+            <a:avLst/>
+          </a:prstGeom>
+          <a:noFill/>
+        </p:spPr>
+        <p:txBody>
+          <a:bodyPr wrap="square" lIns="0" rIns="0" tIns="0" bIns="0" anchor="t">
+            <a:spAutoFit/>
+          </a:bodyPr>
+          <a:lstStyle/>
+          <a:p>
+            <a:pPr algn="l">
+              <a:spcBef>
+                <a:spcPts val="0"/>
+              </a:spcBef>
+              <a:spcAft>
+                <a:spcPts val="0"/>
+              </a:spcAft>
+            </a:pPr>
+            <a:r>
               <a:rPr sz="950" b="0">
                 <a:solidFill>
                   <a:srgbClr val="78838F"/>
                 </a:solidFill>
                 <a:latin typeface="Consolas"/>
               </a:rPr>
-              <a:t>delayed loop is far less forgiving. Model.USE_MODE 11/12 gives exactly that stateless version.</a:t>
+              <a:t>This oscillation is physical, not a modelling artefact. A real car has it: it is the same mechanism behind brake judder and ABS chatter.</a:t>
+            </a:r>
+          </a:p>
+        </p:txBody>
+      </p:sp>
+      <p:sp>
+        <p:nvSpPr>
+          <p:cNvPr id="39" name="Rectangle 38"/>
+          <p:cNvSpPr/>
+          <p:nvPr/>
+        </p:nvSpPr>
+        <p:spPr>
+          <a:xfrm>
+            <a:off x="566928" y="5614416"/>
+            <a:ext cx="3520440" cy="950976"/>
+          </a:xfrm>
+          <a:prstGeom prst="rect">
+            <a:avLst/>
+          </a:prstGeom>
+          <a:noFill/>
+          <a:ln w="15875">
+            <a:solidFill>
+              <a:srgbClr val="1B646D"/>
+            </a:solidFill>
+          </a:ln>
+          <a:effectLst/>
+        </p:spPr>
+        <p:style>
+          <a:lnRef idx="1">
+            <a:schemeClr val="accent1"/>
+          </a:lnRef>
+          <a:fillRef idx="3">
+            <a:schemeClr val="accent1"/>
+          </a:fillRef>
+          <a:effectRef idx="2">
+            <a:schemeClr val="accent1"/>
+          </a:effectRef>
+          <a:fontRef idx="minor">
+            <a:schemeClr val="lt1"/>
+          </a:fontRef>
+        </p:style>
+        <p:txBody>
+          <a:bodyPr rtlCol="0" anchor="t" wrap="square" tIns="54864" bIns="54864"/>
+          <a:lstStyle/>
+          <a:p>
+            <a:pPr algn="ctr">
+              <a:spcBef>
+                <a:spcPts val="0"/>
+              </a:spcBef>
+              <a:spcAft>
+                <a:spcPts val="0"/>
+              </a:spcAft>
+            </a:pPr>
+            <a:r>
+              <a:rPr sz="1300" b="1">
+                <a:solidFill>
+                  <a:srgbClr val="1B646D"/>
+                </a:solidFill>
+                <a:latin typeface="Bahnschrift"/>
+              </a:rPr>
+              <a:t>Why we do not see it</a:t>
+            </a:r>
+          </a:p>
+          <a:p>
+            <a:pPr>
+              <a:spcBef>
+                <a:spcPts val="300"/>
+              </a:spcBef>
+              <a:spcAft>
+                <a:spcPts val="0"/>
+              </a:spcAft>
+            </a:pPr>
+            <a:r>
+              <a:rPr sz="950" b="0">
+                <a:solidFill>
+                  <a:srgbClr val="4A5764"/>
+                </a:solidFill>
+                <a:latin typeface="Consolas"/>
+              </a:rPr>
+              <a:t>Below 2 m/s CarMaker switches to its</a:t>
+            </a:r>
+          </a:p>
+          <a:p>
+            <a:pPr>
+              <a:spcBef>
+                <a:spcPts val="100"/>
+              </a:spcBef>
+              <a:spcAft>
+                <a:spcPts val="0"/>
+              </a:spcAft>
+            </a:pPr>
+            <a:r>
+              <a:rPr sz="950" b="0">
+                <a:solidFill>
+                  <a:srgbClr val="4A5764"/>
+                </a:solidFill>
+                <a:latin typeface="Consolas"/>
+              </a:rPr>
+              <a:t>stand-still tire model, and we put the dyno</a:t>
+            </a:r>
+          </a:p>
+          <a:p>
+            <a:pPr>
+              <a:spcBef>
+                <a:spcPts val="100"/>
+              </a:spcBef>
+              <a:spcAft>
+                <a:spcPts val="0"/>
+              </a:spcAft>
+            </a:pPr>
+            <a:r>
+              <a:rPr sz="950" b="0">
+                <a:solidFill>
+                  <a:srgbClr val="4A5764"/>
+                </a:solidFill>
+                <a:latin typeface="Consolas"/>
+              </a:rPr>
+              <a:t>in torque mode while stopping.</a:t>
+            </a:r>
+          </a:p>
+        </p:txBody>
+      </p:sp>
+      <p:sp>
+        <p:nvSpPr>
+          <p:cNvPr id="40" name="Rectangle 39"/>
+          <p:cNvSpPr/>
+          <p:nvPr/>
+        </p:nvSpPr>
+        <p:spPr>
+          <a:xfrm>
+            <a:off x="4315968" y="5614416"/>
+            <a:ext cx="3520440" cy="950976"/>
+          </a:xfrm>
+          <a:prstGeom prst="rect">
+            <a:avLst/>
+          </a:prstGeom>
+          <a:noFill/>
+          <a:ln w="15875">
+            <a:solidFill>
+              <a:srgbClr val="A9611A"/>
+            </a:solidFill>
+          </a:ln>
+          <a:effectLst/>
+        </p:spPr>
+        <p:style>
+          <a:lnRef idx="1">
+            <a:schemeClr val="accent1"/>
+          </a:lnRef>
+          <a:fillRef idx="3">
+            <a:schemeClr val="accent1"/>
+          </a:fillRef>
+          <a:effectRef idx="2">
+            <a:schemeClr val="accent1"/>
+          </a:effectRef>
+          <a:fontRef idx="minor">
+            <a:schemeClr val="lt1"/>
+          </a:fontRef>
+        </p:style>
+        <p:txBody>
+          <a:bodyPr rtlCol="0" anchor="t" wrap="square" tIns="54864" bIns="54864"/>
+          <a:lstStyle/>
+          <a:p>
+            <a:pPr algn="ctr">
+              <a:spcBef>
+                <a:spcPts val="0"/>
+              </a:spcBef>
+              <a:spcAft>
+                <a:spcPts val="0"/>
+              </a:spcAft>
+            </a:pPr>
+            <a:r>
+              <a:rPr sz="1300" b="1">
+                <a:solidFill>
+                  <a:srgbClr val="A9611A"/>
+                </a:solidFill>
+                <a:latin typeface="Bahnschrift"/>
+              </a:rPr>
+              <a:t>What raises the risk</a:t>
+            </a:r>
+          </a:p>
+          <a:p>
+            <a:pPr>
+              <a:spcBef>
+                <a:spcPts val="300"/>
+              </a:spcBef>
+              <a:spcAft>
+                <a:spcPts val="0"/>
+              </a:spcAft>
+            </a:pPr>
+            <a:r>
+              <a:rPr sz="950" b="0">
+                <a:solidFill>
+                  <a:srgbClr val="4A5764"/>
+                </a:solidFill>
+                <a:latin typeface="Consolas"/>
+              </a:rPr>
+              <a:t>A longer sample time, a smaller wheel</a:t>
+            </a:r>
+          </a:p>
+          <a:p>
+            <a:pPr>
+              <a:spcBef>
+                <a:spcPts val="100"/>
+              </a:spcBef>
+              <a:spcAft>
+                <a:spcPts val="0"/>
+              </a:spcAft>
+            </a:pPr>
+            <a:r>
+              <a:rPr sz="950" b="0">
+                <a:solidFill>
+                  <a:srgbClr val="4A5764"/>
+                </a:solidFill>
+                <a:latin typeface="Consolas"/>
+              </a:rPr>
+              <a:t>inertia, a shorter relaxation length,</a:t>
+            </a:r>
+          </a:p>
+          <a:p>
+            <a:pPr>
+              <a:spcBef>
+                <a:spcPts val="100"/>
+              </a:spcBef>
+              <a:spcAft>
+                <a:spcPts val="0"/>
+              </a:spcAft>
+            </a:pPr>
+            <a:r>
+              <a:rPr sz="950" b="0">
+                <a:solidFill>
+                  <a:srgbClr val="4A5764"/>
+                </a:solidFill>
+                <a:latin typeface="Consolas"/>
+              </a:rPr>
+              <a:t>or a second delay in the loop.</a:t>
+            </a:r>
+          </a:p>
+        </p:txBody>
+      </p:sp>
+      <p:sp>
+        <p:nvSpPr>
+          <p:cNvPr id="41" name="Rectangle 40"/>
+          <p:cNvSpPr/>
+          <p:nvPr/>
+        </p:nvSpPr>
+        <p:spPr>
+          <a:xfrm>
+            <a:off x="8065008" y="5614416"/>
+            <a:ext cx="3566160" cy="950976"/>
+          </a:xfrm>
+          <a:prstGeom prst="rect">
+            <a:avLst/>
+          </a:prstGeom>
+          <a:noFill/>
+          <a:ln w="15875">
+            <a:solidFill>
+              <a:srgbClr val="C7CED5"/>
+            </a:solidFill>
+          </a:ln>
+          <a:effectLst/>
+        </p:spPr>
+        <p:style>
+          <a:lnRef idx="1">
+            <a:schemeClr val="accent1"/>
+          </a:lnRef>
+          <a:fillRef idx="3">
+            <a:schemeClr val="accent1"/>
+          </a:fillRef>
+          <a:effectRef idx="2">
+            <a:schemeClr val="accent1"/>
+          </a:effectRef>
+          <a:fontRef idx="minor">
+            <a:schemeClr val="lt1"/>
+          </a:fontRef>
+        </p:style>
+        <p:txBody>
+          <a:bodyPr rtlCol="0" anchor="t" wrap="square" tIns="54864" bIns="54864"/>
+          <a:lstStyle/>
+          <a:p>
+            <a:pPr algn="ctr">
+              <a:spcBef>
+                <a:spcPts val="0"/>
+              </a:spcBef>
+              <a:spcAft>
+                <a:spcPts val="0"/>
+              </a:spcAft>
+            </a:pPr>
+            <a:r>
+              <a:rPr sz="1300" b="1">
+                <a:solidFill>
+                  <a:srgbClr val="111820"/>
+                </a:solidFill>
+                <a:latin typeface="Bahnschrift"/>
+              </a:rPr>
+              <a:t>The frequency, if you want it</a:t>
+            </a:r>
+          </a:p>
+          <a:p>
+            <a:pPr>
+              <a:spcBef>
+                <a:spcPts val="300"/>
+              </a:spcBef>
+              <a:spcAft>
+                <a:spcPts val="0"/>
+              </a:spcAft>
+            </a:pPr>
+            <a:r>
+              <a:rPr sz="950" b="0">
+                <a:solidFill>
+                  <a:srgbClr val="4A5764"/>
+                </a:solidFill>
+                <a:latin typeface="Consolas"/>
+              </a:rPr>
+              <a:t>Tens of hertz for a passenger wheel; we</a:t>
+            </a:r>
+          </a:p>
+          <a:p>
+            <a:pPr>
+              <a:spcBef>
+                <a:spcPts val="100"/>
+              </a:spcBef>
+              <a:spcAft>
+                <a:spcPts val="0"/>
+              </a:spcAft>
+            </a:pPr>
+            <a:r>
+              <a:rPr sz="950" b="0">
+                <a:solidFill>
+                  <a:srgbClr val="4A5764"/>
+                </a:solidFill>
+                <a:latin typeface="Consolas"/>
+              </a:rPr>
+              <a:t>estimate 40-50 Hz from a textbook slip</a:t>
+            </a:r>
+          </a:p>
+          <a:p>
+            <a:pPr>
+              <a:spcBef>
+                <a:spcPts val="100"/>
+              </a:spcBef>
+              <a:spcAft>
+                <a:spcPts val="0"/>
+              </a:spcAft>
+            </a:pPr>
+            <a:r>
+              <a:rPr sz="950" b="0">
+                <a:solidFill>
+                  <a:srgbClr val="4A5764"/>
+                </a:solidFill>
+                <a:latin typeface="Consolas"/>
+              </a:rPr>
+              <a:t>stiffness. Read Cs from the tire file.</a:t>
             </a:r>
           </a:p>
         </p:txBody>
@@ -8993,7 +9741,7 @@
                 </a:solidFill>
                 <a:latin typeface="Consolas"/>
               </a:rPr>
-              <a:t>06 / 08</a:t>
+              <a:t>06 / 06</a:t>
             </a:r>
             <a:r>
               <a:rPr sz="900">
@@ -9002,7 +9750,7 @@
                 </a:solidFill>
                 <a:latin typeface="Consolas"/>
               </a:rPr>
-              <a:t>    LONGITUDINAL ↔ LATERAL</a:t>
+              <a:t>    SUMMARY</a:t>
             </a:r>
           </a:p>
         </p:txBody>
@@ -9044,86 +9792,49 @@
                 </a:solidFill>
                 <a:latin typeface="Bahnschrift"/>
               </a:rPr>
-              <a:t>The bench is longitudinal-only, but the load it sees is lateral-aware</a:t>
-            </a:r>
-          </a:p>
-        </p:txBody>
-      </p:sp>
-      <p:sp>
-        <p:nvSpPr>
-          <p:cNvPr id="5" name="Rectangle 4"/>
-          <p:cNvSpPr/>
-          <p:nvPr/>
-        </p:nvSpPr>
-        <p:spPr>
-          <a:xfrm>
-            <a:off x="566928" y="2011680"/>
-            <a:ext cx="2286000" cy="786384"/>
+              <a:t>What we can rely on, and what to check</a:t>
+            </a:r>
+          </a:p>
+        </p:txBody>
+      </p:sp>
+      <p:sp>
+        <p:nvSpPr>
+          <p:cNvPr id="5" name="TextBox 4"/>
+          <p:cNvSpPr txBox="1"/>
+          <p:nvPr/>
+        </p:nvSpPr>
+        <p:spPr>
+          <a:xfrm>
+            <a:off x="566928" y="1243584"/>
+            <a:ext cx="10424160" cy="457200"/>
           </a:xfrm>
           <a:prstGeom prst="rect">
             <a:avLst/>
           </a:prstGeom>
           <a:noFill/>
-          <a:ln w="31750">
-            <a:solidFill>
-              <a:srgbClr val="A9611A"/>
-            </a:solidFill>
-          </a:ln>
-          <a:effectLst/>
-        </p:spPr>
-        <p:style>
-          <a:lnRef idx="1">
-            <a:schemeClr val="accent1"/>
-          </a:lnRef>
-          <a:fillRef idx="3">
-            <a:schemeClr val="accent1"/>
-          </a:fillRef>
-          <a:effectRef idx="2">
-            <a:schemeClr val="accent1"/>
-          </a:effectRef>
-          <a:fontRef idx="minor">
-            <a:schemeClr val="lt1"/>
-          </a:fontRef>
-        </p:style>
-        <p:txBody>
-          <a:bodyPr rtlCol="0" anchor="t" wrap="square" tIns="54864" bIns="54864"/>
-          <a:lstStyle/>
-          <a:p>
-            <a:pPr algn="ctr">
-              <a:spcBef>
-                <a:spcPts val="0"/>
-              </a:spcBef>
-              <a:spcAft>
-                <a:spcPts val="0"/>
-              </a:spcAft>
-            </a:pPr>
-            <a:r>
-              <a:rPr sz="1300" b="1">
-                <a:solidFill>
-                  <a:srgbClr val="A9611A"/>
-                </a:solidFill>
-                <a:latin typeface="Bahnschrift"/>
-              </a:rPr>
-              <a:t>our w[k]</a:t>
-            </a:r>
-          </a:p>
-          <a:p>
-            <a:pPr>
-              <a:spcBef>
-                <a:spcPts val="300"/>
-              </a:spcBef>
-              <a:spcAft>
-                <a:spcPts val="0"/>
-              </a:spcAft>
-            </a:pPr>
-            <a:r>
-              <a:rPr sz="950" b="0">
+        </p:spPr>
+        <p:txBody>
+          <a:bodyPr wrap="square" lIns="0" rIns="0" tIns="0" bIns="0" anchor="t">
+            <a:spAutoFit/>
+          </a:bodyPr>
+          <a:lstStyle/>
+          <a:p>
+            <a:pPr algn="l">
+              <a:spcBef>
+                <a:spcPts val="0"/>
+              </a:spcBef>
+              <a:spcAft>
+                <a:spcPts val="0"/>
+              </a:spcAft>
+            </a:pPr>
+            <a:r>
+              <a:rPr sz="1250" b="0">
                 <a:solidFill>
                   <a:srgbClr val="4A5764"/>
                 </a:solidFill>
-                <a:latin typeface="Consolas"/>
-              </a:rPr>
-              <a:t>→ vBelt → s</a:t>
+                <a:latin typeface="Segoe UI"/>
+              </a:rPr>
+              <a:t>The loop is sound. Three reasons, then the two things it cannot report on itself, then the open items.</a:t>
             </a:r>
           </a:p>
         </p:txBody>
@@ -9136,187 +9847,8 @@
         </p:nvSpPr>
         <p:spPr>
           <a:xfrm>
-            <a:off x="566928" y="3931920"/>
-            <a:ext cx="2286000" cy="786384"/>
-          </a:xfrm>
-          <a:prstGeom prst="rect">
-            <a:avLst/>
-          </a:prstGeom>
-          <a:noFill/>
-          <a:ln w="19050">
-            <a:solidFill>
-              <a:srgbClr val="1B646D"/>
-            </a:solidFill>
-          </a:ln>
-          <a:effectLst/>
-        </p:spPr>
-        <p:style>
-          <a:lnRef idx="1">
-            <a:schemeClr val="accent1"/>
-          </a:lnRef>
-          <a:fillRef idx="3">
-            <a:schemeClr val="accent1"/>
-          </a:fillRef>
-          <a:effectRef idx="2">
-            <a:schemeClr val="accent1"/>
-          </a:effectRef>
-          <a:fontRef idx="minor">
-            <a:schemeClr val="lt1"/>
-          </a:fontRef>
-        </p:style>
-        <p:txBody>
-          <a:bodyPr rtlCol="0" anchor="t" wrap="square" tIns="54864" bIns="54864"/>
-          <a:lstStyle/>
-          <a:p>
-            <a:pPr algn="ctr">
-              <a:spcBef>
-                <a:spcPts val="0"/>
-              </a:spcBef>
-              <a:spcAft>
-                <a:spcPts val="0"/>
-              </a:spcAft>
-            </a:pPr>
-            <a:r>
-              <a:rPr sz="1300" b="1">
-                <a:solidFill>
-                  <a:srgbClr val="1B646D"/>
-                </a:solidFill>
-                <a:latin typeface="Bahnschrift"/>
-              </a:rPr>
-              <a:t>steer, yaw</a:t>
-            </a:r>
-          </a:p>
-          <a:p>
-            <a:pPr>
-              <a:spcBef>
-                <a:spcPts val="300"/>
-              </a:spcBef>
-              <a:spcAft>
-                <a:spcPts val="0"/>
-              </a:spcAft>
-            </a:pPr>
-            <a:r>
-              <a:rPr sz="950" b="0">
-                <a:solidFill>
-                  <a:srgbClr val="4A5764"/>
-                </a:solidFill>
-                <a:latin typeface="Consolas"/>
-              </a:rPr>
-              <a:t>→ vy(P) → alpha</a:t>
-            </a:r>
-          </a:p>
-        </p:txBody>
-      </p:sp>
-      <p:sp>
-        <p:nvSpPr>
-          <p:cNvPr id="7" name="Rectangle 6"/>
-          <p:cNvSpPr/>
-          <p:nvPr/>
-        </p:nvSpPr>
-        <p:spPr>
-          <a:xfrm>
-            <a:off x="3749040" y="1920240"/>
-            <a:ext cx="3017520" cy="969264"/>
-          </a:xfrm>
-          <a:prstGeom prst="rect">
-            <a:avLst/>
-          </a:prstGeom>
-          <a:solidFill>
-            <a:srgbClr val="F2E4D3"/>
-          </a:solidFill>
-          <a:ln w="19050">
-            <a:solidFill>
-              <a:srgbClr val="A9611A"/>
-            </a:solidFill>
-          </a:ln>
-          <a:effectLst/>
-        </p:spPr>
-        <p:style>
-          <a:lnRef idx="1">
-            <a:schemeClr val="accent1"/>
-          </a:lnRef>
-          <a:fillRef idx="3">
-            <a:schemeClr val="accent1"/>
-          </a:fillRef>
-          <a:effectRef idx="2">
-            <a:schemeClr val="accent1"/>
-          </a:effectRef>
-          <a:fontRef idx="minor">
-            <a:schemeClr val="lt1"/>
-          </a:fontRef>
-        </p:style>
-        <p:txBody>
-          <a:bodyPr rtlCol="0" anchor="t" wrap="square" tIns="54864" bIns="54864"/>
-          <a:lstStyle/>
-          <a:p>
-            <a:pPr algn="ctr">
-              <a:spcBef>
-                <a:spcPts val="0"/>
-              </a:spcBef>
-              <a:spcAft>
-                <a:spcPts val="0"/>
-              </a:spcAft>
-            </a:pPr>
-            <a:r>
-              <a:rPr sz="1300" b="1">
-                <a:solidFill>
-                  <a:srgbClr val="111820"/>
-                </a:solidFill>
-                <a:latin typeface="Bahnschrift"/>
-              </a:rPr>
-              <a:t>Fx = Gx(alpha)·Fx0(s)</a:t>
-            </a:r>
-          </a:p>
-          <a:p>
-            <a:pPr>
-              <a:spcBef>
-                <a:spcPts val="300"/>
-              </a:spcBef>
-              <a:spcAft>
-                <a:spcPts val="0"/>
-              </a:spcAft>
-            </a:pPr>
-            <a:r>
-              <a:rPr sz="950" b="0">
-                <a:solidFill>
-                  <a:srgbClr val="4A5764"/>
-                </a:solidFill>
-                <a:latin typeface="Consolas"/>
-              </a:rPr>
-              <a:t>longitudinal force,</a:t>
-            </a:r>
-          </a:p>
-          <a:p>
-            <a:pPr>
-              <a:spcBef>
-                <a:spcPts val="100"/>
-              </a:spcBef>
-              <a:spcAft>
-                <a:spcPts val="0"/>
-              </a:spcAft>
-            </a:pPr>
-            <a:r>
-              <a:rPr sz="950" b="0">
-                <a:solidFill>
-                  <a:srgbClr val="4A5764"/>
-                </a:solidFill>
-                <a:latin typeface="Consolas"/>
-              </a:rPr>
-              <a:t>de-rated by sideslip</a:t>
-            </a:r>
-          </a:p>
-        </p:txBody>
-      </p:sp>
-      <p:sp>
-        <p:nvSpPr>
-          <p:cNvPr id="8" name="Rectangle 7"/>
-          <p:cNvSpPr/>
-          <p:nvPr/>
-        </p:nvSpPr>
-        <p:spPr>
-          <a:xfrm>
-            <a:off x="3749040" y="3840480"/>
-            <a:ext cx="3017520" cy="969264"/>
+            <a:off x="566928" y="1737360"/>
+            <a:ext cx="3520440" cy="1188720"/>
           </a:xfrm>
           <a:prstGeom prst="rect">
             <a:avLst/>
@@ -9360,11 +9892,11 @@
             <a:r>
               <a:rPr sz="1300" b="1">
                 <a:solidFill>
-                  <a:srgbClr val="111820"/>
+                  <a:srgbClr val="1B646D"/>
                 </a:solidFill>
                 <a:latin typeface="Bahnschrift"/>
               </a:rPr>
-              <a:t>Fy = Gy(s)·Fy0(alpha)</a:t>
+              <a:t>There is only one wheel speed</a:t>
             </a:r>
           </a:p>
           <a:p>
@@ -9383,7 +9915,7 @@
                 </a:solidFill>
                 <a:latin typeface="Consolas"/>
               </a:rPr>
-              <a:t>lateral force,</a:t>
+              <a:t>Not one in the model and another on the bench.</a:t>
             </a:r>
           </a:p>
           <a:p>
@@ -9402,73 +9934,13 @@
                 </a:solidFill>
                 <a:latin typeface="Consolas"/>
               </a:rPr>
-              <a:t>de-rated by long. slip</a:t>
-            </a:r>
-          </a:p>
-        </p:txBody>
-      </p:sp>
-      <p:sp>
-        <p:nvSpPr>
-          <p:cNvPr id="9" name="Rectangle 8"/>
-          <p:cNvSpPr/>
-          <p:nvPr/>
-        </p:nvSpPr>
-        <p:spPr>
-          <a:xfrm>
-            <a:off x="7772400" y="1920240"/>
-            <a:ext cx="2743200" cy="969264"/>
-          </a:xfrm>
-          <a:prstGeom prst="rect">
-            <a:avLst/>
-          </a:prstGeom>
-          <a:noFill/>
-          <a:ln w="31750">
-            <a:solidFill>
-              <a:srgbClr val="933723"/>
-            </a:solidFill>
-          </a:ln>
-          <a:effectLst/>
-        </p:spPr>
-        <p:style>
-          <a:lnRef idx="1">
-            <a:schemeClr val="accent1"/>
-          </a:lnRef>
-          <a:fillRef idx="3">
-            <a:schemeClr val="accent1"/>
-          </a:fillRef>
-          <a:effectRef idx="2">
-            <a:schemeClr val="accent1"/>
-          </a:effectRef>
-          <a:fontRef idx="minor">
-            <a:schemeClr val="lt1"/>
-          </a:fontRef>
-        </p:style>
-        <p:txBody>
-          <a:bodyPr rtlCol="0" anchor="t" wrap="square" tIns="54864" bIns="54864"/>
-          <a:lstStyle/>
-          <a:p>
-            <a:pPr algn="ctr">
-              <a:spcBef>
-                <a:spcPts val="0"/>
-              </a:spcBef>
-              <a:spcAft>
-                <a:spcPts val="0"/>
-              </a:spcAft>
-            </a:pPr>
-            <a:r>
-              <a:rPr sz="1300" b="1">
-                <a:solidFill>
-                  <a:srgbClr val="933723"/>
-                </a:solidFill>
-                <a:latin typeface="Bahnschrift"/>
-              </a:rPr>
-              <a:t>Trq_T2W</a:t>
+              <a:t>Ours is the only one, so the two cannot</a:t>
             </a:r>
           </a:p>
           <a:p>
             <a:pPr>
               <a:spcBef>
-                <a:spcPts val="300"/>
+                <a:spcPts val="100"/>
               </a:spcBef>
               <a:spcAft>
                 <a:spcPts val="0"/>
@@ -9481,1055 +9953,7 @@
                 </a:solidFill>
                 <a:latin typeface="Consolas"/>
               </a:rPr>
-              <a:t>back into our</a:t>
-            </a:r>
-          </a:p>
-          <a:p>
-            <a:pPr>
-              <a:spcBef>
-                <a:spcPts val="100"/>
-              </a:spcBef>
-              <a:spcAft>
-                <a:spcPts val="0"/>
-              </a:spcAft>
-            </a:pPr>
-            <a:r>
-              <a:rPr sz="950" b="0">
-                <a:solidFill>
-                  <a:srgbClr val="4A5764"/>
-                </a:solidFill>
-                <a:latin typeface="Consolas"/>
-              </a:rPr>
-              <a:t>integrator</a:t>
-            </a:r>
-          </a:p>
-        </p:txBody>
-      </p:sp>
-      <p:sp>
-        <p:nvSpPr>
-          <p:cNvPr id="10" name="Rectangle 9"/>
-          <p:cNvSpPr/>
-          <p:nvPr/>
-        </p:nvSpPr>
-        <p:spPr>
-          <a:xfrm>
-            <a:off x="7772400" y="3840480"/>
-            <a:ext cx="2743200" cy="969264"/>
-          </a:xfrm>
-          <a:prstGeom prst="rect">
-            <a:avLst/>
-          </a:prstGeom>
-          <a:noFill/>
-          <a:ln w="15875">
-            <a:solidFill>
-              <a:srgbClr val="C7CED5"/>
-            </a:solidFill>
-          </a:ln>
-          <a:effectLst/>
-        </p:spPr>
-        <p:style>
-          <a:lnRef idx="1">
-            <a:schemeClr val="accent1"/>
-          </a:lnRef>
-          <a:fillRef idx="3">
-            <a:schemeClr val="accent1"/>
-          </a:fillRef>
-          <a:effectRef idx="2">
-            <a:schemeClr val="accent1"/>
-          </a:effectRef>
-          <a:fontRef idx="minor">
-            <a:schemeClr val="lt1"/>
-          </a:fontRef>
-        </p:style>
-        <p:txBody>
-          <a:bodyPr rtlCol="0" anchor="t" wrap="square" tIns="54864" bIns="54864"/>
-          <a:lstStyle/>
-          <a:p>
-            <a:pPr algn="ctr">
-              <a:spcBef>
-                <a:spcPts val="0"/>
-              </a:spcBef>
-              <a:spcAft>
-                <a:spcPts val="0"/>
-              </a:spcAft>
-            </a:pPr>
-            <a:r>
-              <a:rPr sz="1300" b="1">
-                <a:solidFill>
-                  <a:srgbClr val="111820"/>
-                </a:solidFill>
-                <a:latin typeface="Bahnschrift"/>
-              </a:rPr>
-              <a:t>Fz — load transfer</a:t>
-            </a:r>
-          </a:p>
-          <a:p>
-            <a:pPr>
-              <a:spcBef>
-                <a:spcPts val="300"/>
-              </a:spcBef>
-              <a:spcAft>
-                <a:spcPts val="0"/>
-              </a:spcAft>
-            </a:pPr>
-            <a:r>
-              <a:rPr sz="950" b="0">
-                <a:solidFill>
-                  <a:srgbClr val="4A5764"/>
-                </a:solidFill>
-                <a:latin typeface="Consolas"/>
-              </a:rPr>
-              <a:t>pitch → understeer</a:t>
-            </a:r>
-          </a:p>
-          <a:p>
-            <a:pPr>
-              <a:spcBef>
-                <a:spcPts val="100"/>
-              </a:spcBef>
-              <a:spcAft>
-                <a:spcPts val="0"/>
-              </a:spcAft>
-            </a:pPr>
-            <a:r>
-              <a:rPr sz="950" b="0">
-                <a:solidFill>
-                  <a:srgbClr val="4A5764"/>
-                </a:solidFill>
-                <a:latin typeface="Consolas"/>
-              </a:rPr>
-              <a:t>balance shifts</a:t>
-            </a:r>
-          </a:p>
-        </p:txBody>
-      </p:sp>
-      <p:cxnSp>
-        <p:nvCxnSpPr>
-          <p:cNvPr id="11" name="Connector 10"/>
-          <p:cNvCxnSpPr/>
-          <p:nvPr/>
-        </p:nvCxnSpPr>
-        <p:spPr>
-          <a:xfrm>
-            <a:off x="2852928" y="2404872"/>
-            <a:ext cx="841248" cy="0"/>
-          </a:xfrm>
-          <a:prstGeom prst="line">
-            <a:avLst/>
-          </a:prstGeom>
-          <a:ln w="31750">
-            <a:solidFill>
-              <a:srgbClr val="A9611A"/>
-            </a:solidFill>
-            <a:tailEnd type="triangle" w="med" len="med"/>
-          </a:ln>
-        </p:spPr>
-        <p:style>
-          <a:lnRef idx="2">
-            <a:schemeClr val="accent1"/>
-          </a:lnRef>
-          <a:fillRef idx="0">
-            <a:schemeClr val="accent1"/>
-          </a:fillRef>
-          <a:effectRef idx="1">
-            <a:schemeClr val="accent1"/>
-          </a:effectRef>
-          <a:fontRef idx="minor">
-            <a:schemeClr val="tx1"/>
-          </a:fontRef>
-        </p:style>
-      </p:cxnSp>
-      <p:cxnSp>
-        <p:nvCxnSpPr>
-          <p:cNvPr id="12" name="Connector 11"/>
-          <p:cNvCxnSpPr/>
-          <p:nvPr/>
-        </p:nvCxnSpPr>
-        <p:spPr>
-          <a:xfrm>
-            <a:off x="2852928" y="4325112"/>
-            <a:ext cx="841248" cy="0"/>
-          </a:xfrm>
-          <a:prstGeom prst="line">
-            <a:avLst/>
-          </a:prstGeom>
-          <a:ln w="25400">
-            <a:solidFill>
-              <a:srgbClr val="1B646D"/>
-            </a:solidFill>
-            <a:tailEnd type="triangle" w="med" len="med"/>
-          </a:ln>
-        </p:spPr>
-        <p:style>
-          <a:lnRef idx="2">
-            <a:schemeClr val="accent1"/>
-          </a:lnRef>
-          <a:fillRef idx="0">
-            <a:schemeClr val="accent1"/>
-          </a:fillRef>
-          <a:effectRef idx="1">
-            <a:schemeClr val="accent1"/>
-          </a:effectRef>
-          <a:fontRef idx="minor">
-            <a:schemeClr val="tx1"/>
-          </a:fontRef>
-        </p:style>
-      </p:cxnSp>
-      <p:cxnSp>
-        <p:nvCxnSpPr>
-          <p:cNvPr id="13" name="Connector 12"/>
-          <p:cNvCxnSpPr/>
-          <p:nvPr/>
-        </p:nvCxnSpPr>
-        <p:spPr>
-          <a:xfrm>
-            <a:off x="6766560" y="2404872"/>
-            <a:ext cx="950976" cy="0"/>
-          </a:xfrm>
-          <a:prstGeom prst="line">
-            <a:avLst/>
-          </a:prstGeom>
-          <a:ln w="38100">
-            <a:solidFill>
-              <a:srgbClr val="933723"/>
-            </a:solidFill>
-            <a:tailEnd type="triangle" w="med" len="med"/>
-          </a:ln>
-        </p:spPr>
-        <p:style>
-          <a:lnRef idx="2">
-            <a:schemeClr val="accent1"/>
-          </a:lnRef>
-          <a:fillRef idx="0">
-            <a:schemeClr val="accent1"/>
-          </a:fillRef>
-          <a:effectRef idx="1">
-            <a:schemeClr val="accent1"/>
-          </a:effectRef>
-          <a:fontRef idx="minor">
-            <a:schemeClr val="tx1"/>
-          </a:fontRef>
-        </p:style>
-      </p:cxnSp>
-      <p:cxnSp>
-        <p:nvCxnSpPr>
-          <p:cNvPr id="14" name="Connector 13"/>
-          <p:cNvCxnSpPr/>
-          <p:nvPr/>
-        </p:nvCxnSpPr>
-        <p:spPr>
-          <a:xfrm>
-            <a:off x="6766560" y="4325112"/>
-            <a:ext cx="950976" cy="0"/>
-          </a:xfrm>
-          <a:prstGeom prst="line">
-            <a:avLst/>
-          </a:prstGeom>
-          <a:ln w="25400">
-            <a:solidFill>
-              <a:srgbClr val="C7CED5"/>
-            </a:solidFill>
-            <a:tailEnd type="triangle" w="med" len="med"/>
-          </a:ln>
-        </p:spPr>
-        <p:style>
-          <a:lnRef idx="2">
-            <a:schemeClr val="accent1"/>
-          </a:lnRef>
-          <a:fillRef idx="0">
-            <a:schemeClr val="accent1"/>
-          </a:fillRef>
-          <a:effectRef idx="1">
-            <a:schemeClr val="accent1"/>
-          </a:effectRef>
-          <a:fontRef idx="minor">
-            <a:schemeClr val="tx1"/>
-          </a:fontRef>
-        </p:style>
-      </p:cxnSp>
-      <p:cxnSp>
-        <p:nvCxnSpPr>
-          <p:cNvPr id="15" name="Connector 14"/>
-          <p:cNvCxnSpPr/>
-          <p:nvPr/>
-        </p:nvCxnSpPr>
-        <p:spPr>
-          <a:xfrm>
-            <a:off x="5669280" y="2889504"/>
-            <a:ext cx="0" cy="896112"/>
-          </a:xfrm>
-          <a:prstGeom prst="line">
-            <a:avLst/>
-          </a:prstGeom>
-          <a:ln w="31750">
-            <a:solidFill>
-              <a:srgbClr val="A9611A"/>
-            </a:solidFill>
-            <a:tailEnd type="triangle" w="med" len="med"/>
-          </a:ln>
-        </p:spPr>
-        <p:style>
-          <a:lnRef idx="2">
-            <a:schemeClr val="accent1"/>
-          </a:lnRef>
-          <a:fillRef idx="0">
-            <a:schemeClr val="accent1"/>
-          </a:fillRef>
-          <a:effectRef idx="1">
-            <a:schemeClr val="accent1"/>
-          </a:effectRef>
-          <a:fontRef idx="minor">
-            <a:schemeClr val="tx1"/>
-          </a:fontRef>
-        </p:style>
-      </p:cxnSp>
-      <p:sp>
-        <p:nvSpPr>
-          <p:cNvPr id="16" name="TextBox 15"/>
-          <p:cNvSpPr txBox="1"/>
-          <p:nvPr/>
-        </p:nvSpPr>
-        <p:spPr>
-          <a:xfrm>
-            <a:off x="5779008" y="3145536"/>
-            <a:ext cx="1828800" cy="457200"/>
-          </a:xfrm>
-          <a:prstGeom prst="rect">
-            <a:avLst/>
-          </a:prstGeom>
-          <a:noFill/>
-        </p:spPr>
-        <p:txBody>
-          <a:bodyPr wrap="square" lIns="0" rIns="0" tIns="0" bIns="0" anchor="t">
-            <a:spAutoFit/>
-          </a:bodyPr>
-          <a:lstStyle/>
-          <a:p>
-            <a:pPr algn="l">
-              <a:spcBef>
-                <a:spcPts val="0"/>
-              </a:spcBef>
-              <a:spcAft>
-                <a:spcPts val="0"/>
-              </a:spcAft>
-            </a:pPr>
-            <a:r>
-              <a:rPr sz="1000" b="1">
-                <a:solidFill>
-                  <a:srgbClr val="A9611A"/>
-                </a:solidFill>
-                <a:latin typeface="Consolas"/>
-              </a:rPr>
-              <a:t>A   s → Gy(s)</a:t>
-            </a:r>
-          </a:p>
-          <a:p>
-            <a:pPr>
-              <a:spcBef>
-                <a:spcPts val="0"/>
-              </a:spcBef>
-              <a:spcAft>
-                <a:spcPts val="0"/>
-              </a:spcAft>
-            </a:pPr>
-            <a:r>
-              <a:rPr sz="900" b="0">
-                <a:solidFill>
-                  <a:srgbClr val="78838F"/>
-                </a:solidFill>
-                <a:latin typeface="Consolas"/>
-              </a:rPr>
-              <a:t>     Fy de-rated</a:t>
-            </a:r>
-          </a:p>
-        </p:txBody>
-      </p:sp>
-      <p:cxnSp>
-        <p:nvCxnSpPr>
-          <p:cNvPr id="17" name="Connector 16"/>
-          <p:cNvCxnSpPr/>
-          <p:nvPr/>
-        </p:nvCxnSpPr>
-        <p:spPr>
-          <a:xfrm flipV="1">
-            <a:off x="4846320" y="2889504"/>
-            <a:ext cx="0" cy="896112"/>
-          </a:xfrm>
-          <a:prstGeom prst="line">
-            <a:avLst/>
-          </a:prstGeom>
-          <a:ln w="38100">
-            <a:solidFill>
-              <a:srgbClr val="933723"/>
-            </a:solidFill>
-            <a:tailEnd type="triangle" w="med" len="med"/>
-          </a:ln>
-        </p:spPr>
-        <p:style>
-          <a:lnRef idx="2">
-            <a:schemeClr val="accent1"/>
-          </a:lnRef>
-          <a:fillRef idx="0">
-            <a:schemeClr val="accent1"/>
-          </a:fillRef>
-          <a:effectRef idx="1">
-            <a:schemeClr val="accent1"/>
-          </a:effectRef>
-          <a:fontRef idx="minor">
-            <a:schemeClr val="tx1"/>
-          </a:fontRef>
-        </p:style>
-      </p:cxnSp>
-      <p:sp>
-        <p:nvSpPr>
-          <p:cNvPr id="18" name="TextBox 17"/>
-          <p:cNvSpPr txBox="1"/>
-          <p:nvPr/>
-        </p:nvSpPr>
-        <p:spPr>
-          <a:xfrm>
-            <a:off x="3840480" y="3218688"/>
-            <a:ext cx="914400" cy="274320"/>
-          </a:xfrm>
-          <a:prstGeom prst="rect">
-            <a:avLst/>
-          </a:prstGeom>
-          <a:noFill/>
-        </p:spPr>
-        <p:txBody>
-          <a:bodyPr wrap="square" lIns="0" rIns="0" tIns="0" bIns="0" anchor="t">
-            <a:spAutoFit/>
-          </a:bodyPr>
-          <a:lstStyle/>
-          <a:p>
-            <a:pPr algn="l">
-              <a:spcBef>
-                <a:spcPts val="0"/>
-              </a:spcBef>
-              <a:spcAft>
-                <a:spcPts val="0"/>
-              </a:spcAft>
-            </a:pPr>
-            <a:r>
-              <a:rPr sz="1300" b="1">
-                <a:solidFill>
-                  <a:srgbClr val="933723"/>
-                </a:solidFill>
-                <a:latin typeface="Consolas"/>
-              </a:rPr>
-              <a:t>C</a:t>
-            </a:r>
-          </a:p>
-        </p:txBody>
-      </p:sp>
-      <p:cxnSp>
-        <p:nvCxnSpPr>
-          <p:cNvPr id="19" name="Connector 18"/>
-          <p:cNvCxnSpPr/>
-          <p:nvPr/>
-        </p:nvCxnSpPr>
-        <p:spPr>
-          <a:xfrm flipV="1">
-            <a:off x="9144000" y="2889504"/>
-            <a:ext cx="0" cy="896112"/>
-          </a:xfrm>
-          <a:prstGeom prst="line">
-            <a:avLst/>
-          </a:prstGeom>
-          <a:ln w="19050">
-            <a:solidFill>
-              <a:srgbClr val="C7CED5"/>
-            </a:solidFill>
-            <a:prstDash val="dash"/>
-            <a:tailEnd type="triangle" w="med" len="med"/>
-          </a:ln>
-        </p:spPr>
-        <p:style>
-          <a:lnRef idx="2">
-            <a:schemeClr val="accent1"/>
-          </a:lnRef>
-          <a:fillRef idx="0">
-            <a:schemeClr val="accent1"/>
-          </a:fillRef>
-          <a:effectRef idx="1">
-            <a:schemeClr val="accent1"/>
-          </a:effectRef>
-          <a:fontRef idx="minor">
-            <a:schemeClr val="tx1"/>
-          </a:fontRef>
-        </p:style>
-      </p:cxnSp>
-      <p:sp>
-        <p:nvSpPr>
-          <p:cNvPr id="20" name="TextBox 19"/>
-          <p:cNvSpPr txBox="1"/>
-          <p:nvPr/>
-        </p:nvSpPr>
-        <p:spPr>
-          <a:xfrm>
-            <a:off x="6876288" y="4059936"/>
-            <a:ext cx="822960" cy="274320"/>
-          </a:xfrm>
-          <a:prstGeom prst="rect">
-            <a:avLst/>
-          </a:prstGeom>
-          <a:noFill/>
-        </p:spPr>
-        <p:txBody>
-          <a:bodyPr wrap="square" lIns="0" rIns="0" tIns="0" bIns="0" anchor="t">
-            <a:spAutoFit/>
-          </a:bodyPr>
-          <a:lstStyle/>
-          <a:p>
-            <a:pPr algn="l">
-              <a:spcBef>
-                <a:spcPts val="0"/>
-              </a:spcBef>
-              <a:spcAft>
-                <a:spcPts val="0"/>
-              </a:spcAft>
-            </a:pPr>
-            <a:r>
-              <a:rPr sz="1300" b="1">
-                <a:solidFill>
-                  <a:srgbClr val="78838F"/>
-                </a:solidFill>
-                <a:latin typeface="Consolas"/>
-              </a:rPr>
-              <a:t>B</a:t>
-            </a:r>
-          </a:p>
-        </p:txBody>
-      </p:sp>
-      <p:sp>
-        <p:nvSpPr>
-          <p:cNvPr id="21" name="TextBox 20"/>
-          <p:cNvSpPr txBox="1"/>
-          <p:nvPr/>
-        </p:nvSpPr>
-        <p:spPr>
-          <a:xfrm>
-            <a:off x="10469880" y="2011680"/>
-            <a:ext cx="1645920" cy="914400"/>
-          </a:xfrm>
-          <a:prstGeom prst="rect">
-            <a:avLst/>
-          </a:prstGeom>
-          <a:noFill/>
-        </p:spPr>
-        <p:txBody>
-          <a:bodyPr wrap="square" lIns="0" rIns="0" tIns="0" bIns="0" anchor="t">
-            <a:spAutoFit/>
-          </a:bodyPr>
-          <a:lstStyle/>
-          <a:p>
-            <a:pPr algn="l">
-              <a:spcBef>
-                <a:spcPts val="0"/>
-              </a:spcBef>
-              <a:spcAft>
-                <a:spcPts val="0"/>
-              </a:spcAft>
-            </a:pPr>
-            <a:r>
-              <a:rPr sz="1000" b="1">
-                <a:solidFill>
-                  <a:srgbClr val="933723"/>
-                </a:solidFill>
-                <a:latin typeface="Consolas"/>
-              </a:rPr>
-              <a:t>PATH C</a:t>
-            </a:r>
-          </a:p>
-          <a:p>
-            <a:pPr>
-              <a:spcBef>
-                <a:spcPts val="0"/>
-              </a:spcBef>
-              <a:spcAft>
-                <a:spcPts val="0"/>
-              </a:spcAft>
-            </a:pPr>
-            <a:r>
-              <a:rPr sz="900" b="0">
-                <a:solidFill>
-                  <a:srgbClr val="933723"/>
-                </a:solidFill>
-                <a:latin typeface="Consolas"/>
-              </a:rPr>
-              <a:t>reaches the</a:t>
-            </a:r>
-          </a:p>
-          <a:p>
-            <a:pPr>
-              <a:spcBef>
-                <a:spcPts val="0"/>
-              </a:spcBef>
-              <a:spcAft>
-                <a:spcPts val="0"/>
-              </a:spcAft>
-            </a:pPr>
-            <a:r>
-              <a:rPr sz="900" b="0">
-                <a:solidFill>
-                  <a:srgbClr val="933723"/>
-                </a:solidFill>
-                <a:latin typeface="Consolas"/>
-              </a:rPr>
-              <a:t>hardware.</a:t>
-            </a:r>
-          </a:p>
-        </p:txBody>
-      </p:sp>
-      <p:sp>
-        <p:nvSpPr>
-          <p:cNvPr id="22" name="TextBox 21"/>
-          <p:cNvSpPr txBox="1"/>
-          <p:nvPr/>
-        </p:nvSpPr>
-        <p:spPr>
-          <a:xfrm>
-            <a:off x="10469880" y="3950208"/>
-            <a:ext cx="1645920" cy="914400"/>
-          </a:xfrm>
-          <a:prstGeom prst="rect">
-            <a:avLst/>
-          </a:prstGeom>
-          <a:noFill/>
-        </p:spPr>
-        <p:txBody>
-          <a:bodyPr wrap="square" lIns="0" rIns="0" tIns="0" bIns="0" anchor="t">
-            <a:spAutoFit/>
-          </a:bodyPr>
-          <a:lstStyle/>
-          <a:p>
-            <a:pPr algn="l">
-              <a:spcBef>
-                <a:spcPts val="0"/>
-              </a:spcBef>
-              <a:spcAft>
-                <a:spcPts val="0"/>
-              </a:spcAft>
-            </a:pPr>
-            <a:r>
-              <a:rPr sz="900" b="0">
-                <a:solidFill>
-                  <a:srgbClr val="78838F"/>
-                </a:solidFill>
-                <a:latin typeface="Consolas"/>
-              </a:rPr>
-              <a:t>Path B partly</a:t>
-            </a:r>
-          </a:p>
-          <a:p>
-            <a:pPr>
-              <a:spcBef>
-                <a:spcPts val="0"/>
-              </a:spcBef>
-              <a:spcAft>
-                <a:spcPts val="0"/>
-              </a:spcAft>
-            </a:pPr>
-            <a:r>
-              <a:rPr sz="900" b="0">
-                <a:solidFill>
-                  <a:srgbClr val="78838F"/>
-                </a:solidFill>
-                <a:latin typeface="Consolas"/>
-              </a:rPr>
-              <a:t>suppressed:</a:t>
-            </a:r>
-          </a:p>
-          <a:p>
-            <a:pPr>
-              <a:spcBef>
-                <a:spcPts val="0"/>
-              </a:spcBef>
-              <a:spcAft>
-                <a:spcPts val="0"/>
-              </a:spcAft>
-            </a:pPr>
-            <a:r>
-              <a:rPr sz="900" b="0">
-                <a:solidFill>
-                  <a:srgbClr val="78838F"/>
-                </a:solidFill>
-                <a:latin typeface="Consolas"/>
-              </a:rPr>
-              <a:t>Supp2WC = 0</a:t>
-            </a:r>
-          </a:p>
-        </p:txBody>
-      </p:sp>
-      <p:sp>
-        <p:nvSpPr>
-          <p:cNvPr id="23" name="TextBox 22"/>
-          <p:cNvSpPr txBox="1"/>
-          <p:nvPr/>
-        </p:nvSpPr>
-        <p:spPr>
-          <a:xfrm>
-            <a:off x="566928" y="5193792"/>
-            <a:ext cx="11064240" cy="548640"/>
-          </a:xfrm>
-          <a:prstGeom prst="rect">
-            <a:avLst/>
-          </a:prstGeom>
-          <a:noFill/>
-        </p:spPr>
-        <p:txBody>
-          <a:bodyPr wrap="square" lIns="0" rIns="0" tIns="0" bIns="0" anchor="t">
-            <a:spAutoFit/>
-          </a:bodyPr>
-          <a:lstStyle/>
-          <a:p>
-            <a:pPr algn="l">
-              <a:spcBef>
-                <a:spcPts val="0"/>
-              </a:spcBef>
-              <a:spcAft>
-                <a:spcPts val="0"/>
-              </a:spcAft>
-            </a:pPr>
-            <a:r>
-              <a:rPr sz="950" b="0">
-                <a:solidFill>
-                  <a:srgbClr val="78838F"/>
-                </a:solidFill>
-                <a:latin typeface="Consolas"/>
-              </a:rPr>
-              <a:t>In a corner the same axle torque produces a different wheel acceleration — cornering reaches the bench through the torque, with no lateral</a:t>
-            </a:r>
-          </a:p>
-        </p:txBody>
-      </p:sp>
-      <p:sp>
-        <p:nvSpPr>
-          <p:cNvPr id="24" name="TextBox 23"/>
-          <p:cNvSpPr txBox="1"/>
-          <p:nvPr/>
-        </p:nvSpPr>
-        <p:spPr>
-          <a:xfrm>
-            <a:off x="566928" y="5413248"/>
-            <a:ext cx="11064240" cy="548640"/>
-          </a:xfrm>
-          <a:prstGeom prst="rect">
-            <a:avLst/>
-          </a:prstGeom>
-          <a:noFill/>
-        </p:spPr>
-        <p:txBody>
-          <a:bodyPr wrap="square" lIns="0" rIns="0" tIns="0" bIns="0" anchor="t">
-            <a:spAutoFit/>
-          </a:bodyPr>
-          <a:lstStyle/>
-          <a:p>
-            <a:pPr algn="l">
-              <a:spcBef>
-                <a:spcPts val="0"/>
-              </a:spcBef>
-              <a:spcAft>
-                <a:spcPts val="0"/>
-              </a:spcAft>
-            </a:pPr>
-            <a:r>
-              <a:rPr sz="950" b="0">
-                <a:solidFill>
-                  <a:srgbClr val="78838F"/>
-                </a:solidFill>
-                <a:latin typeface="Consolas"/>
-              </a:rPr>
-              <a:t>signal crossing the interface. All three paths require Model.USE_MODE to select combined slip; at 11 or 12, paths A and C do not exist.</a:t>
-            </a:r>
-          </a:p>
-        </p:txBody>
-      </p:sp>
-    </p:spTree>
-  </p:cSld>
-  <p:clrMapOvr>
-    <a:masterClrMapping/>
-  </p:clrMapOvr>
-</p:sld>
-</file>
-
-<file path=ppt/slides/slide7.xml><?xml version="1.0" encoding="utf-8"?>
-<p:sld xmlns:a="http://schemas.openxmlformats.org/drawingml/2006/main" xmlns:p="http://schemas.openxmlformats.org/presentationml/2006/main" xmlns:r="http://schemas.openxmlformats.org/officeDocument/2006/relationships">
-  <p:cSld>
-    <p:bg>
-      <p:bgPr>
-        <a:solidFill>
-          <a:srgbClr val="FFFFFF"/>
-        </a:solidFill>
-        <a:effectLst/>
-      </p:bgPr>
-    </p:bg>
-    <p:spTree>
-      <p:nvGrpSpPr>
-        <p:cNvPr id="1" name=""/>
-        <p:cNvGrpSpPr/>
-        <p:nvPr/>
-      </p:nvGrpSpPr>
-      <p:grpSpPr/>
-      <p:cxnSp>
-        <p:nvCxnSpPr>
-          <p:cNvPr id="2" name="Connector 1"/>
-          <p:cNvCxnSpPr/>
-          <p:nvPr/>
-        </p:nvCxnSpPr>
-        <p:spPr>
-          <a:xfrm>
-            <a:off x="566928" y="475488"/>
-            <a:ext cx="11064240" cy="0"/>
-          </a:xfrm>
-          <a:prstGeom prst="line">
-            <a:avLst/>
-          </a:prstGeom>
-          <a:ln w="12700">
-            <a:solidFill>
-              <a:srgbClr val="C7CED5"/>
-            </a:solidFill>
-          </a:ln>
-        </p:spPr>
-        <p:style>
-          <a:lnRef idx="2">
-            <a:schemeClr val="accent1"/>
-          </a:lnRef>
-          <a:fillRef idx="0">
-            <a:schemeClr val="accent1"/>
-          </a:fillRef>
-          <a:effectRef idx="1">
-            <a:schemeClr val="accent1"/>
-          </a:effectRef>
-          <a:fontRef idx="minor">
-            <a:schemeClr val="tx1"/>
-          </a:fontRef>
-        </p:style>
-      </p:cxnSp>
-      <p:sp>
-        <p:nvSpPr>
-          <p:cNvPr id="3" name="TextBox 2"/>
-          <p:cNvSpPr txBox="1"/>
-          <p:nvPr/>
-        </p:nvSpPr>
-        <p:spPr>
-          <a:xfrm>
-            <a:off x="566928" y="219456"/>
-            <a:ext cx="7315200" cy="237744"/>
-          </a:xfrm>
-          <a:prstGeom prst="rect">
-            <a:avLst/>
-          </a:prstGeom>
-          <a:noFill/>
-        </p:spPr>
-        <p:txBody>
-          <a:bodyPr wrap="square" lIns="0" rIns="0" tIns="0" bIns="0" anchor="t">
-            <a:spAutoFit/>
-          </a:bodyPr>
-          <a:lstStyle/>
-          <a:p>
-            <a:pPr algn="l"/>
-            <a:r>
-              <a:rPr sz="900" b="1">
-                <a:solidFill>
-                  <a:srgbClr val="A9611A"/>
-                </a:solidFill>
-                <a:latin typeface="Consolas"/>
-              </a:rPr>
-              <a:t>07 / 08</a:t>
-            </a:r>
-            <a:r>
-              <a:rPr sz="900">
-                <a:solidFill>
-                  <a:srgbClr val="78838F"/>
-                </a:solidFill>
-                <a:latin typeface="Consolas"/>
-              </a:rPr>
-              <a:t>    STABILITY</a:t>
-            </a:r>
-          </a:p>
-        </p:txBody>
-      </p:sp>
-      <p:sp>
-        <p:nvSpPr>
-          <p:cNvPr id="4" name="TextBox 3"/>
-          <p:cNvSpPr txBox="1"/>
-          <p:nvPr/>
-        </p:nvSpPr>
-        <p:spPr>
-          <a:xfrm>
-            <a:off x="566928" y="640080"/>
-            <a:ext cx="11064240" cy="566928"/>
-          </a:xfrm>
-          <a:prstGeom prst="rect">
-            <a:avLst/>
-          </a:prstGeom>
-          <a:noFill/>
-        </p:spPr>
-        <p:txBody>
-          <a:bodyPr wrap="square" lIns="0" rIns="0" tIns="0" bIns="0" anchor="t">
-            <a:spAutoFit/>
-          </a:bodyPr>
-          <a:lstStyle/>
-          <a:p>
-            <a:pPr algn="l">
-              <a:spcBef>
-                <a:spcPts val="0"/>
-              </a:spcBef>
-              <a:spcAft>
-                <a:spcPts val="0"/>
-              </a:spcAft>
-            </a:pPr>
-            <a:r>
-              <a:rPr sz="3000" b="1">
-                <a:solidFill>
-                  <a:srgbClr val="111820"/>
-                </a:solidFill>
-                <a:latin typeface="Bahnschrift"/>
-              </a:rPr>
-              <a:t>A ~45 Hz mode whose damping grows with speed</a:t>
-            </a:r>
-          </a:p>
-        </p:txBody>
-      </p:sp>
-      <p:sp>
-        <p:nvSpPr>
-          <p:cNvPr id="5" name="TextBox 4"/>
-          <p:cNvSpPr txBox="1"/>
-          <p:nvPr/>
-        </p:nvSpPr>
-        <p:spPr>
-          <a:xfrm>
-            <a:off x="566928" y="1243584"/>
-            <a:ext cx="10424160" cy="457200"/>
-          </a:xfrm>
-          <a:prstGeom prst="rect">
-            <a:avLst/>
-          </a:prstGeom>
-          <a:noFill/>
-        </p:spPr>
-        <p:txBody>
-          <a:bodyPr wrap="square" lIns="0" rIns="0" tIns="0" bIns="0" anchor="t">
-            <a:spAutoFit/>
-          </a:bodyPr>
-          <a:lstStyle/>
-          <a:p>
-            <a:pPr algn="l">
-              <a:spcBef>
-                <a:spcPts val="0"/>
-              </a:spcBef>
-              <a:spcAft>
-                <a:spcPts val="0"/>
-              </a:spcAft>
-            </a:pPr>
-            <a:r>
-              <a:rPr sz="1250" b="0">
-                <a:solidFill>
-                  <a:srgbClr val="4A5764"/>
-                </a:solidFill>
-                <a:latin typeface="Segoe UI"/>
-              </a:rPr>
-              <a:t>Wheel inertia working against tire relaxation gives a second-order system. Its frequency does not change with speed. Its damping is proportional to speed, and the one-step delay takes a fixed amount away.</a:t>
-            </a:r>
-          </a:p>
-        </p:txBody>
-      </p:sp>
-      <p:sp>
-        <p:nvSpPr>
-          <p:cNvPr id="6" name="Rectangle 5"/>
-          <p:cNvSpPr/>
-          <p:nvPr/>
-        </p:nvSpPr>
-        <p:spPr>
-          <a:xfrm>
-            <a:off x="566928" y="1810512"/>
-            <a:ext cx="11064240" cy="1005840"/>
-          </a:xfrm>
-          <a:prstGeom prst="rect">
-            <a:avLst/>
-          </a:prstGeom>
-          <a:solidFill>
-            <a:srgbClr val="F4F6F7"/>
-          </a:solidFill>
-          <a:ln w="12700">
-            <a:solidFill>
-              <a:srgbClr val="C7CED5"/>
-            </a:solidFill>
-          </a:ln>
-          <a:effectLst/>
-        </p:spPr>
-        <p:style>
-          <a:lnRef idx="1">
-            <a:schemeClr val="accent1"/>
-          </a:lnRef>
-          <a:fillRef idx="3">
-            <a:schemeClr val="accent1"/>
-          </a:fillRef>
-          <a:effectRef idx="2">
-            <a:schemeClr val="accent1"/>
-          </a:effectRef>
-          <a:fontRef idx="minor">
-            <a:schemeClr val="lt1"/>
-          </a:fontRef>
-        </p:style>
-        <p:txBody>
-          <a:bodyPr rtlCol="0" anchor="t" wrap="square" tIns="91440" bIns="54864" lIns="146304"/>
-          <a:lstStyle/>
-          <a:p>
-            <a:pPr algn="ctr">
-              <a:spcBef>
-                <a:spcPts val="0"/>
-              </a:spcBef>
-              <a:spcAft>
-                <a:spcPts val="0"/>
-              </a:spcAft>
-            </a:pPr>
-            <a:r>
-              <a:rPr sz="1100" b="1">
-                <a:solidFill>
-                  <a:srgbClr val="111820"/>
-                </a:solidFill>
-                <a:latin typeface="Consolas"/>
-              </a:rPr>
-              <a:t>wn   = r * sqrt( Cs / (I*sigma) )  ~ 286 rad/s ~ 45 Hz   — INDEPENDENT of speed</a:t>
-            </a:r>
-          </a:p>
-          <a:p>
-            <a:pPr>
-              <a:spcBef>
-                <a:spcPts val="200"/>
-              </a:spcBef>
-              <a:spcAft>
-                <a:spcPts val="0"/>
-              </a:spcAft>
-            </a:pPr>
-            <a:r>
-              <a:rPr sz="1100" b="0">
-                <a:solidFill>
-                  <a:srgbClr val="111820"/>
-                </a:solidFill>
-                <a:latin typeface="Consolas"/>
-              </a:rPr>
-              <a:t>zeta = vx / (2*sigma*wn)           ~ vx / 28.6           — proportional to speed</a:t>
-            </a:r>
-          </a:p>
-          <a:p>
-            <a:pPr>
-              <a:spcBef>
-                <a:spcPts val="200"/>
-              </a:spcBef>
-              <a:spcAft>
-                <a:spcPts val="0"/>
-              </a:spcAft>
-            </a:pPr>
-            <a:r>
-              <a:rPr sz="1100" b="1">
-                <a:solidFill>
-                  <a:srgbClr val="A9611A"/>
-                </a:solidFill>
-                <a:latin typeface="Consolas"/>
-              </a:rPr>
-              <a:t>delay cost                         ~ wn*Ts/2 = 0.143     — fixed</a:t>
+              <a:t>disagree.</a:t>
             </a:r>
           </a:p>
         </p:txBody>
@@ -10542,1789 +9966,8 @@
         </p:nvSpPr>
         <p:spPr>
           <a:xfrm>
-            <a:off x="822960" y="3072384"/>
-            <a:ext cx="6492240" cy="2304288"/>
-          </a:xfrm>
-          <a:prstGeom prst="rect">
-            <a:avLst/>
-          </a:prstGeom>
-          <a:noFill/>
-          <a:ln w="12700">
-            <a:solidFill>
-              <a:srgbClr val="C7CED5"/>
-            </a:solidFill>
-          </a:ln>
-          <a:effectLst/>
-        </p:spPr>
-        <p:style>
-          <a:lnRef idx="1">
-            <a:schemeClr val="accent1"/>
-          </a:lnRef>
-          <a:fillRef idx="3">
-            <a:schemeClr val="accent1"/>
-          </a:fillRef>
-          <a:effectRef idx="2">
-            <a:schemeClr val="accent1"/>
-          </a:effectRef>
-          <a:fontRef idx="minor">
-            <a:schemeClr val="lt1"/>
-          </a:fontRef>
-        </p:style>
-        <p:txBody>
-          <a:bodyPr rtlCol="0" anchor="t" wrap="square" tIns="54864" bIns="54864"/>
-          <a:lstStyle/>
-          <a:p>
-            <a:pPr algn="ctr"/>
-          </a:p>
-        </p:txBody>
-      </p:sp>
-      <p:sp>
-        <p:nvSpPr>
-          <p:cNvPr id="8" name="Rectangle 7"/>
-          <p:cNvSpPr/>
-          <p:nvPr/>
-        </p:nvSpPr>
-        <p:spPr>
-          <a:xfrm>
-            <a:off x="822960" y="3072384"/>
-            <a:ext cx="432816" cy="2304288"/>
-          </a:xfrm>
-          <a:prstGeom prst="rect">
-            <a:avLst/>
-          </a:prstGeom>
-          <a:solidFill>
-            <a:srgbClr val="D9E9EA"/>
-          </a:solidFill>
-          <a:ln w="6350">
-            <a:solidFill>
-              <a:srgbClr val="D9E9EA"/>
-            </a:solidFill>
-          </a:ln>
-          <a:effectLst/>
-        </p:spPr>
-        <p:style>
-          <a:lnRef idx="1">
-            <a:schemeClr val="accent1"/>
-          </a:lnRef>
-          <a:fillRef idx="3">
-            <a:schemeClr val="accent1"/>
-          </a:fillRef>
-          <a:effectRef idx="2">
-            <a:schemeClr val="accent1"/>
-          </a:effectRef>
-          <a:fontRef idx="minor">
-            <a:schemeClr val="lt1"/>
-          </a:fontRef>
-        </p:style>
-        <p:txBody>
-          <a:bodyPr rtlCol="0" anchor="t" wrap="square" tIns="54864" bIns="54864"/>
-          <a:lstStyle/>
-          <a:p/>
-        </p:txBody>
-      </p:sp>
-      <p:sp>
-        <p:nvSpPr>
-          <p:cNvPr id="9" name="Rectangle 8"/>
-          <p:cNvSpPr/>
-          <p:nvPr/>
-        </p:nvSpPr>
-        <p:spPr>
-          <a:xfrm>
-            <a:off x="1255776" y="3072384"/>
-            <a:ext cx="454457" cy="2304288"/>
-          </a:xfrm>
-          <a:prstGeom prst="rect">
-            <a:avLst/>
-          </a:prstGeom>
-          <a:solidFill>
-            <a:srgbClr val="F3DED8"/>
-          </a:solidFill>
-          <a:ln w="6350">
-            <a:solidFill>
-              <a:srgbClr val="F3DED8"/>
-            </a:solidFill>
-          </a:ln>
-          <a:effectLst/>
-        </p:spPr>
-        <p:style>
-          <a:lnRef idx="1">
-            <a:schemeClr val="accent1"/>
-          </a:lnRef>
-          <a:fillRef idx="3">
-            <a:schemeClr val="accent1"/>
-          </a:fillRef>
-          <a:effectRef idx="2">
-            <a:schemeClr val="accent1"/>
-          </a:effectRef>
-          <a:fontRef idx="minor">
-            <a:schemeClr val="lt1"/>
-          </a:fontRef>
-        </p:style>
-        <p:txBody>
-          <a:bodyPr rtlCol="0" anchor="t" wrap="square" tIns="54864" bIns="54864"/>
-          <a:lstStyle/>
-          <a:p/>
-        </p:txBody>
-      </p:sp>
-      <p:cxnSp>
-        <p:nvCxnSpPr>
-          <p:cNvPr id="10" name="Connector 9"/>
-          <p:cNvCxnSpPr/>
-          <p:nvPr/>
-        </p:nvCxnSpPr>
-        <p:spPr>
-          <a:xfrm>
-            <a:off x="822960" y="4800600"/>
-            <a:ext cx="6492240" cy="0"/>
-          </a:xfrm>
-          <a:prstGeom prst="line">
-            <a:avLst/>
-          </a:prstGeom>
-          <a:ln w="9525">
-            <a:solidFill>
-              <a:srgbClr val="C7CED5"/>
-            </a:solidFill>
-            <a:prstDash val="dash"/>
-          </a:ln>
-        </p:spPr>
-        <p:style>
-          <a:lnRef idx="2">
-            <a:schemeClr val="accent1"/>
-          </a:lnRef>
-          <a:fillRef idx="0">
-            <a:schemeClr val="accent1"/>
-          </a:fillRef>
-          <a:effectRef idx="1">
-            <a:schemeClr val="accent1"/>
-          </a:effectRef>
-          <a:fontRef idx="minor">
-            <a:schemeClr val="tx1"/>
-          </a:fontRef>
-        </p:style>
-      </p:cxnSp>
-      <p:sp>
-        <p:nvSpPr>
-          <p:cNvPr id="11" name="TextBox 10"/>
-          <p:cNvSpPr txBox="1"/>
-          <p:nvPr/>
-        </p:nvSpPr>
-        <p:spPr>
-          <a:xfrm>
-            <a:off x="402336" y="4700016"/>
-            <a:ext cx="402336" cy="201168"/>
-          </a:xfrm>
-          <a:prstGeom prst="rect">
-            <a:avLst/>
-          </a:prstGeom>
-          <a:noFill/>
-        </p:spPr>
-        <p:txBody>
-          <a:bodyPr wrap="square" lIns="0" rIns="0" tIns="0" bIns="0" anchor="t">
-            <a:spAutoFit/>
-          </a:bodyPr>
-          <a:lstStyle/>
-          <a:p>
-            <a:pPr algn="r">
-              <a:spcBef>
-                <a:spcPts val="0"/>
-              </a:spcBef>
-              <a:spcAft>
-                <a:spcPts val="0"/>
-              </a:spcAft>
-            </a:pPr>
-            <a:r>
-              <a:rPr sz="850" b="0">
-                <a:solidFill>
-                  <a:srgbClr val="78838F"/>
-                </a:solidFill>
-                <a:latin typeface="Consolas"/>
-              </a:rPr>
-              <a:t>0.2</a:t>
-            </a:r>
-          </a:p>
-        </p:txBody>
-      </p:sp>
-      <p:cxnSp>
-        <p:nvCxnSpPr>
-          <p:cNvPr id="12" name="Connector 11"/>
-          <p:cNvCxnSpPr/>
-          <p:nvPr/>
-        </p:nvCxnSpPr>
-        <p:spPr>
-          <a:xfrm>
-            <a:off x="822960" y="4224528"/>
-            <a:ext cx="6492240" cy="0"/>
-          </a:xfrm>
-          <a:prstGeom prst="line">
-            <a:avLst/>
-          </a:prstGeom>
-          <a:ln w="9525">
-            <a:solidFill>
-              <a:srgbClr val="C7CED5"/>
-            </a:solidFill>
-            <a:prstDash val="dash"/>
-          </a:ln>
-        </p:spPr>
-        <p:style>
-          <a:lnRef idx="2">
-            <a:schemeClr val="accent1"/>
-          </a:lnRef>
-          <a:fillRef idx="0">
-            <a:schemeClr val="accent1"/>
-          </a:fillRef>
-          <a:effectRef idx="1">
-            <a:schemeClr val="accent1"/>
-          </a:effectRef>
-          <a:fontRef idx="minor">
-            <a:schemeClr val="tx1"/>
-          </a:fontRef>
-        </p:style>
-      </p:cxnSp>
-      <p:sp>
-        <p:nvSpPr>
-          <p:cNvPr id="13" name="TextBox 12"/>
-          <p:cNvSpPr txBox="1"/>
-          <p:nvPr/>
-        </p:nvSpPr>
-        <p:spPr>
-          <a:xfrm>
-            <a:off x="402336" y="4123944"/>
-            <a:ext cx="402336" cy="201168"/>
-          </a:xfrm>
-          <a:prstGeom prst="rect">
-            <a:avLst/>
-          </a:prstGeom>
-          <a:noFill/>
-        </p:spPr>
-        <p:txBody>
-          <a:bodyPr wrap="square" lIns="0" rIns="0" tIns="0" bIns="0" anchor="t">
-            <a:spAutoFit/>
-          </a:bodyPr>
-          <a:lstStyle/>
-          <a:p>
-            <a:pPr algn="r">
-              <a:spcBef>
-                <a:spcPts val="0"/>
-              </a:spcBef>
-              <a:spcAft>
-                <a:spcPts val="0"/>
-              </a:spcAft>
-            </a:pPr>
-            <a:r>
-              <a:rPr sz="850" b="0">
-                <a:solidFill>
-                  <a:srgbClr val="78838F"/>
-                </a:solidFill>
-                <a:latin typeface="Consolas"/>
-              </a:rPr>
-              <a:t>0.4</a:t>
-            </a:r>
-          </a:p>
-        </p:txBody>
-      </p:sp>
-      <p:cxnSp>
-        <p:nvCxnSpPr>
-          <p:cNvPr id="14" name="Connector 13"/>
-          <p:cNvCxnSpPr/>
-          <p:nvPr/>
-        </p:nvCxnSpPr>
-        <p:spPr>
-          <a:xfrm>
-            <a:off x="822960" y="3648456"/>
-            <a:ext cx="6492240" cy="0"/>
-          </a:xfrm>
-          <a:prstGeom prst="line">
-            <a:avLst/>
-          </a:prstGeom>
-          <a:ln w="9525">
-            <a:solidFill>
-              <a:srgbClr val="C7CED5"/>
-            </a:solidFill>
-            <a:prstDash val="dash"/>
-          </a:ln>
-        </p:spPr>
-        <p:style>
-          <a:lnRef idx="2">
-            <a:schemeClr val="accent1"/>
-          </a:lnRef>
-          <a:fillRef idx="0">
-            <a:schemeClr val="accent1"/>
-          </a:fillRef>
-          <a:effectRef idx="1">
-            <a:schemeClr val="accent1"/>
-          </a:effectRef>
-          <a:fontRef idx="minor">
-            <a:schemeClr val="tx1"/>
-          </a:fontRef>
-        </p:style>
-      </p:cxnSp>
-      <p:sp>
-        <p:nvSpPr>
-          <p:cNvPr id="15" name="TextBox 14"/>
-          <p:cNvSpPr txBox="1"/>
-          <p:nvPr/>
-        </p:nvSpPr>
-        <p:spPr>
-          <a:xfrm>
-            <a:off x="402336" y="3547872"/>
-            <a:ext cx="402336" cy="201168"/>
-          </a:xfrm>
-          <a:prstGeom prst="rect">
-            <a:avLst/>
-          </a:prstGeom>
-          <a:noFill/>
-        </p:spPr>
-        <p:txBody>
-          <a:bodyPr wrap="square" lIns="0" rIns="0" tIns="0" bIns="0" anchor="t">
-            <a:spAutoFit/>
-          </a:bodyPr>
-          <a:lstStyle/>
-          <a:p>
-            <a:pPr algn="r">
-              <a:spcBef>
-                <a:spcPts val="0"/>
-              </a:spcBef>
-              <a:spcAft>
-                <a:spcPts val="0"/>
-              </a:spcAft>
-            </a:pPr>
-            <a:r>
-              <a:rPr sz="850" b="0">
-                <a:solidFill>
-                  <a:srgbClr val="78838F"/>
-                </a:solidFill>
-                <a:latin typeface="Consolas"/>
-              </a:rPr>
-              <a:t>0.6</a:t>
-            </a:r>
-          </a:p>
-        </p:txBody>
-      </p:sp>
-      <p:cxnSp>
-        <p:nvCxnSpPr>
-          <p:cNvPr id="16" name="Connector 15"/>
-          <p:cNvCxnSpPr/>
-          <p:nvPr/>
-        </p:nvCxnSpPr>
-        <p:spPr>
-          <a:xfrm>
-            <a:off x="822960" y="5376672"/>
-            <a:ext cx="6492240" cy="0"/>
-          </a:xfrm>
-          <a:prstGeom prst="line">
-            <a:avLst/>
-          </a:prstGeom>
-          <a:ln w="19050">
-            <a:solidFill>
-              <a:srgbClr val="111820"/>
-            </a:solidFill>
-          </a:ln>
-        </p:spPr>
-        <p:style>
-          <a:lnRef idx="2">
-            <a:schemeClr val="accent1"/>
-          </a:lnRef>
-          <a:fillRef idx="0">
-            <a:schemeClr val="accent1"/>
-          </a:fillRef>
-          <a:effectRef idx="1">
-            <a:schemeClr val="accent1"/>
-          </a:effectRef>
-          <a:fontRef idx="minor">
-            <a:schemeClr val="tx1"/>
-          </a:fontRef>
-        </p:style>
-      </p:cxnSp>
-      <p:cxnSp>
-        <p:nvCxnSpPr>
-          <p:cNvPr id="17" name="Connector 16"/>
-          <p:cNvCxnSpPr/>
-          <p:nvPr/>
-        </p:nvCxnSpPr>
-        <p:spPr>
-          <a:xfrm flipV="1">
-            <a:off x="822960" y="2355315"/>
-            <a:ext cx="6492240" cy="3021357"/>
-          </a:xfrm>
-          <a:prstGeom prst="line">
-            <a:avLst/>
-          </a:prstGeom>
-          <a:ln w="31750">
-            <a:solidFill>
-              <a:srgbClr val="1B646D"/>
-            </a:solidFill>
-            <a:prstDash val="dash"/>
-          </a:ln>
-        </p:spPr>
-        <p:style>
-          <a:lnRef idx="2">
-            <a:schemeClr val="accent1"/>
-          </a:lnRef>
-          <a:fillRef idx="0">
-            <a:schemeClr val="accent1"/>
-          </a:fillRef>
-          <a:effectRef idx="1">
-            <a:schemeClr val="accent1"/>
-          </a:effectRef>
-          <a:fontRef idx="minor">
-            <a:schemeClr val="tx1"/>
-          </a:fontRef>
-        </p:style>
-      </p:cxnSp>
-      <p:cxnSp>
-        <p:nvCxnSpPr>
-          <p:cNvPr id="18" name="Connector 17"/>
-          <p:cNvCxnSpPr/>
-          <p:nvPr/>
-        </p:nvCxnSpPr>
-        <p:spPr>
-          <a:xfrm flipV="1">
-            <a:off x="1708069" y="2767207"/>
-            <a:ext cx="5607131" cy="2609465"/>
-          </a:xfrm>
-          <a:prstGeom prst="line">
-            <a:avLst/>
-          </a:prstGeom>
-          <a:ln w="38100">
-            <a:solidFill>
-              <a:srgbClr val="A9611A"/>
-            </a:solidFill>
-          </a:ln>
-        </p:spPr>
-        <p:style>
-          <a:lnRef idx="2">
-            <a:schemeClr val="accent1"/>
-          </a:lnRef>
-          <a:fillRef idx="0">
-            <a:schemeClr val="accent1"/>
-          </a:fillRef>
-          <a:effectRef idx="1">
-            <a:schemeClr val="accent1"/>
-          </a:effectRef>
-          <a:fontRef idx="minor">
-            <a:schemeClr val="tx1"/>
-          </a:fontRef>
-        </p:style>
-      </p:cxnSp>
-      <p:sp>
-        <p:nvSpPr>
-          <p:cNvPr id="19" name="TextBox 18"/>
-          <p:cNvSpPr txBox="1"/>
-          <p:nvPr/>
-        </p:nvSpPr>
-        <p:spPr>
-          <a:xfrm>
-            <a:off x="4754880" y="3129991"/>
-            <a:ext cx="2377440" cy="219456"/>
-          </a:xfrm>
-          <a:prstGeom prst="rect">
-            <a:avLst/>
-          </a:prstGeom>
-          <a:noFill/>
-        </p:spPr>
-        <p:txBody>
-          <a:bodyPr wrap="square" lIns="0" rIns="0" tIns="0" bIns="0" anchor="t">
-            <a:spAutoFit/>
-          </a:bodyPr>
-          <a:lstStyle/>
-          <a:p>
-            <a:pPr algn="l">
-              <a:spcBef>
-                <a:spcPts val="0"/>
-              </a:spcBef>
-              <a:spcAft>
-                <a:spcPts val="0"/>
-              </a:spcAft>
-            </a:pPr>
-            <a:r>
-              <a:rPr sz="950" b="1">
-                <a:solidFill>
-                  <a:srgbClr val="1B646D"/>
-                </a:solidFill>
-                <a:latin typeface="Consolas"/>
-              </a:rPr>
-              <a:t>zeta physical</a:t>
-            </a:r>
-          </a:p>
-        </p:txBody>
-      </p:sp>
-      <p:sp>
-        <p:nvSpPr>
-          <p:cNvPr id="20" name="TextBox 19"/>
-          <p:cNvSpPr txBox="1"/>
-          <p:nvPr/>
-        </p:nvSpPr>
-        <p:spPr>
-          <a:xfrm>
-            <a:off x="4754880" y="3878885"/>
-            <a:ext cx="2651760" cy="219456"/>
-          </a:xfrm>
-          <a:prstGeom prst="rect">
-            <a:avLst/>
-          </a:prstGeom>
-          <a:noFill/>
-        </p:spPr>
-        <p:txBody>
-          <a:bodyPr wrap="square" lIns="0" rIns="0" tIns="0" bIns="0" anchor="t">
-            <a:spAutoFit/>
-          </a:bodyPr>
-          <a:lstStyle/>
-          <a:p>
-            <a:pPr algn="l">
-              <a:spcBef>
-                <a:spcPts val="0"/>
-              </a:spcBef>
-              <a:spcAft>
-                <a:spcPts val="0"/>
-              </a:spcAft>
-            </a:pPr>
-            <a:r>
-              <a:rPr sz="950" b="1">
-                <a:solidFill>
-                  <a:srgbClr val="A9611A"/>
-                </a:solidFill>
-                <a:latin typeface="Consolas"/>
-              </a:rPr>
-              <a:t>after 1-step delay</a:t>
-            </a:r>
-          </a:p>
-        </p:txBody>
-      </p:sp>
-      <p:sp>
-        <p:nvSpPr>
-          <p:cNvPr id="21" name="TextBox 20"/>
-          <p:cNvSpPr txBox="1"/>
-          <p:nvPr/>
-        </p:nvSpPr>
-        <p:spPr>
-          <a:xfrm>
-            <a:off x="658368" y="5431536"/>
-            <a:ext cx="365760" cy="201168"/>
-          </a:xfrm>
-          <a:prstGeom prst="rect">
-            <a:avLst/>
-          </a:prstGeom>
-          <a:noFill/>
-        </p:spPr>
-        <p:txBody>
-          <a:bodyPr wrap="square" lIns="0" rIns="0" tIns="0" bIns="0" anchor="t">
-            <a:spAutoFit/>
-          </a:bodyPr>
-          <a:lstStyle/>
-          <a:p>
-            <a:pPr algn="ctr">
-              <a:spcBef>
-                <a:spcPts val="0"/>
-              </a:spcBef>
-              <a:spcAft>
-                <a:spcPts val="0"/>
-              </a:spcAft>
-            </a:pPr>
-            <a:r>
-              <a:rPr sz="850" b="0">
-                <a:solidFill>
-                  <a:srgbClr val="78838F"/>
-                </a:solidFill>
-                <a:latin typeface="Consolas"/>
-              </a:rPr>
-              <a:t>0</a:t>
-            </a:r>
-          </a:p>
-        </p:txBody>
-      </p:sp>
-      <p:sp>
-        <p:nvSpPr>
-          <p:cNvPr id="22" name="TextBox 21"/>
-          <p:cNvSpPr txBox="1"/>
-          <p:nvPr/>
-        </p:nvSpPr>
-        <p:spPr>
-          <a:xfrm>
-            <a:off x="1740408" y="5431536"/>
-            <a:ext cx="365760" cy="201168"/>
-          </a:xfrm>
-          <a:prstGeom prst="rect">
-            <a:avLst/>
-          </a:prstGeom>
-          <a:noFill/>
-        </p:spPr>
-        <p:txBody>
-          <a:bodyPr wrap="square" lIns="0" rIns="0" tIns="0" bIns="0" anchor="t">
-            <a:spAutoFit/>
-          </a:bodyPr>
-          <a:lstStyle/>
-          <a:p>
-            <a:pPr algn="ctr">
-              <a:spcBef>
-                <a:spcPts val="0"/>
-              </a:spcBef>
-              <a:spcAft>
-                <a:spcPts val="0"/>
-              </a:spcAft>
-            </a:pPr>
-            <a:r>
-              <a:rPr sz="850" b="0">
-                <a:solidFill>
-                  <a:srgbClr val="78838F"/>
-                </a:solidFill>
-                <a:latin typeface="Consolas"/>
-              </a:rPr>
-              <a:t>5</a:t>
-            </a:r>
-          </a:p>
-        </p:txBody>
-      </p:sp>
-      <p:sp>
-        <p:nvSpPr>
-          <p:cNvPr id="23" name="TextBox 22"/>
-          <p:cNvSpPr txBox="1"/>
-          <p:nvPr/>
-        </p:nvSpPr>
-        <p:spPr>
-          <a:xfrm>
-            <a:off x="2822448" y="5431536"/>
-            <a:ext cx="365760" cy="201168"/>
-          </a:xfrm>
-          <a:prstGeom prst="rect">
-            <a:avLst/>
-          </a:prstGeom>
-          <a:noFill/>
-        </p:spPr>
-        <p:txBody>
-          <a:bodyPr wrap="square" lIns="0" rIns="0" tIns="0" bIns="0" anchor="t">
-            <a:spAutoFit/>
-          </a:bodyPr>
-          <a:lstStyle/>
-          <a:p>
-            <a:pPr algn="ctr">
-              <a:spcBef>
-                <a:spcPts val="0"/>
-              </a:spcBef>
-              <a:spcAft>
-                <a:spcPts val="0"/>
-              </a:spcAft>
-            </a:pPr>
-            <a:r>
-              <a:rPr sz="850" b="0">
-                <a:solidFill>
-                  <a:srgbClr val="78838F"/>
-                </a:solidFill>
-                <a:latin typeface="Consolas"/>
-              </a:rPr>
-              <a:t>10</a:t>
-            </a:r>
-          </a:p>
-        </p:txBody>
-      </p:sp>
-      <p:sp>
-        <p:nvSpPr>
-          <p:cNvPr id="24" name="TextBox 23"/>
-          <p:cNvSpPr txBox="1"/>
-          <p:nvPr/>
-        </p:nvSpPr>
-        <p:spPr>
-          <a:xfrm>
-            <a:off x="3904488" y="5431536"/>
-            <a:ext cx="365760" cy="201168"/>
-          </a:xfrm>
-          <a:prstGeom prst="rect">
-            <a:avLst/>
-          </a:prstGeom>
-          <a:noFill/>
-        </p:spPr>
-        <p:txBody>
-          <a:bodyPr wrap="square" lIns="0" rIns="0" tIns="0" bIns="0" anchor="t">
-            <a:spAutoFit/>
-          </a:bodyPr>
-          <a:lstStyle/>
-          <a:p>
-            <a:pPr algn="ctr">
-              <a:spcBef>
-                <a:spcPts val="0"/>
-              </a:spcBef>
-              <a:spcAft>
-                <a:spcPts val="0"/>
-              </a:spcAft>
-            </a:pPr>
-            <a:r>
-              <a:rPr sz="850" b="0">
-                <a:solidFill>
-                  <a:srgbClr val="78838F"/>
-                </a:solidFill>
-                <a:latin typeface="Consolas"/>
-              </a:rPr>
-              <a:t>15</a:t>
-            </a:r>
-          </a:p>
-        </p:txBody>
-      </p:sp>
-      <p:sp>
-        <p:nvSpPr>
-          <p:cNvPr id="25" name="TextBox 24"/>
-          <p:cNvSpPr txBox="1"/>
-          <p:nvPr/>
-        </p:nvSpPr>
-        <p:spPr>
-          <a:xfrm>
-            <a:off x="4986528" y="5431536"/>
-            <a:ext cx="365760" cy="201168"/>
-          </a:xfrm>
-          <a:prstGeom prst="rect">
-            <a:avLst/>
-          </a:prstGeom>
-          <a:noFill/>
-        </p:spPr>
-        <p:txBody>
-          <a:bodyPr wrap="square" lIns="0" rIns="0" tIns="0" bIns="0" anchor="t">
-            <a:spAutoFit/>
-          </a:bodyPr>
-          <a:lstStyle/>
-          <a:p>
-            <a:pPr algn="ctr">
-              <a:spcBef>
-                <a:spcPts val="0"/>
-              </a:spcBef>
-              <a:spcAft>
-                <a:spcPts val="0"/>
-              </a:spcAft>
-            </a:pPr>
-            <a:r>
-              <a:rPr sz="850" b="0">
-                <a:solidFill>
-                  <a:srgbClr val="78838F"/>
-                </a:solidFill>
-                <a:latin typeface="Consolas"/>
-              </a:rPr>
-              <a:t>20</a:t>
-            </a:r>
-          </a:p>
-        </p:txBody>
-      </p:sp>
-      <p:sp>
-        <p:nvSpPr>
-          <p:cNvPr id="26" name="TextBox 25"/>
-          <p:cNvSpPr txBox="1"/>
-          <p:nvPr/>
-        </p:nvSpPr>
-        <p:spPr>
-          <a:xfrm>
-            <a:off x="6068568" y="5431536"/>
-            <a:ext cx="365760" cy="201168"/>
-          </a:xfrm>
-          <a:prstGeom prst="rect">
-            <a:avLst/>
-          </a:prstGeom>
-          <a:noFill/>
-        </p:spPr>
-        <p:txBody>
-          <a:bodyPr wrap="square" lIns="0" rIns="0" tIns="0" bIns="0" anchor="t">
-            <a:spAutoFit/>
-          </a:bodyPr>
-          <a:lstStyle/>
-          <a:p>
-            <a:pPr algn="ctr">
-              <a:spcBef>
-                <a:spcPts val="0"/>
-              </a:spcBef>
-              <a:spcAft>
-                <a:spcPts val="0"/>
-              </a:spcAft>
-            </a:pPr>
-            <a:r>
-              <a:rPr sz="850" b="0">
-                <a:solidFill>
-                  <a:srgbClr val="78838F"/>
-                </a:solidFill>
-                <a:latin typeface="Consolas"/>
-              </a:rPr>
-              <a:t>25</a:t>
-            </a:r>
-          </a:p>
-        </p:txBody>
-      </p:sp>
-      <p:sp>
-        <p:nvSpPr>
-          <p:cNvPr id="27" name="TextBox 26"/>
-          <p:cNvSpPr txBox="1"/>
-          <p:nvPr/>
-        </p:nvSpPr>
-        <p:spPr>
-          <a:xfrm>
-            <a:off x="7150608" y="5431536"/>
-            <a:ext cx="365760" cy="201168"/>
-          </a:xfrm>
-          <a:prstGeom prst="rect">
-            <a:avLst/>
-          </a:prstGeom>
-          <a:noFill/>
-        </p:spPr>
-        <p:txBody>
-          <a:bodyPr wrap="square" lIns="0" rIns="0" tIns="0" bIns="0" anchor="t">
-            <a:spAutoFit/>
-          </a:bodyPr>
-          <a:lstStyle/>
-          <a:p>
-            <a:pPr algn="ctr">
-              <a:spcBef>
-                <a:spcPts val="0"/>
-              </a:spcBef>
-              <a:spcAft>
-                <a:spcPts val="0"/>
-              </a:spcAft>
-            </a:pPr>
-            <a:r>
-              <a:rPr sz="850" b="0">
-                <a:solidFill>
-                  <a:srgbClr val="78838F"/>
-                </a:solidFill>
-                <a:latin typeface="Consolas"/>
-              </a:rPr>
-              <a:t>30</a:t>
-            </a:r>
-          </a:p>
-        </p:txBody>
-      </p:sp>
-      <p:sp>
-        <p:nvSpPr>
-          <p:cNvPr id="28" name="TextBox 27"/>
-          <p:cNvSpPr txBox="1"/>
-          <p:nvPr/>
-        </p:nvSpPr>
-        <p:spPr>
-          <a:xfrm>
-            <a:off x="5029200" y="5632704"/>
-            <a:ext cx="2377440" cy="201168"/>
-          </a:xfrm>
-          <a:prstGeom prst="rect">
-            <a:avLst/>
-          </a:prstGeom>
-          <a:noFill/>
-        </p:spPr>
-        <p:txBody>
-          <a:bodyPr wrap="square" lIns="0" rIns="0" tIns="0" bIns="0" anchor="t">
-            <a:spAutoFit/>
-          </a:bodyPr>
-          <a:lstStyle/>
-          <a:p>
-            <a:pPr algn="r">
-              <a:spcBef>
-                <a:spcPts val="0"/>
-              </a:spcBef>
-              <a:spcAft>
-                <a:spcPts val="0"/>
-              </a:spcAft>
-            </a:pPr>
-            <a:r>
-              <a:rPr sz="900" b="0">
-                <a:solidFill>
-                  <a:srgbClr val="78838F"/>
-                </a:solidFill>
-                <a:latin typeface="Consolas"/>
-              </a:rPr>
-              <a:t>vehicle speed  vx  [m/s]</a:t>
-            </a:r>
-          </a:p>
-        </p:txBody>
-      </p:sp>
-      <p:sp>
-        <p:nvSpPr>
-          <p:cNvPr id="29" name="TextBox 28"/>
-          <p:cNvSpPr txBox="1"/>
-          <p:nvPr/>
-        </p:nvSpPr>
-        <p:spPr>
-          <a:xfrm>
-            <a:off x="877824" y="3145536"/>
-            <a:ext cx="914400" cy="822960"/>
-          </a:xfrm>
-          <a:prstGeom prst="rect">
-            <a:avLst/>
-          </a:prstGeom>
-          <a:noFill/>
-        </p:spPr>
-        <p:txBody>
-          <a:bodyPr wrap="square" lIns="0" rIns="0" tIns="0" bIns="0" anchor="t">
-            <a:spAutoFit/>
-          </a:bodyPr>
-          <a:lstStyle/>
-          <a:p>
-            <a:pPr algn="l">
-              <a:spcBef>
-                <a:spcPts val="0"/>
-              </a:spcBef>
-              <a:spcAft>
-                <a:spcPts val="0"/>
-              </a:spcAft>
-            </a:pPr>
-            <a:r>
-              <a:rPr sz="800" b="0">
-                <a:solidFill>
-                  <a:srgbClr val="1B646D"/>
-                </a:solidFill>
-                <a:latin typeface="Consolas"/>
-              </a:rPr>
-              <a:t>CM stand-</a:t>
-            </a:r>
-          </a:p>
-          <a:p>
-            <a:pPr>
-              <a:spcBef>
-                <a:spcPts val="0"/>
-              </a:spcBef>
-              <a:spcAft>
-                <a:spcPts val="0"/>
-              </a:spcAft>
-            </a:pPr>
-            <a:r>
-              <a:rPr sz="800" b="0">
-                <a:solidFill>
-                  <a:srgbClr val="1B646D"/>
-                </a:solidFill>
-                <a:latin typeface="Consolas"/>
-              </a:rPr>
-              <a:t>still model</a:t>
-            </a:r>
-          </a:p>
-          <a:p>
-            <a:pPr>
-              <a:spcBef>
-                <a:spcPts val="0"/>
-              </a:spcBef>
-              <a:spcAft>
-                <a:spcPts val="0"/>
-              </a:spcAft>
-            </a:pPr>
-            <a:r>
-              <a:rPr sz="800" b="0">
-                <a:solidFill>
-                  <a:srgbClr val="1B646D"/>
-                </a:solidFill>
-                <a:latin typeface="Consolas"/>
-              </a:rPr>
-              <a:t>below 2.0</a:t>
-            </a:r>
-          </a:p>
-        </p:txBody>
-      </p:sp>
-      <p:sp>
-        <p:nvSpPr>
-          <p:cNvPr id="30" name="TextBox 29"/>
-          <p:cNvSpPr txBox="1"/>
-          <p:nvPr/>
-        </p:nvSpPr>
-        <p:spPr>
-          <a:xfrm>
-            <a:off x="1266596" y="3145536"/>
-            <a:ext cx="914400" cy="822960"/>
-          </a:xfrm>
-          <a:prstGeom prst="rect">
-            <a:avLst/>
-          </a:prstGeom>
-          <a:noFill/>
-        </p:spPr>
-        <p:txBody>
-          <a:bodyPr wrap="square" lIns="0" rIns="0" tIns="0" bIns="0" anchor="t">
-            <a:spAutoFit/>
-          </a:bodyPr>
-          <a:lstStyle/>
-          <a:p>
-            <a:pPr algn="l">
-              <a:spcBef>
-                <a:spcPts val="0"/>
-              </a:spcBef>
-              <a:spcAft>
-                <a:spcPts val="0"/>
-              </a:spcAft>
-            </a:pPr>
-            <a:r>
-              <a:rPr sz="800" b="1">
-                <a:solidFill>
-                  <a:srgbClr val="933723"/>
-                </a:solidFill>
-                <a:latin typeface="Consolas"/>
-              </a:rPr>
-              <a:t>exposed</a:t>
-            </a:r>
-          </a:p>
-          <a:p>
-            <a:pPr>
-              <a:spcBef>
-                <a:spcPts val="0"/>
-              </a:spcBef>
-              <a:spcAft>
-                <a:spcPts val="0"/>
-              </a:spcAft>
-            </a:pPr>
-            <a:r>
-              <a:rPr sz="800" b="1">
-                <a:solidFill>
-                  <a:srgbClr val="933723"/>
-                </a:solidFill>
-                <a:latin typeface="Consolas"/>
-              </a:rPr>
-              <a:t>band</a:t>
-            </a:r>
-          </a:p>
-          <a:p>
-            <a:pPr>
-              <a:spcBef>
-                <a:spcPts val="0"/>
-              </a:spcBef>
-              <a:spcAft>
-                <a:spcPts val="0"/>
-              </a:spcAft>
-            </a:pPr>
-            <a:r>
-              <a:rPr sz="800" b="1">
-                <a:solidFill>
-                  <a:srgbClr val="933723"/>
-                </a:solidFill>
-                <a:latin typeface="Consolas"/>
-              </a:rPr>
-              <a:t>2 – 4.1</a:t>
-            </a:r>
-          </a:p>
-        </p:txBody>
-      </p:sp>
-      <p:graphicFrame>
-        <p:nvGraphicFramePr>
-          <p:cNvPr id="31" name="Table 30"/>
-          <p:cNvGraphicFramePr>
-            <a:graphicFrameLocks noGrp="1"/>
-          </p:cNvGraphicFramePr>
-          <p:nvPr/>
-        </p:nvGraphicFramePr>
-        <p:xfrm>
-          <a:off x="7635240" y="3072384"/>
-          <a:ext cx="4251960" cy="1828800"/>
-        </p:xfrm>
-        <a:graphic>
-          <a:graphicData uri="http://schemas.openxmlformats.org/drawingml/2006/table">
-            <a:tbl>
-              <a:tblPr firstRow="1" bandRow="1">
-                <a:tableStyleId>{5C22544A-7EE6-4342-B048-85BDC9FD1C3A}</a:tableStyleId>
-              </a:tblPr>
-              <a:tblGrid>
-                <a:gridCol w="960120"/>
-                <a:gridCol w="960120"/>
-                <a:gridCol w="1097280"/>
-                <a:gridCol w="1234440"/>
-              </a:tblGrid>
-              <a:tr h="365760">
-                <a:tc>
-                  <a:txBody>
-                    <a:bodyPr/>
-                    <a:lstStyle/>
-                    <a:p>
-                      <a:pPr algn="l"/>
-                      <a:r>
-                        <a:rPr sz="850" b="1">
-                          <a:solidFill>
-                            <a:srgbClr val="78838F"/>
-                          </a:solidFill>
-                          <a:latin typeface="Consolas"/>
-                        </a:rPr>
-                        <a:t>vx [m/s]</a:t>
-                      </a:r>
-                    </a:p>
-                  </a:txBody>
-                  <a:tcPr marL="64008" marR="64008">
-                    <a:solidFill>
-                      <a:srgbClr val="F4F6F7"/>
-                    </a:solidFill>
-                  </a:tcPr>
-                </a:tc>
-                <a:tc>
-                  <a:txBody>
-                    <a:bodyPr/>
-                    <a:lstStyle/>
-                    <a:p>
-                      <a:pPr algn="l"/>
-                      <a:r>
-                        <a:rPr sz="850" b="1">
-                          <a:solidFill>
-                            <a:srgbClr val="78838F"/>
-                          </a:solidFill>
-                          <a:latin typeface="Consolas"/>
-                        </a:rPr>
-                        <a:t>zeta phys</a:t>
-                      </a:r>
-                    </a:p>
-                  </a:txBody>
-                  <a:tcPr marL="64008" marR="64008">
-                    <a:solidFill>
-                      <a:srgbClr val="F4F6F7"/>
-                    </a:solidFill>
-                  </a:tcPr>
-                </a:tc>
-                <a:tc>
-                  <a:txBody>
-                    <a:bodyPr/>
-                    <a:lstStyle/>
-                    <a:p>
-                      <a:pPr algn="l"/>
-                      <a:r>
-                        <a:rPr sz="850" b="1">
-                          <a:solidFill>
-                            <a:srgbClr val="78838F"/>
-                          </a:solidFill>
-                          <a:latin typeface="Consolas"/>
-                        </a:rPr>
-                        <a:t>after delay</a:t>
-                      </a:r>
-                    </a:p>
-                  </a:txBody>
-                  <a:tcPr marL="64008" marR="64008">
-                    <a:solidFill>
-                      <a:srgbClr val="F4F6F7"/>
-                    </a:solidFill>
-                  </a:tcPr>
-                </a:tc>
-                <a:tc>
-                  <a:txBody>
-                    <a:bodyPr/>
-                    <a:lstStyle/>
-                    <a:p>
-                      <a:pPr algn="l"/>
-                      <a:r>
-                        <a:rPr sz="850" b="1">
-                          <a:solidFill>
-                            <a:srgbClr val="78838F"/>
-                          </a:solidFill>
-                          <a:latin typeface="Consolas"/>
-                        </a:rPr>
-                        <a:t>verdict</a:t>
-                      </a:r>
-                    </a:p>
-                  </a:txBody>
-                  <a:tcPr marL="64008" marR="64008">
-                    <a:solidFill>
-                      <a:srgbClr val="F4F6F7"/>
-                    </a:solidFill>
-                  </a:tcPr>
-                </a:tc>
-              </a:tr>
-              <a:tr h="365760">
-                <a:tc>
-                  <a:txBody>
-                    <a:bodyPr/>
-                    <a:lstStyle/>
-                    <a:p>
-                      <a:pPr algn="l"/>
-                      <a:r>
-                        <a:rPr sz="950" b="0">
-                          <a:solidFill>
-                            <a:srgbClr val="111820"/>
-                          </a:solidFill>
-                          <a:latin typeface="Consolas"/>
-                        </a:rPr>
-                        <a:t>20</a:t>
-                      </a:r>
-                    </a:p>
-                  </a:txBody>
-                  <a:tcPr marL="64008" marR="64008">
-                    <a:solidFill>
-                      <a:srgbClr val="FFFFFF"/>
-                    </a:solidFill>
-                  </a:tcPr>
-                </a:tc>
-                <a:tc>
-                  <a:txBody>
-                    <a:bodyPr/>
-                    <a:lstStyle/>
-                    <a:p>
-                      <a:pPr algn="l"/>
-                      <a:r>
-                        <a:rPr sz="950" b="0">
-                          <a:solidFill>
-                            <a:srgbClr val="111820"/>
-                          </a:solidFill>
-                          <a:latin typeface="Consolas"/>
-                        </a:rPr>
-                        <a:t>0.70</a:t>
-                      </a:r>
-                    </a:p>
-                  </a:txBody>
-                  <a:tcPr marL="64008" marR="64008">
-                    <a:solidFill>
-                      <a:srgbClr val="FFFFFF"/>
-                    </a:solidFill>
-                  </a:tcPr>
-                </a:tc>
-                <a:tc>
-                  <a:txBody>
-                    <a:bodyPr/>
-                    <a:lstStyle/>
-                    <a:p>
-                      <a:pPr algn="l"/>
-                      <a:r>
-                        <a:rPr sz="950" b="0">
-                          <a:solidFill>
-                            <a:srgbClr val="111820"/>
-                          </a:solidFill>
-                          <a:latin typeface="Consolas"/>
-                        </a:rPr>
-                        <a:t>0.56</a:t>
-                      </a:r>
-                    </a:p>
-                  </a:txBody>
-                  <a:tcPr marL="64008" marR="64008">
-                    <a:solidFill>
-                      <a:srgbClr val="FFFFFF"/>
-                    </a:solidFill>
-                  </a:tcPr>
-                </a:tc>
-                <a:tc>
-                  <a:txBody>
-                    <a:bodyPr/>
-                    <a:lstStyle/>
-                    <a:p>
-                      <a:pPr algn="l"/>
-                      <a:r>
-                        <a:rPr sz="950" b="0">
-                          <a:solidFill>
-                            <a:srgbClr val="111820"/>
-                          </a:solidFill>
-                          <a:latin typeface="Consolas"/>
-                        </a:rPr>
-                        <a:t>well damped</a:t>
-                      </a:r>
-                    </a:p>
-                  </a:txBody>
-                  <a:tcPr marL="64008" marR="64008">
-                    <a:solidFill>
-                      <a:srgbClr val="FFFFFF"/>
-                    </a:solidFill>
-                  </a:tcPr>
-                </a:tc>
-              </a:tr>
-              <a:tr h="365760">
-                <a:tc>
-                  <a:txBody>
-                    <a:bodyPr/>
-                    <a:lstStyle/>
-                    <a:p>
-                      <a:pPr algn="l"/>
-                      <a:r>
-                        <a:rPr sz="950" b="0">
-                          <a:solidFill>
-                            <a:srgbClr val="111820"/>
-                          </a:solidFill>
-                          <a:latin typeface="Consolas"/>
-                        </a:rPr>
-                        <a:t>10</a:t>
-                      </a:r>
-                    </a:p>
-                  </a:txBody>
-                  <a:tcPr marL="64008" marR="64008">
-                    <a:solidFill>
-                      <a:srgbClr val="FFFFFF"/>
-                    </a:solidFill>
-                  </a:tcPr>
-                </a:tc>
-                <a:tc>
-                  <a:txBody>
-                    <a:bodyPr/>
-                    <a:lstStyle/>
-                    <a:p>
-                      <a:pPr algn="l"/>
-                      <a:r>
-                        <a:rPr sz="950" b="0">
-                          <a:solidFill>
-                            <a:srgbClr val="111820"/>
-                          </a:solidFill>
-                          <a:latin typeface="Consolas"/>
-                        </a:rPr>
-                        <a:t>0.35</a:t>
-                      </a:r>
-                    </a:p>
-                  </a:txBody>
-                  <a:tcPr marL="64008" marR="64008">
-                    <a:solidFill>
-                      <a:srgbClr val="FFFFFF"/>
-                    </a:solidFill>
-                  </a:tcPr>
-                </a:tc>
-                <a:tc>
-                  <a:txBody>
-                    <a:bodyPr/>
-                    <a:lstStyle/>
-                    <a:p>
-                      <a:pPr algn="l"/>
-                      <a:r>
-                        <a:rPr sz="950" b="0">
-                          <a:solidFill>
-                            <a:srgbClr val="111820"/>
-                          </a:solidFill>
-                          <a:latin typeface="Consolas"/>
-                        </a:rPr>
-                        <a:t>0.21</a:t>
-                      </a:r>
-                    </a:p>
-                  </a:txBody>
-                  <a:tcPr marL="64008" marR="64008">
-                    <a:solidFill>
-                      <a:srgbClr val="FFFFFF"/>
-                    </a:solidFill>
-                  </a:tcPr>
-                </a:tc>
-                <a:tc>
-                  <a:txBody>
-                    <a:bodyPr/>
-                    <a:lstStyle/>
-                    <a:p>
-                      <a:pPr algn="l"/>
-                      <a:r>
-                        <a:rPr sz="950" b="0">
-                          <a:solidFill>
-                            <a:srgbClr val="111820"/>
-                          </a:solidFill>
-                          <a:latin typeface="Consolas"/>
-                        </a:rPr>
-                        <a:t>fine</a:t>
-                      </a:r>
-                    </a:p>
-                  </a:txBody>
-                  <a:tcPr marL="64008" marR="64008">
-                    <a:solidFill>
-                      <a:srgbClr val="FFFFFF"/>
-                    </a:solidFill>
-                  </a:tcPr>
-                </a:tc>
-              </a:tr>
-              <a:tr h="365760">
-                <a:tc>
-                  <a:txBody>
-                    <a:bodyPr/>
-                    <a:lstStyle/>
-                    <a:p>
-                      <a:pPr algn="l"/>
-                      <a:r>
-                        <a:rPr sz="950" b="0">
-                          <a:solidFill>
-                            <a:srgbClr val="111820"/>
-                          </a:solidFill>
-                          <a:latin typeface="Consolas"/>
-                        </a:rPr>
-                        <a:t>5</a:t>
-                      </a:r>
-                    </a:p>
-                  </a:txBody>
-                  <a:tcPr marL="64008" marR="64008">
-                    <a:solidFill>
-                      <a:srgbClr val="FFFFFF"/>
-                    </a:solidFill>
-                  </a:tcPr>
-                </a:tc>
-                <a:tc>
-                  <a:txBody>
-                    <a:bodyPr/>
-                    <a:lstStyle/>
-                    <a:p>
-                      <a:pPr algn="l"/>
-                      <a:r>
-                        <a:rPr sz="950" b="0">
-                          <a:solidFill>
-                            <a:srgbClr val="111820"/>
-                          </a:solidFill>
-                          <a:latin typeface="Consolas"/>
-                        </a:rPr>
-                        <a:t>0.175</a:t>
-                      </a:r>
-                    </a:p>
-                  </a:txBody>
-                  <a:tcPr marL="64008" marR="64008">
-                    <a:solidFill>
-                      <a:srgbClr val="FFFFFF"/>
-                    </a:solidFill>
-                  </a:tcPr>
-                </a:tc>
-                <a:tc>
-                  <a:txBody>
-                    <a:bodyPr/>
-                    <a:lstStyle/>
-                    <a:p>
-                      <a:pPr algn="l"/>
-                      <a:r>
-                        <a:rPr sz="950" b="0">
-                          <a:solidFill>
-                            <a:srgbClr val="111820"/>
-                          </a:solidFill>
-                          <a:latin typeface="Consolas"/>
-                        </a:rPr>
-                        <a:t>0.03</a:t>
-                      </a:r>
-                    </a:p>
-                  </a:txBody>
-                  <a:tcPr marL="64008" marR="64008">
-                    <a:solidFill>
-                      <a:srgbClr val="FFFFFF"/>
-                    </a:solidFill>
-                  </a:tcPr>
-                </a:tc>
-                <a:tc>
-                  <a:txBody>
-                    <a:bodyPr/>
-                    <a:lstStyle/>
-                    <a:p>
-                      <a:pPr algn="l"/>
-                      <a:r>
-                        <a:rPr sz="950" b="0">
-                          <a:solidFill>
-                            <a:srgbClr val="111820"/>
-                          </a:solidFill>
-                          <a:latin typeface="Consolas"/>
-                        </a:rPr>
-                        <a:t>marginal</a:t>
-                      </a:r>
-                    </a:p>
-                  </a:txBody>
-                  <a:tcPr marL="64008" marR="64008">
-                    <a:solidFill>
-                      <a:srgbClr val="FFFFFF"/>
-                    </a:solidFill>
-                  </a:tcPr>
-                </a:tc>
-              </a:tr>
-              <a:tr h="365760">
-                <a:tc>
-                  <a:txBody>
-                    <a:bodyPr/>
-                    <a:lstStyle/>
-                    <a:p>
-                      <a:pPr algn="l"/>
-                      <a:r>
-                        <a:rPr sz="950" b="0">
-                          <a:solidFill>
-                            <a:srgbClr val="933723"/>
-                          </a:solidFill>
-                          <a:latin typeface="Consolas"/>
-                        </a:rPr>
-                        <a:t>2</a:t>
-                      </a:r>
-                    </a:p>
-                  </a:txBody>
-                  <a:tcPr marL="64008" marR="64008">
-                    <a:solidFill>
-                      <a:srgbClr val="FFFFFF"/>
-                    </a:solidFill>
-                  </a:tcPr>
-                </a:tc>
-                <a:tc>
-                  <a:txBody>
-                    <a:bodyPr/>
-                    <a:lstStyle/>
-                    <a:p>
-                      <a:pPr algn="l"/>
-                      <a:r>
-                        <a:rPr sz="950" b="0">
-                          <a:solidFill>
-                            <a:srgbClr val="933723"/>
-                          </a:solidFill>
-                          <a:latin typeface="Consolas"/>
-                        </a:rPr>
-                        <a:t>0.070</a:t>
-                      </a:r>
-                    </a:p>
-                  </a:txBody>
-                  <a:tcPr marL="64008" marR="64008">
-                    <a:solidFill>
-                      <a:srgbClr val="FFFFFF"/>
-                    </a:solidFill>
-                  </a:tcPr>
-                </a:tc>
-                <a:tc>
-                  <a:txBody>
-                    <a:bodyPr/>
-                    <a:lstStyle/>
-                    <a:p>
-                      <a:pPr algn="l"/>
-                      <a:r>
-                        <a:rPr sz="950" b="0">
-                          <a:solidFill>
-                            <a:srgbClr val="933723"/>
-                          </a:solidFill>
-                          <a:latin typeface="Consolas"/>
-                        </a:rPr>
-                        <a:t>-0.07</a:t>
-                      </a:r>
-                    </a:p>
-                  </a:txBody>
-                  <a:tcPr marL="64008" marR="64008">
-                    <a:solidFill>
-                      <a:srgbClr val="FFFFFF"/>
-                    </a:solidFill>
-                  </a:tcPr>
-                </a:tc>
-                <a:tc>
-                  <a:txBody>
-                    <a:bodyPr/>
-                    <a:lstStyle/>
-                    <a:p>
-                      <a:pPr algn="l"/>
-                      <a:r>
-                        <a:rPr sz="950" b="0">
-                          <a:solidFill>
-                            <a:srgbClr val="933723"/>
-                          </a:solidFill>
-                          <a:latin typeface="Consolas"/>
-                        </a:rPr>
-                        <a:t>mode switch</a:t>
-                      </a:r>
-                    </a:p>
-                  </a:txBody>
-                  <a:tcPr marL="64008" marR="64008">
-                    <a:solidFill>
-                      <a:srgbClr val="FFFFFF"/>
-                    </a:solidFill>
-                  </a:tcPr>
-                </a:tc>
-              </a:tr>
-            </a:tbl>
-          </a:graphicData>
-        </a:graphic>
-      </p:graphicFrame>
-      <p:sp>
-        <p:nvSpPr>
-          <p:cNvPr id="32" name="TextBox 31"/>
-          <p:cNvSpPr txBox="1"/>
-          <p:nvPr/>
-        </p:nvSpPr>
-        <p:spPr>
-          <a:xfrm>
-            <a:off x="566928" y="5577840"/>
-            <a:ext cx="11064240" cy="548640"/>
-          </a:xfrm>
-          <a:prstGeom prst="rect">
-            <a:avLst/>
-          </a:prstGeom>
-          <a:noFill/>
-        </p:spPr>
-        <p:txBody>
-          <a:bodyPr wrap="square" lIns="0" rIns="0" tIns="0" bIns="0" anchor="t">
-            <a:spAutoFit/>
-          </a:bodyPr>
-          <a:lstStyle/>
-          <a:p>
-            <a:pPr algn="l">
-              <a:spcBef>
-                <a:spcPts val="0"/>
-              </a:spcBef>
-              <a:spcAft>
-                <a:spcPts val="0"/>
-              </a:spcAft>
-            </a:pPr>
-            <a:r>
-              <a:rPr sz="950" b="0">
-                <a:solidFill>
-                  <a:srgbClr val="78838F"/>
-                </a:solidFill>
-                <a:latin typeface="Consolas"/>
-              </a:rPr>
-              <a:t>The mode is PHYSICAL — the tire/wheel torsional resonance a real vehicle has. The delay only removes damping from it. Below 2.0 m/s CarMaker</a:t>
-            </a:r>
-          </a:p>
-        </p:txBody>
-      </p:sp>
-      <p:sp>
-        <p:nvSpPr>
-          <p:cNvPr id="33" name="TextBox 32"/>
-          <p:cNvSpPr txBox="1"/>
-          <p:nvPr/>
-        </p:nvSpPr>
-        <p:spPr>
-          <a:xfrm>
-            <a:off x="566928" y="5797296"/>
-            <a:ext cx="11064240" cy="548640"/>
-          </a:xfrm>
-          <a:prstGeom prst="rect">
-            <a:avLst/>
-          </a:prstGeom>
-          <a:noFill/>
-        </p:spPr>
-        <p:txBody>
-          <a:bodyPr wrap="square" lIns="0" rIns="0" tIns="0" bIns="0" anchor="t">
-            <a:spAutoFit/>
-          </a:bodyPr>
-          <a:lstStyle/>
-          <a:p>
-            <a:pPr algn="l">
-              <a:spcBef>
-                <a:spcPts val="0"/>
-              </a:spcBef>
-              <a:spcAft>
-                <a:spcPts val="0"/>
-              </a:spcAft>
-            </a:pPr>
-            <a:r>
-              <a:rPr sz="950" b="0">
-                <a:solidFill>
-                  <a:srgbClr val="78838F"/>
-                </a:solidFill>
-                <a:latin typeface="Consolas"/>
-              </a:rPr>
-              <a:t>switches to its stand-still tire model. The residual 2–4.1 m/s band is covered on the bench by switching the dyno to torque mode with Ttire = 0.</a:t>
-            </a:r>
-          </a:p>
-        </p:txBody>
-      </p:sp>
-    </p:spTree>
-  </p:cSld>
-  <p:clrMapOvr>
-    <a:masterClrMapping/>
-  </p:clrMapOvr>
-</p:sld>
-</file>
-
-<file path=ppt/slides/slide8.xml><?xml version="1.0" encoding="utf-8"?>
-<p:sld xmlns:a="http://schemas.openxmlformats.org/drawingml/2006/main" xmlns:p="http://schemas.openxmlformats.org/presentationml/2006/main" xmlns:r="http://schemas.openxmlformats.org/officeDocument/2006/relationships">
-  <p:cSld>
-    <p:bg>
-      <p:bgPr>
-        <a:solidFill>
-          <a:srgbClr val="FFFFFF"/>
-        </a:solidFill>
-        <a:effectLst/>
-      </p:bgPr>
-    </p:bg>
-    <p:spTree>
-      <p:nvGrpSpPr>
-        <p:cNvPr id="1" name=""/>
-        <p:cNvGrpSpPr/>
-        <p:nvPr/>
-      </p:nvGrpSpPr>
-      <p:grpSpPr/>
-      <p:cxnSp>
-        <p:nvCxnSpPr>
-          <p:cNvPr id="2" name="Connector 1"/>
-          <p:cNvCxnSpPr/>
-          <p:nvPr/>
-        </p:nvCxnSpPr>
-        <p:spPr>
-          <a:xfrm>
-            <a:off x="566928" y="475488"/>
-            <a:ext cx="11064240" cy="0"/>
-          </a:xfrm>
-          <a:prstGeom prst="line">
-            <a:avLst/>
-          </a:prstGeom>
-          <a:ln w="12700">
-            <a:solidFill>
-              <a:srgbClr val="C7CED5"/>
-            </a:solidFill>
-          </a:ln>
-        </p:spPr>
-        <p:style>
-          <a:lnRef idx="2">
-            <a:schemeClr val="accent1"/>
-          </a:lnRef>
-          <a:fillRef idx="0">
-            <a:schemeClr val="accent1"/>
-          </a:fillRef>
-          <a:effectRef idx="1">
-            <a:schemeClr val="accent1"/>
-          </a:effectRef>
-          <a:fontRef idx="minor">
-            <a:schemeClr val="tx1"/>
-          </a:fontRef>
-        </p:style>
-      </p:cxnSp>
-      <p:sp>
-        <p:nvSpPr>
-          <p:cNvPr id="3" name="TextBox 2"/>
-          <p:cNvSpPr txBox="1"/>
-          <p:nvPr/>
-        </p:nvSpPr>
-        <p:spPr>
-          <a:xfrm>
-            <a:off x="566928" y="219456"/>
-            <a:ext cx="7315200" cy="237744"/>
-          </a:xfrm>
-          <a:prstGeom prst="rect">
-            <a:avLst/>
-          </a:prstGeom>
-          <a:noFill/>
-        </p:spPr>
-        <p:txBody>
-          <a:bodyPr wrap="square" lIns="0" rIns="0" tIns="0" bIns="0" anchor="t">
-            <a:spAutoFit/>
-          </a:bodyPr>
-          <a:lstStyle/>
-          <a:p>
-            <a:pPr algn="l"/>
-            <a:r>
-              <a:rPr sz="900" b="1">
-                <a:solidFill>
-                  <a:srgbClr val="A9611A"/>
-                </a:solidFill>
-                <a:latin typeface="Consolas"/>
-              </a:rPr>
-              <a:t>08 / 08</a:t>
-            </a:r>
-            <a:r>
-              <a:rPr sz="900">
-                <a:solidFill>
-                  <a:srgbClr val="78838F"/>
-                </a:solidFill>
-                <a:latin typeface="Consolas"/>
-              </a:rPr>
-              <a:t>    VERDICT</a:t>
-            </a:r>
-          </a:p>
-        </p:txBody>
-      </p:sp>
-      <p:sp>
-        <p:nvSpPr>
-          <p:cNvPr id="4" name="TextBox 3"/>
-          <p:cNvSpPr txBox="1"/>
-          <p:nvPr/>
-        </p:nvSpPr>
-        <p:spPr>
-          <a:xfrm>
-            <a:off x="566928" y="640080"/>
-            <a:ext cx="11064240" cy="566928"/>
-          </a:xfrm>
-          <a:prstGeom prst="rect">
-            <a:avLst/>
-          </a:prstGeom>
-          <a:noFill/>
-        </p:spPr>
-        <p:txBody>
-          <a:bodyPr wrap="square" lIns="0" rIns="0" tIns="0" bIns="0" anchor="t">
-            <a:spAutoFit/>
-          </a:bodyPr>
-          <a:lstStyle/>
-          <a:p>
-            <a:pPr algn="l">
-              <a:spcBef>
-                <a:spcPts val="0"/>
-              </a:spcBef>
-              <a:spcAft>
-                <a:spcPts val="0"/>
-              </a:spcAft>
-            </a:pPr>
-            <a:r>
-              <a:rPr sz="3000" b="1">
-                <a:solidFill>
-                  <a:srgbClr val="111820"/>
-                </a:solidFill>
-                <a:latin typeface="Bahnschrift"/>
-              </a:rPr>
-              <a:t>Why it works, and the two things it cannot tell you</a:t>
-            </a:r>
-          </a:p>
-        </p:txBody>
-      </p:sp>
-      <p:sp>
-        <p:nvSpPr>
-          <p:cNvPr id="5" name="Rectangle 4"/>
-          <p:cNvSpPr/>
-          <p:nvPr/>
-        </p:nvSpPr>
-        <p:spPr>
-          <a:xfrm>
-            <a:off x="566928" y="1645920"/>
-            <a:ext cx="3520440" cy="1417320"/>
+            <a:off x="4315968" y="1737360"/>
+            <a:ext cx="3520440" cy="1188720"/>
           </a:xfrm>
           <a:prstGeom prst="rect">
             <a:avLst/>
@@ -12372,7 +10015,7 @@
                 </a:solidFill>
                 <a:latin typeface="Bahnschrift"/>
               </a:rPr>
-              <a:t>One integrator</a:t>
+              <a:t>It is IPG's own bypass</a:t>
             </a:r>
           </a:p>
           <a:p>
@@ -12391,7 +10034,7 @@
                 </a:solidFill>
                 <a:latin typeface="Consolas"/>
               </a:rPr>
-              <a:t>Divergence needs two states drifting apart.</a:t>
+              <a:t>Backward Euler at 1 ms, wheel inertia read</a:t>
             </a:r>
           </a:p>
           <a:p>
@@ -12410,7 +10053,7 @@
                 </a:solidFill>
                 <a:latin typeface="Consolas"/>
               </a:rPr>
-              <a:t>There is one. CM's tire slip comes from</a:t>
+              <a:t>from CarMaker, block for block the same as</a:t>
             </a:r>
           </a:p>
           <a:p>
@@ -12429,21 +10072,21 @@
                 </a:solidFill>
                 <a:latin typeface="Consolas"/>
               </a:rPr>
-              <a:t>exactly the number that commands the dyno.</a:t>
-            </a:r>
-          </a:p>
-        </p:txBody>
-      </p:sp>
-      <p:sp>
-        <p:nvSpPr>
-          <p:cNvPr id="6" name="Rectangle 5"/>
+              <a:t>UserPowerTrain.mdl.</a:t>
+            </a:r>
+          </a:p>
+        </p:txBody>
+      </p:sp>
+      <p:sp>
+        <p:nvSpPr>
+          <p:cNvPr id="8" name="Rectangle 7"/>
           <p:cNvSpPr/>
           <p:nvPr/>
         </p:nvSpPr>
         <p:spPr>
           <a:xfrm>
-            <a:off x="4315968" y="1645920"/>
-            <a:ext cx="3520440" cy="1417320"/>
+            <a:off x="8065008" y="1737360"/>
+            <a:ext cx="3520440" cy="1188720"/>
           </a:xfrm>
           <a:prstGeom prst="rect">
             <a:avLst/>
@@ -12491,7 +10134,7 @@
                 </a:solidFill>
                 <a:latin typeface="Bahnschrift"/>
               </a:rPr>
-              <a:t>IPG's sanctioned bypass</a:t>
+              <a:t>Errors stay small</a:t>
             </a:r>
           </a:p>
           <a:p>
@@ -12510,7 +10153,7 @@
                 </a:solidFill>
                 <a:latin typeface="Consolas"/>
               </a:rPr>
-              <a:t>Backward Euler at 1 ms with Wheel.&lt;i&gt;.I read</a:t>
+              <a:t>A 2 N·m torque bias settles at about</a:t>
             </a:r>
           </a:p>
           <a:p>
@@ -12529,7 +10172,7 @@
                 </a:solidFill>
                 <a:latin typeface="Consolas"/>
               </a:rPr>
-              <a:t>from CM parameters — block-for-block</a:t>
+              <a:t>0.24 m/s of speed offset. It does not grow:</a:t>
             </a:r>
           </a:p>
           <a:p>
@@ -12548,140 +10191,21 @@
                 </a:solidFill>
                 <a:latin typeface="Consolas"/>
               </a:rPr>
-              <a:t>identical to UserPowerTrain.mdl.</a:t>
-            </a:r>
-          </a:p>
-        </p:txBody>
-      </p:sp>
-      <p:sp>
-        <p:nvSpPr>
-          <p:cNvPr id="7" name="Rectangle 6"/>
+              <a:t>slip stiffness and drag both push back.</a:t>
+            </a:r>
+          </a:p>
+        </p:txBody>
+      </p:sp>
+      <p:sp>
+        <p:nvSpPr>
+          <p:cNvPr id="9" name="Rectangle 8"/>
           <p:cNvSpPr/>
           <p:nvPr/>
         </p:nvSpPr>
         <p:spPr>
           <a:xfrm>
-            <a:off x="8065008" y="1645920"/>
-            <a:ext cx="3520440" cy="1417320"/>
-          </a:xfrm>
-          <a:prstGeom prst="rect">
-            <a:avLst/>
-          </a:prstGeom>
-          <a:solidFill>
-            <a:srgbClr val="D9E9EA"/>
-          </a:solidFill>
-          <a:ln w="19050">
-            <a:solidFill>
-              <a:srgbClr val="1B646D"/>
-            </a:solidFill>
-          </a:ln>
-          <a:effectLst/>
-        </p:spPr>
-        <p:style>
-          <a:lnRef idx="1">
-            <a:schemeClr val="accent1"/>
-          </a:lnRef>
-          <a:fillRef idx="3">
-            <a:schemeClr val="accent1"/>
-          </a:fillRef>
-          <a:effectRef idx="2">
-            <a:schemeClr val="accent1"/>
-          </a:effectRef>
-          <a:fontRef idx="minor">
-            <a:schemeClr val="lt1"/>
-          </a:fontRef>
-        </p:style>
-        <p:txBody>
-          <a:bodyPr rtlCol="0" anchor="t" wrap="square" tIns="54864" bIns="54864"/>
-          <a:lstStyle/>
-          <a:p>
-            <a:pPr algn="ctr">
-              <a:spcBef>
-                <a:spcPts val="0"/>
-              </a:spcBef>
-              <a:spcAft>
-                <a:spcPts val="0"/>
-              </a:spcAft>
-            </a:pPr>
-            <a:r>
-              <a:rPr sz="1300" b="1">
-                <a:solidFill>
-                  <a:srgbClr val="1B646D"/>
-                </a:solidFill>
-                <a:latin typeface="Bahnschrift"/>
-              </a:rPr>
-              <a:t>Bounded, not divergent</a:t>
-            </a:r>
-          </a:p>
-          <a:p>
-            <a:pPr>
-              <a:spcBef>
-                <a:spcPts val="300"/>
-              </a:spcBef>
-              <a:spcAft>
-                <a:spcPts val="0"/>
-              </a:spcAft>
-            </a:pPr>
-            <a:r>
-              <a:rPr sz="950" b="0">
-                <a:solidFill>
-                  <a:srgbClr val="4A5764"/>
-                </a:solidFill>
-                <a:latin typeface="Consolas"/>
-              </a:rPr>
-              <a:t>A 2 N·m torque bias yields 1e-4 slip offset</a:t>
-            </a:r>
-          </a:p>
-          <a:p>
-            <a:pPr>
-              <a:spcBef>
-                <a:spcPts val="100"/>
-              </a:spcBef>
-              <a:spcAft>
-                <a:spcPts val="0"/>
-              </a:spcAft>
-            </a:pPr>
-            <a:r>
-              <a:rPr sz="950" b="0">
-                <a:solidFill>
-                  <a:srgbClr val="4A5764"/>
-                </a:solidFill>
-                <a:latin typeface="Consolas"/>
-              </a:rPr>
-              <a:t>and ~0.24 m/s speed offset: tire slip</a:t>
-            </a:r>
-          </a:p>
-          <a:p>
-            <a:pPr>
-              <a:spcBef>
-                <a:spcPts val="100"/>
-              </a:spcBef>
-              <a:spcAft>
-                <a:spcPts val="0"/>
-              </a:spcAft>
-            </a:pPr>
-            <a:r>
-              <a:rPr sz="950" b="0">
-                <a:solidFill>
-                  <a:srgbClr val="4A5764"/>
-                </a:solidFill>
-                <a:latin typeface="Consolas"/>
-              </a:rPr>
-              <a:t>stiffness and road-load drag both restore.</a:t>
-            </a:r>
-          </a:p>
-        </p:txBody>
-      </p:sp>
-      <p:sp>
-        <p:nvSpPr>
-          <p:cNvPr id="8" name="Rectangle 7"/>
-          <p:cNvSpPr/>
-          <p:nvPr/>
-        </p:nvSpPr>
-        <p:spPr>
-          <a:xfrm>
-            <a:off x="566928" y="3273552"/>
-            <a:ext cx="5440680" cy="1325880"/>
+            <a:off x="566928" y="3127248"/>
+            <a:ext cx="5440680" cy="1298448"/>
           </a:xfrm>
           <a:prstGeom prst="rect">
             <a:avLst/>
@@ -12729,7 +10253,7 @@
                 </a:solidFill>
                 <a:latin typeface="Bahnschrift"/>
               </a:rPr>
-              <a:t>BLIND SPOT — the servo error is invisible</a:t>
+              <a:t>We cannot see the servo error</a:t>
             </a:r>
           </a:p>
           <a:p>
@@ -12748,7 +10272,7 @@
                 </a:solidFill>
                 <a:latin typeface="Consolas"/>
               </a:rPr>
-              <a:t>CM never sees w_act. If the servo saturates we integrate a torque measured at the</a:t>
+              <a:t>CarMaker is given the commanded speed, so it never learns whether the shaft reached</a:t>
             </a:r>
           </a:p>
           <a:p>
@@ -12767,7 +10291,7 @@
                 </a:solidFill>
                 <a:latin typeface="Consolas"/>
               </a:rPr>
-              <a:t>wrong operating point. Nothing rings, nothing diverges — the sim quietly becomes a</a:t>
+              <a:t>it. If the servo saturates we integrate a torque produced at a different speed, and</a:t>
             </a:r>
           </a:p>
           <a:p>
@@ -12786,21 +10310,21 @@
                 </a:solidFill>
                 <a:latin typeface="Consolas"/>
               </a:rPr>
-              <a:t>different vehicle.  ACTION: log w_act - w_cmd and alarm on it.</a:t>
-            </a:r>
-          </a:p>
-        </p:txBody>
-      </p:sp>
-      <p:sp>
-        <p:nvSpPr>
-          <p:cNvPr id="9" name="Rectangle 8"/>
+              <a:t>nothing warns us.  Log w_act - w_cmd and set an alarm on it.</a:t>
+            </a:r>
+          </a:p>
+        </p:txBody>
+      </p:sp>
+      <p:sp>
+        <p:nvSpPr>
+          <p:cNvPr id="10" name="Rectangle 9"/>
           <p:cNvSpPr/>
           <p:nvPr/>
         </p:nvSpPr>
         <p:spPr>
           <a:xfrm>
-            <a:off x="6236208" y="3273552"/>
-            <a:ext cx="5440680" cy="1325880"/>
+            <a:off x="6236208" y="3127248"/>
+            <a:ext cx="5440680" cy="1298448"/>
           </a:xfrm>
           <a:prstGeom prst="rect">
             <a:avLst/>
@@ -12848,7 +10372,7 @@
                 </a:solidFill>
                 <a:latin typeface="Bahnschrift"/>
               </a:rPr>
-              <a:t>BLIND SPOT — Taxl cannot be validated against CM</a:t>
+              <a:t>We cannot check Taxl against the model</a:t>
             </a:r>
           </a:p>
           <a:p>
@@ -12867,7 +10391,7 @@
                 </a:solidFill>
                 <a:latin typeface="Consolas"/>
               </a:rPr>
-              <a:t>CarMaker never sees Taxl dynamically, so a torque-measurement error surfaces only</a:t>
+              <a:t>CarMaker never reads the axle torque, so a measurement error shows up only as that</a:t>
             </a:r>
           </a:p>
           <a:p>
@@ -12886,7 +10410,7 @@
                 </a:solidFill>
                 <a:latin typeface="Consolas"/>
               </a:rPr>
-              <a:t>as that ~0.24 m/s bias — indistinguishable from a dozen modelling choices.</a:t>
+              <a:t>small speed offset, which looks like any other modelling choice. Torque calibration</a:t>
             </a:r>
           </a:p>
           <a:p>
@@ -12905,21 +10429,21 @@
                 </a:solidFill>
                 <a:latin typeface="Consolas"/>
               </a:rPr>
-              <a:t>Calibration must be established on the bench.</a:t>
-            </a:r>
-          </a:p>
-        </p:txBody>
-      </p:sp>
-      <p:sp>
-        <p:nvSpPr>
-          <p:cNvPr id="10" name="Rectangle 9"/>
+              <a:t>has to be done on the bench.</a:t>
+            </a:r>
+          </a:p>
+        </p:txBody>
+      </p:sp>
+      <p:sp>
+        <p:nvSpPr>
+          <p:cNvPr id="11" name="Rectangle 10"/>
           <p:cNvSpPr/>
           <p:nvPr/>
         </p:nvSpPr>
         <p:spPr>
           <a:xfrm>
-            <a:off x="566928" y="4809744"/>
-            <a:ext cx="3520440" cy="1234440"/>
+            <a:off x="566928" y="4626864"/>
+            <a:ext cx="3520440" cy="1188720"/>
           </a:xfrm>
           <a:prstGeom prst="rect">
             <a:avLst/>
@@ -12965,7 +10489,7 @@
                 </a:solidFill>
                 <a:latin typeface="Bahnschrift"/>
               </a:rPr>
-              <a:t>Still open</a:t>
+              <a:t>To check</a:t>
             </a:r>
           </a:p>
           <a:p>
@@ -12984,7 +10508,7 @@
                 </a:solidFill>
                 <a:latin typeface="Consolas"/>
               </a:rPr>
-              <a:t>Model.USE_MODE in the tire file — decides both</a:t>
+              <a:t>Model.USE_MODE in the tire file. 13, 14 or 15</a:t>
             </a:r>
           </a:p>
           <a:p>
@@ -13003,7 +10527,7 @@
                 </a:solidFill>
                 <a:latin typeface="Consolas"/>
               </a:rPr>
-              <a:t>whether combined slip exists and which</a:t>
+              <a:t>is expected. It decides both the lateral</a:t>
             </a:r>
           </a:p>
           <a:p>
@@ -13022,21 +10546,21 @@
                 </a:solidFill>
                 <a:latin typeface="Consolas"/>
               </a:rPr>
-              <a:t>stability analysis applies. Expected 13/14/15.</a:t>
-            </a:r>
-          </a:p>
-        </p:txBody>
-      </p:sp>
-      <p:sp>
-        <p:nvSpPr>
-          <p:cNvPr id="11" name="Rectangle 10"/>
+              <a:t>coupling and the low-speed behaviour.</a:t>
+            </a:r>
+          </a:p>
+        </p:txBody>
+      </p:sp>
+      <p:sp>
+        <p:nvSpPr>
+          <p:cNvPr id="12" name="Rectangle 11"/>
           <p:cNvSpPr/>
           <p:nvPr/>
         </p:nvSpPr>
         <p:spPr>
           <a:xfrm>
-            <a:off x="4315968" y="4809744"/>
-            <a:ext cx="3520440" cy="1234440"/>
+            <a:off x="4315968" y="4626864"/>
+            <a:ext cx="3520440" cy="1188720"/>
           </a:xfrm>
           <a:prstGeom prst="rect">
             <a:avLst/>
@@ -13101,7 +10625,7 @@
                 </a:solidFill>
                 <a:latin typeface="Consolas"/>
               </a:rPr>
-              <a:t>All CM brake torque zeroed (real braking is inside</a:t>
+              <a:t>All CarMaker brake torque zeroed, since real</a:t>
             </a:r>
           </a:p>
           <a:p>
@@ -13120,7 +10644,7 @@
                 </a:solidFill>
                 <a:latin typeface="Consolas"/>
               </a:rPr>
-              <a:t>Taxl). Trq_Supp2WC / Supp2Bdy1 / Supp2BdyEng</a:t>
+              <a:t>braking is inside Taxl. Support torques</a:t>
             </a:r>
           </a:p>
           <a:p>
@@ -13139,21 +10663,21 @@
                 </a:solidFill>
                 <a:latin typeface="Consolas"/>
               </a:rPr>
-              <a:t>zeroed — no squat, no engine-mount reaction.</a:t>
-            </a:r>
-          </a:p>
-        </p:txBody>
-      </p:sp>
-      <p:sp>
-        <p:nvSpPr>
-          <p:cNvPr id="12" name="Rectangle 11"/>
+              <a:t>zeroed too: no squat, no mount reaction.</a:t>
+            </a:r>
+          </a:p>
+        </p:txBody>
+      </p:sp>
+      <p:sp>
+        <p:nvSpPr>
+          <p:cNvPr id="13" name="Rectangle 12"/>
           <p:cNvSpPr/>
           <p:nvPr/>
         </p:nvSpPr>
         <p:spPr>
           <a:xfrm>
-            <a:off x="8065008" y="4809744"/>
-            <a:ext cx="3520440" cy="1234440"/>
+            <a:off x="8065008" y="4626864"/>
+            <a:ext cx="3520440" cy="1188720"/>
           </a:xfrm>
           <a:prstGeom prst="rect">
             <a:avLst/>
@@ -13218,7 +10742,7 @@
                 </a:solidFill>
                 <a:latin typeface="Consolas"/>
               </a:rPr>
-              <a:t>doc/xil/AxleDynoCarMakerCoupling.md — k-indexed</a:t>
+              <a:t>doc/xil/AxleDynoCarMakerCoupling.md has the</a:t>
             </a:r>
           </a:p>
           <a:p>
@@ -13237,7 +10761,7 @@
                 </a:solidFill>
                 <a:latin typeface="Consolas"/>
               </a:rPr>
-              <a:t>equations, source citations, and the</a:t>
+              <a:t>step-indexed equations, the source</a:t>
             </a:r>
           </a:p>
           <a:p>
@@ -13256,7 +10780,7 @@
                 </a:solidFill>
                 <a:latin typeface="Consolas"/>
               </a:rPr>
-              <a:t>open-item register.</a:t>
+              <a:t>references and the open-item list.</a:t>
             </a:r>
           </a:p>
         </p:txBody>

--- a/doc/xil/AxleDynoCarMakerCoupling.pptx
+++ b/doc/xil/AxleDynoCarMakerCoupling.pptx
@@ -4268,8 +4268,8 @@
         </p:nvSpPr>
         <p:spPr>
           <a:xfrm>
-            <a:off x="3474720" y="1938528"/>
-            <a:ext cx="1463040" cy="219456"/>
+            <a:off x="3456432" y="1956816"/>
+            <a:ext cx="804672" cy="201168"/>
           </a:xfrm>
           <a:prstGeom prst="rect">
             <a:avLst/>
@@ -4282,16 +4282,16 @@
           </a:bodyPr>
           <a:lstStyle/>
           <a:p>
-            <a:pPr algn="l">
-              <a:spcBef>
-                <a:spcPts val="0"/>
-              </a:spcBef>
-              <a:spcAft>
-                <a:spcPts val="0"/>
-              </a:spcAft>
-            </a:pPr>
-            <a:r>
-              <a:rPr sz="1000" b="1">
+            <a:pPr algn="ctr">
+              <a:spcBef>
+                <a:spcPts val="0"/>
+              </a:spcBef>
+              <a:spcAft>
+                <a:spcPts val="0"/>
+              </a:spcAft>
+            </a:pPr>
+            <a:r>
+              <a:rPr sz="950" b="1">
                 <a:solidFill>
                   <a:srgbClr val="A9611A"/>
                 </a:solidFill>
@@ -4310,8 +4310,8 @@
         </p:nvSpPr>
         <p:spPr>
           <a:xfrm>
-            <a:off x="3474720" y="2395728"/>
-            <a:ext cx="1554480" cy="457200"/>
+            <a:off x="3456432" y="2267712"/>
+            <a:ext cx="804672" cy="201168"/>
           </a:xfrm>
           <a:prstGeom prst="rect">
             <a:avLst/>
@@ -4324,7 +4324,7 @@
           </a:bodyPr>
           <a:lstStyle/>
           <a:p>
-            <a:pPr algn="l">
+            <a:pPr algn="ctr">
               <a:spcBef>
                 <a:spcPts val="0"/>
               </a:spcBef>
@@ -4339,26 +4339,7 @@
                 </a:solidFill>
                 <a:latin typeface="Consolas"/>
               </a:rPr>
-              <a:t>measured axle</a:t>
-            </a:r>
-          </a:p>
-          <a:p>
-            <a:pPr>
-              <a:spcBef>
-                <a:spcPts val="0"/>
-              </a:spcBef>
-              <a:spcAft>
-                <a:spcPts val="0"/>
-              </a:spcAft>
-            </a:pPr>
-            <a:r>
-              <a:rPr sz="850" b="0">
-                <a:solidFill>
-                  <a:srgbClr val="78838F"/>
-                </a:solidFill>
-                <a:latin typeface="Consolas"/>
-              </a:rPr>
-              <a:t>torque [Nm]</a:t>
+              <a:t>[Nm]</a:t>
             </a:r>
           </a:p>
         </p:txBody>
@@ -4408,8 +4389,8 @@
         </p:nvSpPr>
         <p:spPr>
           <a:xfrm>
-            <a:off x="3474720" y="3200400"/>
-            <a:ext cx="1645920" cy="457200"/>
+            <a:off x="3456432" y="2871216"/>
+            <a:ext cx="804672" cy="201168"/>
           </a:xfrm>
           <a:prstGeom prst="rect">
             <a:avLst/>
@@ -4422,7 +4403,49 @@
           </a:bodyPr>
           <a:lstStyle/>
           <a:p>
-            <a:pPr algn="l">
+            <a:pPr algn="ctr">
+              <a:spcBef>
+                <a:spcPts val="0"/>
+              </a:spcBef>
+              <a:spcAft>
+                <a:spcPts val="0"/>
+              </a:spcAft>
+            </a:pPr>
+            <a:r>
+              <a:rPr sz="950" b="1">
+                <a:solidFill>
+                  <a:srgbClr val="A9611A"/>
+                </a:solidFill>
+                <a:latin typeface="Consolas"/>
+              </a:rPr>
+              <a:t>w[k]</a:t>
+            </a:r>
+          </a:p>
+        </p:txBody>
+      </p:sp>
+      <p:sp>
+        <p:nvSpPr>
+          <p:cNvPr id="14" name="TextBox 13"/>
+          <p:cNvSpPr txBox="1"/>
+          <p:nvPr/>
+        </p:nvSpPr>
+        <p:spPr>
+          <a:xfrm>
+            <a:off x="3456432" y="3182112"/>
+            <a:ext cx="804672" cy="201168"/>
+          </a:xfrm>
+          <a:prstGeom prst="rect">
+            <a:avLst/>
+          </a:prstGeom>
+          <a:noFill/>
+        </p:spPr>
+        <p:txBody>
+          <a:bodyPr wrap="square" lIns="0" rIns="0" tIns="0" bIns="0" anchor="t">
+            <a:spAutoFit/>
+          </a:bodyPr>
+          <a:lstStyle/>
+          <a:p>
+            <a:pPr algn="ctr">
               <a:spcBef>
                 <a:spcPts val="0"/>
               </a:spcBef>
@@ -4433,37 +4456,18 @@
             <a:r>
               <a:rPr sz="850" b="0">
                 <a:solidFill>
-                  <a:srgbClr val="A9611A"/>
-                </a:solidFill>
-                <a:latin typeface="Consolas"/>
-              </a:rPr>
-              <a:t>w[k] as speed</a:t>
-            </a:r>
-          </a:p>
-          <a:p>
-            <a:pPr>
-              <a:spcBef>
-                <a:spcPts val="0"/>
-              </a:spcBef>
-              <a:spcAft>
-                <a:spcPts val="0"/>
-              </a:spcAft>
-            </a:pPr>
-            <a:r>
-              <a:rPr sz="850" b="0">
-                <a:solidFill>
-                  <a:srgbClr val="A9611A"/>
-                </a:solidFill>
-                <a:latin typeface="Consolas"/>
-              </a:rPr>
-              <a:t>command [rad/s]</a:t>
+                  <a:srgbClr val="78838F"/>
+                </a:solidFill>
+                <a:latin typeface="Consolas"/>
+              </a:rPr>
+              <a:t>[rad/s]</a:t>
             </a:r>
           </a:p>
         </p:txBody>
       </p:sp>
       <p:cxnSp>
         <p:nvCxnSpPr>
-          <p:cNvPr id="14" name="Connector 13"/>
+          <p:cNvPr id="15" name="Connector 14"/>
           <p:cNvCxnSpPr/>
           <p:nvPr/>
         </p:nvCxnSpPr>
@@ -4499,14 +4503,14 @@
       </p:cxnSp>
       <p:sp>
         <p:nvSpPr>
-          <p:cNvPr id="15" name="TextBox 14"/>
+          <p:cNvPr id="16" name="TextBox 15"/>
           <p:cNvSpPr txBox="1"/>
           <p:nvPr/>
         </p:nvSpPr>
         <p:spPr>
           <a:xfrm>
-            <a:off x="7909560" y="1938528"/>
-            <a:ext cx="1463040" cy="219456"/>
+            <a:off x="7891272" y="1956816"/>
+            <a:ext cx="804672" cy="201168"/>
           </a:xfrm>
           <a:prstGeom prst="rect">
             <a:avLst/>
@@ -4519,16 +4523,16 @@
           </a:bodyPr>
           <a:lstStyle/>
           <a:p>
-            <a:pPr algn="l">
-              <a:spcBef>
-                <a:spcPts val="0"/>
-              </a:spcBef>
-              <a:spcAft>
-                <a:spcPts val="0"/>
-              </a:spcAft>
-            </a:pPr>
-            <a:r>
-              <a:rPr sz="1000" b="1">
+            <a:pPr algn="ctr">
+              <a:spcBef>
+                <a:spcPts val="0"/>
+              </a:spcBef>
+              <a:spcAft>
+                <a:spcPts val="0"/>
+              </a:spcAft>
+            </a:pPr>
+            <a:r>
+              <a:rPr sz="950" b="1">
                 <a:solidFill>
                   <a:srgbClr val="1B646D"/>
                 </a:solidFill>
@@ -4541,14 +4545,14 @@
       </p:sp>
       <p:sp>
         <p:nvSpPr>
-          <p:cNvPr id="16" name="TextBox 15"/>
+          <p:cNvPr id="17" name="TextBox 16"/>
           <p:cNvSpPr txBox="1"/>
           <p:nvPr/>
         </p:nvSpPr>
         <p:spPr>
           <a:xfrm>
-            <a:off x="7909560" y="2395728"/>
-            <a:ext cx="1645920" cy="457200"/>
+            <a:off x="7891272" y="2267712"/>
+            <a:ext cx="804672" cy="201168"/>
           </a:xfrm>
           <a:prstGeom prst="rect">
             <a:avLst/>
@@ -4561,26 +4565,7 @@
           </a:bodyPr>
           <a:lstStyle/>
           <a:p>
-            <a:pPr algn="l">
-              <a:spcBef>
-                <a:spcPts val="0"/>
-              </a:spcBef>
-              <a:spcAft>
-                <a:spcPts val="0"/>
-              </a:spcAft>
-            </a:pPr>
-            <a:r>
-              <a:rPr sz="850" b="0">
-                <a:solidFill>
-                  <a:srgbClr val="78838F"/>
-                </a:solidFill>
-                <a:latin typeface="Consolas"/>
-              </a:rPr>
-              <a:t>written to rotv</a:t>
-            </a:r>
-          </a:p>
-          <a:p>
-            <a:pPr>
+            <a:pPr algn="ctr">
               <a:spcBef>
                 <a:spcPts val="0"/>
               </a:spcBef>
@@ -4602,7 +4587,7 @@
       </p:sp>
       <p:cxnSp>
         <p:nvCxnSpPr>
-          <p:cNvPr id="17" name="Connector 16"/>
+          <p:cNvPr id="18" name="Connector 17"/>
           <p:cNvCxnSpPr/>
           <p:nvPr/>
         </p:nvCxnSpPr>
@@ -4638,14 +4623,14 @@
       </p:cxnSp>
       <p:sp>
         <p:nvSpPr>
-          <p:cNvPr id="18" name="TextBox 17"/>
+          <p:cNvPr id="19" name="TextBox 18"/>
           <p:cNvSpPr txBox="1"/>
           <p:nvPr/>
         </p:nvSpPr>
         <p:spPr>
           <a:xfrm>
-            <a:off x="7909560" y="3200400"/>
-            <a:ext cx="1645920" cy="457200"/>
+            <a:off x="7891272" y="2871216"/>
+            <a:ext cx="804672" cy="201168"/>
           </a:xfrm>
           <a:prstGeom prst="rect">
             <a:avLst/>
@@ -4658,7 +4643,7 @@
           </a:bodyPr>
           <a:lstStyle/>
           <a:p>
-            <a:pPr algn="l">
+            <a:pPr algn="ctr">
               <a:spcBef>
                 <a:spcPts val="0"/>
               </a:spcBef>
@@ -4673,11 +4658,34 @@
                 </a:solidFill>
                 <a:latin typeface="Consolas"/>
               </a:rPr>
-              <a:t>Trq_T2W[k]</a:t>
-            </a:r>
-          </a:p>
-          <a:p>
-            <a:pPr>
+              <a:t>Trq_T2W</a:t>
+            </a:r>
+          </a:p>
+        </p:txBody>
+      </p:sp>
+      <p:sp>
+        <p:nvSpPr>
+          <p:cNvPr id="20" name="TextBox 19"/>
+          <p:cNvSpPr txBox="1"/>
+          <p:nvPr/>
+        </p:nvSpPr>
+        <p:spPr>
+          <a:xfrm>
+            <a:off x="7891272" y="3182112"/>
+            <a:ext cx="804672" cy="201168"/>
+          </a:xfrm>
+          <a:prstGeom prst="rect">
+            <a:avLst/>
+          </a:prstGeom>
+          <a:noFill/>
+        </p:spPr>
+        <p:txBody>
+          <a:bodyPr wrap="square" lIns="0" rIns="0" tIns="0" bIns="0" anchor="t">
+            <a:spAutoFit/>
+          </a:bodyPr>
+          <a:lstStyle/>
+          <a:p>
+            <a:pPr algn="ctr">
               <a:spcBef>
                 <a:spcPts val="0"/>
               </a:spcBef>
@@ -4692,14 +4700,14 @@
                 </a:solidFill>
                 <a:latin typeface="Consolas"/>
               </a:rPr>
-              <a:t>tire torque [Nm]</a:t>
+              <a:t>[Nm]</a:t>
             </a:r>
           </a:p>
         </p:txBody>
       </p:sp>
       <p:cxnSp>
         <p:nvCxnSpPr>
-          <p:cNvPr id="19" name="Connector 18"/>
+          <p:cNvPr id="21" name="Connector 20"/>
           <p:cNvCxnSpPr/>
           <p:nvPr/>
         </p:nvCxnSpPr>
@@ -4734,7 +4742,7 @@
       </p:cxnSp>
       <p:sp>
         <p:nvSpPr>
-          <p:cNvPr id="20" name="TextBox 19"/>
+          <p:cNvPr id="22" name="TextBox 21"/>
           <p:cNvSpPr txBox="1"/>
           <p:nvPr/>
         </p:nvSpPr>
@@ -4778,7 +4786,7 @@
       </p:sp>
       <p:sp>
         <p:nvSpPr>
-          <p:cNvPr id="21" name="TextBox 20"/>
+          <p:cNvPr id="23" name="TextBox 22"/>
           <p:cNvSpPr txBox="1"/>
           <p:nvPr/>
         </p:nvSpPr>
@@ -4822,7 +4830,7 @@
       </p:sp>
       <p:sp>
         <p:nvSpPr>
-          <p:cNvPr id="22" name="TextBox 21"/>
+          <p:cNvPr id="24" name="TextBox 23"/>
           <p:cNvSpPr txBox="1"/>
           <p:nvPr/>
         </p:nvSpPr>
@@ -4866,7 +4874,7 @@
       </p:sp>
       <p:sp>
         <p:nvSpPr>
-          <p:cNvPr id="23" name="TextBox 22"/>
+          <p:cNvPr id="25" name="TextBox 24"/>
           <p:cNvSpPr txBox="1"/>
           <p:nvPr/>
         </p:nvSpPr>
@@ -4910,14 +4918,14 @@
       </p:sp>
       <p:sp>
         <p:nvSpPr>
-          <p:cNvPr id="24" name="TextBox 23"/>
+          <p:cNvPr id="26" name="TextBox 25"/>
           <p:cNvSpPr txBox="1"/>
           <p:nvPr/>
         </p:nvSpPr>
         <p:spPr>
           <a:xfrm>
             <a:off x="566928" y="5321808"/>
-            <a:ext cx="11064240" cy="548640"/>
+            <a:ext cx="11064240" cy="201168"/>
           </a:xfrm>
           <a:prstGeom prst="rect">
             <a:avLst/>
@@ -4952,14 +4960,14 @@
       </p:sp>
       <p:sp>
         <p:nvSpPr>
-          <p:cNvPr id="25" name="TextBox 24"/>
+          <p:cNvPr id="27" name="TextBox 26"/>
           <p:cNvSpPr txBox="1"/>
           <p:nvPr/>
         </p:nvSpPr>
         <p:spPr>
           <a:xfrm>
             <a:off x="566928" y="5541264"/>
-            <a:ext cx="11064240" cy="548640"/>
+            <a:ext cx="11064240" cy="201168"/>
           </a:xfrm>
           <a:prstGeom prst="rect">
             <a:avLst/>
@@ -4994,14 +5002,14 @@
       </p:sp>
       <p:sp>
         <p:nvSpPr>
-          <p:cNvPr id="26" name="TextBox 25"/>
+          <p:cNvPr id="28" name="TextBox 27"/>
           <p:cNvSpPr txBox="1"/>
           <p:nvPr/>
         </p:nvSpPr>
         <p:spPr>
           <a:xfrm>
             <a:off x="566928" y="5760720"/>
-            <a:ext cx="11064240" cy="548640"/>
+            <a:ext cx="11064240" cy="201168"/>
           </a:xfrm>
           <a:prstGeom prst="rect">
             <a:avLst/>
@@ -5231,13 +5239,13 @@
         </p:nvCxnSpPr>
         <p:spPr>
           <a:xfrm>
-            <a:off x="658368" y="1773936"/>
-            <a:ext cx="0" cy="2670048"/>
+            <a:off x="1298448" y="1883664"/>
+            <a:ext cx="10332720" cy="0"/>
           </a:xfrm>
           <a:prstGeom prst="line">
             <a:avLst/>
           </a:prstGeom>
-          <a:ln w="25400">
+          <a:ln w="19050">
             <a:solidFill>
               <a:srgbClr val="A9611A"/>
             </a:solidFill>
@@ -5266,13 +5274,13 @@
         </p:nvCxnSpPr>
         <p:spPr>
           <a:xfrm>
-            <a:off x="658368" y="1773936"/>
-            <a:ext cx="201168" cy="0"/>
+            <a:off x="1298448" y="5577840"/>
+            <a:ext cx="10332720" cy="0"/>
           </a:xfrm>
           <a:prstGeom prst="line">
             <a:avLst/>
           </a:prstGeom>
-          <a:ln w="25400">
+          <a:ln w="19050">
             <a:solidFill>
               <a:srgbClr val="A9611A"/>
             </a:solidFill>
@@ -5301,16 +5309,17 @@
         </p:nvCxnSpPr>
         <p:spPr>
           <a:xfrm>
-            <a:off x="658368" y="4443984"/>
-            <a:ext cx="201168" cy="0"/>
+            <a:off x="1298448" y="1883664"/>
+            <a:ext cx="0" cy="3694176"/>
           </a:xfrm>
           <a:prstGeom prst="line">
             <a:avLst/>
           </a:prstGeom>
-          <a:ln w="25400">
+          <a:ln w="31750">
             <a:solidFill>
               <a:srgbClr val="A9611A"/>
             </a:solidFill>
+            <a:tailEnd type="triangle" w="med" len="med"/>
           </a:ln>
         </p:spPr>
         <p:style>
@@ -5336,8 +5345,8 @@
         </p:nvSpPr>
         <p:spPr>
           <a:xfrm>
-            <a:off x="329184" y="2011680"/>
-            <a:ext cx="2194560" cy="219456"/>
+            <a:off x="566928" y="1764792"/>
+            <a:ext cx="713232" cy="237744"/>
           </a:xfrm>
           <a:prstGeom prst="rect">
             <a:avLst/>
@@ -5359,13 +5368,13 @@
               </a:spcAft>
             </a:pPr>
             <a:r>
-              <a:rPr sz="850" b="1">
+              <a:rPr sz="1000" b="1">
                 <a:solidFill>
                   <a:srgbClr val="A9611A"/>
                 </a:solidFill>
                 <a:latin typeface="Consolas"/>
               </a:rPr>
-              <a:t>ONE INTEGRATION STEP</a:t>
+              <a:t>t = k-1</a:t>
             </a:r>
           </a:p>
         </p:txBody>
@@ -5378,8 +5387,8 @@
         </p:nvSpPr>
         <p:spPr>
           <a:xfrm>
-            <a:off x="329184" y="2212848"/>
-            <a:ext cx="2194560" cy="219456"/>
+            <a:off x="8503920" y="1627632"/>
+            <a:ext cx="3108960" cy="237744"/>
           </a:xfrm>
           <a:prstGeom prst="rect">
             <a:avLst/>
@@ -5392,22 +5401,22 @@
           </a:bodyPr>
           <a:lstStyle/>
           <a:p>
-            <a:pPr algn="l">
-              <a:spcBef>
-                <a:spcPts val="0"/>
-              </a:spcBef>
-              <a:spcAft>
-                <a:spcPts val="0"/>
-              </a:spcAft>
-            </a:pPr>
-            <a:r>
-              <a:rPr sz="850" b="0">
+            <a:pPr algn="r">
+              <a:spcBef>
+                <a:spcPts val="0"/>
+              </a:spcBef>
+              <a:spcAft>
+                <a:spcPts val="0"/>
+              </a:spcAft>
+            </a:pPr>
+            <a:r>
+              <a:rPr sz="1000" b="1">
                 <a:solidFill>
                   <a:srgbClr val="A9611A"/>
                 </a:solidFill>
                 <a:latin typeface="Consolas"/>
               </a:rPr>
-              <a:t>Ts = 1 ms</a:t>
+              <a:t>wheel speed = w[k-1]</a:t>
             </a:r>
           </a:p>
         </p:txBody>
@@ -5420,8 +5429,8 @@
         </p:nvSpPr>
         <p:spPr>
           <a:xfrm>
-            <a:off x="1005840" y="1737360"/>
-            <a:ext cx="4572000" cy="219456"/>
+            <a:off x="566928" y="5458968"/>
+            <a:ext cx="713232" cy="237744"/>
           </a:xfrm>
           <a:prstGeom prst="rect">
             <a:avLst/>
@@ -5443,13 +5452,13 @@
               </a:spcAft>
             </a:pPr>
             <a:r>
-              <a:rPr sz="1100" b="1">
-                <a:solidFill>
-                  <a:srgbClr val="111820"/>
-                </a:solidFill>
-                <a:latin typeface="Consolas"/>
-              </a:rPr>
-              <a:t>Vehicle</a:t>
+              <a:rPr sz="1000" b="1">
+                <a:solidFill>
+                  <a:srgbClr val="A9611A"/>
+                </a:solidFill>
+                <a:latin typeface="Consolas"/>
+              </a:rPr>
+              <a:t>t = k</a:t>
             </a:r>
           </a:p>
         </p:txBody>
@@ -5462,8 +5471,8 @@
         </p:nvSpPr>
         <p:spPr>
           <a:xfrm>
-            <a:off x="1316736" y="1956816"/>
-            <a:ext cx="4572000" cy="219456"/>
+            <a:off x="8503920" y="5321808"/>
+            <a:ext cx="3108960" cy="237744"/>
           </a:xfrm>
           <a:prstGeom prst="rect">
             <a:avLst/>
@@ -5476,22 +5485,22 @@
           </a:bodyPr>
           <a:lstStyle/>
           <a:p>
-            <a:pPr algn="l">
-              <a:spcBef>
-                <a:spcPts val="0"/>
-              </a:spcBef>
-              <a:spcAft>
-                <a:spcPts val="0"/>
-              </a:spcAft>
-            </a:pPr>
-            <a:r>
-              <a:rPr sz="1000" b="0">
-                <a:solidFill>
-                  <a:srgbClr val="4A5764"/>
-                </a:solidFill>
-                <a:latin typeface="Consolas"/>
-              </a:rPr>
-              <a:t>Steering</a:t>
+            <a:pPr algn="r">
+              <a:spcBef>
+                <a:spcPts val="0"/>
+              </a:spcBef>
+              <a:spcAft>
+                <a:spcPts val="0"/>
+              </a:spcAft>
+            </a:pPr>
+            <a:r>
+              <a:rPr sz="1000" b="1">
+                <a:solidFill>
+                  <a:srgbClr val="A9611A"/>
+                </a:solidFill>
+                <a:latin typeface="Consolas"/>
+              </a:rPr>
+              <a:t>wheel speed = w[k]</a:t>
             </a:r>
           </a:p>
         </p:txBody>
@@ -5504,8 +5513,8 @@
         </p:nvSpPr>
         <p:spPr>
           <a:xfrm>
-            <a:off x="1316736" y="2176272"/>
-            <a:ext cx="4572000" cy="219456"/>
+            <a:off x="566928" y="3383280"/>
+            <a:ext cx="658368" cy="914400"/>
           </a:xfrm>
           <a:prstGeom prst="rect">
             <a:avLst/>
@@ -5527,13 +5536,51 @@
               </a:spcAft>
             </a:pPr>
             <a:r>
-              <a:rPr sz="1000" b="0">
-                <a:solidFill>
-                  <a:srgbClr val="4A5764"/>
-                </a:solidFill>
-                <a:latin typeface="Consolas"/>
-              </a:rPr>
-              <a:t>Suspension kinematics &amp; compliance</a:t>
+              <a:rPr sz="900" b="1">
+                <a:solidFill>
+                  <a:srgbClr val="A9611A"/>
+                </a:solidFill>
+                <a:latin typeface="Consolas"/>
+              </a:rPr>
+              <a:t>ONE</a:t>
+            </a:r>
+          </a:p>
+          <a:p>
+            <a:pPr>
+              <a:spcBef>
+                <a:spcPts val="0"/>
+              </a:spcBef>
+              <a:spcAft>
+                <a:spcPts val="0"/>
+              </a:spcAft>
+            </a:pPr>
+            <a:r>
+              <a:rPr sz="900" b="1">
+                <a:solidFill>
+                  <a:srgbClr val="A9611A"/>
+                </a:solidFill>
+                <a:latin typeface="Consolas"/>
+              </a:rPr>
+              <a:t>STEP</a:t>
+            </a:r>
+          </a:p>
+          <a:p>
+            <a:pPr>
+              <a:spcBef>
+                <a:spcPts val="0"/>
+              </a:spcBef>
+              <a:spcAft>
+                <a:spcPts val="0"/>
+              </a:spcAft>
+            </a:pPr>
+            <a:r>
+              <a:rPr sz="900" b="0">
+                <a:solidFill>
+                  <a:srgbClr val="A9611A"/>
+                </a:solidFill>
+                <a:latin typeface="Consolas"/>
+              </a:rPr>
+              <a:t>1 ms</a:t>
             </a:r>
           </a:p>
         </p:txBody>
@@ -5546,7 +5593,7 @@
         </p:nvSpPr>
         <p:spPr>
           <a:xfrm>
-            <a:off x="1316736" y="2395728"/>
+            <a:off x="1737360" y="2011680"/>
             <a:ext cx="4572000" cy="219456"/>
           </a:xfrm>
           <a:prstGeom prst="rect">
@@ -5569,13 +5616,13 @@
               </a:spcAft>
             </a:pPr>
             <a:r>
-              <a:rPr sz="1000" b="0">
-                <a:solidFill>
-                  <a:srgbClr val="4A5764"/>
-                </a:solidFill>
-                <a:latin typeface="Consolas"/>
-              </a:rPr>
-              <a:t>Aerodynamics</a:t>
+              <a:rPr sz="1100" b="1">
+                <a:solidFill>
+                  <a:srgbClr val="111820"/>
+                </a:solidFill>
+                <a:latin typeface="Consolas"/>
+              </a:rPr>
+              <a:t>Vehicle</a:t>
             </a:r>
           </a:p>
         </p:txBody>
@@ -5588,8 +5635,8 @@
         </p:nvSpPr>
         <p:spPr>
           <a:xfrm>
-            <a:off x="1316736" y="2615184"/>
-            <a:ext cx="4572000" cy="219456"/>
+            <a:off x="2011680" y="2249424"/>
+            <a:ext cx="5486400" cy="219456"/>
           </a:xfrm>
           <a:prstGeom prst="rect">
             <a:avLst/>
@@ -5611,13 +5658,13 @@
               </a:spcAft>
             </a:pPr>
             <a:r>
-              <a:rPr sz="1000" b="0">
+              <a:rPr sz="950" b="0">
                 <a:solidFill>
                   <a:srgbClr val="4A5764"/>
                 </a:solidFill>
                 <a:latin typeface="Consolas"/>
               </a:rPr>
-              <a:t>Suspension forces</a:t>
+              <a:t>Steering / Suspension K&amp;C / Aerodynamics / Suspension forces</a:t>
             </a:r>
           </a:p>
         </p:txBody>
@@ -5630,8 +5677,8 @@
         </p:nvSpPr>
         <p:spPr>
           <a:xfrm>
-            <a:off x="1170432" y="2889504"/>
-            <a:ext cx="3246120" cy="566928"/>
+            <a:off x="1737360" y="2560320"/>
+            <a:ext cx="4846320" cy="512064"/>
           </a:xfrm>
           <a:prstGeom prst="rect">
             <a:avLst/>
@@ -5692,13 +5739,13 @@
               </a:spcAft>
             </a:pPr>
             <a:r>
-              <a:rPr sz="900" b="0">
+              <a:rPr sz="950" b="0">
                 <a:solidFill>
                   <a:srgbClr val="4A5764"/>
                 </a:solidFill>
                 <a:latin typeface="Consolas"/>
               </a:rPr>
-              <a:t>reads the wheel speed as it stands</a:t>
+              <a:t>uses w[k-1], emits Trq_T2W[k]</a:t>
             </a:r>
           </a:p>
         </p:txBody>
@@ -5711,7 +5758,7 @@
         </p:nvSpPr>
         <p:spPr>
           <a:xfrm>
-            <a:off x="1005840" y="3584448"/>
+            <a:off x="1737360" y="3182112"/>
             <a:ext cx="4572000" cy="219456"/>
           </a:xfrm>
           <a:prstGeom prst="rect">
@@ -5753,16 +5800,18 @@
         </p:nvSpPr>
         <p:spPr>
           <a:xfrm>
-            <a:off x="1170432" y="3858768"/>
-            <a:ext cx="3246120" cy="566928"/>
+            <a:off x="1737360" y="3474720"/>
+            <a:ext cx="4846320" cy="786384"/>
           </a:xfrm>
           <a:prstGeom prst="rect">
             <a:avLst/>
           </a:prstGeom>
-          <a:noFill/>
+          <a:solidFill>
+            <a:srgbClr val="F2E4D3"/>
+          </a:solidFill>
           <a:ln w="31750">
             <a:solidFill>
-              <a:srgbClr val="111820"/>
+              <a:srgbClr val="A9611A"/>
             </a:solidFill>
           </a:ln>
           <a:effectLst/>
@@ -5802,26 +5851,26 @@
                 </a:solidFill>
                 <a:latin typeface="Consolas"/>
               </a:rPr>
-              <a:t>     &lt;- our block</a:t>
+              <a:t>     our block</a:t>
             </a:r>
           </a:p>
           <a:p>
             <a:pPr>
               <a:spcBef>
-                <a:spcPts val="200"/>
-              </a:spcBef>
-              <a:spcAft>
-                <a:spcPts val="0"/>
-              </a:spcAft>
-            </a:pPr>
-            <a:r>
-              <a:rPr sz="900" b="0">
-                <a:solidFill>
-                  <a:srgbClr val="4A5764"/>
-                </a:solidFill>
-                <a:latin typeface="Consolas"/>
-              </a:rPr>
-              <a:t>advances the wheel speed state</a:t>
+                <a:spcPts val="300"/>
+              </a:spcBef>
+              <a:spcAft>
+                <a:spcPts val="0"/>
+              </a:spcAft>
+            </a:pPr>
+            <a:r>
+              <a:rPr sz="1000" b="1">
+                <a:solidFill>
+                  <a:srgbClr val="111820"/>
+                </a:solidFill>
+                <a:latin typeface="Consolas"/>
+              </a:rPr>
+              <a:t>w[k] = w[k-1] + (Ts / I) * ( Taxl[k] + Trq_T2W[k] )</a:t>
             </a:r>
           </a:p>
         </p:txBody>
@@ -5834,8 +5883,8 @@
         </p:nvSpPr>
         <p:spPr>
           <a:xfrm>
-            <a:off x="1170432" y="4553712"/>
-            <a:ext cx="3246120" cy="329184"/>
+            <a:off x="1737360" y="4407408"/>
+            <a:ext cx="4846320" cy="512064"/>
           </a:xfrm>
           <a:prstGeom prst="rect">
             <a:avLst/>
@@ -5843,7 +5892,7 @@
           <a:solidFill>
             <a:srgbClr val="D9E9EA"/>
           </a:solidFill>
-          <a:ln w="19050">
+          <a:ln w="25400">
             <a:solidFill>
               <a:srgbClr val="1B646D"/>
             </a:solidFill>
@@ -5865,7 +5914,7 @@
           </a:fontRef>
         </p:style>
         <p:txBody>
-          <a:bodyPr rtlCol="0" anchor="ctr" wrap="square" tIns="54864" bIns="54864"/>
+          <a:bodyPr rtlCol="0" anchor="t" wrap="square" tIns="54864" bIns="54864"/>
           <a:lstStyle/>
           <a:p>
             <a:pPr algn="ctr">
@@ -5877,13 +5926,32 @@
               </a:spcAft>
             </a:pPr>
             <a:r>
-              <a:rPr sz="950" b="1">
+              <a:rPr sz="1100" b="1">
                 <a:solidFill>
                   <a:srgbClr val="1B646D"/>
                 </a:solidFill>
                 <a:latin typeface="Consolas"/>
               </a:rPr>
-              <a:t>Body Frame   advances the chassis states</a:t>
+              <a:t>Body Frame</a:t>
+            </a:r>
+          </a:p>
+          <a:p>
+            <a:pPr>
+              <a:spcBef>
+                <a:spcPts val="200"/>
+              </a:spcBef>
+              <a:spcAft>
+                <a:spcPts val="0"/>
+              </a:spcAft>
+            </a:pPr>
+            <a:r>
+              <a:rPr sz="950" b="0">
+                <a:solidFill>
+                  <a:srgbClr val="4A5764"/>
+                </a:solidFill>
+                <a:latin typeface="Consolas"/>
+              </a:rPr>
+              <a:t>chassis, suspension and vehicle speed</a:t>
             </a:r>
           </a:p>
         </p:txBody>
@@ -5896,8 +5964,8 @@
         </p:nvCxnSpPr>
         <p:spPr>
           <a:xfrm>
-            <a:off x="2788920" y="3456432"/>
-            <a:ext cx="0" cy="347472"/>
+            <a:off x="4160520" y="3072384"/>
+            <a:ext cx="0" cy="73152"/>
           </a:xfrm>
           <a:prstGeom prst="line">
             <a:avLst/>
@@ -5932,8 +6000,8 @@
         </p:nvCxnSpPr>
         <p:spPr>
           <a:xfrm>
-            <a:off x="2788920" y="4425696"/>
-            <a:ext cx="0" cy="73152"/>
+            <a:off x="4160520" y="3401568"/>
+            <a:ext cx="0" cy="36576"/>
           </a:xfrm>
           <a:prstGeom prst="line">
             <a:avLst/>
@@ -5968,8 +6036,140 @@
         </p:nvCxnSpPr>
         <p:spPr>
           <a:xfrm>
-            <a:off x="4416552" y="3172968"/>
-            <a:ext cx="521208" cy="0"/>
+            <a:off x="4160520" y="4261104"/>
+            <a:ext cx="0" cy="109728"/>
+          </a:xfrm>
+          <a:prstGeom prst="line">
+            <a:avLst/>
+          </a:prstGeom>
+          <a:ln w="25400">
+            <a:solidFill>
+              <a:srgbClr val="C7CED5"/>
+            </a:solidFill>
+            <a:tailEnd type="triangle" w="med" len="med"/>
+          </a:ln>
+        </p:spPr>
+        <p:style>
+          <a:lnRef idx="2">
+            <a:schemeClr val="accent1"/>
+          </a:lnRef>
+          <a:fillRef idx="0">
+            <a:schemeClr val="accent1"/>
+          </a:fillRef>
+          <a:effectRef idx="1">
+            <a:schemeClr val="accent1"/>
+          </a:effectRef>
+          <a:fontRef idx="minor">
+            <a:schemeClr val="tx1"/>
+          </a:fontRef>
+        </p:style>
+      </p:cxnSp>
+      <p:cxnSp>
+        <p:nvCxnSpPr>
+          <p:cNvPr id="23" name="Connector 22"/>
+          <p:cNvCxnSpPr/>
+          <p:nvPr/>
+        </p:nvCxnSpPr>
+        <p:spPr>
+          <a:xfrm>
+            <a:off x="6583680" y="3867912"/>
+            <a:ext cx="384048" cy="0"/>
+          </a:xfrm>
+          <a:prstGeom prst="line">
+            <a:avLst/>
+          </a:prstGeom>
+          <a:ln w="31750">
+            <a:solidFill>
+              <a:srgbClr val="A9611A"/>
+            </a:solidFill>
+            <a:tailEnd type="triangle" w="med" len="med"/>
+          </a:ln>
+        </p:spPr>
+        <p:style>
+          <a:lnRef idx="2">
+            <a:schemeClr val="accent1"/>
+          </a:lnRef>
+          <a:fillRef idx="0">
+            <a:schemeClr val="accent1"/>
+          </a:fillRef>
+          <a:effectRef idx="1">
+            <a:schemeClr val="accent1"/>
+          </a:effectRef>
+          <a:fontRef idx="minor">
+            <a:schemeClr val="tx1"/>
+          </a:fontRef>
+        </p:style>
+      </p:cxnSp>
+      <p:sp>
+        <p:nvSpPr>
+          <p:cNvPr id="24" name="Rectangle 23"/>
+          <p:cNvSpPr/>
+          <p:nvPr/>
+        </p:nvSpPr>
+        <p:spPr>
+          <a:xfrm>
+            <a:off x="7022592" y="3602736"/>
+            <a:ext cx="4187952" cy="530352"/>
+          </a:xfrm>
+          <a:prstGeom prst="rect">
+            <a:avLst/>
+          </a:prstGeom>
+          <a:noFill/>
+          <a:ln w="25400">
+            <a:solidFill>
+              <a:srgbClr val="A9611A"/>
+            </a:solidFill>
+          </a:ln>
+          <a:effectLst/>
+        </p:spPr>
+        <p:style>
+          <a:lnRef idx="1">
+            <a:schemeClr val="accent1"/>
+          </a:lnRef>
+          <a:fillRef idx="3">
+            <a:schemeClr val="accent1"/>
+          </a:fillRef>
+          <a:effectRef idx="2">
+            <a:schemeClr val="accent1"/>
+          </a:effectRef>
+          <a:fontRef idx="minor">
+            <a:schemeClr val="lt1"/>
+          </a:fontRef>
+        </p:style>
+        <p:txBody>
+          <a:bodyPr rtlCol="0" anchor="ctr" wrap="square" tIns="54864" bIns="54864"/>
+          <a:lstStyle/>
+          <a:p>
+            <a:pPr algn="ctr">
+              <a:spcBef>
+                <a:spcPts val="0"/>
+              </a:spcBef>
+              <a:spcAft>
+                <a:spcPts val="0"/>
+              </a:spcAft>
+            </a:pPr>
+            <a:r>
+              <a:rPr sz="1050" b="1">
+                <a:solidFill>
+                  <a:srgbClr val="A9611A"/>
+                </a:solidFill>
+                <a:latin typeface="Consolas"/>
+              </a:rPr>
+              <a:t>THE WHEEL SPEED ADVANCES HERE</a:t>
+            </a:r>
+          </a:p>
+        </p:txBody>
+      </p:sp>
+      <p:cxnSp>
+        <p:nvCxnSpPr>
+          <p:cNvPr id="25" name="Connector 24"/>
+          <p:cNvCxnSpPr/>
+          <p:nvPr/>
+        </p:nvCxnSpPr>
+        <p:spPr>
+          <a:xfrm>
+            <a:off x="6583680" y="4663440"/>
+            <a:ext cx="384048" cy="0"/>
           </a:xfrm>
           <a:prstGeom prst="line">
             <a:avLst/>
@@ -5998,14 +6198,14 @@
       </p:cxnSp>
       <p:sp>
         <p:nvSpPr>
-          <p:cNvPr id="23" name="Rectangle 22"/>
+          <p:cNvPr id="26" name="Rectangle 25"/>
           <p:cNvSpPr/>
           <p:nvPr/>
         </p:nvSpPr>
         <p:spPr>
           <a:xfrm>
-            <a:off x="4992624" y="2889504"/>
-            <a:ext cx="3017520" cy="566928"/>
+            <a:off x="7022592" y="4443984"/>
+            <a:ext cx="4187952" cy="438912"/>
           </a:xfrm>
           <a:prstGeom prst="rect">
             <a:avLst/>
@@ -6033,7 +6233,7 @@
           </a:fontRef>
         </p:style>
         <p:txBody>
-          <a:bodyPr rtlCol="0" anchor="t" wrap="square" tIns="54864" bIns="54864"/>
+          <a:bodyPr rtlCol="0" anchor="ctr" wrap="square" tIns="54864" bIns="54864"/>
           <a:lstStyle/>
           <a:p>
             <a:pPr algn="ctr">
@@ -6045,163 +6245,27 @@
               </a:spcAft>
             </a:pPr>
             <a:r>
-              <a:rPr sz="1050" b="1">
+              <a:rPr sz="1000" b="1">
                 <a:solidFill>
                   <a:srgbClr val="1B646D"/>
                 </a:solidFill>
                 <a:latin typeface="Consolas"/>
               </a:rPr>
-              <a:t>uses  w[k-1]</a:t>
-            </a:r>
-          </a:p>
-          <a:p>
-            <a:pPr>
-              <a:spcBef>
-                <a:spcPts val="200"/>
-              </a:spcBef>
-              <a:spcAft>
-                <a:spcPts val="0"/>
-              </a:spcAft>
-            </a:pPr>
-            <a:r>
-              <a:rPr sz="1050" b="1">
-                <a:solidFill>
-                  <a:srgbClr val="1B646D"/>
-                </a:solidFill>
-                <a:latin typeface="Consolas"/>
-              </a:rPr>
-              <a:t>emits Trq_T2W[k]</a:t>
-            </a:r>
-          </a:p>
-        </p:txBody>
-      </p:sp>
-      <p:cxnSp>
-        <p:nvCxnSpPr>
-          <p:cNvPr id="24" name="Connector 23"/>
-          <p:cNvCxnSpPr/>
-          <p:nvPr/>
-        </p:nvCxnSpPr>
-        <p:spPr>
-          <a:xfrm>
-            <a:off x="4416552" y="4142232"/>
-            <a:ext cx="521208" cy="0"/>
-          </a:xfrm>
-          <a:prstGeom prst="line">
-            <a:avLst/>
-          </a:prstGeom>
-          <a:ln w="31750">
-            <a:solidFill>
-              <a:srgbClr val="111820"/>
-            </a:solidFill>
-            <a:tailEnd type="triangle" w="med" len="med"/>
-          </a:ln>
-        </p:spPr>
-        <p:style>
-          <a:lnRef idx="2">
-            <a:schemeClr val="accent1"/>
-          </a:lnRef>
-          <a:fillRef idx="0">
-            <a:schemeClr val="accent1"/>
-          </a:fillRef>
-          <a:effectRef idx="1">
-            <a:schemeClr val="accent1"/>
-          </a:effectRef>
-          <a:fontRef idx="minor">
-            <a:schemeClr val="tx1"/>
-          </a:fontRef>
-        </p:style>
-      </p:cxnSp>
-      <p:sp>
-        <p:nvSpPr>
-          <p:cNvPr id="25" name="Rectangle 24"/>
-          <p:cNvSpPr/>
-          <p:nvPr/>
-        </p:nvSpPr>
-        <p:spPr>
-          <a:xfrm>
-            <a:off x="4992624" y="3858768"/>
-            <a:ext cx="4206240" cy="566928"/>
-          </a:xfrm>
-          <a:prstGeom prst="rect">
-            <a:avLst/>
-          </a:prstGeom>
-          <a:solidFill>
-            <a:srgbClr val="F2E4D3"/>
-          </a:solidFill>
-          <a:ln w="25400">
-            <a:solidFill>
-              <a:srgbClr val="A9611A"/>
-            </a:solidFill>
-          </a:ln>
-          <a:effectLst/>
-        </p:spPr>
-        <p:style>
-          <a:lnRef idx="1">
-            <a:schemeClr val="accent1"/>
-          </a:lnRef>
-          <a:fillRef idx="3">
-            <a:schemeClr val="accent1"/>
-          </a:fillRef>
-          <a:effectRef idx="2">
-            <a:schemeClr val="accent1"/>
-          </a:effectRef>
-          <a:fontRef idx="minor">
-            <a:schemeClr val="lt1"/>
-          </a:fontRef>
-        </p:style>
-        <p:txBody>
-          <a:bodyPr rtlCol="0" anchor="t" wrap="square" tIns="54864" bIns="54864"/>
-          <a:lstStyle/>
-          <a:p>
-            <a:pPr algn="ctr">
-              <a:spcBef>
-                <a:spcPts val="0"/>
-              </a:spcBef>
-              <a:spcAft>
-                <a:spcPts val="0"/>
-              </a:spcAft>
-            </a:pPr>
-            <a:r>
-              <a:rPr sz="1050" b="0">
-                <a:solidFill>
-                  <a:srgbClr val="111820"/>
-                </a:solidFill>
-                <a:latin typeface="Consolas"/>
-              </a:rPr>
-              <a:t>w[k] = w[k-1] + (Ts / I) *</a:t>
-            </a:r>
-          </a:p>
-          <a:p>
-            <a:pPr>
-              <a:spcBef>
-                <a:spcPts val="200"/>
-              </a:spcBef>
-              <a:spcAft>
-                <a:spcPts val="0"/>
-              </a:spcAft>
-            </a:pPr>
-            <a:r>
-              <a:rPr sz="1050" b="0">
-                <a:solidFill>
-                  <a:srgbClr val="111820"/>
-                </a:solidFill>
-                <a:latin typeface="Consolas"/>
-              </a:rPr>
-              <a:t>           ( Taxl[k] + Trq_T2W[k] )</a:t>
-            </a:r>
-          </a:p>
-        </p:txBody>
-      </p:sp>
-      <p:sp>
-        <p:nvSpPr>
-          <p:cNvPr id="26" name="TextBox 25"/>
+              <a:t>the chassis states advance here</a:t>
+            </a:r>
+          </a:p>
+        </p:txBody>
+      </p:sp>
+      <p:sp>
+        <p:nvSpPr>
+          <p:cNvPr id="27" name="TextBox 26"/>
           <p:cNvSpPr txBox="1"/>
           <p:nvPr/>
         </p:nvSpPr>
         <p:spPr>
           <a:xfrm>
-            <a:off x="566928" y="5084064"/>
-            <a:ext cx="11064240" cy="548640"/>
+            <a:off x="566928" y="5797296"/>
+            <a:ext cx="11064240" cy="201168"/>
           </a:xfrm>
           <a:prstGeom prst="rect">
             <a:avLst/>
@@ -6229,21 +6293,21 @@
                 </a:solidFill>
                 <a:latin typeface="Consolas"/>
               </a:rPr>
-              <a:t>The tire is evaluated before the wheel speed is advanced, so it uses the value the state holds at the start of the step.</a:t>
-            </a:r>
-          </a:p>
-        </p:txBody>
-      </p:sp>
-      <p:sp>
-        <p:nvSpPr>
-          <p:cNvPr id="27" name="TextBox 26"/>
+              <a:t>The whole sequence is one step of the solver. The wheel speed keeps the value w[k-1] right up to the PowerTrain box, so the tire, which runs</a:t>
+            </a:r>
+          </a:p>
+        </p:txBody>
+      </p:sp>
+      <p:sp>
+        <p:nvSpPr>
+          <p:cNvPr id="28" name="TextBox 27"/>
           <p:cNvSpPr txBox="1"/>
           <p:nvPr/>
         </p:nvSpPr>
         <p:spPr>
           <a:xfrm>
-            <a:off x="566928" y="5303520"/>
-            <a:ext cx="11064240" cy="548640"/>
+            <a:off x="566928" y="5998464"/>
+            <a:ext cx="11064240" cy="201168"/>
           </a:xfrm>
           <a:prstGeom prst="rect">
             <a:avLst/>
@@ -6271,105 +6335,7 @@
                 </a:solidFill>
                 <a:latin typeface="Consolas"/>
               </a:rPr>
-              <a:t>That is what advancing an ODE state means. It is not a delay added by our bypass: CarMaker's own powertrain does the same thing.</a:t>
-            </a:r>
-          </a:p>
-        </p:txBody>
-      </p:sp>
-      <p:sp>
-        <p:nvSpPr>
-          <p:cNvPr id="28" name="Rectangle 27"/>
-          <p:cNvSpPr/>
-          <p:nvPr/>
-        </p:nvSpPr>
-        <p:spPr>
-          <a:xfrm>
-            <a:off x="566928" y="5577840"/>
-            <a:ext cx="3520440" cy="969264"/>
-          </a:xfrm>
-          <a:prstGeom prst="rect">
-            <a:avLst/>
-          </a:prstGeom>
-          <a:noFill/>
-          <a:ln w="15875">
-            <a:solidFill>
-              <a:srgbClr val="1B646D"/>
-            </a:solidFill>
-          </a:ln>
-          <a:effectLst/>
-        </p:spPr>
-        <p:style>
-          <a:lnRef idx="1">
-            <a:schemeClr val="accent1"/>
-          </a:lnRef>
-          <a:fillRef idx="3">
-            <a:schemeClr val="accent1"/>
-          </a:fillRef>
-          <a:effectRef idx="2">
-            <a:schemeClr val="accent1"/>
-          </a:effectRef>
-          <a:fontRef idx="minor">
-            <a:schemeClr val="lt1"/>
-          </a:fontRef>
-        </p:style>
-        <p:txBody>
-          <a:bodyPr rtlCol="0" anchor="t" wrap="square" tIns="54864" bIns="54864"/>
-          <a:lstStyle/>
-          <a:p>
-            <a:pPr algn="ctr">
-              <a:spcBef>
-                <a:spcPts val="0"/>
-              </a:spcBef>
-              <a:spcAft>
-                <a:spcPts val="0"/>
-              </a:spcAft>
-            </a:pPr>
-            <a:r>
-              <a:rPr sz="1300" b="1">
-                <a:solidFill>
-                  <a:srgbClr val="1B646D"/>
-                </a:solidFill>
-                <a:latin typeface="Bahnschrift"/>
-              </a:rPr>
-              <a:t>Two states advance here</a:t>
-            </a:r>
-          </a:p>
-          <a:p>
-            <a:pPr>
-              <a:spcBef>
-                <a:spcPts val="300"/>
-              </a:spcBef>
-              <a:spcAft>
-                <a:spcPts val="0"/>
-              </a:spcAft>
-            </a:pPr>
-            <a:r>
-              <a:rPr sz="950" b="0">
-                <a:solidFill>
-                  <a:srgbClr val="4A5764"/>
-                </a:solidFill>
-                <a:latin typeface="Consolas"/>
-              </a:rPr>
-              <a:t>Wheel speed at the PowerTrain slot,</a:t>
-            </a:r>
-          </a:p>
-          <a:p>
-            <a:pPr>
-              <a:spcBef>
-                <a:spcPts val="100"/>
-              </a:spcBef>
-              <a:spcAft>
-                <a:spcPts val="0"/>
-              </a:spcAft>
-            </a:pPr>
-            <a:r>
-              <a:rPr sz="950" b="0">
-                <a:solidFill>
-                  <a:srgbClr val="4A5764"/>
-                </a:solidFill>
-                <a:latin typeface="Consolas"/>
-              </a:rPr>
-              <a:t>chassis afterwards at Body Frame.</a:t>
+              <a:t>earlier, necessarily uses w[k-1]. That is what advancing an ODE state means, not a delay we added: CarMaker's own powertrain does the same.</a:t>
             </a:r>
           </a:p>
         </p:txBody>
@@ -6382,8 +6348,8 @@
         </p:nvSpPr>
         <p:spPr>
           <a:xfrm>
-            <a:off x="4315968" y="5577840"/>
-            <a:ext cx="3520440" cy="969264"/>
+            <a:off x="566928" y="6217920"/>
+            <a:ext cx="5440680" cy="475488"/>
           </a:xfrm>
           <a:prstGeom prst="rect">
             <a:avLst/>
@@ -6448,26 +6414,7 @@
                 </a:solidFill>
                 <a:latin typeface="Consolas"/>
               </a:rPr>
-              <a:t>CarMaker's own solver; ours matches.</a:t>
-            </a:r>
-          </a:p>
-          <a:p>
-            <a:pPr>
-              <a:spcBef>
-                <a:spcPts val="100"/>
-              </a:spcBef>
-              <a:spcAft>
-                <a:spcPts val="0"/>
-              </a:spcAft>
-            </a:pPr>
-            <a:r>
-              <a:rPr sz="950" b="0">
-                <a:solidFill>
-                  <a:srgbClr val="4A5764"/>
-                </a:solidFill>
-                <a:latin typeface="Consolas"/>
-              </a:rPr>
-              <a:t>Single stage, so this runs once per step.</a:t>
+              <a:t>CarMaker's own solver; ours matches. Single stage, one pass.</a:t>
             </a:r>
           </a:p>
         </p:txBody>
@@ -6480,8 +6427,8 @@
         </p:nvSpPr>
         <p:spPr>
           <a:xfrm>
-            <a:off x="8065008" y="5577840"/>
-            <a:ext cx="3566160" cy="969264"/>
+            <a:off x="6190488" y="6217920"/>
+            <a:ext cx="5440680" cy="475488"/>
           </a:xfrm>
           <a:prstGeom prst="rect">
             <a:avLst/>
@@ -6529,7 +6476,7 @@
                 </a:solidFill>
                 <a:latin typeface="Bahnschrift"/>
               </a:rPr>
-              <a:t>Do not add another step</a:t>
+              <a:t>Do not add a second step</a:t>
             </a:r>
           </a:p>
           <a:p>
@@ -6548,26 +6495,7 @@
                 </a:solidFill>
                 <a:latin typeface="Consolas"/>
               </a:rPr>
-              <a:t>A Memory block or rate transition on</a:t>
-            </a:r>
-          </a:p>
-          <a:p>
-            <a:pPr>
-              <a:spcBef>
-                <a:spcPts val="100"/>
-              </a:spcBef>
-              <a:spcAft>
-                <a:spcPts val="0"/>
-              </a:spcAft>
-            </a:pPr>
-            <a:r>
-              <a:rPr sz="950" b="0">
-                <a:solidFill>
-                  <a:srgbClr val="4A5764"/>
-                </a:solidFill>
-                <a:latin typeface="Consolas"/>
-              </a:rPr>
-              <a:t>Trq_T2W -&gt; integrator -&gt; rotv costs damping.</a:t>
+              <a:t>A Memory block or rate transition in the loop costs damping.</a:t>
             </a:r>
           </a:p>
         </p:txBody>
@@ -6756,7 +6684,7 @@
                 </a:solidFill>
                 <a:latin typeface="Segoe UI"/>
               </a:rPr>
-              <a:t>The bench supplies one quantity: the wheel rotational speed. Follow it down through the tire model to the torque that comes back.</a:t>
+              <a:t>Slip is the gap between our wheel speed and CarMaker's vehicle speed. Everything the tire produces follows from that one comparison.</a:t>
             </a:r>
           </a:p>
         </p:txBody>
@@ -6769,8 +6697,8 @@
         </p:nvSpPr>
         <p:spPr>
           <a:xfrm>
-            <a:off x="566928" y="1773936"/>
-            <a:ext cx="5074920" cy="786384"/>
+            <a:off x="566928" y="1737360"/>
+            <a:ext cx="5074920" cy="676656"/>
           </a:xfrm>
           <a:prstGeom prst="rect">
             <a:avLst/>
@@ -6818,7 +6746,7 @@
                 </a:solidFill>
                 <a:latin typeface="Bahnschrift"/>
               </a:rPr>
-              <a:t>FROM THE BENCH</a:t>
+              <a:t>OUR WHEEL SPEED</a:t>
             </a:r>
           </a:p>
           <a:p>
@@ -6837,26 +6765,7 @@
                 </a:solidFill>
                 <a:latin typeface="Consolas"/>
               </a:rPr>
-              <a:t>w[k-1]  -&gt;  Rim_rotv</a:t>
-            </a:r>
-          </a:p>
-          <a:p>
-            <a:pPr>
-              <a:spcBef>
-                <a:spcPts val="100"/>
-              </a:spcBef>
-              <a:spcAft>
-                <a:spcPts val="0"/>
-              </a:spcAft>
-            </a:pPr>
-            <a:r>
-              <a:rPr sz="950" b="0">
-                <a:solidFill>
-                  <a:srgbClr val="4A5764"/>
-                </a:solidFill>
-                <a:latin typeface="Consolas"/>
-              </a:rPr>
-              <a:t>the wheel rotational speed, and nothing else</a:t>
+              <a:t>w[k-1] -&gt; Rim_rotv, from the bench</a:t>
             </a:r>
           </a:p>
         </p:txBody>
@@ -6869,8 +6778,8 @@
         </p:nvSpPr>
         <p:spPr>
           <a:xfrm>
-            <a:off x="6556248" y="1773936"/>
-            <a:ext cx="5074920" cy="786384"/>
+            <a:off x="6556248" y="1737360"/>
+            <a:ext cx="5074920" cy="676656"/>
           </a:xfrm>
           <a:prstGeom prst="rect">
             <a:avLst/>
@@ -6918,7 +6827,7 @@
                 </a:solidFill>
                 <a:latin typeface="Bahnschrift"/>
               </a:rPr>
-              <a:t>FROM CARMAKER'S BODY MODEL</a:t>
+              <a:t>CARMAKER'S VEHICLE SPEED</a:t>
             </a:r>
           </a:p>
           <a:p>
@@ -6937,26 +6846,7 @@
                 </a:solidFill>
                 <a:latin typeface="Consolas"/>
               </a:rPr>
-              <a:t>P_v0_W · Fz · camber · muRoad</a:t>
-            </a:r>
-          </a:p>
-          <a:p>
-            <a:pPr>
-              <a:spcBef>
-                <a:spcPts val="100"/>
-              </a:spcBef>
-              <a:spcAft>
-                <a:spcPts val="0"/>
-              </a:spcAft>
-            </a:pPr>
-            <a:r>
-              <a:rPr sz="950" b="0">
-                <a:solidFill>
-                  <a:srgbClr val="4A5764"/>
-                </a:solidFill>
-                <a:latin typeface="Consolas"/>
-              </a:rPr>
-              <a:t>contact-point velocity, load, friction</a:t>
+              <a:t>vx at the contact point, plus Fz and friction</a:t>
             </a:r>
           </a:p>
         </p:txBody>
@@ -6969,7 +6859,7 @@
         </p:nvCxnSpPr>
         <p:spPr>
           <a:xfrm>
-            <a:off x="3108960" y="2560320"/>
+            <a:off x="3108960" y="2414016"/>
             <a:ext cx="0" cy="182880"/>
           </a:xfrm>
           <a:prstGeom prst="line">
@@ -7004,7 +6894,7 @@
         </p:nvCxnSpPr>
         <p:spPr>
           <a:xfrm>
-            <a:off x="9098280" y="2560320"/>
+            <a:off x="9098280" y="2414016"/>
             <a:ext cx="0" cy="182880"/>
           </a:xfrm>
           <a:prstGeom prst="line">
@@ -7039,7 +6929,7 @@
         </p:nvCxnSpPr>
         <p:spPr>
           <a:xfrm>
-            <a:off x="3108960" y="2743200"/>
+            <a:off x="3108960" y="2596896"/>
             <a:ext cx="5989320" cy="0"/>
           </a:xfrm>
           <a:prstGeom prst="line">
@@ -7074,8 +6964,8 @@
         </p:nvCxnSpPr>
         <p:spPr>
           <a:xfrm>
-            <a:off x="6099048" y="2743200"/>
-            <a:ext cx="0" cy="182880"/>
+            <a:off x="6099048" y="2596896"/>
+            <a:ext cx="0" cy="164592"/>
           </a:xfrm>
           <a:prstGeom prst="line">
             <a:avLst/>
@@ -7110,8 +7000,8 @@
         </p:nvSpPr>
         <p:spPr>
           <a:xfrm>
-            <a:off x="566928" y="2980944"/>
-            <a:ext cx="11064240" cy="822960"/>
+            <a:off x="1188720" y="2816352"/>
+            <a:ext cx="9820656" cy="768096"/>
           </a:xfrm>
           <a:prstGeom prst="rect">
             <a:avLst/>
@@ -7150,7 +7040,7 @@
                 </a:solidFill>
                 <a:latin typeface="Consolas"/>
               </a:rPr>
-              <a:t>1   SLIP        </a:t>
+              <a:t>1   SLIP   </a:t>
             </a:r>
             <a:r>
               <a:rPr sz="1000" b="1">
@@ -7168,69 +7058,51 @@
                 </a:solidFill>
                 <a:latin typeface="Consolas"/>
               </a:rPr>
-              <a:t>s = ( w · rBelt_eff - vx ) / |…|      </a:t>
-            </a:r>
+              <a:t>s = ( w · rBelt_eff  -  vx ) / |…|</a:t>
+            </a:r>
+          </a:p>
+          <a:p>
+            <a:pPr>
+              <a:spcBef>
+                <a:spcPts val="200"/>
+              </a:spcBef>
+            </a:pPr>
+            <a:r>
+              <a:rPr sz="1000" b="1">
+                <a:solidFill>
+                  <a:srgbClr val="1B646D"/>
+                </a:solidFill>
+                <a:latin typeface="Consolas"/>
+              </a:rPr>
+              <a:t>           lateral        </a:t>
+            </a:r>
+            <a:r>
+              <a:rPr sz="1000" b="0">
+                <a:solidFill>
+                  <a:srgbClr val="111820"/>
+                </a:solidFill>
+                <a:latin typeface="Consolas"/>
+              </a:rPr>
+              <a:t>alpha = atan( vy / |vx| )</a:t>
+            </a:r>
+          </a:p>
+          <a:p>
+            <a:pPr>
+              <a:spcBef>
+                <a:spcPts val="300"/>
+              </a:spcBef>
+              <a:spcAft>
+                <a:spcPts val="0"/>
+              </a:spcAft>
+            </a:pPr>
             <a:r>
               <a:rPr sz="900" b="0">
                 <a:solidFill>
-                  <a:srgbClr val="A9611A"/>
-                </a:solidFill>
-                <a:latin typeface="Consolas"/>
-              </a:rPr>
-              <a:t>&lt;- the bench sets this</a:t>
-            </a:r>
-          </a:p>
-          <a:p>
-            <a:pPr>
-              <a:spcBef>
-                <a:spcPts val="200"/>
-              </a:spcBef>
-            </a:pPr>
-            <a:r>
-              <a:rPr sz="1000" b="1">
-                <a:solidFill>
-                  <a:srgbClr val="1B646D"/>
-                </a:solidFill>
-                <a:latin typeface="Consolas"/>
-              </a:rPr>
-              <a:t>                lateral        </a:t>
-            </a:r>
-            <a:r>
-              <a:rPr sz="1000" b="0">
-                <a:solidFill>
-                  <a:srgbClr val="111820"/>
-                </a:solidFill>
-                <a:latin typeface="Consolas"/>
-              </a:rPr>
-              <a:t>alpha = atan( vy / |vx| )             </a:t>
-            </a:r>
-            <a:r>
-              <a:rPr sz="900" b="0">
-                <a:solidFill>
-                  <a:srgbClr val="1B646D"/>
-                </a:solidFill>
-                <a:latin typeface="Consolas"/>
-              </a:rPr>
-              <a:t>&lt;- steering and body yaw</a:t>
-            </a:r>
-          </a:p>
-          <a:p>
-            <a:pPr>
-              <a:spcBef>
-                <a:spcPts val="300"/>
-              </a:spcBef>
-              <a:spcAft>
-                <a:spcPts val="0"/>
-              </a:spcAft>
-            </a:pPr>
-            <a:r>
-              <a:rPr sz="900" b="0">
-                <a:solidFill>
                   <a:srgbClr val="78838F"/>
                 </a:solidFill>
                 <a:latin typeface="Consolas"/>
               </a:rPr>
-              <a:t>Both come from one contact-point velocity vector, split into its two components.</a:t>
+              <a:t>how much faster the tread is moving than the road under it, and at what angle</a:t>
             </a:r>
           </a:p>
         </p:txBody>
@@ -7243,8 +7115,8 @@
         </p:nvCxnSpPr>
         <p:spPr>
           <a:xfrm>
-            <a:off x="6099048" y="3803904"/>
-            <a:ext cx="0" cy="164592"/>
+            <a:off x="6099048" y="3584448"/>
+            <a:ext cx="0" cy="146304"/>
           </a:xfrm>
           <a:prstGeom prst="line">
             <a:avLst/>
@@ -7279,8 +7151,8 @@
         </p:nvSpPr>
         <p:spPr>
           <a:xfrm>
-            <a:off x="566928" y="4023360"/>
-            <a:ext cx="11064240" cy="694944"/>
+            <a:off x="1188720" y="3785616"/>
+            <a:ext cx="9820656" cy="512064"/>
           </a:xfrm>
           <a:prstGeom prst="rect">
             <a:avLst/>
@@ -7310,7 +7182,7 @@
           </a:fontRef>
         </p:style>
         <p:txBody>
-          <a:bodyPr rtlCol="0" anchor="t" wrap="square" tIns="54864" bIns="54864"/>
+          <a:bodyPr rtlCol="0" anchor="ctr" wrap="square" tIns="54864" bIns="54864"/>
           <a:lstStyle/>
           <a:p>
             <a:pPr algn="ctr"/>
@@ -7321,16 +7193,16 @@
                 </a:solidFill>
                 <a:latin typeface="Consolas"/>
               </a:rPr>
-              <a:t>2   RELAXATION  </a:t>
-            </a:r>
-            <a:r>
-              <a:rPr sz="1000" b="0">
+              <a:t>2   RELAXATION   </a:t>
+            </a:r>
+            <a:r>
+              <a:rPr sz="950" b="0">
                 <a:solidFill>
                   <a:srgbClr val="111820"/>
                 </a:solidFill>
                 <a:latin typeface="Consolas"/>
               </a:rPr>
-              <a:t>tau = sigma / vx    sigma ~ 0.05 m      </a:t>
+              <a:t>the carcass takes about 5 cm of rolling to build force, so slip is low-passed  </a:t>
             </a:r>
             <a:r>
               <a:rPr sz="900" b="0">
@@ -7339,26 +7211,7 @@
                 </a:solidFill>
                 <a:latin typeface="Consolas"/>
               </a:rPr>
-              <a:t>the tire's only ODE states</a:t>
-            </a:r>
-          </a:p>
-          <a:p>
-            <a:pPr>
-              <a:spcBef>
-                <a:spcPts val="300"/>
-              </a:spcBef>
-              <a:spcAft>
-                <a:spcPts val="0"/>
-              </a:spcAft>
-            </a:pPr>
-            <a:r>
-              <a:rPr sz="900" b="0">
-                <a:solidFill>
-                  <a:srgbClr val="78838F"/>
-                </a:solidFill>
-                <a:latin typeface="Consolas"/>
-              </a:rPr>
-              <a:t>The carcass takes a rolling distance to build force, so slip is low-passed before it becomes force. Everything else here is algebraic.</a:t>
+              <a:t>(the tire's only states)</a:t>
             </a:r>
           </a:p>
         </p:txBody>
@@ -7371,8 +7224,8 @@
         </p:nvCxnSpPr>
         <p:spPr>
           <a:xfrm>
-            <a:off x="6099048" y="4718304"/>
-            <a:ext cx="0" cy="164592"/>
+            <a:off x="6099048" y="4297680"/>
+            <a:ext cx="0" cy="146304"/>
           </a:xfrm>
           <a:prstGeom prst="line">
             <a:avLst/>
@@ -7407,8 +7260,8 @@
         </p:nvSpPr>
         <p:spPr>
           <a:xfrm>
-            <a:off x="566928" y="4937760"/>
-            <a:ext cx="11064240" cy="822960"/>
+            <a:off x="1188720" y="4498848"/>
+            <a:ext cx="9820656" cy="768096"/>
           </a:xfrm>
           <a:prstGeom prst="rect">
             <a:avLst/>
@@ -7449,7 +7302,7 @@
                 </a:solidFill>
                 <a:latin typeface="Consolas"/>
               </a:rPr>
-              <a:t>3   FORCES      </a:t>
+              <a:t>3   FORCES   </a:t>
             </a:r>
             <a:r>
               <a:rPr sz="1000" b="0">
@@ -7467,7 +7320,7 @@
                 </a:solidFill>
                 <a:latin typeface="Consolas"/>
               </a:rPr>
-              <a:t>longitudinal force, reduced by cornering</a:t>
+              <a:t>longitudinal, reduced by cornering</a:t>
             </a:r>
           </a:p>
           <a:p>
@@ -7483,7 +7336,7 @@
                 </a:solidFill>
                 <a:latin typeface="Consolas"/>
               </a:rPr>
-              <a:t>                Fy = Gy(s)     · Fy0(alpha)  </a:t>
+              <a:t>             Fy = Gy(s)     · Fy0(alpha)  </a:t>
             </a:r>
             <a:r>
               <a:rPr sz="900" b="0">
@@ -7492,7 +7345,7 @@
                 </a:solidFill>
                 <a:latin typeface="Consolas"/>
               </a:rPr>
-              <a:t>lateral force, reduced by driving or braking</a:t>
+              <a:t>lateral, reduced by driving or braking</a:t>
             </a:r>
           </a:p>
           <a:p>
@@ -7511,7 +7364,7 @@
                 </a:solidFill>
                 <a:latin typeface="Consolas"/>
               </a:rPr>
-              <a:t>Gx and Gy are the friction ellipse: one contact patch, one friction budget, so the two directions take from each other.</a:t>
+              <a:t>one contact patch, one friction budget, so the two directions take from each other</a:t>
             </a:r>
           </a:p>
         </p:txBody>
@@ -7524,15 +7377,15 @@
         </p:nvCxnSpPr>
         <p:spPr>
           <a:xfrm>
-            <a:off x="6099048" y="5760720"/>
-            <a:ext cx="0" cy="164592"/>
+            <a:off x="3291840" y="5266944"/>
+            <a:ext cx="0" cy="256032"/>
           </a:xfrm>
           <a:prstGeom prst="line">
             <a:avLst/>
           </a:prstGeom>
           <a:ln w="31750">
             <a:solidFill>
-              <a:srgbClr val="C7CED5"/>
+              <a:srgbClr val="933723"/>
             </a:solidFill>
             <a:tailEnd type="triangle" w="med" len="med"/>
           </a:ln>
@@ -7552,16 +7405,52 @@
           </a:fontRef>
         </p:style>
       </p:cxnSp>
-      <p:sp>
-        <p:nvSpPr>
-          <p:cNvPr id="18" name="Rectangle 17"/>
+      <p:cxnSp>
+        <p:nvCxnSpPr>
+          <p:cNvPr id="18" name="Connector 17"/>
+          <p:cNvCxnSpPr/>
+          <p:nvPr/>
+        </p:nvCxnSpPr>
+        <p:spPr>
+          <a:xfrm>
+            <a:off x="8961120" y="5266944"/>
+            <a:ext cx="0" cy="256032"/>
+          </a:xfrm>
+          <a:prstGeom prst="line">
+            <a:avLst/>
+          </a:prstGeom>
+          <a:ln w="31750">
+            <a:solidFill>
+              <a:srgbClr val="1B646D"/>
+            </a:solidFill>
+            <a:tailEnd type="triangle" w="med" len="med"/>
+          </a:ln>
+        </p:spPr>
+        <p:style>
+          <a:lnRef idx="2">
+            <a:schemeClr val="accent1"/>
+          </a:lnRef>
+          <a:fillRef idx="0">
+            <a:schemeClr val="accent1"/>
+          </a:fillRef>
+          <a:effectRef idx="1">
+            <a:schemeClr val="accent1"/>
+          </a:effectRef>
+          <a:fontRef idx="minor">
+            <a:schemeClr val="tx1"/>
+          </a:fontRef>
+        </p:style>
+      </p:cxnSp>
+      <p:sp>
+        <p:nvSpPr>
+          <p:cNvPr id="19" name="Rectangle 18"/>
           <p:cNvSpPr/>
           <p:nvPr/>
         </p:nvSpPr>
         <p:spPr>
           <a:xfrm>
-            <a:off x="566928" y="5980176"/>
-            <a:ext cx="11064240" cy="402336"/>
+            <a:off x="1188720" y="5577840"/>
+            <a:ext cx="4206240" cy="566928"/>
           </a:xfrm>
           <a:prstGeom prst="rect">
             <a:avLst/>
@@ -7589,19 +7478,36 @@
           </a:fontRef>
         </p:style>
         <p:txBody>
-          <a:bodyPr rtlCol="0" anchor="ctr" wrap="square" tIns="54864" bIns="54864"/>
-          <a:lstStyle/>
-          <a:p>
-            <a:pPr algn="ctr"/>
-            <a:r>
-              <a:rPr sz="1050" b="1">
+          <a:bodyPr rtlCol="0" anchor="t" wrap="square" tIns="54864" bIns="54864"/>
+          <a:lstStyle/>
+          <a:p>
+            <a:pPr algn="ctr">
+              <a:spcBef>
+                <a:spcPts val="0"/>
+              </a:spcBef>
+              <a:spcAft>
+                <a:spcPts val="0"/>
+              </a:spcAft>
+            </a:pPr>
+            <a:r>
+              <a:rPr sz="1000" b="1">
                 <a:solidFill>
                   <a:srgbClr val="933723"/>
                 </a:solidFill>
                 <a:latin typeface="Consolas"/>
               </a:rPr>
-              <a:t>4   SPIN-AXIS TORQUE   </a:t>
-            </a:r>
+              <a:t>4a   TO US</a:t>
+            </a:r>
+          </a:p>
+          <a:p>
+            <a:pPr>
+              <a:spcBef>
+                <a:spcPts val="200"/>
+              </a:spcBef>
+              <a:spcAft>
+                <a:spcPts val="0"/>
+              </a:spcAft>
+            </a:pPr>
             <a:r>
               <a:rPr sz="1000" b="0">
                 <a:solidFill>
@@ -7609,16 +7515,359 @@
                 </a:solidFill>
                 <a:latin typeface="Consolas"/>
               </a:rPr>
-              <a:t>Trq_T2W = -r · Fx  +  rolling resistance      </a:t>
-            </a:r>
+              <a:t>Trq_T2W = -r · Fx  -&gt;  our integrator</a:t>
+            </a:r>
+          </a:p>
+        </p:txBody>
+      </p:sp>
+      <p:sp>
+        <p:nvSpPr>
+          <p:cNvPr id="20" name="Rectangle 19"/>
+          <p:cNvSpPr/>
+          <p:nvPr/>
+        </p:nvSpPr>
+        <p:spPr>
+          <a:xfrm>
+            <a:off x="6803136" y="5577840"/>
+            <a:ext cx="4206240" cy="566928"/>
+          </a:xfrm>
+          <a:prstGeom prst="rect">
+            <a:avLst/>
+          </a:prstGeom>
+          <a:noFill/>
+          <a:ln w="31750">
+            <a:solidFill>
+              <a:srgbClr val="1B646D"/>
+            </a:solidFill>
+          </a:ln>
+          <a:effectLst/>
+        </p:spPr>
+        <p:style>
+          <a:lnRef idx="1">
+            <a:schemeClr val="accent1"/>
+          </a:lnRef>
+          <a:fillRef idx="3">
+            <a:schemeClr val="accent1"/>
+          </a:fillRef>
+          <a:effectRef idx="2">
+            <a:schemeClr val="accent1"/>
+          </a:effectRef>
+          <a:fontRef idx="minor">
+            <a:schemeClr val="lt1"/>
+          </a:fontRef>
+        </p:style>
+        <p:txBody>
+          <a:bodyPr rtlCol="0" anchor="t" wrap="square" tIns="54864" bIns="54864"/>
+          <a:lstStyle/>
+          <a:p>
+            <a:pPr algn="ctr">
+              <a:spcBef>
+                <a:spcPts val="0"/>
+              </a:spcBef>
+              <a:spcAft>
+                <a:spcPts val="0"/>
+              </a:spcAft>
+            </a:pPr>
+            <a:r>
+              <a:rPr sz="1000" b="1">
+                <a:solidFill>
+                  <a:srgbClr val="1B646D"/>
+                </a:solidFill>
+                <a:latin typeface="Consolas"/>
+              </a:rPr>
+              <a:t>4b   TO THE VEHICLE</a:t>
+            </a:r>
+          </a:p>
+          <a:p>
+            <a:pPr>
+              <a:spcBef>
+                <a:spcPts val="200"/>
+              </a:spcBef>
+              <a:spcAft>
+                <a:spcPts val="0"/>
+              </a:spcAft>
+            </a:pPr>
+            <a:r>
+              <a:rPr sz="1000" b="0">
+                <a:solidFill>
+                  <a:srgbClr val="111820"/>
+                </a:solidFill>
+                <a:latin typeface="Consolas"/>
+              </a:rPr>
+              <a:t>Fx pushes the body  -&gt;  CarMaker sets vx</a:t>
+            </a:r>
+          </a:p>
+        </p:txBody>
+      </p:sp>
+      <p:cxnSp>
+        <p:nvCxnSpPr>
+          <p:cNvPr id="21" name="Connector 20"/>
+          <p:cNvCxnSpPr/>
+          <p:nvPr/>
+        </p:nvCxnSpPr>
+        <p:spPr>
+          <a:xfrm>
+            <a:off x="11009376" y="5861304"/>
+            <a:ext cx="374904" cy="0"/>
+          </a:xfrm>
+          <a:prstGeom prst="line">
+            <a:avLst/>
+          </a:prstGeom>
+          <a:ln w="25400">
+            <a:solidFill>
+              <a:srgbClr val="1B646D"/>
+            </a:solidFill>
+            <a:prstDash val="dash"/>
+          </a:ln>
+        </p:spPr>
+        <p:style>
+          <a:lnRef idx="2">
+            <a:schemeClr val="accent1"/>
+          </a:lnRef>
+          <a:fillRef idx="0">
+            <a:schemeClr val="accent1"/>
+          </a:fillRef>
+          <a:effectRef idx="1">
+            <a:schemeClr val="accent1"/>
+          </a:effectRef>
+          <a:fontRef idx="minor">
+            <a:schemeClr val="tx1"/>
+          </a:fontRef>
+        </p:style>
+      </p:cxnSp>
+      <p:cxnSp>
+        <p:nvCxnSpPr>
+          <p:cNvPr id="22" name="Connector 21"/>
+          <p:cNvCxnSpPr/>
+          <p:nvPr/>
+        </p:nvCxnSpPr>
+        <p:spPr>
+          <a:xfrm flipV="1">
+            <a:off x="11384280" y="3200400"/>
+            <a:ext cx="0" cy="2660904"/>
+          </a:xfrm>
+          <a:prstGeom prst="line">
+            <a:avLst/>
+          </a:prstGeom>
+          <a:ln w="25400">
+            <a:solidFill>
+              <a:srgbClr val="1B646D"/>
+            </a:solidFill>
+            <a:prstDash val="dash"/>
+          </a:ln>
+        </p:spPr>
+        <p:style>
+          <a:lnRef idx="2">
+            <a:schemeClr val="accent1"/>
+          </a:lnRef>
+          <a:fillRef idx="0">
+            <a:schemeClr val="accent1"/>
+          </a:fillRef>
+          <a:effectRef idx="1">
+            <a:schemeClr val="accent1"/>
+          </a:effectRef>
+          <a:fontRef idx="minor">
+            <a:schemeClr val="tx1"/>
+          </a:fontRef>
+        </p:style>
+      </p:cxnSp>
+      <p:cxnSp>
+        <p:nvCxnSpPr>
+          <p:cNvPr id="23" name="Connector 22"/>
+          <p:cNvCxnSpPr/>
+          <p:nvPr/>
+        </p:nvCxnSpPr>
+        <p:spPr>
+          <a:xfrm flipH="1">
+            <a:off x="11045952" y="3200400"/>
+            <a:ext cx="338328" cy="0"/>
+          </a:xfrm>
+          <a:prstGeom prst="line">
+            <a:avLst/>
+          </a:prstGeom>
+          <a:ln w="25400">
+            <a:solidFill>
+              <a:srgbClr val="1B646D"/>
+            </a:solidFill>
+            <a:prstDash val="dash"/>
+            <a:tailEnd type="triangle" w="med" len="med"/>
+          </a:ln>
+        </p:spPr>
+        <p:style>
+          <a:lnRef idx="2">
+            <a:schemeClr val="accent1"/>
+          </a:lnRef>
+          <a:fillRef idx="0">
+            <a:schemeClr val="accent1"/>
+          </a:fillRef>
+          <a:effectRef idx="1">
+            <a:schemeClr val="accent1"/>
+          </a:effectRef>
+          <a:fontRef idx="minor">
+            <a:schemeClr val="tx1"/>
+          </a:fontRef>
+        </p:style>
+      </p:cxnSp>
+      <p:sp>
+        <p:nvSpPr>
+          <p:cNvPr id="24" name="TextBox 23"/>
+          <p:cNvSpPr txBox="1"/>
+          <p:nvPr/>
+        </p:nvSpPr>
+        <p:spPr>
+          <a:xfrm>
+            <a:off x="11448288" y="4224528"/>
+            <a:ext cx="713232" cy="640080"/>
+          </a:xfrm>
+          <a:prstGeom prst="rect">
+            <a:avLst/>
+          </a:prstGeom>
+          <a:noFill/>
+        </p:spPr>
+        <p:txBody>
+          <a:bodyPr wrap="square" lIns="0" rIns="0" tIns="0" bIns="0" anchor="t">
+            <a:spAutoFit/>
+          </a:bodyPr>
+          <a:lstStyle/>
+          <a:p>
+            <a:pPr algn="l">
+              <a:spcBef>
+                <a:spcPts val="0"/>
+              </a:spcBef>
+              <a:spcAft>
+                <a:spcPts val="0"/>
+              </a:spcAft>
+            </a:pPr>
             <a:r>
               <a:rPr sz="900" b="1">
                 <a:solidFill>
-                  <a:srgbClr val="933723"/>
-                </a:solidFill>
-                <a:latin typeface="Consolas"/>
-              </a:rPr>
-              <a:t>-&gt; back to our integrator</a:t>
+                  <a:srgbClr val="1B646D"/>
+                </a:solidFill>
+                <a:latin typeface="Consolas"/>
+              </a:rPr>
+              <a:t>vx</a:t>
+            </a:r>
+          </a:p>
+          <a:p>
+            <a:pPr>
+              <a:spcBef>
+                <a:spcPts val="0"/>
+              </a:spcBef>
+              <a:spcAft>
+                <a:spcPts val="0"/>
+              </a:spcAft>
+            </a:pPr>
+            <a:r>
+              <a:rPr sz="900" b="1">
+                <a:solidFill>
+                  <a:srgbClr val="1B646D"/>
+                </a:solidFill>
+                <a:latin typeface="Consolas"/>
+              </a:rPr>
+              <a:t>next</a:t>
+            </a:r>
+          </a:p>
+          <a:p>
+            <a:pPr>
+              <a:spcBef>
+                <a:spcPts val="0"/>
+              </a:spcBef>
+              <a:spcAft>
+                <a:spcPts val="0"/>
+              </a:spcAft>
+            </a:pPr>
+            <a:r>
+              <a:rPr sz="900" b="1">
+                <a:solidFill>
+                  <a:srgbClr val="1B646D"/>
+                </a:solidFill>
+                <a:latin typeface="Consolas"/>
+              </a:rPr>
+              <a:t>step</a:t>
+            </a:r>
+          </a:p>
+        </p:txBody>
+      </p:sp>
+      <p:sp>
+        <p:nvSpPr>
+          <p:cNvPr id="25" name="TextBox 24"/>
+          <p:cNvSpPr txBox="1"/>
+          <p:nvPr/>
+        </p:nvSpPr>
+        <p:spPr>
+          <a:xfrm>
+            <a:off x="566928" y="6309360"/>
+            <a:ext cx="11064240" cy="201168"/>
+          </a:xfrm>
+          <a:prstGeom prst="rect">
+            <a:avLst/>
+          </a:prstGeom>
+          <a:noFill/>
+        </p:spPr>
+        <p:txBody>
+          <a:bodyPr wrap="square" lIns="0" rIns="0" tIns="0" bIns="0" anchor="t">
+            <a:spAutoFit/>
+          </a:bodyPr>
+          <a:lstStyle/>
+          <a:p>
+            <a:pPr algn="l">
+              <a:spcBef>
+                <a:spcPts val="0"/>
+              </a:spcBef>
+              <a:spcAft>
+                <a:spcPts val="0"/>
+              </a:spcAft>
+            </a:pPr>
+            <a:r>
+              <a:rPr sz="950" b="0">
+                <a:solidFill>
+                  <a:srgbClr val="A9611A"/>
+                </a:solidFill>
+                <a:latin typeface="Consolas"/>
+              </a:rPr>
+              <a:t>The bench sets the wheel speed. CarMaker sets the vehicle speed, by integrating these same tire forces on the vehicle mass at Body Frame.</a:t>
+            </a:r>
+          </a:p>
+        </p:txBody>
+      </p:sp>
+      <p:sp>
+        <p:nvSpPr>
+          <p:cNvPr id="26" name="TextBox 25"/>
+          <p:cNvSpPr txBox="1"/>
+          <p:nvPr/>
+        </p:nvSpPr>
+        <p:spPr>
+          <a:xfrm>
+            <a:off x="566928" y="6510528"/>
+            <a:ext cx="11064240" cy="201168"/>
+          </a:xfrm>
+          <a:prstGeom prst="rect">
+            <a:avLst/>
+          </a:prstGeom>
+          <a:noFill/>
+        </p:spPr>
+        <p:txBody>
+          <a:bodyPr wrap="square" lIns="0" rIns="0" tIns="0" bIns="0" anchor="t">
+            <a:spAutoFit/>
+          </a:bodyPr>
+          <a:lstStyle/>
+          <a:p>
+            <a:pPr algn="l">
+              <a:spcBef>
+                <a:spcPts val="0"/>
+              </a:spcBef>
+              <a:spcAft>
+                <a:spcPts val="0"/>
+              </a:spcAft>
+            </a:pPr>
+            <a:r>
+              <a:rPr sz="950" b="0">
+                <a:solidFill>
+                  <a:srgbClr val="78838F"/>
+                </a:solidFill>
+                <a:latin typeface="Consolas"/>
+              </a:rPr>
+              <a:t>Neither one is imposed on the other. They meet only in the slip calculation, which is the whole coupling.</a:t>
             </a:r>
           </a:p>
         </p:txBody>
@@ -7765,7 +8014,7 @@
                 </a:solidFill>
                 <a:latin typeface="Bahnschrift"/>
               </a:rPr>
-              <a:t>The wheel can oscillate against the tire</a:t>
+              <a:t>The computed wheel speed can start to oscillate</a:t>
             </a:r>
           </a:p>
         </p:txBody>
@@ -7807,7 +8056,7 @@
                 </a:solidFill>
                 <a:latin typeface="Segoe UI"/>
               </a:rPr>
-              <a:t>The wheel has inertia. The tire sits between it and the road and acts like a spring. That is an oscillator, and it exists on any real vehicle.</a:t>
+              <a:t>This is the one failure mode worth knowing. It shows up in the logs, and the dyno is then commanded to chase the wobble.</a:t>
             </a:r>
           </a:p>
         </p:txBody>
@@ -7820,8 +8069,8 @@
         </p:nvSpPr>
         <p:spPr>
           <a:xfrm>
-            <a:off x="566928" y="1792224"/>
-            <a:ext cx="3657600" cy="237744"/>
+            <a:off x="566928" y="1773936"/>
+            <a:ext cx="5486400" cy="237744"/>
           </a:xfrm>
           <a:prstGeom prst="rect">
             <a:avLst/>
@@ -7843,71 +8092,27 @@
               </a:spcAft>
             </a:pPr>
             <a:r>
-              <a:rPr sz="1300" b="1">
-                <a:solidFill>
-                  <a:srgbClr val="111820"/>
+              <a:rPr sz="1400" b="1">
+                <a:solidFill>
+                  <a:srgbClr val="933723"/>
                 </a:solidFill>
                 <a:latin typeface="Bahnschrift"/>
               </a:rPr>
-              <a:t>WHAT OSCILLATES</a:t>
-            </a:r>
-          </a:p>
-        </p:txBody>
-      </p:sp>
-      <p:sp>
-        <p:nvSpPr>
-          <p:cNvPr id="7" name="Donut 6"/>
-          <p:cNvSpPr/>
-          <p:nvPr/>
-        </p:nvSpPr>
-        <p:spPr>
-          <a:xfrm>
-            <a:off x="822960" y="2139696"/>
-            <a:ext cx="1371600" cy="1371600"/>
-          </a:xfrm>
-          <a:prstGeom prst="donut">
-            <a:avLst/>
-          </a:prstGeom>
-          <a:noFill/>
-          <a:ln w="31750">
-            <a:solidFill>
-              <a:srgbClr val="111820"/>
-            </a:solidFill>
-          </a:ln>
-          <a:effectLst/>
-        </p:spPr>
-        <p:style>
-          <a:lnRef idx="1">
-            <a:schemeClr val="accent1"/>
-          </a:lnRef>
-          <a:fillRef idx="3">
-            <a:schemeClr val="accent1"/>
-          </a:fillRef>
-          <a:effectRef idx="2">
-            <a:schemeClr val="accent1"/>
-          </a:effectRef>
-          <a:fontRef idx="minor">
-            <a:schemeClr val="lt1"/>
-          </a:fontRef>
-        </p:style>
-        <p:txBody>
-          <a:bodyPr rtlCol="0" anchor="ctr"/>
-          <a:lstStyle/>
-          <a:p>
-            <a:pPr algn="ctr"/>
-          </a:p>
-        </p:txBody>
-      </p:sp>
-      <p:sp>
-        <p:nvSpPr>
-          <p:cNvPr id="8" name="TextBox 7"/>
+              <a:t>1  WHAT YOU WOULD SEE</a:t>
+            </a:r>
+          </a:p>
+        </p:txBody>
+      </p:sp>
+      <p:sp>
+        <p:nvSpPr>
+          <p:cNvPr id="7" name="TextBox 6"/>
           <p:cNvSpPr txBox="1"/>
           <p:nvPr/>
         </p:nvSpPr>
         <p:spPr>
           <a:xfrm>
-            <a:off x="1280160" y="2724912"/>
-            <a:ext cx="457200" cy="237744"/>
+            <a:off x="566928" y="2066544"/>
+            <a:ext cx="3749040" cy="731520"/>
           </a:xfrm>
           <a:prstGeom prst="rect">
             <a:avLst/>
@@ -7920,36 +8125,93 @@
           </a:bodyPr>
           <a:lstStyle/>
           <a:p>
-            <a:pPr algn="ctr">
-              <a:spcBef>
-                <a:spcPts val="0"/>
-              </a:spcBef>
-              <a:spcAft>
-                <a:spcPts val="0"/>
-              </a:spcAft>
-            </a:pPr>
-            <a:r>
-              <a:rPr sz="1300" b="1">
-                <a:solidFill>
-                  <a:srgbClr val="111820"/>
-                </a:solidFill>
-                <a:latin typeface="Consolas"/>
-              </a:rPr>
-              <a:t>I</a:t>
-            </a:r>
-          </a:p>
-        </p:txBody>
-      </p:sp>
-      <p:sp>
-        <p:nvSpPr>
-          <p:cNvPr id="9" name="TextBox 8"/>
+            <a:pPr algn="l">
+              <a:spcBef>
+                <a:spcPts val="0"/>
+              </a:spcBef>
+              <a:spcAft>
+                <a:spcPts val="0"/>
+              </a:spcAft>
+            </a:pPr>
+            <a:r>
+              <a:rPr sz="950" b="0">
+                <a:solidFill>
+                  <a:srgbClr val="4A5764"/>
+                </a:solidFill>
+                <a:latin typeface="Consolas"/>
+              </a:rPr>
+              <a:t>rotv and Trq_T2W wobbling at tens of hertz,</a:t>
+            </a:r>
+          </a:p>
+          <a:p>
+            <a:pPr>
+              <a:spcBef>
+                <a:spcPts val="0"/>
+              </a:spcBef>
+              <a:spcAft>
+                <a:spcPts val="0"/>
+              </a:spcAft>
+            </a:pPr>
+            <a:r>
+              <a:rPr sz="950" b="0">
+                <a:solidFill>
+                  <a:srgbClr val="4A5764"/>
+                </a:solidFill>
+                <a:latin typeface="Consolas"/>
+              </a:rPr>
+              <a:t>on top of the speed the vehicle should be</a:t>
+            </a:r>
+          </a:p>
+          <a:p>
+            <a:pPr>
+              <a:spcBef>
+                <a:spcPts val="0"/>
+              </a:spcBef>
+              <a:spcAft>
+                <a:spcPts val="0"/>
+              </a:spcAft>
+            </a:pPr>
+            <a:r>
+              <a:rPr sz="950" b="0">
+                <a:solidFill>
+                  <a:srgbClr val="4A5764"/>
+                </a:solidFill>
+                <a:latin typeface="Consolas"/>
+              </a:rPr>
+              <a:t>holding. Because rotv is also the dyno</a:t>
+            </a:r>
+          </a:p>
+          <a:p>
+            <a:pPr>
+              <a:spcBef>
+                <a:spcPts val="0"/>
+              </a:spcBef>
+              <a:spcAft>
+                <a:spcPts val="0"/>
+              </a:spcAft>
+            </a:pPr>
+            <a:r>
+              <a:rPr sz="950" b="0">
+                <a:solidFill>
+                  <a:srgbClr val="4A5764"/>
+                </a:solidFill>
+                <a:latin typeface="Consolas"/>
+              </a:rPr>
+              <a:t>command, the real shaft is told to chase it.</a:t>
+            </a:r>
+          </a:p>
+        </p:txBody>
+      </p:sp>
+      <p:sp>
+        <p:nvSpPr>
+          <p:cNvPr id="8" name="TextBox 7"/>
           <p:cNvSpPr txBox="1"/>
           <p:nvPr/>
         </p:nvSpPr>
         <p:spPr>
           <a:xfrm>
-            <a:off x="658368" y="3584448"/>
-            <a:ext cx="1828800" cy="219456"/>
+            <a:off x="566928" y="2907792"/>
+            <a:ext cx="3657600" cy="219456"/>
           </a:xfrm>
           <a:prstGeom prst="rect">
             <a:avLst/>
@@ -7973,179 +8235,32 @@
             <a:r>
               <a:rPr sz="900" b="0">
                 <a:solidFill>
-                  <a:srgbClr val="A9611A"/>
-                </a:solidFill>
-                <a:latin typeface="Consolas"/>
-              </a:rPr>
-              <a:t>wheel rocks back</a:t>
-            </a:r>
-          </a:p>
-          <a:p>
-            <a:pPr>
-              <a:spcBef>
-                <a:spcPts val="0"/>
-              </a:spcBef>
-              <a:spcAft>
-                <a:spcPts val="0"/>
-              </a:spcAft>
-            </a:pPr>
-            <a:r>
-              <a:rPr sz="900" b="0">
-                <a:solidFill>
-                  <a:srgbClr val="A9611A"/>
-                </a:solidFill>
-                <a:latin typeface="Consolas"/>
-              </a:rPr>
-              <a:t>and forth</a:t>
-            </a:r>
-          </a:p>
-        </p:txBody>
-      </p:sp>
-      <p:sp>
-        <p:nvSpPr>
-          <p:cNvPr id="10" name="Lightning Bolt 9"/>
-          <p:cNvSpPr/>
-          <p:nvPr/>
-        </p:nvSpPr>
-        <p:spPr>
-          <a:xfrm>
-            <a:off x="2304288" y="2651760"/>
-            <a:ext cx="1097280" cy="365760"/>
-          </a:xfrm>
-          <a:prstGeom prst="lightningBolt">
-            <a:avLst/>
-          </a:prstGeom>
-          <a:noFill/>
+                  <a:srgbClr val="78838F"/>
+                </a:solidFill>
+                <a:latin typeface="Consolas"/>
+              </a:rPr>
+              <a:t>rotv during a slow crawl</a:t>
+            </a:r>
+          </a:p>
+        </p:txBody>
+      </p:sp>
+      <p:cxnSp>
+        <p:nvCxnSpPr>
+          <p:cNvPr id="9" name="Connector 8"/>
+          <p:cNvCxnSpPr/>
+          <p:nvPr/>
+        </p:nvCxnSpPr>
+        <p:spPr>
+          <a:xfrm>
+            <a:off x="640080" y="3401568"/>
+            <a:ext cx="731520" cy="0"/>
+          </a:xfrm>
+          <a:prstGeom prst="line">
+            <a:avLst/>
+          </a:prstGeom>
           <a:ln w="25400">
             <a:solidFill>
               <a:srgbClr val="1B646D"/>
-            </a:solidFill>
-          </a:ln>
-          <a:effectLst/>
-        </p:spPr>
-        <p:style>
-          <a:lnRef idx="1">
-            <a:schemeClr val="accent1"/>
-          </a:lnRef>
-          <a:fillRef idx="3">
-            <a:schemeClr val="accent1"/>
-          </a:fillRef>
-          <a:effectRef idx="2">
-            <a:schemeClr val="accent1"/>
-          </a:effectRef>
-          <a:fontRef idx="minor">
-            <a:schemeClr val="lt1"/>
-          </a:fontRef>
-        </p:style>
-        <p:txBody>
-          <a:bodyPr rtlCol="0" anchor="ctr"/>
-          <a:lstStyle/>
-          <a:p>
-            <a:pPr algn="ctr"/>
-          </a:p>
-        </p:txBody>
-      </p:sp>
-      <p:sp>
-        <p:nvSpPr>
-          <p:cNvPr id="11" name="TextBox 10"/>
-          <p:cNvSpPr txBox="1"/>
-          <p:nvPr/>
-        </p:nvSpPr>
-        <p:spPr>
-          <a:xfrm>
-            <a:off x="2249424" y="2340864"/>
-            <a:ext cx="1463040" cy="219456"/>
-          </a:xfrm>
-          <a:prstGeom prst="rect">
-            <a:avLst/>
-          </a:prstGeom>
-          <a:noFill/>
-        </p:spPr>
-        <p:txBody>
-          <a:bodyPr wrap="square" lIns="0" rIns="0" tIns="0" bIns="0" anchor="t">
-            <a:spAutoFit/>
-          </a:bodyPr>
-          <a:lstStyle/>
-          <a:p>
-            <a:pPr algn="l">
-              <a:spcBef>
-                <a:spcPts val="0"/>
-              </a:spcBef>
-              <a:spcAft>
-                <a:spcPts val="0"/>
-              </a:spcAft>
-            </a:pPr>
-            <a:r>
-              <a:rPr sz="900" b="0">
-                <a:solidFill>
-                  <a:srgbClr val="1B646D"/>
-                </a:solidFill>
-                <a:latin typeface="Consolas"/>
-              </a:rPr>
-              <a:t>tire carcass</a:t>
-            </a:r>
-          </a:p>
-        </p:txBody>
-      </p:sp>
-      <p:sp>
-        <p:nvSpPr>
-          <p:cNvPr id="12" name="TextBox 11"/>
-          <p:cNvSpPr txBox="1"/>
-          <p:nvPr/>
-        </p:nvSpPr>
-        <p:spPr>
-          <a:xfrm>
-            <a:off x="2249424" y="3072384"/>
-            <a:ext cx="1554480" cy="219456"/>
-          </a:xfrm>
-          <a:prstGeom prst="rect">
-            <a:avLst/>
-          </a:prstGeom>
-          <a:noFill/>
-        </p:spPr>
-        <p:txBody>
-          <a:bodyPr wrap="square" lIns="0" rIns="0" tIns="0" bIns="0" anchor="t">
-            <a:spAutoFit/>
-          </a:bodyPr>
-          <a:lstStyle/>
-          <a:p>
-            <a:pPr algn="l">
-              <a:spcBef>
-                <a:spcPts val="0"/>
-              </a:spcBef>
-              <a:spcAft>
-                <a:spcPts val="0"/>
-              </a:spcAft>
-            </a:pPr>
-            <a:r>
-              <a:rPr sz="900" b="0">
-                <a:solidFill>
-                  <a:srgbClr val="1B646D"/>
-                </a:solidFill>
-                <a:latin typeface="Consolas"/>
-              </a:rPr>
-              <a:t>acts as a spring</a:t>
-            </a:r>
-          </a:p>
-        </p:txBody>
-      </p:sp>
-      <p:cxnSp>
-        <p:nvCxnSpPr>
-          <p:cNvPr id="13" name="Connector 12"/>
-          <p:cNvCxnSpPr/>
-          <p:nvPr/>
-        </p:nvCxnSpPr>
-        <p:spPr>
-          <a:xfrm>
-            <a:off x="3584448" y="2432304"/>
-            <a:ext cx="0" cy="841248"/>
-          </a:xfrm>
-          <a:prstGeom prst="line">
-            <a:avLst/>
-          </a:prstGeom>
-          <a:ln w="38100">
-            <a:solidFill>
-              <a:srgbClr val="111820"/>
             </a:solidFill>
           </a:ln>
         </p:spPr>
@@ -8164,183 +8279,23 @@
           </a:fontRef>
         </p:style>
       </p:cxnSp>
-      <p:sp>
-        <p:nvSpPr>
-          <p:cNvPr id="14" name="TextBox 13"/>
-          <p:cNvSpPr txBox="1"/>
-          <p:nvPr/>
-        </p:nvSpPr>
-        <p:spPr>
-          <a:xfrm>
-            <a:off x="3675888" y="2724912"/>
-            <a:ext cx="731520" cy="219456"/>
-          </a:xfrm>
-          <a:prstGeom prst="rect">
-            <a:avLst/>
-          </a:prstGeom>
-          <a:noFill/>
-        </p:spPr>
-        <p:txBody>
-          <a:bodyPr wrap="square" lIns="0" rIns="0" tIns="0" bIns="0" anchor="t">
-            <a:spAutoFit/>
-          </a:bodyPr>
-          <a:lstStyle/>
-          <a:p>
-            <a:pPr algn="l">
-              <a:spcBef>
-                <a:spcPts val="0"/>
-              </a:spcBef>
-              <a:spcAft>
-                <a:spcPts val="0"/>
-              </a:spcAft>
-            </a:pPr>
-            <a:r>
-              <a:rPr sz="900" b="0">
-                <a:solidFill>
-                  <a:srgbClr val="78838F"/>
-                </a:solidFill>
-                <a:latin typeface="Consolas"/>
-              </a:rPr>
-              <a:t>road</a:t>
-            </a:r>
-          </a:p>
-        </p:txBody>
-      </p:sp>
-      <p:sp>
-        <p:nvSpPr>
-          <p:cNvPr id="15" name="TextBox 14"/>
-          <p:cNvSpPr txBox="1"/>
-          <p:nvPr/>
-        </p:nvSpPr>
-        <p:spPr>
-          <a:xfrm>
-            <a:off x="566928" y="3968496"/>
-            <a:ext cx="4206240" cy="1005840"/>
-          </a:xfrm>
-          <a:prstGeom prst="rect">
-            <a:avLst/>
-          </a:prstGeom>
-          <a:noFill/>
-        </p:spPr>
-        <p:txBody>
-          <a:bodyPr wrap="square" lIns="0" rIns="0" tIns="0" bIns="0" anchor="t">
-            <a:spAutoFit/>
-          </a:bodyPr>
-          <a:lstStyle/>
-          <a:p>
-            <a:pPr algn="l">
-              <a:spcBef>
-                <a:spcPts val="0"/>
-              </a:spcBef>
-              <a:spcAft>
-                <a:spcPts val="0"/>
-              </a:spcAft>
-            </a:pPr>
-            <a:r>
-              <a:rPr sz="950" b="0">
-                <a:solidFill>
-                  <a:srgbClr val="4A5764"/>
-                </a:solidFill>
-                <a:latin typeface="Consolas"/>
-              </a:rPr>
-              <a:t>The carcass has to flex before it can pass</a:t>
-            </a:r>
-          </a:p>
-          <a:p>
-            <a:pPr>
-              <a:spcBef>
-                <a:spcPts val="0"/>
-              </a:spcBef>
-              <a:spcAft>
-                <a:spcPts val="0"/>
-              </a:spcAft>
-            </a:pPr>
-            <a:r>
-              <a:rPr sz="950" b="0">
-                <a:solidFill>
-                  <a:srgbClr val="4A5764"/>
-                </a:solidFill>
-                <a:latin typeface="Consolas"/>
-              </a:rPr>
-              <a:t>force to the road. CarMaker gives that flex a</a:t>
-            </a:r>
-          </a:p>
-          <a:p>
-            <a:pPr>
-              <a:spcBef>
-                <a:spcPts val="0"/>
-              </a:spcBef>
-              <a:spcAft>
-                <a:spcPts val="0"/>
-              </a:spcAft>
-            </a:pPr>
-            <a:r>
-              <a:rPr sz="950" b="0">
-                <a:solidFill>
-                  <a:srgbClr val="4A5764"/>
-                </a:solidFill>
-                <a:latin typeface="Consolas"/>
-              </a:rPr>
-              <a:t>length: about 5 cm of rolling. A compliance is</a:t>
-            </a:r>
-          </a:p>
-          <a:p>
-            <a:pPr>
-              <a:spcBef>
-                <a:spcPts val="0"/>
-              </a:spcBef>
-              <a:spcAft>
-                <a:spcPts val="0"/>
-              </a:spcAft>
-            </a:pPr>
-            <a:r>
-              <a:rPr sz="950" b="0">
-                <a:solidFill>
-                  <a:srgbClr val="4A5764"/>
-                </a:solidFill>
-                <a:latin typeface="Consolas"/>
-              </a:rPr>
-              <a:t>a spring, and a spring against the wheel</a:t>
-            </a:r>
-          </a:p>
-          <a:p>
-            <a:pPr>
-              <a:spcBef>
-                <a:spcPts val="0"/>
-              </a:spcBef>
-              <a:spcAft>
-                <a:spcPts val="0"/>
-              </a:spcAft>
-            </a:pPr>
-            <a:r>
-              <a:rPr sz="950" b="0">
-                <a:solidFill>
-                  <a:srgbClr val="4A5764"/>
-                </a:solidFill>
-                <a:latin typeface="Consolas"/>
-              </a:rPr>
-              <a:t>inertia is an oscillator.</a:t>
-            </a:r>
-          </a:p>
-        </p:txBody>
-      </p:sp>
       <p:cxnSp>
         <p:nvCxnSpPr>
-          <p:cNvPr id="16" name="Connector 15"/>
+          <p:cNvPr id="10" name="Connector 9"/>
           <p:cNvCxnSpPr/>
           <p:nvPr/>
         </p:nvCxnSpPr>
         <p:spPr>
-          <a:xfrm>
-            <a:off x="5029200" y="1737360"/>
-            <a:ext cx="0" cy="3383280"/>
+          <a:xfrm flipV="1">
+            <a:off x="1371600" y="3346704"/>
+            <a:ext cx="182880" cy="54864"/>
           </a:xfrm>
           <a:prstGeom prst="line">
             <a:avLst/>
           </a:prstGeom>
-          <a:ln w="12700">
+          <a:ln w="25400">
             <a:solidFill>
-              <a:srgbClr val="C7CED5"/>
+              <a:srgbClr val="1B646D"/>
             </a:solidFill>
           </a:ln>
         </p:spPr>
@@ -8359,16 +8314,121 @@
           </a:fontRef>
         </p:style>
       </p:cxnSp>
-      <p:sp>
-        <p:nvSpPr>
-          <p:cNvPr id="17" name="TextBox 16"/>
+      <p:cxnSp>
+        <p:nvCxnSpPr>
+          <p:cNvPr id="11" name="Connector 10"/>
+          <p:cNvCxnSpPr/>
+          <p:nvPr/>
+        </p:nvCxnSpPr>
+        <p:spPr>
+          <a:xfrm>
+            <a:off x="1554480" y="3346704"/>
+            <a:ext cx="182880" cy="91440"/>
+          </a:xfrm>
+          <a:prstGeom prst="line">
+            <a:avLst/>
+          </a:prstGeom>
+          <a:ln w="25400">
+            <a:solidFill>
+              <a:srgbClr val="1B646D"/>
+            </a:solidFill>
+          </a:ln>
+        </p:spPr>
+        <p:style>
+          <a:lnRef idx="2">
+            <a:schemeClr val="accent1"/>
+          </a:lnRef>
+          <a:fillRef idx="0">
+            <a:schemeClr val="accent1"/>
+          </a:fillRef>
+          <a:effectRef idx="1">
+            <a:schemeClr val="accent1"/>
+          </a:effectRef>
+          <a:fontRef idx="minor">
+            <a:schemeClr val="tx1"/>
+          </a:fontRef>
+        </p:style>
+      </p:cxnSp>
+      <p:cxnSp>
+        <p:nvCxnSpPr>
+          <p:cNvPr id="12" name="Connector 11"/>
+          <p:cNvCxnSpPr/>
+          <p:nvPr/>
+        </p:nvCxnSpPr>
+        <p:spPr>
+          <a:xfrm flipV="1">
+            <a:off x="1737360" y="3383280"/>
+            <a:ext cx="182880" cy="54864"/>
+          </a:xfrm>
+          <a:prstGeom prst="line">
+            <a:avLst/>
+          </a:prstGeom>
+          <a:ln w="25400">
+            <a:solidFill>
+              <a:srgbClr val="1B646D"/>
+            </a:solidFill>
+          </a:ln>
+        </p:spPr>
+        <p:style>
+          <a:lnRef idx="2">
+            <a:schemeClr val="accent1"/>
+          </a:lnRef>
+          <a:fillRef idx="0">
+            <a:schemeClr val="accent1"/>
+          </a:fillRef>
+          <a:effectRef idx="1">
+            <a:schemeClr val="accent1"/>
+          </a:effectRef>
+          <a:fontRef idx="minor">
+            <a:schemeClr val="tx1"/>
+          </a:fontRef>
+        </p:style>
+      </p:cxnSp>
+      <p:cxnSp>
+        <p:nvCxnSpPr>
+          <p:cNvPr id="13" name="Connector 12"/>
+          <p:cNvCxnSpPr/>
+          <p:nvPr/>
+        </p:nvCxnSpPr>
+        <p:spPr>
+          <a:xfrm>
+            <a:off x="1920240" y="3383280"/>
+            <a:ext cx="731520" cy="18288"/>
+          </a:xfrm>
+          <a:prstGeom prst="line">
+            <a:avLst/>
+          </a:prstGeom>
+          <a:ln w="25400">
+            <a:solidFill>
+              <a:srgbClr val="1B646D"/>
+            </a:solidFill>
+          </a:ln>
+        </p:spPr>
+        <p:style>
+          <a:lnRef idx="2">
+            <a:schemeClr val="accent1"/>
+          </a:lnRef>
+          <a:fillRef idx="0">
+            <a:schemeClr val="accent1"/>
+          </a:fillRef>
+          <a:effectRef idx="1">
+            <a:schemeClr val="accent1"/>
+          </a:effectRef>
+          <a:fontRef idx="minor">
+            <a:schemeClr val="tx1"/>
+          </a:fontRef>
+        </p:style>
+      </p:cxnSp>
+      <p:sp>
+        <p:nvSpPr>
+          <p:cNvPr id="14" name="TextBox 13"/>
           <p:cNvSpPr txBox="1"/>
           <p:nvPr/>
         </p:nvSpPr>
         <p:spPr>
           <a:xfrm>
-            <a:off x="5303520" y="1792224"/>
-            <a:ext cx="6309360" cy="237744"/>
+            <a:off x="2743200" y="3291840"/>
+            <a:ext cx="914400" cy="219456"/>
           </a:xfrm>
           <a:prstGeom prst="rect">
             <a:avLst/>
@@ -8390,299 +8450,262 @@
               </a:spcAft>
             </a:pPr>
             <a:r>
-              <a:rPr sz="1300" b="1">
-                <a:solidFill>
-                  <a:srgbClr val="111820"/>
-                </a:solidFill>
-                <a:latin typeface="Bahnschrift"/>
-              </a:rPr>
-              <a:t>WHERE THE DAMPING COMES FROM</a:t>
-            </a:r>
-          </a:p>
-        </p:txBody>
-      </p:sp>
-      <p:sp>
-        <p:nvSpPr>
-          <p:cNvPr id="18" name="TextBox 17"/>
-          <p:cNvSpPr txBox="1"/>
-          <p:nvPr/>
-        </p:nvSpPr>
-        <p:spPr>
-          <a:xfrm>
-            <a:off x="5303520" y="2084832"/>
-            <a:ext cx="6309360" cy="822960"/>
-          </a:xfrm>
-          <a:prstGeom prst="rect">
-            <a:avLst/>
-          </a:prstGeom>
-          <a:noFill/>
-        </p:spPr>
-        <p:txBody>
-          <a:bodyPr wrap="square" lIns="0" rIns="0" tIns="0" bIns="0" anchor="t">
-            <a:spAutoFit/>
-          </a:bodyPr>
-          <a:lstStyle/>
-          <a:p>
-            <a:pPr algn="l">
-              <a:spcBef>
-                <a:spcPts val="0"/>
-              </a:spcBef>
-              <a:spcAft>
-                <a:spcPts val="0"/>
-              </a:spcAft>
-            </a:pPr>
-            <a:r>
-              <a:rPr sz="950" b="0">
-                <a:solidFill>
-                  <a:srgbClr val="4A5764"/>
-                </a:solidFill>
-                <a:latin typeface="Consolas"/>
-              </a:rPr>
-              <a:t>As the tire rolls it continuously lays down fresh rubber and renews its grip.</a:t>
-            </a:r>
-          </a:p>
-          <a:p>
-            <a:pPr>
-              <a:spcBef>
-                <a:spcPts val="0"/>
-              </a:spcBef>
-              <a:spcAft>
-                <a:spcPts val="0"/>
-              </a:spcAft>
-            </a:pPr>
-            <a:r>
-              <a:rPr sz="950" b="0">
-                <a:solidFill>
-                  <a:srgbClr val="4A5764"/>
-                </a:solidFill>
-                <a:latin typeface="Consolas"/>
-              </a:rPr>
-              <a:t>That is what settles the oscillation.</a:t>
-            </a:r>
-          </a:p>
-          <a:p>
-            <a:pPr>
-              <a:spcBef>
-                <a:spcPts val="400"/>
-              </a:spcBef>
-              <a:spcAft>
-                <a:spcPts val="0"/>
-              </a:spcAft>
-            </a:pPr>
-            <a:r>
-              <a:rPr sz="950" b="1">
-                <a:solidFill>
-                  <a:srgbClr val="A9611A"/>
-                </a:solidFill>
-                <a:latin typeface="Consolas"/>
-              </a:rPr>
-              <a:t>Faster rolling renews it faster, so damping grows with speed.</a:t>
-            </a:r>
-          </a:p>
-          <a:p>
-            <a:pPr>
-              <a:spcBef>
-                <a:spcPts val="0"/>
-              </a:spcBef>
-              <a:spcAft>
-                <a:spcPts val="0"/>
-              </a:spcAft>
-            </a:pPr>
-            <a:r>
-              <a:rPr sz="950" b="1">
-                <a:solidFill>
-                  <a:srgbClr val="A9611A"/>
-                </a:solidFill>
-                <a:latin typeface="Consolas"/>
-              </a:rPr>
-              <a:t>At a standstill there is none at all.</a:t>
-            </a:r>
-          </a:p>
-        </p:txBody>
-      </p:sp>
-      <p:sp>
-        <p:nvSpPr>
-          <p:cNvPr id="19" name="TextBox 18"/>
-          <p:cNvSpPr txBox="1"/>
-          <p:nvPr/>
-        </p:nvSpPr>
-        <p:spPr>
-          <a:xfrm>
-            <a:off x="5303520" y="3218688"/>
-            <a:ext cx="6309360" cy="237744"/>
-          </a:xfrm>
-          <a:prstGeom prst="rect">
-            <a:avLst/>
-          </a:prstGeom>
-          <a:noFill/>
-        </p:spPr>
-        <p:txBody>
-          <a:bodyPr wrap="square" lIns="0" rIns="0" tIns="0" bIns="0" anchor="t">
-            <a:spAutoFit/>
-          </a:bodyPr>
-          <a:lstStyle/>
-          <a:p>
-            <a:pPr algn="l">
-              <a:spcBef>
-                <a:spcPts val="0"/>
-              </a:spcBef>
-              <a:spcAft>
-                <a:spcPts val="0"/>
-              </a:spcAft>
-            </a:pPr>
-            <a:r>
-              <a:rPr sz="1300" b="1">
-                <a:solidFill>
-                  <a:srgbClr val="111820"/>
-                </a:solidFill>
-                <a:latin typeface="Bahnschrift"/>
-              </a:rPr>
-              <a:t>WHAT THE INTEGRATION STEP COSTS</a:t>
-            </a:r>
-          </a:p>
-        </p:txBody>
-      </p:sp>
-      <p:sp>
-        <p:nvSpPr>
-          <p:cNvPr id="20" name="TextBox 19"/>
-          <p:cNvSpPr txBox="1"/>
-          <p:nvPr/>
-        </p:nvSpPr>
-        <p:spPr>
-          <a:xfrm>
-            <a:off x="5303520" y="3511296"/>
-            <a:ext cx="6309360" cy="914400"/>
-          </a:xfrm>
-          <a:prstGeom prst="rect">
-            <a:avLst/>
-          </a:prstGeom>
-          <a:noFill/>
-        </p:spPr>
-        <p:txBody>
-          <a:bodyPr wrap="square" lIns="0" rIns="0" tIns="0" bIns="0" anchor="t">
-            <a:spAutoFit/>
-          </a:bodyPr>
-          <a:lstStyle/>
-          <a:p>
-            <a:pPr algn="l">
-              <a:spcBef>
-                <a:spcPts val="0"/>
-              </a:spcBef>
-              <a:spcAft>
-                <a:spcPts val="0"/>
-              </a:spcAft>
-            </a:pPr>
-            <a:r>
-              <a:rPr sz="950" b="0">
-                <a:solidFill>
-                  <a:srgbClr val="4A5764"/>
-                </a:solidFill>
-                <a:latin typeface="Consolas"/>
-              </a:rPr>
-              <a:t>The tire is evaluated once per step, from the wheel speed as it stood at</a:t>
-            </a:r>
-          </a:p>
-          <a:p>
-            <a:pPr>
-              <a:spcBef>
-                <a:spcPts val="0"/>
-              </a:spcBef>
-              <a:spcAft>
-                <a:spcPts val="0"/>
-              </a:spcAft>
-            </a:pPr>
-            <a:r>
-              <a:rPr sz="950" b="0">
-                <a:solidFill>
-                  <a:srgbClr val="4A5764"/>
-                </a:solidFill>
-                <a:latin typeface="Consolas"/>
-              </a:rPr>
-              <a:t>the start of it. That always removes a small, fixed amount of damping.</a:t>
-            </a:r>
-          </a:p>
-          <a:p>
-            <a:pPr>
-              <a:spcBef>
-                <a:spcPts val="400"/>
-              </a:spcBef>
-              <a:spcAft>
-                <a:spcPts val="0"/>
-              </a:spcAft>
-            </a:pPr>
-            <a:r>
-              <a:rPr sz="950" b="0">
-                <a:solidFill>
-                  <a:srgbClr val="933723"/>
-                </a:solidFill>
-                <a:latin typeface="Consolas"/>
-              </a:rPr>
-              <a:t>At road speed there is plenty to spare. Down near walking pace there is</a:t>
-            </a:r>
-          </a:p>
-          <a:p>
-            <a:pPr>
-              <a:spcBef>
-                <a:spcPts val="0"/>
-              </a:spcBef>
-              <a:spcAft>
-                <a:spcPts val="0"/>
-              </a:spcAft>
-            </a:pPr>
-            <a:r>
-              <a:rPr sz="950" b="0">
-                <a:solidFill>
-                  <a:srgbClr val="933723"/>
-                </a:solidFill>
-                <a:latin typeface="Consolas"/>
-              </a:rPr>
-              <a:t>not, and the trace can ring.</a:t>
-            </a:r>
-          </a:p>
-        </p:txBody>
-      </p:sp>
-      <p:sp>
-        <p:nvSpPr>
-          <p:cNvPr id="21" name="TextBox 20"/>
-          <p:cNvSpPr txBox="1"/>
-          <p:nvPr/>
-        </p:nvSpPr>
-        <p:spPr>
-          <a:xfrm>
-            <a:off x="5303520" y="4590288"/>
-            <a:ext cx="6309360" cy="237744"/>
-          </a:xfrm>
-          <a:prstGeom prst="rect">
-            <a:avLst/>
-          </a:prstGeom>
-          <a:noFill/>
-        </p:spPr>
-        <p:txBody>
-          <a:bodyPr wrap="square" lIns="0" rIns="0" tIns="0" bIns="0" anchor="t">
-            <a:spAutoFit/>
-          </a:bodyPr>
-          <a:lstStyle/>
-          <a:p>
-            <a:pPr algn="l">
-              <a:spcBef>
-                <a:spcPts val="0"/>
-              </a:spcBef>
-              <a:spcAft>
-                <a:spcPts val="0"/>
-              </a:spcAft>
-            </a:pPr>
-            <a:r>
-              <a:rPr sz="1200" b="1">
-                <a:solidFill>
-                  <a:srgbClr val="78838F"/>
-                </a:solidFill>
-                <a:latin typeface="Bahnschrift"/>
-              </a:rPr>
-              <a:t>EXAMPLE — rotv OR Trq_T2W DURING A SLOW CRAWL</a:t>
-            </a:r>
-          </a:p>
-        </p:txBody>
-      </p:sp>
+              <a:rPr sz="900" b="0">
+                <a:solidFill>
+                  <a:srgbClr val="1B646D"/>
+                </a:solidFill>
+                <a:latin typeface="Consolas"/>
+              </a:rPr>
+              <a:t>healthy</a:t>
+            </a:r>
+          </a:p>
+        </p:txBody>
+      </p:sp>
+      <p:cxnSp>
+        <p:nvCxnSpPr>
+          <p:cNvPr id="15" name="Connector 14"/>
+          <p:cNvCxnSpPr/>
+          <p:nvPr/>
+        </p:nvCxnSpPr>
+        <p:spPr>
+          <a:xfrm>
+            <a:off x="640080" y="3968496"/>
+            <a:ext cx="548640" cy="0"/>
+          </a:xfrm>
+          <a:prstGeom prst="line">
+            <a:avLst/>
+          </a:prstGeom>
+          <a:ln w="25400">
+            <a:solidFill>
+              <a:srgbClr val="933723"/>
+            </a:solidFill>
+          </a:ln>
+        </p:spPr>
+        <p:style>
+          <a:lnRef idx="2">
+            <a:schemeClr val="accent1"/>
+          </a:lnRef>
+          <a:fillRef idx="0">
+            <a:schemeClr val="accent1"/>
+          </a:fillRef>
+          <a:effectRef idx="1">
+            <a:schemeClr val="accent1"/>
+          </a:effectRef>
+          <a:fontRef idx="minor">
+            <a:schemeClr val="tx1"/>
+          </a:fontRef>
+        </p:style>
+      </p:cxnSp>
+      <p:cxnSp>
+        <p:nvCxnSpPr>
+          <p:cNvPr id="16" name="Connector 15"/>
+          <p:cNvCxnSpPr/>
+          <p:nvPr/>
+        </p:nvCxnSpPr>
+        <p:spPr>
+          <a:xfrm flipV="1">
+            <a:off x="1188720" y="3675888"/>
+            <a:ext cx="109728" cy="292608"/>
+          </a:xfrm>
+          <a:prstGeom prst="line">
+            <a:avLst/>
+          </a:prstGeom>
+          <a:ln w="25400">
+            <a:solidFill>
+              <a:srgbClr val="933723"/>
+            </a:solidFill>
+          </a:ln>
+        </p:spPr>
+        <p:style>
+          <a:lnRef idx="2">
+            <a:schemeClr val="accent1"/>
+          </a:lnRef>
+          <a:fillRef idx="0">
+            <a:schemeClr val="accent1"/>
+          </a:fillRef>
+          <a:effectRef idx="1">
+            <a:schemeClr val="accent1"/>
+          </a:effectRef>
+          <a:fontRef idx="minor">
+            <a:schemeClr val="tx1"/>
+          </a:fontRef>
+        </p:style>
+      </p:cxnSp>
+      <p:cxnSp>
+        <p:nvCxnSpPr>
+          <p:cNvPr id="17" name="Connector 16"/>
+          <p:cNvCxnSpPr/>
+          <p:nvPr/>
+        </p:nvCxnSpPr>
+        <p:spPr>
+          <a:xfrm>
+            <a:off x="1298448" y="3675888"/>
+            <a:ext cx="109728" cy="566928"/>
+          </a:xfrm>
+          <a:prstGeom prst="line">
+            <a:avLst/>
+          </a:prstGeom>
+          <a:ln w="25400">
+            <a:solidFill>
+              <a:srgbClr val="933723"/>
+            </a:solidFill>
+          </a:ln>
+        </p:spPr>
+        <p:style>
+          <a:lnRef idx="2">
+            <a:schemeClr val="accent1"/>
+          </a:lnRef>
+          <a:fillRef idx="0">
+            <a:schemeClr val="accent1"/>
+          </a:fillRef>
+          <a:effectRef idx="1">
+            <a:schemeClr val="accent1"/>
+          </a:effectRef>
+          <a:fontRef idx="minor">
+            <a:schemeClr val="tx1"/>
+          </a:fontRef>
+        </p:style>
+      </p:cxnSp>
+      <p:cxnSp>
+        <p:nvCxnSpPr>
+          <p:cNvPr id="18" name="Connector 17"/>
+          <p:cNvCxnSpPr/>
+          <p:nvPr/>
+        </p:nvCxnSpPr>
+        <p:spPr>
+          <a:xfrm flipV="1">
+            <a:off x="1408176" y="3785616"/>
+            <a:ext cx="109728" cy="457200"/>
+          </a:xfrm>
+          <a:prstGeom prst="line">
+            <a:avLst/>
+          </a:prstGeom>
+          <a:ln w="25400">
+            <a:solidFill>
+              <a:srgbClr val="933723"/>
+            </a:solidFill>
+          </a:ln>
+        </p:spPr>
+        <p:style>
+          <a:lnRef idx="2">
+            <a:schemeClr val="accent1"/>
+          </a:lnRef>
+          <a:fillRef idx="0">
+            <a:schemeClr val="accent1"/>
+          </a:fillRef>
+          <a:effectRef idx="1">
+            <a:schemeClr val="accent1"/>
+          </a:effectRef>
+          <a:fontRef idx="minor">
+            <a:schemeClr val="tx1"/>
+          </a:fontRef>
+        </p:style>
+      </p:cxnSp>
+      <p:cxnSp>
+        <p:nvCxnSpPr>
+          <p:cNvPr id="19" name="Connector 18"/>
+          <p:cNvCxnSpPr/>
+          <p:nvPr/>
+        </p:nvCxnSpPr>
+        <p:spPr>
+          <a:xfrm>
+            <a:off x="1517904" y="3785616"/>
+            <a:ext cx="109728" cy="365760"/>
+          </a:xfrm>
+          <a:prstGeom prst="line">
+            <a:avLst/>
+          </a:prstGeom>
+          <a:ln w="25400">
+            <a:solidFill>
+              <a:srgbClr val="933723"/>
+            </a:solidFill>
+          </a:ln>
+        </p:spPr>
+        <p:style>
+          <a:lnRef idx="2">
+            <a:schemeClr val="accent1"/>
+          </a:lnRef>
+          <a:fillRef idx="0">
+            <a:schemeClr val="accent1"/>
+          </a:fillRef>
+          <a:effectRef idx="1">
+            <a:schemeClr val="accent1"/>
+          </a:effectRef>
+          <a:fontRef idx="minor">
+            <a:schemeClr val="tx1"/>
+          </a:fontRef>
+        </p:style>
+      </p:cxnSp>
+      <p:cxnSp>
+        <p:nvCxnSpPr>
+          <p:cNvPr id="20" name="Connector 19"/>
+          <p:cNvCxnSpPr/>
+          <p:nvPr/>
+        </p:nvCxnSpPr>
+        <p:spPr>
+          <a:xfrm flipV="1">
+            <a:off x="1627632" y="3895344"/>
+            <a:ext cx="109728" cy="256032"/>
+          </a:xfrm>
+          <a:prstGeom prst="line">
+            <a:avLst/>
+          </a:prstGeom>
+          <a:ln w="25400">
+            <a:solidFill>
+              <a:srgbClr val="933723"/>
+            </a:solidFill>
+          </a:ln>
+        </p:spPr>
+        <p:style>
+          <a:lnRef idx="2">
+            <a:schemeClr val="accent1"/>
+          </a:lnRef>
+          <a:fillRef idx="0">
+            <a:schemeClr val="accent1"/>
+          </a:fillRef>
+          <a:effectRef idx="1">
+            <a:schemeClr val="accent1"/>
+          </a:effectRef>
+          <a:fontRef idx="minor">
+            <a:schemeClr val="tx1"/>
+          </a:fontRef>
+        </p:style>
+      </p:cxnSp>
+      <p:cxnSp>
+        <p:nvCxnSpPr>
+          <p:cNvPr id="21" name="Connector 20"/>
+          <p:cNvCxnSpPr/>
+          <p:nvPr/>
+        </p:nvCxnSpPr>
+        <p:spPr>
+          <a:xfrm>
+            <a:off x="1737360" y="3895344"/>
+            <a:ext cx="109728" cy="164592"/>
+          </a:xfrm>
+          <a:prstGeom prst="line">
+            <a:avLst/>
+          </a:prstGeom>
+          <a:ln w="25400">
+            <a:solidFill>
+              <a:srgbClr val="933723"/>
+            </a:solidFill>
+          </a:ln>
+        </p:spPr>
+        <p:style>
+          <a:lnRef idx="2">
+            <a:schemeClr val="accent1"/>
+          </a:lnRef>
+          <a:fillRef idx="0">
+            <a:schemeClr val="accent1"/>
+          </a:fillRef>
+          <a:effectRef idx="1">
+            <a:schemeClr val="accent1"/>
+          </a:effectRef>
+          <a:fontRef idx="minor">
+            <a:schemeClr val="tx1"/>
+          </a:fontRef>
+        </p:style>
+      </p:cxnSp>
       <p:cxnSp>
         <p:nvCxnSpPr>
           <p:cNvPr id="22" name="Connector 21"/>
@@ -8690,16 +8713,16 @@
           <p:nvPr/>
         </p:nvCxnSpPr>
         <p:spPr>
-          <a:xfrm>
-            <a:off x="5394960" y="5010912"/>
-            <a:ext cx="640080" cy="0"/>
+          <a:xfrm flipV="1">
+            <a:off x="1847088" y="3968496"/>
+            <a:ext cx="109728" cy="91440"/>
           </a:xfrm>
           <a:prstGeom prst="line">
             <a:avLst/>
           </a:prstGeom>
           <a:ln w="25400">
             <a:solidFill>
-              <a:srgbClr val="1B646D"/>
+              <a:srgbClr val="933723"/>
             </a:solidFill>
           </a:ln>
         </p:spPr>
@@ -8725,16 +8748,16 @@
           <p:nvPr/>
         </p:nvCxnSpPr>
         <p:spPr>
-          <a:xfrm flipV="1">
-            <a:off x="6035040" y="4956048"/>
-            <a:ext cx="182880" cy="54864"/>
+          <a:xfrm>
+            <a:off x="1956816" y="3968496"/>
+            <a:ext cx="694944" cy="0"/>
           </a:xfrm>
           <a:prstGeom prst="line">
             <a:avLst/>
           </a:prstGeom>
           <a:ln w="25400">
             <a:solidFill>
-              <a:srgbClr val="1B646D"/>
+              <a:srgbClr val="933723"/>
             </a:solidFill>
           </a:ln>
         </p:spPr>
@@ -8753,23 +8776,65 @@
           </a:fontRef>
         </p:style>
       </p:cxnSp>
+      <p:sp>
+        <p:nvSpPr>
+          <p:cNvPr id="24" name="TextBox 23"/>
+          <p:cNvSpPr txBox="1"/>
+          <p:nvPr/>
+        </p:nvSpPr>
+        <p:spPr>
+          <a:xfrm>
+            <a:off x="2743200" y="3858768"/>
+            <a:ext cx="1280160" cy="219456"/>
+          </a:xfrm>
+          <a:prstGeom prst="rect">
+            <a:avLst/>
+          </a:prstGeom>
+          <a:noFill/>
+        </p:spPr>
+        <p:txBody>
+          <a:bodyPr wrap="square" lIns="0" rIns="0" tIns="0" bIns="0" anchor="t">
+            <a:spAutoFit/>
+          </a:bodyPr>
+          <a:lstStyle/>
+          <a:p>
+            <a:pPr algn="l">
+              <a:spcBef>
+                <a:spcPts val="0"/>
+              </a:spcBef>
+              <a:spcAft>
+                <a:spcPts val="0"/>
+              </a:spcAft>
+            </a:pPr>
+            <a:r>
+              <a:rPr sz="900" b="1">
+                <a:solidFill>
+                  <a:srgbClr val="933723"/>
+                </a:solidFill>
+                <a:latin typeface="Consolas"/>
+              </a:rPr>
+              <a:t>oscillating</a:t>
+            </a:r>
+          </a:p>
+        </p:txBody>
+      </p:sp>
       <p:cxnSp>
         <p:nvCxnSpPr>
-          <p:cNvPr id="24" name="Connector 23"/>
+          <p:cNvPr id="25" name="Connector 24"/>
           <p:cNvCxnSpPr/>
           <p:nvPr/>
         </p:nvCxnSpPr>
         <p:spPr>
           <a:xfrm>
-            <a:off x="6217920" y="4956048"/>
-            <a:ext cx="182880" cy="91440"/>
+            <a:off x="4480560" y="1737360"/>
+            <a:ext cx="0" cy="3474720"/>
           </a:xfrm>
           <a:prstGeom prst="line">
             <a:avLst/>
           </a:prstGeom>
-          <a:ln w="25400">
+          <a:ln w="12700">
             <a:solidFill>
-              <a:srgbClr val="1B646D"/>
+              <a:srgbClr val="C7CED5"/>
             </a:solidFill>
           </a:ln>
         </p:spPr>
@@ -8788,86 +8853,16 @@
           </a:fontRef>
         </p:style>
       </p:cxnSp>
-      <p:cxnSp>
-        <p:nvCxnSpPr>
-          <p:cNvPr id="25" name="Connector 24"/>
-          <p:cNvCxnSpPr/>
-          <p:nvPr/>
-        </p:nvCxnSpPr>
-        <p:spPr>
-          <a:xfrm flipV="1">
-            <a:off x="6400800" y="5001768"/>
-            <a:ext cx="182880" cy="45720"/>
-          </a:xfrm>
-          <a:prstGeom prst="line">
-            <a:avLst/>
-          </a:prstGeom>
-          <a:ln w="25400">
-            <a:solidFill>
-              <a:srgbClr val="1B646D"/>
-            </a:solidFill>
-          </a:ln>
-        </p:spPr>
-        <p:style>
-          <a:lnRef idx="2">
-            <a:schemeClr val="accent1"/>
-          </a:lnRef>
-          <a:fillRef idx="0">
-            <a:schemeClr val="accent1"/>
-          </a:fillRef>
-          <a:effectRef idx="1">
-            <a:schemeClr val="accent1"/>
-          </a:effectRef>
-          <a:fontRef idx="minor">
-            <a:schemeClr val="tx1"/>
-          </a:fontRef>
-        </p:style>
-      </p:cxnSp>
-      <p:cxnSp>
-        <p:nvCxnSpPr>
-          <p:cNvPr id="26" name="Connector 25"/>
-          <p:cNvCxnSpPr/>
-          <p:nvPr/>
-        </p:nvCxnSpPr>
-        <p:spPr>
-          <a:xfrm>
-            <a:off x="6583680" y="5001768"/>
-            <a:ext cx="822960" cy="9144"/>
-          </a:xfrm>
-          <a:prstGeom prst="line">
-            <a:avLst/>
-          </a:prstGeom>
-          <a:ln w="25400">
-            <a:solidFill>
-              <a:srgbClr val="1B646D"/>
-            </a:solidFill>
-          </a:ln>
-        </p:spPr>
-        <p:style>
-          <a:lnRef idx="2">
-            <a:schemeClr val="accent1"/>
-          </a:lnRef>
-          <a:fillRef idx="0">
-            <a:schemeClr val="accent1"/>
-          </a:fillRef>
-          <a:effectRef idx="1">
-            <a:schemeClr val="accent1"/>
-          </a:effectRef>
-          <a:fontRef idx="minor">
-            <a:schemeClr val="tx1"/>
-          </a:fontRef>
-        </p:style>
-      </p:cxnSp>
-      <p:sp>
-        <p:nvSpPr>
-          <p:cNvPr id="27" name="TextBox 26"/>
+      <p:sp>
+        <p:nvSpPr>
+          <p:cNvPr id="26" name="TextBox 25"/>
           <p:cNvSpPr txBox="1"/>
           <p:nvPr/>
         </p:nvSpPr>
         <p:spPr>
           <a:xfrm>
-            <a:off x="7498080" y="4901184"/>
-            <a:ext cx="914400" cy="219456"/>
+            <a:off x="4754880" y="1773936"/>
+            <a:ext cx="6858000" cy="237744"/>
           </a:xfrm>
           <a:prstGeom prst="rect">
             <a:avLst/>
@@ -8889,342 +8884,27 @@
               </a:spcAft>
             </a:pPr>
             <a:r>
-              <a:rPr sz="900" b="0">
-                <a:solidFill>
-                  <a:srgbClr val="1B646D"/>
-                </a:solidFill>
-                <a:latin typeface="Consolas"/>
-              </a:rPr>
-              <a:t>healthy</a:t>
-            </a:r>
-          </a:p>
-        </p:txBody>
-      </p:sp>
-      <p:cxnSp>
-        <p:nvCxnSpPr>
-          <p:cNvPr id="28" name="Connector 27"/>
-          <p:cNvCxnSpPr/>
-          <p:nvPr/>
-        </p:nvCxnSpPr>
-        <p:spPr>
-          <a:xfrm>
-            <a:off x="8503920" y="5010912"/>
-            <a:ext cx="365760" cy="0"/>
-          </a:xfrm>
-          <a:prstGeom prst="line">
-            <a:avLst/>
-          </a:prstGeom>
-          <a:ln w="25400">
-            <a:solidFill>
-              <a:srgbClr val="933723"/>
-            </a:solidFill>
-          </a:ln>
-        </p:spPr>
-        <p:style>
-          <a:lnRef idx="2">
-            <a:schemeClr val="accent1"/>
-          </a:lnRef>
-          <a:fillRef idx="0">
-            <a:schemeClr val="accent1"/>
-          </a:fillRef>
-          <a:effectRef idx="1">
-            <a:schemeClr val="accent1"/>
-          </a:effectRef>
-          <a:fontRef idx="minor">
-            <a:schemeClr val="tx1"/>
-          </a:fontRef>
-        </p:style>
-      </p:cxnSp>
-      <p:cxnSp>
-        <p:nvCxnSpPr>
-          <p:cNvPr id="29" name="Connector 28"/>
-          <p:cNvCxnSpPr/>
-          <p:nvPr/>
-        </p:nvCxnSpPr>
-        <p:spPr>
-          <a:xfrm flipV="1">
-            <a:off x="8869680" y="4700016"/>
-            <a:ext cx="109728" cy="310896"/>
-          </a:xfrm>
-          <a:prstGeom prst="line">
-            <a:avLst/>
-          </a:prstGeom>
-          <a:ln w="25400">
-            <a:solidFill>
-              <a:srgbClr val="933723"/>
-            </a:solidFill>
-          </a:ln>
-        </p:spPr>
-        <p:style>
-          <a:lnRef idx="2">
-            <a:schemeClr val="accent1"/>
-          </a:lnRef>
-          <a:fillRef idx="0">
-            <a:schemeClr val="accent1"/>
-          </a:fillRef>
-          <a:effectRef idx="1">
-            <a:schemeClr val="accent1"/>
-          </a:effectRef>
-          <a:fontRef idx="minor">
-            <a:schemeClr val="tx1"/>
-          </a:fontRef>
-        </p:style>
-      </p:cxnSp>
-      <p:cxnSp>
-        <p:nvCxnSpPr>
-          <p:cNvPr id="30" name="Connector 29"/>
-          <p:cNvCxnSpPr/>
-          <p:nvPr/>
-        </p:nvCxnSpPr>
-        <p:spPr>
-          <a:xfrm>
-            <a:off x="8979408" y="4700016"/>
-            <a:ext cx="109728" cy="585216"/>
-          </a:xfrm>
-          <a:prstGeom prst="line">
-            <a:avLst/>
-          </a:prstGeom>
-          <a:ln w="25400">
-            <a:solidFill>
-              <a:srgbClr val="933723"/>
-            </a:solidFill>
-          </a:ln>
-        </p:spPr>
-        <p:style>
-          <a:lnRef idx="2">
-            <a:schemeClr val="accent1"/>
-          </a:lnRef>
-          <a:fillRef idx="0">
-            <a:schemeClr val="accent1"/>
-          </a:fillRef>
-          <a:effectRef idx="1">
-            <a:schemeClr val="accent1"/>
-          </a:effectRef>
-          <a:fontRef idx="minor">
-            <a:schemeClr val="tx1"/>
-          </a:fontRef>
-        </p:style>
-      </p:cxnSp>
-      <p:cxnSp>
-        <p:nvCxnSpPr>
-          <p:cNvPr id="31" name="Connector 30"/>
-          <p:cNvCxnSpPr/>
-          <p:nvPr/>
-        </p:nvCxnSpPr>
-        <p:spPr>
-          <a:xfrm flipV="1">
-            <a:off x="9089136" y="4809744"/>
-            <a:ext cx="109728" cy="475488"/>
-          </a:xfrm>
-          <a:prstGeom prst="line">
-            <a:avLst/>
-          </a:prstGeom>
-          <a:ln w="25400">
-            <a:solidFill>
-              <a:srgbClr val="933723"/>
-            </a:solidFill>
-          </a:ln>
-        </p:spPr>
-        <p:style>
-          <a:lnRef idx="2">
-            <a:schemeClr val="accent1"/>
-          </a:lnRef>
-          <a:fillRef idx="0">
-            <a:schemeClr val="accent1"/>
-          </a:fillRef>
-          <a:effectRef idx="1">
-            <a:schemeClr val="accent1"/>
-          </a:effectRef>
-          <a:fontRef idx="minor">
-            <a:schemeClr val="tx1"/>
-          </a:fontRef>
-        </p:style>
-      </p:cxnSp>
-      <p:cxnSp>
-        <p:nvCxnSpPr>
-          <p:cNvPr id="32" name="Connector 31"/>
-          <p:cNvCxnSpPr/>
-          <p:nvPr/>
-        </p:nvCxnSpPr>
-        <p:spPr>
-          <a:xfrm>
-            <a:off x="9198864" y="4809744"/>
-            <a:ext cx="109728" cy="365760"/>
-          </a:xfrm>
-          <a:prstGeom prst="line">
-            <a:avLst/>
-          </a:prstGeom>
-          <a:ln w="25400">
-            <a:solidFill>
-              <a:srgbClr val="933723"/>
-            </a:solidFill>
-          </a:ln>
-        </p:spPr>
-        <p:style>
-          <a:lnRef idx="2">
-            <a:schemeClr val="accent1"/>
-          </a:lnRef>
-          <a:fillRef idx="0">
-            <a:schemeClr val="accent1"/>
-          </a:fillRef>
-          <a:effectRef idx="1">
-            <a:schemeClr val="accent1"/>
-          </a:effectRef>
-          <a:fontRef idx="minor">
-            <a:schemeClr val="tx1"/>
-          </a:fontRef>
-        </p:style>
-      </p:cxnSp>
-      <p:cxnSp>
-        <p:nvCxnSpPr>
-          <p:cNvPr id="33" name="Connector 32"/>
-          <p:cNvCxnSpPr/>
-          <p:nvPr/>
-        </p:nvCxnSpPr>
-        <p:spPr>
-          <a:xfrm flipV="1">
-            <a:off x="9308592" y="4919472"/>
-            <a:ext cx="109728" cy="256032"/>
-          </a:xfrm>
-          <a:prstGeom prst="line">
-            <a:avLst/>
-          </a:prstGeom>
-          <a:ln w="25400">
-            <a:solidFill>
-              <a:srgbClr val="933723"/>
-            </a:solidFill>
-          </a:ln>
-        </p:spPr>
-        <p:style>
-          <a:lnRef idx="2">
-            <a:schemeClr val="accent1"/>
-          </a:lnRef>
-          <a:fillRef idx="0">
-            <a:schemeClr val="accent1"/>
-          </a:fillRef>
-          <a:effectRef idx="1">
-            <a:schemeClr val="accent1"/>
-          </a:effectRef>
-          <a:fontRef idx="minor">
-            <a:schemeClr val="tx1"/>
-          </a:fontRef>
-        </p:style>
-      </p:cxnSp>
-      <p:cxnSp>
-        <p:nvCxnSpPr>
-          <p:cNvPr id="34" name="Connector 33"/>
-          <p:cNvCxnSpPr/>
-          <p:nvPr/>
-        </p:nvCxnSpPr>
-        <p:spPr>
-          <a:xfrm>
-            <a:off x="9418320" y="4919472"/>
-            <a:ext cx="109728" cy="164592"/>
-          </a:xfrm>
-          <a:prstGeom prst="line">
-            <a:avLst/>
-          </a:prstGeom>
-          <a:ln w="25400">
-            <a:solidFill>
-              <a:srgbClr val="933723"/>
-            </a:solidFill>
-          </a:ln>
-        </p:spPr>
-        <p:style>
-          <a:lnRef idx="2">
-            <a:schemeClr val="accent1"/>
-          </a:lnRef>
-          <a:fillRef idx="0">
-            <a:schemeClr val="accent1"/>
-          </a:fillRef>
-          <a:effectRef idx="1">
-            <a:schemeClr val="accent1"/>
-          </a:effectRef>
-          <a:fontRef idx="minor">
-            <a:schemeClr val="tx1"/>
-          </a:fontRef>
-        </p:style>
-      </p:cxnSp>
-      <p:cxnSp>
-        <p:nvCxnSpPr>
-          <p:cNvPr id="35" name="Connector 34"/>
-          <p:cNvCxnSpPr/>
-          <p:nvPr/>
-        </p:nvCxnSpPr>
-        <p:spPr>
-          <a:xfrm flipV="1">
-            <a:off x="9528048" y="4992624"/>
-            <a:ext cx="109728" cy="91440"/>
-          </a:xfrm>
-          <a:prstGeom prst="line">
-            <a:avLst/>
-          </a:prstGeom>
-          <a:ln w="25400">
-            <a:solidFill>
-              <a:srgbClr val="933723"/>
-            </a:solidFill>
-          </a:ln>
-        </p:spPr>
-        <p:style>
-          <a:lnRef idx="2">
-            <a:schemeClr val="accent1"/>
-          </a:lnRef>
-          <a:fillRef idx="0">
-            <a:schemeClr val="accent1"/>
-          </a:fillRef>
-          <a:effectRef idx="1">
-            <a:schemeClr val="accent1"/>
-          </a:effectRef>
-          <a:fontRef idx="minor">
-            <a:schemeClr val="tx1"/>
-          </a:fontRef>
-        </p:style>
-      </p:cxnSp>
-      <p:cxnSp>
-        <p:nvCxnSpPr>
-          <p:cNvPr id="36" name="Connector 35"/>
-          <p:cNvCxnSpPr/>
-          <p:nvPr/>
-        </p:nvCxnSpPr>
-        <p:spPr>
-          <a:xfrm>
-            <a:off x="9637776" y="4992624"/>
-            <a:ext cx="603504" cy="18288"/>
-          </a:xfrm>
-          <a:prstGeom prst="line">
-            <a:avLst/>
-          </a:prstGeom>
-          <a:ln w="25400">
-            <a:solidFill>
-              <a:srgbClr val="933723"/>
-            </a:solidFill>
-          </a:ln>
-        </p:spPr>
-        <p:style>
-          <a:lnRef idx="2">
-            <a:schemeClr val="accent1"/>
-          </a:lnRef>
-          <a:fillRef idx="0">
-            <a:schemeClr val="accent1"/>
-          </a:fillRef>
-          <a:effectRef idx="1">
-            <a:schemeClr val="accent1"/>
-          </a:effectRef>
-          <a:fontRef idx="minor">
-            <a:schemeClr val="tx1"/>
-          </a:fontRef>
-        </p:style>
-      </p:cxnSp>
-      <p:sp>
-        <p:nvSpPr>
-          <p:cNvPr id="37" name="TextBox 36"/>
+              <a:rPr sz="1400" b="1">
+                <a:solidFill>
+                  <a:srgbClr val="111820"/>
+                </a:solidFill>
+                <a:latin typeface="Bahnschrift"/>
+              </a:rPr>
+              <a:t>2  WHY IT CAN HAPPEN AT ALL</a:t>
+            </a:r>
+          </a:p>
+        </p:txBody>
+      </p:sp>
+      <p:sp>
+        <p:nvSpPr>
+          <p:cNvPr id="27" name="TextBox 26"/>
           <p:cNvSpPr txBox="1"/>
           <p:nvPr/>
         </p:nvSpPr>
         <p:spPr>
           <a:xfrm>
-            <a:off x="10332720" y="4901184"/>
-            <a:ext cx="1097280" cy="219456"/>
+            <a:off x="4754880" y="2066544"/>
+            <a:ext cx="6858000" cy="822960"/>
           </a:xfrm>
           <a:prstGeom prst="rect">
             <a:avLst/>
@@ -9246,27 +8926,84 @@
               </a:spcAft>
             </a:pPr>
             <a:r>
-              <a:rPr sz="900" b="1">
-                <a:solidFill>
-                  <a:srgbClr val="933723"/>
-                </a:solidFill>
-                <a:latin typeface="Consolas"/>
-              </a:rPr>
-              <a:t>ringing</a:t>
-            </a:r>
-          </a:p>
-        </p:txBody>
-      </p:sp>
-      <p:sp>
-        <p:nvSpPr>
-          <p:cNvPr id="38" name="TextBox 37"/>
+              <a:rPr sz="950" b="0">
+                <a:solidFill>
+                  <a:srgbClr val="4A5764"/>
+                </a:solidFill>
+                <a:latin typeface="Consolas"/>
+              </a:rPr>
+              <a:t>The wheel has rotational inertia. The tire carcass has to flex before it can</a:t>
+            </a:r>
+          </a:p>
+          <a:p>
+            <a:pPr>
+              <a:spcBef>
+                <a:spcPts val="0"/>
+              </a:spcBef>
+              <a:spcAft>
+                <a:spcPts val="0"/>
+              </a:spcAft>
+            </a:pPr>
+            <a:r>
+              <a:rPr sz="950" b="0">
+                <a:solidFill>
+                  <a:srgbClr val="4A5764"/>
+                </a:solidFill>
+                <a:latin typeface="Consolas"/>
+              </a:rPr>
+              <a:t>pass force to the road, so it behaves as a spring between the wheel and the</a:t>
+            </a:r>
+          </a:p>
+          <a:p>
+            <a:pPr>
+              <a:spcBef>
+                <a:spcPts val="0"/>
+              </a:spcBef>
+              <a:spcAft>
+                <a:spcPts val="0"/>
+              </a:spcAft>
+            </a:pPr>
+            <a:r>
+              <a:rPr sz="950" b="0">
+                <a:solidFill>
+                  <a:srgbClr val="4A5764"/>
+                </a:solidFill>
+                <a:latin typeface="Consolas"/>
+              </a:rPr>
+              <a:t>ground. An inertia on a spring can ring. Every real car has this mode; it is</a:t>
+            </a:r>
+          </a:p>
+          <a:p>
+            <a:pPr>
+              <a:spcBef>
+                <a:spcPts val="0"/>
+              </a:spcBef>
+              <a:spcAft>
+                <a:spcPts val="0"/>
+              </a:spcAft>
+            </a:pPr>
+            <a:r>
+              <a:rPr sz="950" b="0">
+                <a:solidFill>
+                  <a:srgbClr val="4A5764"/>
+                </a:solidFill>
+                <a:latin typeface="Consolas"/>
+              </a:rPr>
+              <a:t>the same one behind brake judder and ABS chatter.</a:t>
+            </a:r>
+          </a:p>
+        </p:txBody>
+      </p:sp>
+      <p:sp>
+        <p:nvSpPr>
+          <p:cNvPr id="28" name="TextBox 27"/>
           <p:cNvSpPr txBox="1"/>
           <p:nvPr/>
         </p:nvSpPr>
         <p:spPr>
           <a:xfrm>
-            <a:off x="566928" y="5358384"/>
-            <a:ext cx="11064240" cy="548640"/>
+            <a:off x="4754880" y="3163824"/>
+            <a:ext cx="6858000" cy="237744"/>
           </a:xfrm>
           <a:prstGeom prst="rect">
             <a:avLst/>
@@ -9288,35 +9025,237 @@
               </a:spcAft>
             </a:pPr>
             <a:r>
+              <a:rPr sz="1400" b="1">
+                <a:solidFill>
+                  <a:srgbClr val="111820"/>
+                </a:solidFill>
+                <a:latin typeface="Bahnschrift"/>
+              </a:rPr>
+              <a:t>3  WHY IT ONLY BITES AT LOW SPEED</a:t>
+            </a:r>
+          </a:p>
+        </p:txBody>
+      </p:sp>
+      <p:sp>
+        <p:nvSpPr>
+          <p:cNvPr id="29" name="TextBox 28"/>
+          <p:cNvSpPr txBox="1"/>
+          <p:nvPr/>
+        </p:nvSpPr>
+        <p:spPr>
+          <a:xfrm>
+            <a:off x="4754880" y="3456432"/>
+            <a:ext cx="6858000" cy="822960"/>
+          </a:xfrm>
+          <a:prstGeom prst="rect">
+            <a:avLst/>
+          </a:prstGeom>
+          <a:noFill/>
+        </p:spPr>
+        <p:txBody>
+          <a:bodyPr wrap="square" lIns="0" rIns="0" tIns="0" bIns="0" anchor="t">
+            <a:spAutoFit/>
+          </a:bodyPr>
+          <a:lstStyle/>
+          <a:p>
+            <a:pPr algn="l">
+              <a:spcBef>
+                <a:spcPts val="0"/>
+              </a:spcBef>
+              <a:spcAft>
+                <a:spcPts val="0"/>
+              </a:spcAft>
+            </a:pPr>
+            <a:r>
               <a:rPr sz="950" b="0">
                 <a:solidFill>
-                  <a:srgbClr val="78838F"/>
-                </a:solidFill>
-                <a:latin typeface="Consolas"/>
-              </a:rPr>
-              <a:t>This oscillation is physical, not a modelling artefact. A real car has it: it is the same mechanism behind brake judder and ABS chatter.</a:t>
-            </a:r>
-          </a:p>
-        </p:txBody>
-      </p:sp>
-      <p:sp>
-        <p:nvSpPr>
-          <p:cNvPr id="39" name="Rectangle 38"/>
+                  <a:srgbClr val="4A5764"/>
+                </a:solidFill>
+                <a:latin typeface="Consolas"/>
+              </a:rPr>
+              <a:t>Rolling is what damps it: the tire keeps laying down fresh rubber and renewing</a:t>
+            </a:r>
+          </a:p>
+          <a:p>
+            <a:pPr>
+              <a:spcBef>
+                <a:spcPts val="0"/>
+              </a:spcBef>
+              <a:spcAft>
+                <a:spcPts val="0"/>
+              </a:spcAft>
+            </a:pPr>
+            <a:r>
+              <a:rPr sz="950" b="0">
+                <a:solidFill>
+                  <a:srgbClr val="4A5764"/>
+                </a:solidFill>
+                <a:latin typeface="Consolas"/>
+              </a:rPr>
+              <a:t>its grip. Fast rolling renews it quickly and the ringing dies out. At walking</a:t>
+            </a:r>
+          </a:p>
+          <a:p>
+            <a:pPr>
+              <a:spcBef>
+                <a:spcPts val="0"/>
+              </a:spcBef>
+              <a:spcAft>
+                <a:spcPts val="0"/>
+              </a:spcAft>
+            </a:pPr>
+            <a:r>
+              <a:rPr sz="950" b="0">
+                <a:solidFill>
+                  <a:srgbClr val="4A5764"/>
+                </a:solidFill>
+                <a:latin typeface="Consolas"/>
+              </a:rPr>
+              <a:t>pace there is little damping left, and at a standstill none.</a:t>
+            </a:r>
+          </a:p>
+          <a:p>
+            <a:pPr>
+              <a:spcBef>
+                <a:spcPts val="400"/>
+              </a:spcBef>
+              <a:spcAft>
+                <a:spcPts val="0"/>
+              </a:spcAft>
+            </a:pPr>
+            <a:r>
+              <a:rPr sz="950" b="0">
+                <a:solidFill>
+                  <a:srgbClr val="933723"/>
+                </a:solidFill>
+                <a:latin typeface="Consolas"/>
+              </a:rPr>
+              <a:t>Evaluating the tire once per step removes a further fixed amount, at any speed.</a:t>
+            </a:r>
+          </a:p>
+        </p:txBody>
+      </p:sp>
+      <p:sp>
+        <p:nvSpPr>
+          <p:cNvPr id="30" name="TextBox 29"/>
+          <p:cNvSpPr txBox="1"/>
+          <p:nvPr/>
+        </p:nvSpPr>
+        <p:spPr>
+          <a:xfrm>
+            <a:off x="4754880" y="4553712"/>
+            <a:ext cx="6858000" cy="237744"/>
+          </a:xfrm>
+          <a:prstGeom prst="rect">
+            <a:avLst/>
+          </a:prstGeom>
+          <a:noFill/>
+        </p:spPr>
+        <p:txBody>
+          <a:bodyPr wrap="square" lIns="0" rIns="0" tIns="0" bIns="0" anchor="t">
+            <a:spAutoFit/>
+          </a:bodyPr>
+          <a:lstStyle/>
+          <a:p>
+            <a:pPr algn="l">
+              <a:spcBef>
+                <a:spcPts val="0"/>
+              </a:spcBef>
+              <a:spcAft>
+                <a:spcPts val="0"/>
+              </a:spcAft>
+            </a:pPr>
+            <a:r>
+              <a:rPr sz="1400" b="1">
+                <a:solidFill>
+                  <a:srgbClr val="1B646D"/>
+                </a:solidFill>
+                <a:latin typeface="Bahnschrift"/>
+              </a:rPr>
+              <a:t>4  WHY WE DO NOT SEE IT</a:t>
+            </a:r>
+          </a:p>
+        </p:txBody>
+      </p:sp>
+      <p:sp>
+        <p:nvSpPr>
+          <p:cNvPr id="31" name="TextBox 30"/>
+          <p:cNvSpPr txBox="1"/>
+          <p:nvPr/>
+        </p:nvSpPr>
+        <p:spPr>
+          <a:xfrm>
+            <a:off x="4754880" y="4846320"/>
+            <a:ext cx="6858000" cy="457200"/>
+          </a:xfrm>
+          <a:prstGeom prst="rect">
+            <a:avLst/>
+          </a:prstGeom>
+          <a:noFill/>
+        </p:spPr>
+        <p:txBody>
+          <a:bodyPr wrap="square" lIns="0" rIns="0" tIns="0" bIns="0" anchor="t">
+            <a:spAutoFit/>
+          </a:bodyPr>
+          <a:lstStyle/>
+          <a:p>
+            <a:pPr algn="l">
+              <a:spcBef>
+                <a:spcPts val="0"/>
+              </a:spcBef>
+              <a:spcAft>
+                <a:spcPts val="0"/>
+              </a:spcAft>
+            </a:pPr>
+            <a:r>
+              <a:rPr sz="950" b="0">
+                <a:solidFill>
+                  <a:srgbClr val="4A5764"/>
+                </a:solidFill>
+                <a:latin typeface="Consolas"/>
+              </a:rPr>
+              <a:t>Below 2 m/s CarMaker switches to its stand-still tire model, and we put the dyno</a:t>
+            </a:r>
+          </a:p>
+          <a:p>
+            <a:pPr>
+              <a:spcBef>
+                <a:spcPts val="0"/>
+              </a:spcBef>
+              <a:spcAft>
+                <a:spcPts val="0"/>
+              </a:spcAft>
+            </a:pPr>
+            <a:r>
+              <a:rPr sz="950" b="0">
+                <a:solidFill>
+                  <a:srgbClr val="4A5764"/>
+                </a:solidFill>
+                <a:latin typeface="Consolas"/>
+              </a:rPr>
+              <a:t>into torque mode with zero tire torque while stopping. The slow region is never run.</a:t>
+            </a:r>
+          </a:p>
+        </p:txBody>
+      </p:sp>
+      <p:sp>
+        <p:nvSpPr>
+          <p:cNvPr id="32" name="Rectangle 31"/>
           <p:cNvSpPr/>
           <p:nvPr/>
         </p:nvSpPr>
         <p:spPr>
           <a:xfrm>
-            <a:off x="566928" y="5614416"/>
-            <a:ext cx="3520440" cy="950976"/>
+            <a:off x="566928" y="5541264"/>
+            <a:ext cx="3520440" cy="1005840"/>
           </a:xfrm>
           <a:prstGeom prst="rect">
             <a:avLst/>
           </a:prstGeom>
           <a:noFill/>
-          <a:ln w="15875">
+          <a:ln w="19050">
             <a:solidFill>
-              <a:srgbClr val="1B646D"/>
+              <a:srgbClr val="933723"/>
             </a:solidFill>
           </a:ln>
           <a:effectLst/>
@@ -9350,11 +9289,11 @@
             <a:r>
               <a:rPr sz="1300" b="1">
                 <a:solidFill>
-                  <a:srgbClr val="1B646D"/>
+                  <a:srgbClr val="933723"/>
                 </a:solidFill>
                 <a:latin typeface="Bahnschrift"/>
               </a:rPr>
-              <a:t>Why we do not see it</a:t>
+              <a:t>How to check</a:t>
             </a:r>
           </a:p>
           <a:p>
@@ -9373,7 +9312,7 @@
                 </a:solidFill>
                 <a:latin typeface="Consolas"/>
               </a:rPr>
-              <a:t>Below 2 m/s CarMaker switches to its</a:t>
+              <a:t>Look at rotv and Trq_T2W through a</a:t>
             </a:r>
           </a:p>
           <a:p>
@@ -9392,7 +9331,7 @@
                 </a:solidFill>
                 <a:latin typeface="Consolas"/>
               </a:rPr>
-              <a:t>stand-still tire model, and we put the dyno</a:t>
+              <a:t>slow crawl. Clean trace, no issue.</a:t>
             </a:r>
           </a:p>
           <a:p>
@@ -9411,21 +9350,21 @@
                 </a:solidFill>
                 <a:latin typeface="Consolas"/>
               </a:rPr>
-              <a:t>in torque mode while stopping.</a:t>
-            </a:r>
-          </a:p>
-        </p:txBody>
-      </p:sp>
-      <p:sp>
-        <p:nvSpPr>
-          <p:cNvPr id="40" name="Rectangle 39"/>
+              <a:t>Tens-of-hertz wobble, come back to this.</a:t>
+            </a:r>
+          </a:p>
+        </p:txBody>
+      </p:sp>
+      <p:sp>
+        <p:nvSpPr>
+          <p:cNvPr id="33" name="Rectangle 32"/>
           <p:cNvSpPr/>
           <p:nvPr/>
         </p:nvSpPr>
         <p:spPr>
           <a:xfrm>
-            <a:off x="4315968" y="5614416"/>
-            <a:ext cx="3520440" cy="950976"/>
+            <a:off x="4315968" y="5541264"/>
+            <a:ext cx="3520440" cy="1005840"/>
           </a:xfrm>
           <a:prstGeom prst="rect">
             <a:avLst/>
@@ -9471,7 +9410,7 @@
                 </a:solidFill>
                 <a:latin typeface="Bahnschrift"/>
               </a:rPr>
-              <a:t>What raises the risk</a:t>
+              <a:t>What would raise the risk</a:t>
             </a:r>
           </a:p>
           <a:p>
@@ -9528,21 +9467,21 @@
                 </a:solidFill>
                 <a:latin typeface="Consolas"/>
               </a:rPr>
-              <a:t>or a second delay in the loop.</a:t>
-            </a:r>
-          </a:p>
-        </p:txBody>
-      </p:sp>
-      <p:sp>
-        <p:nvSpPr>
-          <p:cNvPr id="41" name="Rectangle 40"/>
+              <a:t>or a second delay added to the loop.</a:t>
+            </a:r>
+          </a:p>
+        </p:txBody>
+      </p:sp>
+      <p:sp>
+        <p:nvSpPr>
+          <p:cNvPr id="34" name="Rectangle 33"/>
           <p:cNvSpPr/>
           <p:nvPr/>
         </p:nvSpPr>
         <p:spPr>
           <a:xfrm>
-            <a:off x="8065008" y="5614416"/>
-            <a:ext cx="3566160" cy="950976"/>
+            <a:off x="8065008" y="5541264"/>
+            <a:ext cx="3566160" cy="1005840"/>
           </a:xfrm>
           <a:prstGeom prst="rect">
             <a:avLst/>
@@ -9607,7 +9546,7 @@
                 </a:solidFill>
                 <a:latin typeface="Consolas"/>
               </a:rPr>
-              <a:t>Tens of hertz for a passenger wheel; we</a:t>
+              <a:t>Set by wheel inertia against carcass</a:t>
             </a:r>
           </a:p>
           <a:p>
@@ -9626,7 +9565,7 @@
                 </a:solidFill>
                 <a:latin typeface="Consolas"/>
               </a:rPr>
-              <a:t>estimate 40-50 Hz from a textbook slip</a:t>
+              <a:t>stiffness; tens of hertz for a car wheel.</a:t>
             </a:r>
           </a:p>
           <a:p>
@@ -9645,7 +9584,7 @@
                 </a:solidFill>
                 <a:latin typeface="Consolas"/>
               </a:rPr>
-              <a:t>stiffness. Read Cs from the tire file.</a:t>
+              <a:t>Our 40-50 Hz is a textbook estimate.</a:t>
             </a:r>
           </a:p>
         </p:txBody>

--- a/doc/xil/AxleDynoCarMakerCoupling.pptx
+++ b/doc/xil/AxleDynoCarMakerCoupling.pptx
@@ -3269,7 +3269,7 @@
           <a:bodyPr rtlCol="0" anchor="t" wrap="square" tIns="91440" bIns="54864" lIns="146304"/>
           <a:lstStyle/>
           <a:p>
-            <a:pPr algn="ctr">
+            <a:pPr algn="l">
               <a:spcBef>
                 <a:spcPts val="0"/>
               </a:spcBef>
@@ -3288,7 +3288,7 @@
             </a:r>
           </a:p>
           <a:p>
-            <a:pPr>
+            <a:pPr algn="l">
               <a:spcBef>
                 <a:spcPts val="200"/>
               </a:spcBef>
@@ -3307,7 +3307,7 @@
             </a:r>
           </a:p>
           <a:p>
-            <a:pPr>
+            <a:pPr algn="l">
               <a:spcBef>
                 <a:spcPts val="200"/>
               </a:spcBef>
